--- a/day2-deck/decks/Most Improved v2 - Review.pptx
+++ b/day2-deck/decks/Most Improved v2 - Review.pptx
@@ -25272,8 +25272,8 @@
         </p:nvSpPr>
         <p:spPr>
           <a:xfrm>
-            <a:off x="457200" y="5961888"/>
-            <a:ext cx="11274552" cy="548640"/>
+            <a:off x="457200" y="6126480"/>
+            <a:ext cx="11274552" cy="371856"/>
           </a:xfrm>
           <a:prstGeom prst="rect">
             <a:avLst/>
@@ -25292,8 +25292,8 @@
         </p:nvSpPr>
         <p:spPr>
           <a:xfrm>
-            <a:off x="658368" y="5980176"/>
-            <a:ext cx="10927080" cy="512064"/>
+            <a:off x="658368" y="6144768"/>
+            <a:ext cx="10927080" cy="335280"/>
           </a:xfrm>
           <a:prstGeom prst="rect">
             <a:avLst/>
@@ -25317,7 +25317,7 @@
                 <a:ea typeface="Inter" pitchFamily="34" charset="-122"/>
                 <a:cs typeface="Inter" pitchFamily="34" charset="-120"/>
               </a:rPr>
-              <a:t>Top: LINCOLN, SUBARU PRESCOTT, SUBARU ST GEORGE (4 of 6).</a:t>
+              <a:t>Top: Lincoln, Subaru Prescott, Subaru St George (4 of 6).</a:t>
             </a:r>
             <a:endParaRPr lang="en-US" sz="1600" dirty="0"/>
           </a:p>
@@ -25334,7 +25334,7 @@
                 <a:ea typeface="Inter" pitchFamily="34" charset="-122"/>
                 <a:cs typeface="Inter" pitchFamily="34" charset="-120"/>
               </a:rPr>
-              <a:t>Bottom: AUDI RENO, VW ST GEORGE (4 of 6).</a:t>
+              <a:t>Bottom: Audi Reno, VW St George (4 of 6).</a:t>
             </a:r>
             <a:endParaRPr lang="en-US" sz="1600" dirty="0"/>
           </a:p>
@@ -27138,8 +27138,8 @@
         </p:nvSpPr>
         <p:spPr>
           <a:xfrm>
-            <a:off x="457200" y="5961888"/>
-            <a:ext cx="11274552" cy="548640"/>
+            <a:off x="457200" y="6126480"/>
+            <a:ext cx="11274552" cy="364236"/>
           </a:xfrm>
           <a:prstGeom prst="rect">
             <a:avLst/>
@@ -27158,24 +27158,24 @@
         </p:nvSpPr>
         <p:spPr>
           <a:xfrm>
-            <a:off x="658368" y="5980176"/>
-            <a:ext cx="10927080" cy="512064"/>
-          </a:xfrm>
-          <a:prstGeom prst="rect">
-            <a:avLst/>
-          </a:prstGeom>
-          <a:noFill/>
-          <a:ln/>
-        </p:spPr>
-        <p:txBody>
-          <a:bodyPr wrap="square" lIns="0" tIns="0" rIns="0" bIns="0" rtlCol="0" anchor="ctr"/>
-          <a:lstStyle/>
-          <a:p>
-            <a:pPr indent="0" marL="0">
-              <a:buNone/>
-            </a:pPr>
-            <a:r>
-              <a:rPr lang="en-US" sz="1600" b="1" dirty="0">
+            <a:off x="658368" y="6144768"/>
+            <a:ext cx="10927080" cy="327660"/>
+          </a:xfrm>
+          <a:prstGeom prst="rect">
+            <a:avLst/>
+          </a:prstGeom>
+          <a:noFill/>
+          <a:ln/>
+        </p:spPr>
+        <p:txBody>
+          <a:bodyPr wrap="square" lIns="0" tIns="0" rIns="0" bIns="0" rtlCol="0" anchor="ctr"/>
+          <a:lstStyle/>
+          <a:p>
+            <a:pPr indent="0" marL="0">
+              <a:buNone/>
+            </a:pPr>
+            <a:r>
+              <a:rPr lang="en-US" sz="1550" b="1" dirty="0">
                 <a:solidFill>
                   <a:srgbClr val="0B2C4A"/>
                 </a:solidFill>
@@ -27185,7 +27185,7 @@
               </a:rPr>
               <a:t>Four stores, one question each: what did you start doing that month? One sentence, before you leave.</a:t>
             </a:r>
-            <a:endParaRPr lang="en-US" sz="1600" dirty="0"/>
+            <a:endParaRPr lang="en-US" sz="1550" dirty="0"/>
           </a:p>
         </p:txBody>
       </p:sp>
@@ -33336,8 +33336,8 @@
         </p:nvSpPr>
         <p:spPr>
           <a:xfrm>
-            <a:off x="457200" y="5961888"/>
-            <a:ext cx="11274552" cy="548640"/>
+            <a:off x="457200" y="6126480"/>
+            <a:ext cx="11274552" cy="371856"/>
           </a:xfrm>
           <a:prstGeom prst="rect">
             <a:avLst/>
@@ -33356,8 +33356,8 @@
         </p:nvSpPr>
         <p:spPr>
           <a:xfrm>
-            <a:off x="658368" y="5980176"/>
-            <a:ext cx="10927080" cy="512064"/>
+            <a:off x="658368" y="6144768"/>
+            <a:ext cx="10927080" cy="335280"/>
           </a:xfrm>
           <a:prstGeom prst="rect">
             <a:avLst/>
@@ -33381,7 +33381,7 @@
                 <a:ea typeface="Inter" pitchFamily="34" charset="-122"/>
                 <a:cs typeface="Inter" pitchFamily="34" charset="-120"/>
               </a:rPr>
-              <a:t>Top: VW ST GEORGE (4 of 6).</a:t>
+              <a:t>Top: VW St George (4 of 6).</a:t>
             </a:r>
             <a:endParaRPr lang="en-US" sz="1600" dirty="0"/>
           </a:p>
@@ -33398,7 +33398,7 @@
                 <a:ea typeface="Inter" pitchFamily="34" charset="-122"/>
                 <a:cs typeface="Inter" pitchFamily="34" charset="-120"/>
               </a:rPr>
-              <a:t>Bottom: SUBARU ST GEORGE, HONDA HENDERSON (4 of 6).</a:t>
+              <a:t>Bottom: Subaru St George, Honda Henderson (4 of 6).</a:t>
             </a:r>
             <a:endParaRPr lang="en-US" sz="1600" dirty="0"/>
           </a:p>
@@ -35967,8 +35967,8 @@
         </p:nvSpPr>
         <p:spPr>
           <a:xfrm>
-            <a:off x="457200" y="5961888"/>
-            <a:ext cx="11274552" cy="548640"/>
+            <a:off x="457200" y="6126480"/>
+            <a:ext cx="11274552" cy="371856"/>
           </a:xfrm>
           <a:prstGeom prst="rect">
             <a:avLst/>
@@ -35987,8 +35987,8 @@
         </p:nvSpPr>
         <p:spPr>
           <a:xfrm>
-            <a:off x="658368" y="5980176"/>
-            <a:ext cx="10927080" cy="512064"/>
+            <a:off x="658368" y="6144768"/>
+            <a:ext cx="10927080" cy="335280"/>
           </a:xfrm>
           <a:prstGeom prst="rect">
             <a:avLst/>
@@ -36012,7 +36012,7 @@
                 <a:ea typeface="Inter" pitchFamily="34" charset="-122"/>
                 <a:cs typeface="Inter" pitchFamily="34" charset="-120"/>
               </a:rPr>
-              <a:t>MAZDA went $155K to $209K, stepping up in August. Ask what changed that month.</a:t>
+              <a:t>Mazda went $155K to $209K, stepping up in August. Ask what changed that month.</a:t>
             </a:r>
             <a:endParaRPr lang="en-US" sz="1600" dirty="0"/>
           </a:p>
@@ -38581,8 +38581,8 @@
         </p:nvSpPr>
         <p:spPr>
           <a:xfrm>
-            <a:off x="457200" y="5961888"/>
-            <a:ext cx="11274552" cy="548640"/>
+            <a:off x="457200" y="6126480"/>
+            <a:ext cx="11274552" cy="371856"/>
           </a:xfrm>
           <a:prstGeom prst="rect">
             <a:avLst/>
@@ -38601,8 +38601,8 @@
         </p:nvSpPr>
         <p:spPr>
           <a:xfrm>
-            <a:off x="658368" y="5980176"/>
-            <a:ext cx="10927080" cy="512064"/>
+            <a:off x="658368" y="6144768"/>
+            <a:ext cx="10927080" cy="335280"/>
           </a:xfrm>
           <a:prstGeom prst="rect">
             <a:avLst/>
@@ -38626,7 +38626,7 @@
                 <a:ea typeface="Inter" pitchFamily="34" charset="-122"/>
                 <a:cs typeface="Inter" pitchFamily="34" charset="-120"/>
               </a:rPr>
-              <a:t>LEXUS went 425 to 570, stepping up in April. Ask what changed that month.</a:t>
+              <a:t>Lexus went 425 to 570, stepping up in April. Ask what changed that month.</a:t>
             </a:r>
             <a:endParaRPr lang="en-US" sz="1600" dirty="0"/>
           </a:p>
@@ -41195,8 +41195,8 @@
         </p:nvSpPr>
         <p:spPr>
           <a:xfrm>
-            <a:off x="457200" y="5961888"/>
-            <a:ext cx="11274552" cy="548640"/>
+            <a:off x="457200" y="6126480"/>
+            <a:ext cx="11274552" cy="371856"/>
           </a:xfrm>
           <a:prstGeom prst="rect">
             <a:avLst/>
@@ -41215,8 +41215,8 @@
         </p:nvSpPr>
         <p:spPr>
           <a:xfrm>
-            <a:off x="658368" y="5980176"/>
-            <a:ext cx="10927080" cy="512064"/>
+            <a:off x="658368" y="6144768"/>
+            <a:ext cx="10927080" cy="335280"/>
           </a:xfrm>
           <a:prstGeom prst="rect">
             <a:avLst/>
@@ -41240,7 +41240,7 @@
                 <a:ea typeface="Inter" pitchFamily="34" charset="-122"/>
                 <a:cs typeface="Inter" pitchFamily="34" charset="-120"/>
               </a:rPr>
-              <a:t>MAZDA went 1.35 to 1.65, stepping up in August. Ask what changed that month.</a:t>
+              <a:t>Mazda went 1.35 to 1.65, stepping up in August. Ask what changed that month.</a:t>
             </a:r>
             <a:endParaRPr lang="en-US" sz="1600" dirty="0"/>
           </a:p>
@@ -43809,8 +43809,8 @@
         </p:nvSpPr>
         <p:spPr>
           <a:xfrm>
-            <a:off x="457200" y="5961888"/>
-            <a:ext cx="11274552" cy="548640"/>
+            <a:off x="457200" y="6126480"/>
+            <a:ext cx="11274552" cy="371856"/>
           </a:xfrm>
           <a:prstGeom prst="rect">
             <a:avLst/>
@@ -43829,8 +43829,8 @@
         </p:nvSpPr>
         <p:spPr>
           <a:xfrm>
-            <a:off x="658368" y="5980176"/>
-            <a:ext cx="10927080" cy="512064"/>
+            <a:off x="658368" y="6144768"/>
+            <a:ext cx="10927080" cy="335280"/>
           </a:xfrm>
           <a:prstGeom prst="rect">
             <a:avLst/>
@@ -43854,7 +43854,7 @@
                 <a:ea typeface="Inter" pitchFamily="34" charset="-122"/>
                 <a:cs typeface="Inter" pitchFamily="34" charset="-120"/>
               </a:rPr>
-              <a:t>VW ST GEORGE went $128.27 to $141.89, stepping up in June. Ask what changed that month.</a:t>
+              <a:t>VW St George went $128.27 to $141.89, stepping up in June. Ask what changed that month.</a:t>
             </a:r>
             <a:endParaRPr lang="en-US" sz="1600" dirty="0"/>
           </a:p>
@@ -46423,8 +46423,8 @@
         </p:nvSpPr>
         <p:spPr>
           <a:xfrm>
-            <a:off x="457200" y="5961888"/>
-            <a:ext cx="11274552" cy="548640"/>
+            <a:off x="457200" y="6126480"/>
+            <a:ext cx="11274552" cy="371856"/>
           </a:xfrm>
           <a:prstGeom prst="rect">
             <a:avLst/>
@@ -46443,8 +46443,8 @@
         </p:nvSpPr>
         <p:spPr>
           <a:xfrm>
-            <a:off x="658368" y="5980176"/>
-            <a:ext cx="10927080" cy="512064"/>
+            <a:off x="658368" y="6144768"/>
+            <a:ext cx="10927080" cy="335280"/>
           </a:xfrm>
           <a:prstGeom prst="rect">
             <a:avLst/>
@@ -46468,7 +46468,7 @@
                 <a:ea typeface="Inter" pitchFamily="34" charset="-122"/>
                 <a:cs typeface="Inter" pitchFamily="34" charset="-120"/>
               </a:rPr>
-              <a:t>VW ST GEORGE went $224 to $298, stepping up in June. Ask what changed that month.</a:t>
+              <a:t>VW St George went $224 to $298, stepping up in June. Ask what changed that month.</a:t>
             </a:r>
             <a:endParaRPr lang="en-US" sz="1600" dirty="0"/>
           </a:p>
@@ -49037,8 +49037,8 @@
         </p:nvSpPr>
         <p:spPr>
           <a:xfrm>
-            <a:off x="457200" y="5961888"/>
-            <a:ext cx="11274552" cy="548640"/>
+            <a:off x="457200" y="6126480"/>
+            <a:ext cx="11274552" cy="371856"/>
           </a:xfrm>
           <a:prstGeom prst="rect">
             <a:avLst/>
@@ -49057,8 +49057,8 @@
         </p:nvSpPr>
         <p:spPr>
           <a:xfrm>
-            <a:off x="658368" y="5980176"/>
-            <a:ext cx="10927080" cy="512064"/>
+            <a:off x="658368" y="6144768"/>
+            <a:ext cx="10927080" cy="335280"/>
           </a:xfrm>
           <a:prstGeom prst="rect">
             <a:avLst/>
@@ -49082,7 +49082,7 @@
                 <a:ea typeface="Inter" pitchFamily="34" charset="-122"/>
                 <a:cs typeface="Inter" pitchFamily="34" charset="-120"/>
               </a:rPr>
-              <a:t>ACURA went 39.4% to 46.6%, stepping up in April. Ask what changed that month.</a:t>
+              <a:t>Acura went 39.4% to 46.6%, stepping up in April. Ask what changed that month.</a:t>
             </a:r>
             <a:endParaRPr lang="en-US" sz="1600" dirty="0"/>
           </a:p>
@@ -51226,8 +51226,8 @@
         </p:nvSpPr>
         <p:spPr>
           <a:xfrm>
-            <a:off x="457200" y="5961888"/>
-            <a:ext cx="11274552" cy="548640"/>
+            <a:off x="457200" y="6126480"/>
+            <a:ext cx="11274552" cy="371856"/>
           </a:xfrm>
           <a:prstGeom prst="rect">
             <a:avLst/>
@@ -51246,8 +51246,8 @@
         </p:nvSpPr>
         <p:spPr>
           <a:xfrm>
-            <a:off x="658368" y="5980176"/>
-            <a:ext cx="10927080" cy="512064"/>
+            <a:off x="658368" y="6144768"/>
+            <a:ext cx="10927080" cy="335280"/>
           </a:xfrm>
           <a:prstGeom prst="rect">
             <a:avLst/>
@@ -51271,7 +51271,7 @@
                 <a:ea typeface="Inter" pitchFamily="34" charset="-122"/>
                 <a:cs typeface="Inter" pitchFamily="34" charset="-120"/>
               </a:rPr>
-              <a:t>Last year: Three stores tie. Moving now: VW ST GEORGE leads. Ten stores make both views.</a:t>
+              <a:t>Last year: Three stores tie. Moving now: VW St George leads. Ten stores make both views.</a:t>
             </a:r>
             <a:endParaRPr lang="en-US" sz="1600" dirty="0"/>
           </a:p>

--- a/day2-deck/decks/Most Improved v2 - Review.pptx
+++ b/day2-deck/decks/Most Improved v2 - Review.pptx
@@ -17977,7 +17977,6 @@
 CP RO Count: top KIA LV 7,156 → 8,133; HYUNDAI PRESCOTT 1,784 → 2,010; GMC PRESCOTT 2,810 → 3,107. Bottom AUDI RENO 4,379 → 3,917; HYUNDAI ST GEORGE 3,784 → 3,349; VW ST GEORGE 2,251 → 1,919.
 CP Hours per RO: top HYUNDAI ST GEORGE 1.03 → 1.43; SUBARU ST GEORGE 1.75 → 2.30; KIA ST GEORGE 0.99 → 1.29. Bottom VOLVO 2.58 → 2.28; VW ST GEORGE 1.95 → 1.71; LR RENO 4.04 → 3.48.
 CP ELR: top HONDA SPOKANE $117.05 → $143.89; VOLVO $181.59 → $222.12; LINCOLN $139.55 → $167.64. Bottom ACURA $221.78 → $210.50; SUBARU ST GEORGE $148.84 → $138.48; KIA LV $184.36 → $149.23.
-CP Parts $ per RO: top LINCOLN $281 → $363; LEXUS $193 → $240; HYUNDAI ST GEORGE $181 → $219. Bottom LR RENO $876 → $814; AUDI RENO $596 → $542; KIA LV $227 → $193.
 CP Parts GP %: top ACURA 38.7% → 44.9%; NISSAN 38.2% → 42.7%; SUBARU PRESCOTT 31.0% → 34.8%. Bottom HYUNDAI PRESCOTT 39.9% → 39.4%; TOYOTA SPOKANE 45.3% → 44.5%; AUDI HENDERSON 35.8% → 33.6%.Source: Qlik - Closed Repair Orders. Customer pay, by close date. Same-store, 33 stores (INEOS excluded, opened 2026). GMC Prescott body shop labor types excluded. CP gross = CP labor gross + CP parts gross. Change is Jan-Sep 2026 vs Jan-Sep 2025. Ranked by percent change (points for parts GP %), so store size does not drive the ranking.</a:t>
             </a:r>
             <a:endParaRPr lang="en-US" dirty="0"/>
@@ -18161,7 +18160,6 @@
 CP ROs per Month: top LEXUS 425 → 570; CDJR POST FALLS 543 → 667; LR LV 350 → 415. Bottom VW ST GEORGE 207 → 203; HYUNDAI ST GEORGE 377 → 365; CADILLAC 609 → 582.
 CP Hours per RO: top MAZDA 1.35 → 1.65; HYUNDAI PRESCOTT 1.56 → 1.76; HYUNDAI ST GEORGE 1.37 → 1.54. Bottom HONDA HENDERSON 2.06 → 1.86; VW HENDERSON 2.66 → 2.37; CADILLAC 2.85 → 2.45.
 CP ELR: top VW ST GEORGE $128.27 → $141.89; AUDI RENO $227.34 → $244.12; HONDA SPOKANE $139.40 → $147.93. Bottom SUBARU ST GEORGE $141.07 → $136.71; LEXUS $196.84 → $187.42; ACURA $232.02 → $199.04.
-CP Parts $ per RO: top VW ST GEORGE $224 → $298; LR RENO $692 → $877; ACURA $229 → $282. Bottom LR LV $873 → $834; GMC PRESCOTT $299 → $282; HONDA HENDERSON $190 → $178.
 CP Parts GP %: top ACURA 39.4% → 46.6%; VW ST GEORGE 39.1% → 43.8%; GMC PRESCOTT 35.3% → 39.2%. Bottom CHEVY LV 38.2% → 35.0%; LINCOLN 39.9% → 36.0%; HONDA HENDERSON 44.3% → 40.0%.Source: Qlik - Closed Repair Orders. Customer pay, by close date. Same-store, 33 stores (INEOS excluded, opened 2026). GMC Prescott body shop labor types excluded. CP gross = CP labor gross + CP parts gross. Change is Jul-Sep 2026 (Q3) vs Jan-Mar 2026 (Q1), each store against itself. Gross and ROs are per-month averages of each quarter. The group's own Q1-to-Q3 change is the seasonal baseline: it is the same for every store, so ranking by a store's change is the same as ranking by how far it beat the group. 'Stepped up in' = the month that best splits the store's year into a lower stretch before and a higher stretch after (at least three months before, two after). It is a conversation starter, not proof of cause.</a:t>
             </a:r>
             <a:endParaRPr lang="en-US" dirty="0"/>
@@ -18784,7 +18782,7 @@
           <a:p>
             <a:r>
               <a:rPr lang="en-US" dirty="0"/>
-              <a:t>Source: Qlik - Closed Repair Orders. Customer pay, by close date. Same-store, 33 stores (INEOS excluded, opened 2026). GMC Prescott body shop labor types excluded. CP gross = CP labor gross + CP parts gross. Left: Jan-Sep 2026 vs Jan-Sep 2025. Right: Q3 2026 vs Q1 2026. Top-5 finishes counted across six measures; top six stores shown in each view.</a:t>
+              <a:t>Source: Qlik - Closed Repair Orders. Customer pay, by close date. Same-store, 33 stores (INEOS excluded, opened 2026). GMC Prescott body shop labor types excluded. CP gross = CP labor gross + CP parts gross. Left: Jan-Sep 2026 vs Jan-Sep 2025. Right: Q3 2026 vs Q1 2026. Top-5 finishes counted across five measures (parts $ per RO dropped, Oct 23); top six stores shown in each view.</a:t>
             </a:r>
             <a:endParaRPr lang="en-US" dirty="0"/>
           </a:p>
@@ -19677,7 +19675,7 @@
         <p:spPr>
           <a:xfrm>
             <a:off x="969264" y="1691640"/>
-            <a:ext cx="1670304" cy="45720"/>
+            <a:ext cx="2026310" cy="45720"/>
           </a:xfrm>
           <a:prstGeom prst="rect">
             <a:avLst/>
@@ -19697,7 +19695,7 @@
         <p:spPr>
           <a:xfrm>
             <a:off x="987552" y="1773936"/>
-            <a:ext cx="1633728" cy="237744"/>
+            <a:ext cx="1989734" cy="237744"/>
           </a:xfrm>
           <a:prstGeom prst="rect">
             <a:avLst/>
@@ -19738,7 +19736,7 @@
         <p:spPr>
           <a:xfrm>
             <a:off x="987552" y="1993392"/>
-            <a:ext cx="1633728" cy="201168"/>
+            <a:ext cx="1989734" cy="201168"/>
           </a:xfrm>
           <a:prstGeom prst="rect">
             <a:avLst/>
@@ -19777,7 +19775,7 @@
         <p:spPr>
           <a:xfrm>
             <a:off x="987552" y="2377440"/>
-            <a:ext cx="1688592" cy="219456"/>
+            <a:ext cx="2044598" cy="219456"/>
           </a:xfrm>
           <a:prstGeom prst="rect">
             <a:avLst/>
@@ -19816,7 +19814,7 @@
         <p:spPr>
           <a:xfrm>
             <a:off x="987552" y="2596896"/>
-            <a:ext cx="1670304" cy="228600"/>
+            <a:ext cx="2026310" cy="228600"/>
           </a:xfrm>
           <a:prstGeom prst="rect">
             <a:avLst/>
@@ -19855,7 +19853,7 @@
         <p:spPr>
           <a:xfrm>
             <a:off x="987552" y="2907792"/>
-            <a:ext cx="1688592" cy="219456"/>
+            <a:ext cx="2044598" cy="219456"/>
           </a:xfrm>
           <a:prstGeom prst="rect">
             <a:avLst/>
@@ -19894,7 +19892,7 @@
         <p:spPr>
           <a:xfrm>
             <a:off x="987552" y="3127248"/>
-            <a:ext cx="1670304" cy="228600"/>
+            <a:ext cx="2026310" cy="228600"/>
           </a:xfrm>
           <a:prstGeom prst="rect">
             <a:avLst/>
@@ -19933,7 +19931,7 @@
         <p:spPr>
           <a:xfrm>
             <a:off x="987552" y="3438144"/>
-            <a:ext cx="1688592" cy="219456"/>
+            <a:ext cx="2044598" cy="219456"/>
           </a:xfrm>
           <a:prstGeom prst="rect">
             <a:avLst/>
@@ -19972,7 +19970,7 @@
         <p:spPr>
           <a:xfrm>
             <a:off x="987552" y="3657600"/>
-            <a:ext cx="1670304" cy="228600"/>
+            <a:ext cx="2026310" cy="228600"/>
           </a:xfrm>
           <a:prstGeom prst="rect">
             <a:avLst/>
@@ -20011,7 +20009,7 @@
         <p:spPr>
           <a:xfrm>
             <a:off x="987552" y="4123944"/>
-            <a:ext cx="1688592" cy="219456"/>
+            <a:ext cx="2044598" cy="219456"/>
           </a:xfrm>
           <a:prstGeom prst="rect">
             <a:avLst/>
@@ -20050,7 +20048,7 @@
         <p:spPr>
           <a:xfrm>
             <a:off x="987552" y="4343400"/>
-            <a:ext cx="1670304" cy="228600"/>
+            <a:ext cx="2026310" cy="228600"/>
           </a:xfrm>
           <a:prstGeom prst="rect">
             <a:avLst/>
@@ -20089,7 +20087,7 @@
         <p:spPr>
           <a:xfrm>
             <a:off x="987552" y="4654296"/>
-            <a:ext cx="1688592" cy="219456"/>
+            <a:ext cx="2044598" cy="219456"/>
           </a:xfrm>
           <a:prstGeom prst="rect">
             <a:avLst/>
@@ -20128,7 +20126,7 @@
         <p:spPr>
           <a:xfrm>
             <a:off x="987552" y="4873752"/>
-            <a:ext cx="1670304" cy="228600"/>
+            <a:ext cx="2026310" cy="228600"/>
           </a:xfrm>
           <a:prstGeom prst="rect">
             <a:avLst/>
@@ -20167,7 +20165,7 @@
         <p:spPr>
           <a:xfrm>
             <a:off x="987552" y="5184648"/>
-            <a:ext cx="1688592" cy="219456"/>
+            <a:ext cx="2044598" cy="219456"/>
           </a:xfrm>
           <a:prstGeom prst="rect">
             <a:avLst/>
@@ -20206,7 +20204,7 @@
         <p:spPr>
           <a:xfrm>
             <a:off x="987552" y="5404104"/>
-            <a:ext cx="1670304" cy="228600"/>
+            <a:ext cx="2026310" cy="228600"/>
           </a:xfrm>
           <a:prstGeom prst="rect">
             <a:avLst/>
@@ -20244,8 +20242,8 @@
         </p:nvSpPr>
         <p:spPr>
           <a:xfrm>
-            <a:off x="2749296" y="1691640"/>
-            <a:ext cx="1670304" cy="45720"/>
+            <a:off x="3105302" y="1691640"/>
+            <a:ext cx="2026310" cy="45720"/>
           </a:xfrm>
           <a:prstGeom prst="rect">
             <a:avLst/>
@@ -20264,8 +20262,8 @@
         </p:nvSpPr>
         <p:spPr>
           <a:xfrm>
-            <a:off x="2767584" y="1773936"/>
-            <a:ext cx="1633728" cy="237744"/>
+            <a:off x="3123590" y="1773936"/>
+            <a:ext cx="1989734" cy="237744"/>
           </a:xfrm>
           <a:prstGeom prst="rect">
             <a:avLst/>
@@ -20305,8 +20303,8 @@
         </p:nvSpPr>
         <p:spPr>
           <a:xfrm>
-            <a:off x="2767584" y="1993392"/>
-            <a:ext cx="1633728" cy="201168"/>
+            <a:off x="3123590" y="1993392"/>
+            <a:ext cx="1989734" cy="201168"/>
           </a:xfrm>
           <a:prstGeom prst="rect">
             <a:avLst/>
@@ -20344,8 +20342,8 @@
         </p:nvSpPr>
         <p:spPr>
           <a:xfrm>
-            <a:off x="2767584" y="2377440"/>
-            <a:ext cx="1688592" cy="219456"/>
+            <a:off x="3123590" y="2377440"/>
+            <a:ext cx="2044598" cy="219456"/>
           </a:xfrm>
           <a:prstGeom prst="rect">
             <a:avLst/>
@@ -20383,8 +20381,8 @@
         </p:nvSpPr>
         <p:spPr>
           <a:xfrm>
-            <a:off x="2767584" y="2596896"/>
-            <a:ext cx="1670304" cy="228600"/>
+            <a:off x="3123590" y="2596896"/>
+            <a:ext cx="2026310" cy="228600"/>
           </a:xfrm>
           <a:prstGeom prst="rect">
             <a:avLst/>
@@ -20422,8 +20420,8 @@
         </p:nvSpPr>
         <p:spPr>
           <a:xfrm>
-            <a:off x="2767584" y="2907792"/>
-            <a:ext cx="1688592" cy="219456"/>
+            <a:off x="3123590" y="2907792"/>
+            <a:ext cx="2044598" cy="219456"/>
           </a:xfrm>
           <a:prstGeom prst="rect">
             <a:avLst/>
@@ -20461,8 +20459,8 @@
         </p:nvSpPr>
         <p:spPr>
           <a:xfrm>
-            <a:off x="2767584" y="3127248"/>
-            <a:ext cx="1670304" cy="228600"/>
+            <a:off x="3123590" y="3127248"/>
+            <a:ext cx="2026310" cy="228600"/>
           </a:xfrm>
           <a:prstGeom prst="rect">
             <a:avLst/>
@@ -20500,8 +20498,8 @@
         </p:nvSpPr>
         <p:spPr>
           <a:xfrm>
-            <a:off x="2767584" y="3438144"/>
-            <a:ext cx="1688592" cy="219456"/>
+            <a:off x="3123590" y="3438144"/>
+            <a:ext cx="2044598" cy="219456"/>
           </a:xfrm>
           <a:prstGeom prst="rect">
             <a:avLst/>
@@ -20539,8 +20537,8 @@
         </p:nvSpPr>
         <p:spPr>
           <a:xfrm>
-            <a:off x="2767584" y="3657600"/>
-            <a:ext cx="1670304" cy="228600"/>
+            <a:off x="3123590" y="3657600"/>
+            <a:ext cx="2026310" cy="228600"/>
           </a:xfrm>
           <a:prstGeom prst="rect">
             <a:avLst/>
@@ -20578,8 +20576,8 @@
         </p:nvSpPr>
         <p:spPr>
           <a:xfrm>
-            <a:off x="2767584" y="4123944"/>
-            <a:ext cx="1688592" cy="219456"/>
+            <a:off x="3123590" y="4123944"/>
+            <a:ext cx="2044598" cy="219456"/>
           </a:xfrm>
           <a:prstGeom prst="rect">
             <a:avLst/>
@@ -20617,8 +20615,8 @@
         </p:nvSpPr>
         <p:spPr>
           <a:xfrm>
-            <a:off x="2767584" y="4343400"/>
-            <a:ext cx="1670304" cy="228600"/>
+            <a:off x="3123590" y="4343400"/>
+            <a:ext cx="2026310" cy="228600"/>
           </a:xfrm>
           <a:prstGeom prst="rect">
             <a:avLst/>
@@ -20656,8 +20654,8 @@
         </p:nvSpPr>
         <p:spPr>
           <a:xfrm>
-            <a:off x="2767584" y="4654296"/>
-            <a:ext cx="1688592" cy="219456"/>
+            <a:off x="3123590" y="4654296"/>
+            <a:ext cx="2044598" cy="219456"/>
           </a:xfrm>
           <a:prstGeom prst="rect">
             <a:avLst/>
@@ -20695,8 +20693,8 @@
         </p:nvSpPr>
         <p:spPr>
           <a:xfrm>
-            <a:off x="2767584" y="4873752"/>
-            <a:ext cx="1670304" cy="228600"/>
+            <a:off x="3123590" y="4873752"/>
+            <a:ext cx="2026310" cy="228600"/>
           </a:xfrm>
           <a:prstGeom prst="rect">
             <a:avLst/>
@@ -20734,8 +20732,8 @@
         </p:nvSpPr>
         <p:spPr>
           <a:xfrm>
-            <a:off x="2767584" y="5184648"/>
-            <a:ext cx="1688592" cy="219456"/>
+            <a:off x="3123590" y="5184648"/>
+            <a:ext cx="2044598" cy="219456"/>
           </a:xfrm>
           <a:prstGeom prst="rect">
             <a:avLst/>
@@ -20773,8 +20771,8 @@
         </p:nvSpPr>
         <p:spPr>
           <a:xfrm>
-            <a:off x="2767584" y="5404104"/>
-            <a:ext cx="1670304" cy="228600"/>
+            <a:off x="3123590" y="5404104"/>
+            <a:ext cx="2026310" cy="228600"/>
           </a:xfrm>
           <a:prstGeom prst="rect">
             <a:avLst/>
@@ -20812,8 +20810,8 @@
         </p:nvSpPr>
         <p:spPr>
           <a:xfrm>
-            <a:off x="4529328" y="1691640"/>
-            <a:ext cx="1670304" cy="45720"/>
+            <a:off x="5241341" y="1691640"/>
+            <a:ext cx="2026310" cy="45720"/>
           </a:xfrm>
           <a:prstGeom prst="rect">
             <a:avLst/>
@@ -20832,8 +20830,8 @@
         </p:nvSpPr>
         <p:spPr>
           <a:xfrm>
-            <a:off x="4547616" y="1773936"/>
-            <a:ext cx="1633728" cy="237744"/>
+            <a:off x="5259629" y="1773936"/>
+            <a:ext cx="1989734" cy="237744"/>
           </a:xfrm>
           <a:prstGeom prst="rect">
             <a:avLst/>
@@ -20873,8 +20871,8 @@
         </p:nvSpPr>
         <p:spPr>
           <a:xfrm>
-            <a:off x="4547616" y="1993392"/>
-            <a:ext cx="1633728" cy="201168"/>
+            <a:off x="5259629" y="1993392"/>
+            <a:ext cx="1989734" cy="201168"/>
           </a:xfrm>
           <a:prstGeom prst="rect">
             <a:avLst/>
@@ -20912,8 +20910,8 @@
         </p:nvSpPr>
         <p:spPr>
           <a:xfrm>
-            <a:off x="4547616" y="2377440"/>
-            <a:ext cx="1688592" cy="219456"/>
+            <a:off x="5259629" y="2377440"/>
+            <a:ext cx="2044598" cy="219456"/>
           </a:xfrm>
           <a:prstGeom prst="rect">
             <a:avLst/>
@@ -20951,8 +20949,8 @@
         </p:nvSpPr>
         <p:spPr>
           <a:xfrm>
-            <a:off x="4547616" y="2596896"/>
-            <a:ext cx="1670304" cy="228600"/>
+            <a:off x="5259629" y="2596896"/>
+            <a:ext cx="2026310" cy="228600"/>
           </a:xfrm>
           <a:prstGeom prst="rect">
             <a:avLst/>
@@ -20990,8 +20988,8 @@
         </p:nvSpPr>
         <p:spPr>
           <a:xfrm>
-            <a:off x="4547616" y="2907792"/>
-            <a:ext cx="1688592" cy="219456"/>
+            <a:off x="5259629" y="2907792"/>
+            <a:ext cx="2044598" cy="219456"/>
           </a:xfrm>
           <a:prstGeom prst="rect">
             <a:avLst/>
@@ -21029,8 +21027,8 @@
         </p:nvSpPr>
         <p:spPr>
           <a:xfrm>
-            <a:off x="4547616" y="3127248"/>
-            <a:ext cx="1670304" cy="228600"/>
+            <a:off x="5259629" y="3127248"/>
+            <a:ext cx="2026310" cy="228600"/>
           </a:xfrm>
           <a:prstGeom prst="rect">
             <a:avLst/>
@@ -21068,8 +21066,8 @@
         </p:nvSpPr>
         <p:spPr>
           <a:xfrm>
-            <a:off x="4547616" y="3438144"/>
-            <a:ext cx="1688592" cy="219456"/>
+            <a:off x="5259629" y="3438144"/>
+            <a:ext cx="2044598" cy="219456"/>
           </a:xfrm>
           <a:prstGeom prst="rect">
             <a:avLst/>
@@ -21107,8 +21105,8 @@
         </p:nvSpPr>
         <p:spPr>
           <a:xfrm>
-            <a:off x="4547616" y="3657600"/>
-            <a:ext cx="1670304" cy="228600"/>
+            <a:off x="5259629" y="3657600"/>
+            <a:ext cx="2026310" cy="228600"/>
           </a:xfrm>
           <a:prstGeom prst="rect">
             <a:avLst/>
@@ -21146,8 +21144,8 @@
         </p:nvSpPr>
         <p:spPr>
           <a:xfrm>
-            <a:off x="4547616" y="4123944"/>
-            <a:ext cx="1688592" cy="219456"/>
+            <a:off x="5259629" y="4123944"/>
+            <a:ext cx="2044598" cy="219456"/>
           </a:xfrm>
           <a:prstGeom prst="rect">
             <a:avLst/>
@@ -21185,8 +21183,8 @@
         </p:nvSpPr>
         <p:spPr>
           <a:xfrm>
-            <a:off x="4547616" y="4343400"/>
-            <a:ext cx="1670304" cy="228600"/>
+            <a:off x="5259629" y="4343400"/>
+            <a:ext cx="2026310" cy="228600"/>
           </a:xfrm>
           <a:prstGeom prst="rect">
             <a:avLst/>
@@ -21224,8 +21222,8 @@
         </p:nvSpPr>
         <p:spPr>
           <a:xfrm>
-            <a:off x="4547616" y="4654296"/>
-            <a:ext cx="1688592" cy="219456"/>
+            <a:off x="5259629" y="4654296"/>
+            <a:ext cx="2044598" cy="219456"/>
           </a:xfrm>
           <a:prstGeom prst="rect">
             <a:avLst/>
@@ -21263,8 +21261,8 @@
         </p:nvSpPr>
         <p:spPr>
           <a:xfrm>
-            <a:off x="4547616" y="4873752"/>
-            <a:ext cx="1670304" cy="228600"/>
+            <a:off x="5259629" y="4873752"/>
+            <a:ext cx="2026310" cy="228600"/>
           </a:xfrm>
           <a:prstGeom prst="rect">
             <a:avLst/>
@@ -21302,8 +21300,8 @@
         </p:nvSpPr>
         <p:spPr>
           <a:xfrm>
-            <a:off x="4547616" y="5184648"/>
-            <a:ext cx="1688592" cy="219456"/>
+            <a:off x="5259629" y="5184648"/>
+            <a:ext cx="2044598" cy="219456"/>
           </a:xfrm>
           <a:prstGeom prst="rect">
             <a:avLst/>
@@ -21341,8 +21339,8 @@
         </p:nvSpPr>
         <p:spPr>
           <a:xfrm>
-            <a:off x="4547616" y="5404104"/>
-            <a:ext cx="1670304" cy="228600"/>
+            <a:off x="5259629" y="5404104"/>
+            <a:ext cx="2026310" cy="228600"/>
           </a:xfrm>
           <a:prstGeom prst="rect">
             <a:avLst/>
@@ -21380,8 +21378,8 @@
         </p:nvSpPr>
         <p:spPr>
           <a:xfrm>
-            <a:off x="6309360" y="1691640"/>
-            <a:ext cx="1670304" cy="45720"/>
+            <a:off x="7377379" y="1691640"/>
+            <a:ext cx="2026310" cy="45720"/>
           </a:xfrm>
           <a:prstGeom prst="rect">
             <a:avLst/>
@@ -21400,8 +21398,8 @@
         </p:nvSpPr>
         <p:spPr>
           <a:xfrm>
-            <a:off x="6327648" y="1773936"/>
-            <a:ext cx="1633728" cy="237744"/>
+            <a:off x="7395667" y="1773936"/>
+            <a:ext cx="1989734" cy="237744"/>
           </a:xfrm>
           <a:prstGeom prst="rect">
             <a:avLst/>
@@ -21441,8 +21439,8 @@
         </p:nvSpPr>
         <p:spPr>
           <a:xfrm>
-            <a:off x="6327648" y="1993392"/>
-            <a:ext cx="1633728" cy="201168"/>
+            <a:off x="7395667" y="1993392"/>
+            <a:ext cx="1989734" cy="201168"/>
           </a:xfrm>
           <a:prstGeom prst="rect">
             <a:avLst/>
@@ -21480,8 +21478,8 @@
         </p:nvSpPr>
         <p:spPr>
           <a:xfrm>
-            <a:off x="6327648" y="2377440"/>
-            <a:ext cx="1688592" cy="219456"/>
+            <a:off x="7395667" y="2377440"/>
+            <a:ext cx="2044598" cy="219456"/>
           </a:xfrm>
           <a:prstGeom prst="rect">
             <a:avLst/>
@@ -21519,8 +21517,8 @@
         </p:nvSpPr>
         <p:spPr>
           <a:xfrm>
-            <a:off x="6327648" y="2596896"/>
-            <a:ext cx="1670304" cy="228600"/>
+            <a:off x="7395667" y="2596896"/>
+            <a:ext cx="2026310" cy="228600"/>
           </a:xfrm>
           <a:prstGeom prst="rect">
             <a:avLst/>
@@ -21558,8 +21556,8 @@
         </p:nvSpPr>
         <p:spPr>
           <a:xfrm>
-            <a:off x="6327648" y="2907792"/>
-            <a:ext cx="1688592" cy="219456"/>
+            <a:off x="7395667" y="2907792"/>
+            <a:ext cx="2044598" cy="219456"/>
           </a:xfrm>
           <a:prstGeom prst="rect">
             <a:avLst/>
@@ -21597,8 +21595,8 @@
         </p:nvSpPr>
         <p:spPr>
           <a:xfrm>
-            <a:off x="6327648" y="3127248"/>
-            <a:ext cx="1670304" cy="228600"/>
+            <a:off x="7395667" y="3127248"/>
+            <a:ext cx="2026310" cy="228600"/>
           </a:xfrm>
           <a:prstGeom prst="rect">
             <a:avLst/>
@@ -21636,8 +21634,8 @@
         </p:nvSpPr>
         <p:spPr>
           <a:xfrm>
-            <a:off x="6327648" y="3438144"/>
-            <a:ext cx="1688592" cy="219456"/>
+            <a:off x="7395667" y="3438144"/>
+            <a:ext cx="2044598" cy="219456"/>
           </a:xfrm>
           <a:prstGeom prst="rect">
             <a:avLst/>
@@ -21675,8 +21673,8 @@
         </p:nvSpPr>
         <p:spPr>
           <a:xfrm>
-            <a:off x="6327648" y="3657600"/>
-            <a:ext cx="1670304" cy="228600"/>
+            <a:off x="7395667" y="3657600"/>
+            <a:ext cx="2026310" cy="228600"/>
           </a:xfrm>
           <a:prstGeom prst="rect">
             <a:avLst/>
@@ -21714,8 +21712,8 @@
         </p:nvSpPr>
         <p:spPr>
           <a:xfrm>
-            <a:off x="6327648" y="4123944"/>
-            <a:ext cx="1688592" cy="219456"/>
+            <a:off x="7395667" y="4123944"/>
+            <a:ext cx="2044598" cy="219456"/>
           </a:xfrm>
           <a:prstGeom prst="rect">
             <a:avLst/>
@@ -21753,8 +21751,8 @@
         </p:nvSpPr>
         <p:spPr>
           <a:xfrm>
-            <a:off x="6327648" y="4343400"/>
-            <a:ext cx="1670304" cy="228600"/>
+            <a:off x="7395667" y="4343400"/>
+            <a:ext cx="2026310" cy="228600"/>
           </a:xfrm>
           <a:prstGeom prst="rect">
             <a:avLst/>
@@ -21792,8 +21790,8 @@
         </p:nvSpPr>
         <p:spPr>
           <a:xfrm>
-            <a:off x="6327648" y="4654296"/>
-            <a:ext cx="1688592" cy="219456"/>
+            <a:off x="7395667" y="4654296"/>
+            <a:ext cx="2044598" cy="219456"/>
           </a:xfrm>
           <a:prstGeom prst="rect">
             <a:avLst/>
@@ -21831,8 +21829,8 @@
         </p:nvSpPr>
         <p:spPr>
           <a:xfrm>
-            <a:off x="6327648" y="4873752"/>
-            <a:ext cx="1670304" cy="228600"/>
+            <a:off x="7395667" y="4873752"/>
+            <a:ext cx="2026310" cy="228600"/>
           </a:xfrm>
           <a:prstGeom prst="rect">
             <a:avLst/>
@@ -21870,8 +21868,8 @@
         </p:nvSpPr>
         <p:spPr>
           <a:xfrm>
-            <a:off x="6327648" y="5184648"/>
-            <a:ext cx="1688592" cy="219456"/>
+            <a:off x="7395667" y="5184648"/>
+            <a:ext cx="2044598" cy="219456"/>
           </a:xfrm>
           <a:prstGeom prst="rect">
             <a:avLst/>
@@ -21909,8 +21907,8 @@
         </p:nvSpPr>
         <p:spPr>
           <a:xfrm>
-            <a:off x="6327648" y="5404104"/>
-            <a:ext cx="1670304" cy="228600"/>
+            <a:off x="7395667" y="5404104"/>
+            <a:ext cx="2026310" cy="228600"/>
           </a:xfrm>
           <a:prstGeom prst="rect">
             <a:avLst/>
@@ -21948,8 +21946,8 @@
         </p:nvSpPr>
         <p:spPr>
           <a:xfrm>
-            <a:off x="8089392" y="1691640"/>
-            <a:ext cx="1670304" cy="45720"/>
+            <a:off x="9513418" y="1691640"/>
+            <a:ext cx="2026310" cy="45720"/>
           </a:xfrm>
           <a:prstGeom prst="rect">
             <a:avLst/>
@@ -21968,8 +21966,8 @@
         </p:nvSpPr>
         <p:spPr>
           <a:xfrm>
-            <a:off x="8107680" y="1773936"/>
-            <a:ext cx="1633728" cy="237744"/>
+            <a:off x="9531706" y="1773936"/>
+            <a:ext cx="1989734" cy="237744"/>
           </a:xfrm>
           <a:prstGeom prst="rect">
             <a:avLst/>
@@ -21995,7 +21993,7 @@
                 <a:ea typeface="Inter" pitchFamily="34" charset="-122"/>
                 <a:cs typeface="Inter" pitchFamily="34" charset="-120"/>
               </a:rPr>
-              <a:t>CP PARTS $ PER RO</a:t>
+              <a:t>CP PARTS GP %</a:t>
             </a:r>
             <a:endParaRPr lang="en-US" sz="1300" dirty="0"/>
           </a:p>
@@ -22009,8 +22007,8 @@
         </p:nvSpPr>
         <p:spPr>
           <a:xfrm>
-            <a:off x="8107680" y="1993392"/>
-            <a:ext cx="1633728" cy="201168"/>
+            <a:off x="9531706" y="1993392"/>
+            <a:ext cx="1989734" cy="201168"/>
           </a:xfrm>
           <a:prstGeom prst="rect">
             <a:avLst/>
@@ -22034,7 +22032,7 @@
                 <a:ea typeface="Inter" pitchFamily="34" charset="-122"/>
                 <a:cs typeface="Inter" pitchFamily="34" charset="-120"/>
               </a:rPr>
-              <a:t>Group +4.1%</a:t>
+              <a:t>Group +1.2 pts</a:t>
             </a:r>
             <a:endParaRPr lang="en-US" sz="1300" dirty="0"/>
           </a:p>
@@ -22048,8 +22046,8 @@
         </p:nvSpPr>
         <p:spPr>
           <a:xfrm>
-            <a:off x="8107680" y="2377440"/>
-            <a:ext cx="1688592" cy="219456"/>
+            <a:off x="9531706" y="2377440"/>
+            <a:ext cx="2044598" cy="219456"/>
           </a:xfrm>
           <a:prstGeom prst="rect">
             <a:avLst/>
@@ -22073,7 +22071,7 @@
                 <a:ea typeface="Inter" pitchFamily="34" charset="-122"/>
                 <a:cs typeface="Inter" pitchFamily="34" charset="-120"/>
               </a:rPr>
-              <a:t>Lincoln</a:t>
+              <a:t>Acura</a:t>
             </a:r>
             <a:endParaRPr lang="en-US" sz="1300" dirty="0"/>
           </a:p>
@@ -22087,8 +22085,8 @@
         </p:nvSpPr>
         <p:spPr>
           <a:xfrm>
-            <a:off x="8107680" y="2596896"/>
-            <a:ext cx="1670304" cy="228600"/>
+            <a:off x="9531706" y="2596896"/>
+            <a:ext cx="2026310" cy="228600"/>
           </a:xfrm>
           <a:prstGeom prst="rect">
             <a:avLst/>
@@ -22112,7 +22110,7 @@
                 <a:ea typeface="Inter" pitchFamily="34" charset="-122"/>
                 <a:cs typeface="Inter" pitchFamily="34" charset="-120"/>
               </a:rPr>
-              <a:t>+28.9%</a:t>
+              <a:t>+6.1 pts</a:t>
             </a:r>
             <a:endParaRPr lang="en-US" sz="1600" dirty="0"/>
           </a:p>
@@ -22126,8 +22124,8 @@
         </p:nvSpPr>
         <p:spPr>
           <a:xfrm>
-            <a:off x="8107680" y="2907792"/>
-            <a:ext cx="1688592" cy="219456"/>
+            <a:off x="9531706" y="2907792"/>
+            <a:ext cx="2044598" cy="219456"/>
           </a:xfrm>
           <a:prstGeom prst="rect">
             <a:avLst/>
@@ -22151,7 +22149,7 @@
                 <a:ea typeface="Inter" pitchFamily="34" charset="-122"/>
                 <a:cs typeface="Inter" pitchFamily="34" charset="-120"/>
               </a:rPr>
-              <a:t>Lexus</a:t>
+              <a:t>Nissan</a:t>
             </a:r>
             <a:endParaRPr lang="en-US" sz="1300" dirty="0"/>
           </a:p>
@@ -22165,8 +22163,8 @@
         </p:nvSpPr>
         <p:spPr>
           <a:xfrm>
-            <a:off x="8107680" y="3127248"/>
-            <a:ext cx="1670304" cy="228600"/>
+            <a:off x="9531706" y="3127248"/>
+            <a:ext cx="2026310" cy="228600"/>
           </a:xfrm>
           <a:prstGeom prst="rect">
             <a:avLst/>
@@ -22190,7 +22188,7 @@
                 <a:ea typeface="Inter" pitchFamily="34" charset="-122"/>
                 <a:cs typeface="Inter" pitchFamily="34" charset="-120"/>
               </a:rPr>
-              <a:t>+24.7%</a:t>
+              <a:t>+4.5 pts</a:t>
             </a:r>
             <a:endParaRPr lang="en-US" sz="1600" dirty="0"/>
           </a:p>
@@ -22204,8 +22202,8 @@
         </p:nvSpPr>
         <p:spPr>
           <a:xfrm>
-            <a:off x="8107680" y="3438144"/>
-            <a:ext cx="1688592" cy="219456"/>
+            <a:off x="9531706" y="3438144"/>
+            <a:ext cx="2044598" cy="219456"/>
           </a:xfrm>
           <a:prstGeom prst="rect">
             <a:avLst/>
@@ -22229,7 +22227,7 @@
                 <a:ea typeface="Inter" pitchFamily="34" charset="-122"/>
                 <a:cs typeface="Inter" pitchFamily="34" charset="-120"/>
               </a:rPr>
-              <a:t>Hyundai St George</a:t>
+              <a:t>Subaru Prescott</a:t>
             </a:r>
             <a:endParaRPr lang="en-US" sz="1300" dirty="0"/>
           </a:p>
@@ -22243,8 +22241,8 @@
         </p:nvSpPr>
         <p:spPr>
           <a:xfrm>
-            <a:off x="8107680" y="3657600"/>
-            <a:ext cx="1670304" cy="228600"/>
+            <a:off x="9531706" y="3657600"/>
+            <a:ext cx="2026310" cy="228600"/>
           </a:xfrm>
           <a:prstGeom prst="rect">
             <a:avLst/>
@@ -22268,7 +22266,7 @@
                 <a:ea typeface="Inter" pitchFamily="34" charset="-122"/>
                 <a:cs typeface="Inter" pitchFamily="34" charset="-120"/>
               </a:rPr>
-              <a:t>+21.0%</a:t>
+              <a:t>+3.8 pts</a:t>
             </a:r>
             <a:endParaRPr lang="en-US" sz="1600" dirty="0"/>
           </a:p>
@@ -22282,8 +22280,8 @@
         </p:nvSpPr>
         <p:spPr>
           <a:xfrm>
-            <a:off x="8107680" y="4123944"/>
-            <a:ext cx="1688592" cy="219456"/>
+            <a:off x="9531706" y="4123944"/>
+            <a:ext cx="2044598" cy="219456"/>
           </a:xfrm>
           <a:prstGeom prst="rect">
             <a:avLst/>
@@ -22307,7 +22305,7 @@
                 <a:ea typeface="Inter" pitchFamily="34" charset="-122"/>
                 <a:cs typeface="Inter" pitchFamily="34" charset="-120"/>
               </a:rPr>
-              <a:t>LR Reno</a:t>
+              <a:t>Hyundai Prescott</a:t>
             </a:r>
             <a:endParaRPr lang="en-US" sz="1300" dirty="0"/>
           </a:p>
@@ -22321,8 +22319,8 @@
         </p:nvSpPr>
         <p:spPr>
           <a:xfrm>
-            <a:off x="8107680" y="4343400"/>
-            <a:ext cx="1670304" cy="228600"/>
+            <a:off x="9531706" y="4343400"/>
+            <a:ext cx="2026310" cy="228600"/>
           </a:xfrm>
           <a:prstGeom prst="rect">
             <a:avLst/>
@@ -22346,7 +22344,7 @@
                 <a:ea typeface="Inter" pitchFamily="34" charset="-122"/>
                 <a:cs typeface="Inter" pitchFamily="34" charset="-120"/>
               </a:rPr>
-              <a:t>−7.1%</a:t>
+              <a:t>−0.5 pts</a:t>
             </a:r>
             <a:endParaRPr lang="en-US" sz="1600" dirty="0"/>
           </a:p>
@@ -22360,8 +22358,8 @@
         </p:nvSpPr>
         <p:spPr>
           <a:xfrm>
-            <a:off x="8107680" y="4654296"/>
-            <a:ext cx="1688592" cy="219456"/>
+            <a:off x="9531706" y="4654296"/>
+            <a:ext cx="2044598" cy="219456"/>
           </a:xfrm>
           <a:prstGeom prst="rect">
             <a:avLst/>
@@ -22385,7 +22383,7 @@
                 <a:ea typeface="Inter" pitchFamily="34" charset="-122"/>
                 <a:cs typeface="Inter" pitchFamily="34" charset="-120"/>
               </a:rPr>
-              <a:t>Audi Reno</a:t>
+              <a:t>Toyota Spokane</a:t>
             </a:r>
             <a:endParaRPr lang="en-US" sz="1300" dirty="0"/>
           </a:p>
@@ -22399,8 +22397,8 @@
         </p:nvSpPr>
         <p:spPr>
           <a:xfrm>
-            <a:off x="8107680" y="4873752"/>
-            <a:ext cx="1670304" cy="228600"/>
+            <a:off x="9531706" y="4873752"/>
+            <a:ext cx="2026310" cy="228600"/>
           </a:xfrm>
           <a:prstGeom prst="rect">
             <a:avLst/>
@@ -22424,7 +22422,7 @@
                 <a:ea typeface="Inter" pitchFamily="34" charset="-122"/>
                 <a:cs typeface="Inter" pitchFamily="34" charset="-120"/>
               </a:rPr>
-              <a:t>−9.0%</a:t>
+              <a:t>−0.8 pts</a:t>
             </a:r>
             <a:endParaRPr lang="en-US" sz="1600" dirty="0"/>
           </a:p>
@@ -22438,8 +22436,8 @@
         </p:nvSpPr>
         <p:spPr>
           <a:xfrm>
-            <a:off x="8107680" y="5184648"/>
-            <a:ext cx="1688592" cy="219456"/>
+            <a:off x="9531706" y="5184648"/>
+            <a:ext cx="2044598" cy="219456"/>
           </a:xfrm>
           <a:prstGeom prst="rect">
             <a:avLst/>
@@ -22463,7 +22461,7 @@
                 <a:ea typeface="Inter" pitchFamily="34" charset="-122"/>
                 <a:cs typeface="Inter" pitchFamily="34" charset="-120"/>
               </a:rPr>
-              <a:t>Kia LV</a:t>
+              <a:t>Audi Henderson</a:t>
             </a:r>
             <a:endParaRPr lang="en-US" sz="1300" dirty="0"/>
           </a:p>
@@ -22477,8 +22475,8 @@
         </p:nvSpPr>
         <p:spPr>
           <a:xfrm>
-            <a:off x="8107680" y="5404104"/>
-            <a:ext cx="1670304" cy="228600"/>
+            <a:off x="9531706" y="5404104"/>
+            <a:ext cx="2026310" cy="228600"/>
           </a:xfrm>
           <a:prstGeom prst="rect">
             <a:avLst/>
@@ -22502,7 +22500,7 @@
                 <a:ea typeface="Inter" pitchFamily="34" charset="-122"/>
                 <a:cs typeface="Inter" pitchFamily="34" charset="-120"/>
               </a:rPr>
-              <a:t>−15.0%</a:t>
+              <a:t>−2.1 pts</a:t>
             </a:r>
             <a:endParaRPr lang="en-US" sz="1600" dirty="0"/>
           </a:p>
@@ -22510,582 +22508,14 @@
       </p:sp>
       <p:sp>
         <p:nvSpPr>
-          <p:cNvPr id="94" name="Shape 92"/>
+          <p:cNvPr id="95" name="Shape 92"/>
           <p:cNvSpPr/>
           <p:nvPr/>
         </p:nvSpPr>
         <p:spPr>
           <a:xfrm>
-            <a:off x="9869424" y="1691640"/>
-            <a:ext cx="1670304" cy="45720"/>
-          </a:xfrm>
-          <a:prstGeom prst="rect">
-            <a:avLst/>
-          </a:prstGeom>
-          <a:solidFill>
-            <a:srgbClr val="12A566"/>
-          </a:solidFill>
-          <a:ln/>
-        </p:spPr>
-      </p:sp>
-      <p:sp>
-        <p:nvSpPr>
-          <p:cNvPr id="95" name="Text 93"/>
-          <p:cNvSpPr txBox="1"/>
-          <p:nvPr/>
-        </p:nvSpPr>
-        <p:spPr>
-          <a:xfrm>
-            <a:off x="9887712" y="1773936"/>
-            <a:ext cx="1633728" cy="237744"/>
-          </a:xfrm>
-          <a:prstGeom prst="rect">
-            <a:avLst/>
-          </a:prstGeom>
-          <a:noFill/>
-          <a:ln/>
-        </p:spPr>
-        <p:txBody>
-          <a:bodyPr wrap="square" lIns="0" tIns="0" rIns="0" bIns="0" rtlCol="0" anchor="ctr">
-            <a:normAutofit/>
-          </a:bodyPr>
-          <a:lstStyle/>
-          <a:p>
-            <a:pPr indent="0" marL="0">
-              <a:buNone/>
-            </a:pPr>
-            <a:r>
-              <a:rPr lang="en-US" sz="1300" b="1" spc="30" kern="0" dirty="0">
-                <a:solidFill>
-                  <a:srgbClr val="595959"/>
-                </a:solidFill>
-                <a:latin typeface="Inter" pitchFamily="34" charset="0"/>
-                <a:ea typeface="Inter" pitchFamily="34" charset="-122"/>
-                <a:cs typeface="Inter" pitchFamily="34" charset="-120"/>
-              </a:rPr>
-              <a:t>CP PARTS GP %</a:t>
-            </a:r>
-            <a:endParaRPr lang="en-US" sz="1300" dirty="0"/>
-          </a:p>
-        </p:txBody>
-      </p:sp>
-      <p:sp>
-        <p:nvSpPr>
-          <p:cNvPr id="96" name="Text 94"/>
-          <p:cNvSpPr txBox="1"/>
-          <p:nvPr/>
-        </p:nvSpPr>
-        <p:spPr>
-          <a:xfrm>
-            <a:off x="9887712" y="1993392"/>
-            <a:ext cx="1633728" cy="201168"/>
-          </a:xfrm>
-          <a:prstGeom prst="rect">
-            <a:avLst/>
-          </a:prstGeom>
-          <a:noFill/>
-          <a:ln/>
-        </p:spPr>
-        <p:txBody>
-          <a:bodyPr wrap="square" lIns="0" tIns="0" rIns="0" bIns="0" rtlCol="0" anchor="ctr"/>
-          <a:lstStyle/>
-          <a:p>
-            <a:pPr indent="0" marL="0">
-              <a:buNone/>
-            </a:pPr>
-            <a:r>
-              <a:rPr lang="en-US" sz="1300" dirty="0">
-                <a:solidFill>
-                  <a:srgbClr val="595959"/>
-                </a:solidFill>
-                <a:latin typeface="Inter" pitchFamily="34" charset="0"/>
-                <a:ea typeface="Inter" pitchFamily="34" charset="-122"/>
-                <a:cs typeface="Inter" pitchFamily="34" charset="-120"/>
-              </a:rPr>
-              <a:t>Group +1.2 pts</a:t>
-            </a:r>
-            <a:endParaRPr lang="en-US" sz="1300" dirty="0"/>
-          </a:p>
-        </p:txBody>
-      </p:sp>
-      <p:sp>
-        <p:nvSpPr>
-          <p:cNvPr id="97" name="Text 95"/>
-          <p:cNvSpPr txBox="1"/>
-          <p:nvPr/>
-        </p:nvSpPr>
-        <p:spPr>
-          <a:xfrm>
-            <a:off x="9887712" y="2377440"/>
-            <a:ext cx="1688592" cy="219456"/>
-          </a:xfrm>
-          <a:prstGeom prst="rect">
-            <a:avLst/>
-          </a:prstGeom>
-          <a:noFill/>
-          <a:ln/>
-        </p:spPr>
-        <p:txBody>
-          <a:bodyPr wrap="square" lIns="0" tIns="0" rIns="0" bIns="0" rtlCol="0" anchor="ctr"/>
-          <a:lstStyle/>
-          <a:p>
-            <a:pPr indent="0" marL="0">
-              <a:buNone/>
-            </a:pPr>
-            <a:r>
-              <a:rPr lang="en-US" sz="1300" b="1" dirty="0">
-                <a:solidFill>
-                  <a:srgbClr val="1A1A1A"/>
-                </a:solidFill>
-                <a:latin typeface="Inter" pitchFamily="34" charset="0"/>
-                <a:ea typeface="Inter" pitchFamily="34" charset="-122"/>
-                <a:cs typeface="Inter" pitchFamily="34" charset="-120"/>
-              </a:rPr>
-              <a:t>Acura</a:t>
-            </a:r>
-            <a:endParaRPr lang="en-US" sz="1300" dirty="0"/>
-          </a:p>
-        </p:txBody>
-      </p:sp>
-      <p:sp>
-        <p:nvSpPr>
-          <p:cNvPr id="98" name="Text 96"/>
-          <p:cNvSpPr txBox="1"/>
-          <p:nvPr/>
-        </p:nvSpPr>
-        <p:spPr>
-          <a:xfrm>
-            <a:off x="9887712" y="2596896"/>
-            <a:ext cx="1670304" cy="228600"/>
-          </a:xfrm>
-          <a:prstGeom prst="rect">
-            <a:avLst/>
-          </a:prstGeom>
-          <a:noFill/>
-          <a:ln/>
-        </p:spPr>
-        <p:txBody>
-          <a:bodyPr wrap="square" lIns="0" tIns="0" rIns="0" bIns="0" rtlCol="0" anchor="ctr"/>
-          <a:lstStyle/>
-          <a:p>
-            <a:pPr indent="0" marL="0">
-              <a:buNone/>
-            </a:pPr>
-            <a:r>
-              <a:rPr lang="en-US" sz="1600" b="1" dirty="0">
-                <a:solidFill>
-                  <a:srgbClr val="0B7A4A"/>
-                </a:solidFill>
-                <a:latin typeface="Inter" pitchFamily="34" charset="0"/>
-                <a:ea typeface="Inter" pitchFamily="34" charset="-122"/>
-                <a:cs typeface="Inter" pitchFamily="34" charset="-120"/>
-              </a:rPr>
-              <a:t>+6.1 pts</a:t>
-            </a:r>
-            <a:endParaRPr lang="en-US" sz="1600" dirty="0"/>
-          </a:p>
-        </p:txBody>
-      </p:sp>
-      <p:sp>
-        <p:nvSpPr>
-          <p:cNvPr id="99" name="Text 97"/>
-          <p:cNvSpPr txBox="1"/>
-          <p:nvPr/>
-        </p:nvSpPr>
-        <p:spPr>
-          <a:xfrm>
-            <a:off x="9887712" y="2907792"/>
-            <a:ext cx="1688592" cy="219456"/>
-          </a:xfrm>
-          <a:prstGeom prst="rect">
-            <a:avLst/>
-          </a:prstGeom>
-          <a:noFill/>
-          <a:ln/>
-        </p:spPr>
-        <p:txBody>
-          <a:bodyPr wrap="square" lIns="0" tIns="0" rIns="0" bIns="0" rtlCol="0" anchor="ctr"/>
-          <a:lstStyle/>
-          <a:p>
-            <a:pPr indent="0" marL="0">
-              <a:buNone/>
-            </a:pPr>
-            <a:r>
-              <a:rPr lang="en-US" sz="1300" b="1" dirty="0">
-                <a:solidFill>
-                  <a:srgbClr val="1A1A1A"/>
-                </a:solidFill>
-                <a:latin typeface="Inter" pitchFamily="34" charset="0"/>
-                <a:ea typeface="Inter" pitchFamily="34" charset="-122"/>
-                <a:cs typeface="Inter" pitchFamily="34" charset="-120"/>
-              </a:rPr>
-              <a:t>Nissan</a:t>
-            </a:r>
-            <a:endParaRPr lang="en-US" sz="1300" dirty="0"/>
-          </a:p>
-        </p:txBody>
-      </p:sp>
-      <p:sp>
-        <p:nvSpPr>
-          <p:cNvPr id="100" name="Text 98"/>
-          <p:cNvSpPr txBox="1"/>
-          <p:nvPr/>
-        </p:nvSpPr>
-        <p:spPr>
-          <a:xfrm>
-            <a:off x="9887712" y="3127248"/>
-            <a:ext cx="1670304" cy="228600"/>
-          </a:xfrm>
-          <a:prstGeom prst="rect">
-            <a:avLst/>
-          </a:prstGeom>
-          <a:noFill/>
-          <a:ln/>
-        </p:spPr>
-        <p:txBody>
-          <a:bodyPr wrap="square" lIns="0" tIns="0" rIns="0" bIns="0" rtlCol="0" anchor="ctr"/>
-          <a:lstStyle/>
-          <a:p>
-            <a:pPr indent="0" marL="0">
-              <a:buNone/>
-            </a:pPr>
-            <a:r>
-              <a:rPr lang="en-US" sz="1600" b="1" dirty="0">
-                <a:solidFill>
-                  <a:srgbClr val="0B7A4A"/>
-                </a:solidFill>
-                <a:latin typeface="Inter" pitchFamily="34" charset="0"/>
-                <a:ea typeface="Inter" pitchFamily="34" charset="-122"/>
-                <a:cs typeface="Inter" pitchFamily="34" charset="-120"/>
-              </a:rPr>
-              <a:t>+4.5 pts</a:t>
-            </a:r>
-            <a:endParaRPr lang="en-US" sz="1600" dirty="0"/>
-          </a:p>
-        </p:txBody>
-      </p:sp>
-      <p:sp>
-        <p:nvSpPr>
-          <p:cNvPr id="101" name="Text 99"/>
-          <p:cNvSpPr txBox="1"/>
-          <p:nvPr/>
-        </p:nvSpPr>
-        <p:spPr>
-          <a:xfrm>
-            <a:off x="9887712" y="3438144"/>
-            <a:ext cx="1688592" cy="219456"/>
-          </a:xfrm>
-          <a:prstGeom prst="rect">
-            <a:avLst/>
-          </a:prstGeom>
-          <a:noFill/>
-          <a:ln/>
-        </p:spPr>
-        <p:txBody>
-          <a:bodyPr wrap="square" lIns="0" tIns="0" rIns="0" bIns="0" rtlCol="0" anchor="ctr"/>
-          <a:lstStyle/>
-          <a:p>
-            <a:pPr indent="0" marL="0">
-              <a:buNone/>
-            </a:pPr>
-            <a:r>
-              <a:rPr lang="en-US" sz="1300" b="1" dirty="0">
-                <a:solidFill>
-                  <a:srgbClr val="1A1A1A"/>
-                </a:solidFill>
-                <a:latin typeface="Inter" pitchFamily="34" charset="0"/>
-                <a:ea typeface="Inter" pitchFamily="34" charset="-122"/>
-                <a:cs typeface="Inter" pitchFamily="34" charset="-120"/>
-              </a:rPr>
-              <a:t>Subaru Prescott</a:t>
-            </a:r>
-            <a:endParaRPr lang="en-US" sz="1300" dirty="0"/>
-          </a:p>
-        </p:txBody>
-      </p:sp>
-      <p:sp>
-        <p:nvSpPr>
-          <p:cNvPr id="102" name="Text 100"/>
-          <p:cNvSpPr txBox="1"/>
-          <p:nvPr/>
-        </p:nvSpPr>
-        <p:spPr>
-          <a:xfrm>
-            <a:off x="9887712" y="3657600"/>
-            <a:ext cx="1670304" cy="228600"/>
-          </a:xfrm>
-          <a:prstGeom prst="rect">
-            <a:avLst/>
-          </a:prstGeom>
-          <a:noFill/>
-          <a:ln/>
-        </p:spPr>
-        <p:txBody>
-          <a:bodyPr wrap="square" lIns="0" tIns="0" rIns="0" bIns="0" rtlCol="0" anchor="ctr"/>
-          <a:lstStyle/>
-          <a:p>
-            <a:pPr indent="0" marL="0">
-              <a:buNone/>
-            </a:pPr>
-            <a:r>
-              <a:rPr lang="en-US" sz="1600" b="1" dirty="0">
-                <a:solidFill>
-                  <a:srgbClr val="0B7A4A"/>
-                </a:solidFill>
-                <a:latin typeface="Inter" pitchFamily="34" charset="0"/>
-                <a:ea typeface="Inter" pitchFamily="34" charset="-122"/>
-                <a:cs typeface="Inter" pitchFamily="34" charset="-120"/>
-              </a:rPr>
-              <a:t>+3.8 pts</a:t>
-            </a:r>
-            <a:endParaRPr lang="en-US" sz="1600" dirty="0"/>
-          </a:p>
-        </p:txBody>
-      </p:sp>
-      <p:sp>
-        <p:nvSpPr>
-          <p:cNvPr id="103" name="Text 101"/>
-          <p:cNvSpPr txBox="1"/>
-          <p:nvPr/>
-        </p:nvSpPr>
-        <p:spPr>
-          <a:xfrm>
-            <a:off x="9887712" y="4123944"/>
-            <a:ext cx="1688592" cy="219456"/>
-          </a:xfrm>
-          <a:prstGeom prst="rect">
-            <a:avLst/>
-          </a:prstGeom>
-          <a:noFill/>
-          <a:ln/>
-        </p:spPr>
-        <p:txBody>
-          <a:bodyPr wrap="square" lIns="0" tIns="0" rIns="0" bIns="0" rtlCol="0" anchor="ctr"/>
-          <a:lstStyle/>
-          <a:p>
-            <a:pPr indent="0" marL="0">
-              <a:buNone/>
-            </a:pPr>
-            <a:r>
-              <a:rPr lang="en-US" sz="1300" b="1" dirty="0">
-                <a:solidFill>
-                  <a:srgbClr val="1A1A1A"/>
-                </a:solidFill>
-                <a:latin typeface="Inter" pitchFamily="34" charset="0"/>
-                <a:ea typeface="Inter" pitchFamily="34" charset="-122"/>
-                <a:cs typeface="Inter" pitchFamily="34" charset="-120"/>
-              </a:rPr>
-              <a:t>Hyundai Prescott</a:t>
-            </a:r>
-            <a:endParaRPr lang="en-US" sz="1300" dirty="0"/>
-          </a:p>
-        </p:txBody>
-      </p:sp>
-      <p:sp>
-        <p:nvSpPr>
-          <p:cNvPr id="104" name="Text 102"/>
-          <p:cNvSpPr txBox="1"/>
-          <p:nvPr/>
-        </p:nvSpPr>
-        <p:spPr>
-          <a:xfrm>
-            <a:off x="9887712" y="4343400"/>
-            <a:ext cx="1670304" cy="228600"/>
-          </a:xfrm>
-          <a:prstGeom prst="rect">
-            <a:avLst/>
-          </a:prstGeom>
-          <a:noFill/>
-          <a:ln/>
-        </p:spPr>
-        <p:txBody>
-          <a:bodyPr wrap="square" lIns="0" tIns="0" rIns="0" bIns="0" rtlCol="0" anchor="ctr"/>
-          <a:lstStyle/>
-          <a:p>
-            <a:pPr indent="0" marL="0">
-              <a:buNone/>
-            </a:pPr>
-            <a:r>
-              <a:rPr lang="en-US" sz="1600" b="1" dirty="0">
-                <a:solidFill>
-                  <a:srgbClr val="A82B26"/>
-                </a:solidFill>
-                <a:latin typeface="Inter" pitchFamily="34" charset="0"/>
-                <a:ea typeface="Inter" pitchFamily="34" charset="-122"/>
-                <a:cs typeface="Inter" pitchFamily="34" charset="-120"/>
-              </a:rPr>
-              <a:t>−0.5 pts</a:t>
-            </a:r>
-            <a:endParaRPr lang="en-US" sz="1600" dirty="0"/>
-          </a:p>
-        </p:txBody>
-      </p:sp>
-      <p:sp>
-        <p:nvSpPr>
-          <p:cNvPr id="105" name="Text 103"/>
-          <p:cNvSpPr txBox="1"/>
-          <p:nvPr/>
-        </p:nvSpPr>
-        <p:spPr>
-          <a:xfrm>
-            <a:off x="9887712" y="4654296"/>
-            <a:ext cx="1688592" cy="219456"/>
-          </a:xfrm>
-          <a:prstGeom prst="rect">
-            <a:avLst/>
-          </a:prstGeom>
-          <a:noFill/>
-          <a:ln/>
-        </p:spPr>
-        <p:txBody>
-          <a:bodyPr wrap="square" lIns="0" tIns="0" rIns="0" bIns="0" rtlCol="0" anchor="ctr"/>
-          <a:lstStyle/>
-          <a:p>
-            <a:pPr indent="0" marL="0">
-              <a:buNone/>
-            </a:pPr>
-            <a:r>
-              <a:rPr lang="en-US" sz="1300" b="1" dirty="0">
-                <a:solidFill>
-                  <a:srgbClr val="1A1A1A"/>
-                </a:solidFill>
-                <a:latin typeface="Inter" pitchFamily="34" charset="0"/>
-                <a:ea typeface="Inter" pitchFamily="34" charset="-122"/>
-                <a:cs typeface="Inter" pitchFamily="34" charset="-120"/>
-              </a:rPr>
-              <a:t>Toyota Spokane</a:t>
-            </a:r>
-            <a:endParaRPr lang="en-US" sz="1300" dirty="0"/>
-          </a:p>
-        </p:txBody>
-      </p:sp>
-      <p:sp>
-        <p:nvSpPr>
-          <p:cNvPr id="106" name="Text 104"/>
-          <p:cNvSpPr txBox="1"/>
-          <p:nvPr/>
-        </p:nvSpPr>
-        <p:spPr>
-          <a:xfrm>
-            <a:off x="9887712" y="4873752"/>
-            <a:ext cx="1670304" cy="228600"/>
-          </a:xfrm>
-          <a:prstGeom prst="rect">
-            <a:avLst/>
-          </a:prstGeom>
-          <a:noFill/>
-          <a:ln/>
-        </p:spPr>
-        <p:txBody>
-          <a:bodyPr wrap="square" lIns="0" tIns="0" rIns="0" bIns="0" rtlCol="0" anchor="ctr"/>
-          <a:lstStyle/>
-          <a:p>
-            <a:pPr indent="0" marL="0">
-              <a:buNone/>
-            </a:pPr>
-            <a:r>
-              <a:rPr lang="en-US" sz="1600" b="1" dirty="0">
-                <a:solidFill>
-                  <a:srgbClr val="A82B26"/>
-                </a:solidFill>
-                <a:latin typeface="Inter" pitchFamily="34" charset="0"/>
-                <a:ea typeface="Inter" pitchFamily="34" charset="-122"/>
-                <a:cs typeface="Inter" pitchFamily="34" charset="-120"/>
-              </a:rPr>
-              <a:t>−0.8 pts</a:t>
-            </a:r>
-            <a:endParaRPr lang="en-US" sz="1600" dirty="0"/>
-          </a:p>
-        </p:txBody>
-      </p:sp>
-      <p:sp>
-        <p:nvSpPr>
-          <p:cNvPr id="107" name="Text 105"/>
-          <p:cNvSpPr txBox="1"/>
-          <p:nvPr/>
-        </p:nvSpPr>
-        <p:spPr>
-          <a:xfrm>
-            <a:off x="9887712" y="5184648"/>
-            <a:ext cx="1688592" cy="219456"/>
-          </a:xfrm>
-          <a:prstGeom prst="rect">
-            <a:avLst/>
-          </a:prstGeom>
-          <a:noFill/>
-          <a:ln/>
-        </p:spPr>
-        <p:txBody>
-          <a:bodyPr wrap="square" lIns="0" tIns="0" rIns="0" bIns="0" rtlCol="0" anchor="ctr"/>
-          <a:lstStyle/>
-          <a:p>
-            <a:pPr indent="0" marL="0">
-              <a:buNone/>
-            </a:pPr>
-            <a:r>
-              <a:rPr lang="en-US" sz="1300" b="1" dirty="0">
-                <a:solidFill>
-                  <a:srgbClr val="1A1A1A"/>
-                </a:solidFill>
-                <a:latin typeface="Inter" pitchFamily="34" charset="0"/>
-                <a:ea typeface="Inter" pitchFamily="34" charset="-122"/>
-                <a:cs typeface="Inter" pitchFamily="34" charset="-120"/>
-              </a:rPr>
-              <a:t>Audi Henderson</a:t>
-            </a:r>
-            <a:endParaRPr lang="en-US" sz="1300" dirty="0"/>
-          </a:p>
-        </p:txBody>
-      </p:sp>
-      <p:sp>
-        <p:nvSpPr>
-          <p:cNvPr id="108" name="Text 106"/>
-          <p:cNvSpPr txBox="1"/>
-          <p:nvPr/>
-        </p:nvSpPr>
-        <p:spPr>
-          <a:xfrm>
-            <a:off x="9887712" y="5404104"/>
-            <a:ext cx="1670304" cy="228600"/>
-          </a:xfrm>
-          <a:prstGeom prst="rect">
-            <a:avLst/>
-          </a:prstGeom>
-          <a:noFill/>
-          <a:ln/>
-        </p:spPr>
-        <p:txBody>
-          <a:bodyPr wrap="square" lIns="0" tIns="0" rIns="0" bIns="0" rtlCol="0" anchor="ctr"/>
-          <a:lstStyle/>
-          <a:p>
-            <a:pPr indent="0" marL="0">
-              <a:buNone/>
-            </a:pPr>
-            <a:r>
-              <a:rPr lang="en-US" sz="1600" b="1" dirty="0">
-                <a:solidFill>
-                  <a:srgbClr val="A82B26"/>
-                </a:solidFill>
-                <a:latin typeface="Inter" pitchFamily="34" charset="0"/>
-                <a:ea typeface="Inter" pitchFamily="34" charset="-122"/>
-                <a:cs typeface="Inter" pitchFamily="34" charset="-120"/>
-              </a:rPr>
-              <a:t>−2.1 pts</a:t>
-            </a:r>
-            <a:endParaRPr lang="en-US" sz="1600" dirty="0"/>
-          </a:p>
-        </p:txBody>
-      </p:sp>
-      <p:sp>
-        <p:nvSpPr>
-          <p:cNvPr id="110" name="Shape 107"/>
-          <p:cNvSpPr/>
-          <p:nvPr/>
-        </p:nvSpPr>
-        <p:spPr>
-          <a:xfrm>
             <a:off x="457200" y="6126480"/>
-            <a:ext cx="11274552" cy="371856"/>
+            <a:ext cx="11274552" cy="615696"/>
           </a:xfrm>
           <a:prstGeom prst="rect">
             <a:avLst/>
@@ -23098,14 +22528,14 @@
       </p:sp>
       <p:sp>
         <p:nvSpPr>
-          <p:cNvPr id="111" name="Text 108"/>
+          <p:cNvPr id="96" name="Text 93"/>
           <p:cNvSpPr txBox="1"/>
           <p:nvPr/>
         </p:nvSpPr>
         <p:spPr>
           <a:xfrm>
             <a:off x="658368" y="6144768"/>
-            <a:ext cx="10927080" cy="335280"/>
+            <a:ext cx="10927080" cy="579120"/>
           </a:xfrm>
           <a:prstGeom prst="rect">
             <a:avLst/>
@@ -23129,7 +22559,7 @@
                 <a:ea typeface="Inter" pitchFamily="34" charset="-122"/>
                 <a:cs typeface="Inter" pitchFamily="34" charset="-120"/>
               </a:rPr>
-              <a:t>Most top-three finishes: Lincoln (3 of 6). Most bottom-three: Audi Reno and VW St George (3 of 6).</a:t>
+              <a:t>Most top-three finishes: Lincoln, Subaru Prescott and Subaru St George (2 of 5). Most bottom-three: VW St George (3 of 5).</a:t>
             </a:r>
             <a:endParaRPr lang="en-US" sz="1600" dirty="0"/>
           </a:p>
@@ -25536,7 +24966,7 @@
         <p:spPr>
           <a:xfrm>
             <a:off x="969264" y="1691640"/>
-            <a:ext cx="1670304" cy="45720"/>
+            <a:ext cx="2026310" cy="45720"/>
           </a:xfrm>
           <a:prstGeom prst="rect">
             <a:avLst/>
@@ -25556,7 +24986,7 @@
         <p:spPr>
           <a:xfrm>
             <a:off x="987552" y="1773936"/>
-            <a:ext cx="1633728" cy="237744"/>
+            <a:ext cx="1989734" cy="237744"/>
           </a:xfrm>
           <a:prstGeom prst="rect">
             <a:avLst/>
@@ -25597,7 +25027,7 @@
         <p:spPr>
           <a:xfrm>
             <a:off x="987552" y="1993392"/>
-            <a:ext cx="1633728" cy="201168"/>
+            <a:ext cx="1989734" cy="201168"/>
           </a:xfrm>
           <a:prstGeom prst="rect">
             <a:avLst/>
@@ -25636,7 +25066,7 @@
         <p:spPr>
           <a:xfrm>
             <a:off x="987552" y="2377440"/>
-            <a:ext cx="1688592" cy="219456"/>
+            <a:ext cx="2044598" cy="219456"/>
           </a:xfrm>
           <a:prstGeom prst="rect">
             <a:avLst/>
@@ -25675,7 +25105,7 @@
         <p:spPr>
           <a:xfrm>
             <a:off x="987552" y="2596896"/>
-            <a:ext cx="1670304" cy="228600"/>
+            <a:ext cx="2026310" cy="228600"/>
           </a:xfrm>
           <a:prstGeom prst="rect">
             <a:avLst/>
@@ -25714,7 +25144,7 @@
         <p:spPr>
           <a:xfrm>
             <a:off x="987552" y="2907792"/>
-            <a:ext cx="1688592" cy="219456"/>
+            <a:ext cx="2044598" cy="219456"/>
           </a:xfrm>
           <a:prstGeom prst="rect">
             <a:avLst/>
@@ -25753,7 +25183,7 @@
         <p:spPr>
           <a:xfrm>
             <a:off x="987552" y="3127248"/>
-            <a:ext cx="1670304" cy="228600"/>
+            <a:ext cx="2026310" cy="228600"/>
           </a:xfrm>
           <a:prstGeom prst="rect">
             <a:avLst/>
@@ -25792,7 +25222,7 @@
         <p:spPr>
           <a:xfrm>
             <a:off x="987552" y="3438144"/>
-            <a:ext cx="1688592" cy="219456"/>
+            <a:ext cx="2044598" cy="219456"/>
           </a:xfrm>
           <a:prstGeom prst="rect">
             <a:avLst/>
@@ -25831,7 +25261,7 @@
         <p:spPr>
           <a:xfrm>
             <a:off x="987552" y="3657600"/>
-            <a:ext cx="1670304" cy="228600"/>
+            <a:ext cx="2026310" cy="228600"/>
           </a:xfrm>
           <a:prstGeom prst="rect">
             <a:avLst/>
@@ -25870,7 +25300,7 @@
         <p:spPr>
           <a:xfrm>
             <a:off x="987552" y="4123944"/>
-            <a:ext cx="1688592" cy="219456"/>
+            <a:ext cx="2044598" cy="219456"/>
           </a:xfrm>
           <a:prstGeom prst="rect">
             <a:avLst/>
@@ -25909,7 +25339,7 @@
         <p:spPr>
           <a:xfrm>
             <a:off x="987552" y="4343400"/>
-            <a:ext cx="1670304" cy="228600"/>
+            <a:ext cx="2026310" cy="228600"/>
           </a:xfrm>
           <a:prstGeom prst="rect">
             <a:avLst/>
@@ -25948,7 +25378,7 @@
         <p:spPr>
           <a:xfrm>
             <a:off x="987552" y="4654296"/>
-            <a:ext cx="1688592" cy="219456"/>
+            <a:ext cx="2044598" cy="219456"/>
           </a:xfrm>
           <a:prstGeom prst="rect">
             <a:avLst/>
@@ -25987,7 +25417,7 @@
         <p:spPr>
           <a:xfrm>
             <a:off x="987552" y="4873752"/>
-            <a:ext cx="1670304" cy="228600"/>
+            <a:ext cx="2026310" cy="228600"/>
           </a:xfrm>
           <a:prstGeom prst="rect">
             <a:avLst/>
@@ -26026,7 +25456,7 @@
         <p:spPr>
           <a:xfrm>
             <a:off x="987552" y="5184648"/>
-            <a:ext cx="1688592" cy="219456"/>
+            <a:ext cx="2044598" cy="219456"/>
           </a:xfrm>
           <a:prstGeom prst="rect">
             <a:avLst/>
@@ -26065,7 +25495,7 @@
         <p:spPr>
           <a:xfrm>
             <a:off x="987552" y="5404104"/>
-            <a:ext cx="1670304" cy="228600"/>
+            <a:ext cx="2026310" cy="228600"/>
           </a:xfrm>
           <a:prstGeom prst="rect">
             <a:avLst/>
@@ -26103,8 +25533,8 @@
         </p:nvSpPr>
         <p:spPr>
           <a:xfrm>
-            <a:off x="2749296" y="1691640"/>
-            <a:ext cx="1670304" cy="45720"/>
+            <a:off x="3105302" y="1691640"/>
+            <a:ext cx="2026310" cy="45720"/>
           </a:xfrm>
           <a:prstGeom prst="rect">
             <a:avLst/>
@@ -26123,8 +25553,8 @@
         </p:nvSpPr>
         <p:spPr>
           <a:xfrm>
-            <a:off x="2767584" y="1773936"/>
-            <a:ext cx="1633728" cy="237744"/>
+            <a:off x="3123590" y="1773936"/>
+            <a:ext cx="1989734" cy="237744"/>
           </a:xfrm>
           <a:prstGeom prst="rect">
             <a:avLst/>
@@ -26164,8 +25594,8 @@
         </p:nvSpPr>
         <p:spPr>
           <a:xfrm>
-            <a:off x="2767584" y="1993392"/>
-            <a:ext cx="1633728" cy="201168"/>
+            <a:off x="3123590" y="1993392"/>
+            <a:ext cx="1989734" cy="201168"/>
           </a:xfrm>
           <a:prstGeom prst="rect">
             <a:avLst/>
@@ -26203,8 +25633,8 @@
         </p:nvSpPr>
         <p:spPr>
           <a:xfrm>
-            <a:off x="2767584" y="2377440"/>
-            <a:ext cx="1688592" cy="219456"/>
+            <a:off x="3123590" y="2377440"/>
+            <a:ext cx="2044598" cy="219456"/>
           </a:xfrm>
           <a:prstGeom prst="rect">
             <a:avLst/>
@@ -26242,8 +25672,8 @@
         </p:nvSpPr>
         <p:spPr>
           <a:xfrm>
-            <a:off x="2767584" y="2596896"/>
-            <a:ext cx="1670304" cy="228600"/>
+            <a:off x="3123590" y="2596896"/>
+            <a:ext cx="2026310" cy="228600"/>
           </a:xfrm>
           <a:prstGeom prst="rect">
             <a:avLst/>
@@ -26281,8 +25711,8 @@
         </p:nvSpPr>
         <p:spPr>
           <a:xfrm>
-            <a:off x="2767584" y="2907792"/>
-            <a:ext cx="1688592" cy="219456"/>
+            <a:off x="3123590" y="2907792"/>
+            <a:ext cx="2044598" cy="219456"/>
           </a:xfrm>
           <a:prstGeom prst="rect">
             <a:avLst/>
@@ -26320,8 +25750,8 @@
         </p:nvSpPr>
         <p:spPr>
           <a:xfrm>
-            <a:off x="2767584" y="3127248"/>
-            <a:ext cx="1670304" cy="228600"/>
+            <a:off x="3123590" y="3127248"/>
+            <a:ext cx="2026310" cy="228600"/>
           </a:xfrm>
           <a:prstGeom prst="rect">
             <a:avLst/>
@@ -26359,8 +25789,8 @@
         </p:nvSpPr>
         <p:spPr>
           <a:xfrm>
-            <a:off x="2767584" y="3438144"/>
-            <a:ext cx="1688592" cy="219456"/>
+            <a:off x="3123590" y="3438144"/>
+            <a:ext cx="2044598" cy="219456"/>
           </a:xfrm>
           <a:prstGeom prst="rect">
             <a:avLst/>
@@ -26398,8 +25828,8 @@
         </p:nvSpPr>
         <p:spPr>
           <a:xfrm>
-            <a:off x="2767584" y="3657600"/>
-            <a:ext cx="1670304" cy="228600"/>
+            <a:off x="3123590" y="3657600"/>
+            <a:ext cx="2026310" cy="228600"/>
           </a:xfrm>
           <a:prstGeom prst="rect">
             <a:avLst/>
@@ -26437,8 +25867,8 @@
         </p:nvSpPr>
         <p:spPr>
           <a:xfrm>
-            <a:off x="2767584" y="4123944"/>
-            <a:ext cx="1688592" cy="219456"/>
+            <a:off x="3123590" y="4123944"/>
+            <a:ext cx="2044598" cy="219456"/>
           </a:xfrm>
           <a:prstGeom prst="rect">
             <a:avLst/>
@@ -26476,8 +25906,8 @@
         </p:nvSpPr>
         <p:spPr>
           <a:xfrm>
-            <a:off x="2767584" y="4343400"/>
-            <a:ext cx="1670304" cy="228600"/>
+            <a:off x="3123590" y="4343400"/>
+            <a:ext cx="2026310" cy="228600"/>
           </a:xfrm>
           <a:prstGeom prst="rect">
             <a:avLst/>
@@ -26515,8 +25945,8 @@
         </p:nvSpPr>
         <p:spPr>
           <a:xfrm>
-            <a:off x="2767584" y="4654296"/>
-            <a:ext cx="1688592" cy="219456"/>
+            <a:off x="3123590" y="4654296"/>
+            <a:ext cx="2044598" cy="219456"/>
           </a:xfrm>
           <a:prstGeom prst="rect">
             <a:avLst/>
@@ -26554,8 +25984,8 @@
         </p:nvSpPr>
         <p:spPr>
           <a:xfrm>
-            <a:off x="2767584" y="4873752"/>
-            <a:ext cx="1670304" cy="228600"/>
+            <a:off x="3123590" y="4873752"/>
+            <a:ext cx="2026310" cy="228600"/>
           </a:xfrm>
           <a:prstGeom prst="rect">
             <a:avLst/>
@@ -26593,8 +26023,8 @@
         </p:nvSpPr>
         <p:spPr>
           <a:xfrm>
-            <a:off x="2767584" y="5184648"/>
-            <a:ext cx="1688592" cy="219456"/>
+            <a:off x="3123590" y="5184648"/>
+            <a:ext cx="2044598" cy="219456"/>
           </a:xfrm>
           <a:prstGeom prst="rect">
             <a:avLst/>
@@ -26632,8 +26062,8 @@
         </p:nvSpPr>
         <p:spPr>
           <a:xfrm>
-            <a:off x="2767584" y="5404104"/>
-            <a:ext cx="1670304" cy="228600"/>
+            <a:off x="3123590" y="5404104"/>
+            <a:ext cx="2026310" cy="228600"/>
           </a:xfrm>
           <a:prstGeom prst="rect">
             <a:avLst/>
@@ -26671,8 +26101,8 @@
         </p:nvSpPr>
         <p:spPr>
           <a:xfrm>
-            <a:off x="4529328" y="1691640"/>
-            <a:ext cx="1670304" cy="45720"/>
+            <a:off x="5241341" y="1691640"/>
+            <a:ext cx="2026310" cy="45720"/>
           </a:xfrm>
           <a:prstGeom prst="rect">
             <a:avLst/>
@@ -26691,8 +26121,8 @@
         </p:nvSpPr>
         <p:spPr>
           <a:xfrm>
-            <a:off x="4547616" y="1773936"/>
-            <a:ext cx="1633728" cy="237744"/>
+            <a:off x="5259629" y="1773936"/>
+            <a:ext cx="1989734" cy="237744"/>
           </a:xfrm>
           <a:prstGeom prst="rect">
             <a:avLst/>
@@ -26732,8 +26162,8 @@
         </p:nvSpPr>
         <p:spPr>
           <a:xfrm>
-            <a:off x="4547616" y="1993392"/>
-            <a:ext cx="1633728" cy="201168"/>
+            <a:off x="5259629" y="1993392"/>
+            <a:ext cx="1989734" cy="201168"/>
           </a:xfrm>
           <a:prstGeom prst="rect">
             <a:avLst/>
@@ -26771,8 +26201,8 @@
         </p:nvSpPr>
         <p:spPr>
           <a:xfrm>
-            <a:off x="4547616" y="2377440"/>
-            <a:ext cx="1688592" cy="219456"/>
+            <a:off x="5259629" y="2377440"/>
+            <a:ext cx="2044598" cy="219456"/>
           </a:xfrm>
           <a:prstGeom prst="rect">
             <a:avLst/>
@@ -26810,8 +26240,8 @@
         </p:nvSpPr>
         <p:spPr>
           <a:xfrm>
-            <a:off x="4547616" y="2596896"/>
-            <a:ext cx="1670304" cy="228600"/>
+            <a:off x="5259629" y="2596896"/>
+            <a:ext cx="2026310" cy="228600"/>
           </a:xfrm>
           <a:prstGeom prst="rect">
             <a:avLst/>
@@ -26849,8 +26279,8 @@
         </p:nvSpPr>
         <p:spPr>
           <a:xfrm>
-            <a:off x="4547616" y="2907792"/>
-            <a:ext cx="1688592" cy="219456"/>
+            <a:off x="5259629" y="2907792"/>
+            <a:ext cx="2044598" cy="219456"/>
           </a:xfrm>
           <a:prstGeom prst="rect">
             <a:avLst/>
@@ -26888,8 +26318,8 @@
         </p:nvSpPr>
         <p:spPr>
           <a:xfrm>
-            <a:off x="4547616" y="3127248"/>
-            <a:ext cx="1670304" cy="228600"/>
+            <a:off x="5259629" y="3127248"/>
+            <a:ext cx="2026310" cy="228600"/>
           </a:xfrm>
           <a:prstGeom prst="rect">
             <a:avLst/>
@@ -26927,8 +26357,8 @@
         </p:nvSpPr>
         <p:spPr>
           <a:xfrm>
-            <a:off x="4547616" y="3438144"/>
-            <a:ext cx="1688592" cy="219456"/>
+            <a:off x="5259629" y="3438144"/>
+            <a:ext cx="2044598" cy="219456"/>
           </a:xfrm>
           <a:prstGeom prst="rect">
             <a:avLst/>
@@ -26966,8 +26396,8 @@
         </p:nvSpPr>
         <p:spPr>
           <a:xfrm>
-            <a:off x="4547616" y="3657600"/>
-            <a:ext cx="1670304" cy="228600"/>
+            <a:off x="5259629" y="3657600"/>
+            <a:ext cx="2026310" cy="228600"/>
           </a:xfrm>
           <a:prstGeom prst="rect">
             <a:avLst/>
@@ -27005,8 +26435,8 @@
         </p:nvSpPr>
         <p:spPr>
           <a:xfrm>
-            <a:off x="4547616" y="4123944"/>
-            <a:ext cx="1688592" cy="219456"/>
+            <a:off x="5259629" y="4123944"/>
+            <a:ext cx="2044598" cy="219456"/>
           </a:xfrm>
           <a:prstGeom prst="rect">
             <a:avLst/>
@@ -27044,8 +26474,8 @@
         </p:nvSpPr>
         <p:spPr>
           <a:xfrm>
-            <a:off x="4547616" y="4343400"/>
-            <a:ext cx="1670304" cy="228600"/>
+            <a:off x="5259629" y="4343400"/>
+            <a:ext cx="2026310" cy="228600"/>
           </a:xfrm>
           <a:prstGeom prst="rect">
             <a:avLst/>
@@ -27083,8 +26513,8 @@
         </p:nvSpPr>
         <p:spPr>
           <a:xfrm>
-            <a:off x="4547616" y="4654296"/>
-            <a:ext cx="1688592" cy="219456"/>
+            <a:off x="5259629" y="4654296"/>
+            <a:ext cx="2044598" cy="219456"/>
           </a:xfrm>
           <a:prstGeom prst="rect">
             <a:avLst/>
@@ -27122,8 +26552,8 @@
         </p:nvSpPr>
         <p:spPr>
           <a:xfrm>
-            <a:off x="4547616" y="4873752"/>
-            <a:ext cx="1670304" cy="228600"/>
+            <a:off x="5259629" y="4873752"/>
+            <a:ext cx="2026310" cy="228600"/>
           </a:xfrm>
           <a:prstGeom prst="rect">
             <a:avLst/>
@@ -27161,8 +26591,8 @@
         </p:nvSpPr>
         <p:spPr>
           <a:xfrm>
-            <a:off x="4547616" y="5184648"/>
-            <a:ext cx="1688592" cy="219456"/>
+            <a:off x="5259629" y="5184648"/>
+            <a:ext cx="2044598" cy="219456"/>
           </a:xfrm>
           <a:prstGeom prst="rect">
             <a:avLst/>
@@ -27200,8 +26630,8 @@
         </p:nvSpPr>
         <p:spPr>
           <a:xfrm>
-            <a:off x="4547616" y="5404104"/>
-            <a:ext cx="1670304" cy="228600"/>
+            <a:off x="5259629" y="5404104"/>
+            <a:ext cx="2026310" cy="228600"/>
           </a:xfrm>
           <a:prstGeom prst="rect">
             <a:avLst/>
@@ -27239,8 +26669,8 @@
         </p:nvSpPr>
         <p:spPr>
           <a:xfrm>
-            <a:off x="6309360" y="1691640"/>
-            <a:ext cx="1670304" cy="45720"/>
+            <a:off x="7377379" y="1691640"/>
+            <a:ext cx="2026310" cy="45720"/>
           </a:xfrm>
           <a:prstGeom prst="rect">
             <a:avLst/>
@@ -27259,8 +26689,8 @@
         </p:nvSpPr>
         <p:spPr>
           <a:xfrm>
-            <a:off x="6327648" y="1773936"/>
-            <a:ext cx="1633728" cy="237744"/>
+            <a:off x="7395667" y="1773936"/>
+            <a:ext cx="1989734" cy="237744"/>
           </a:xfrm>
           <a:prstGeom prst="rect">
             <a:avLst/>
@@ -27300,8 +26730,8 @@
         </p:nvSpPr>
         <p:spPr>
           <a:xfrm>
-            <a:off x="6327648" y="1993392"/>
-            <a:ext cx="1633728" cy="201168"/>
+            <a:off x="7395667" y="1993392"/>
+            <a:ext cx="1989734" cy="201168"/>
           </a:xfrm>
           <a:prstGeom prst="rect">
             <a:avLst/>
@@ -27339,8 +26769,8 @@
         </p:nvSpPr>
         <p:spPr>
           <a:xfrm>
-            <a:off x="6327648" y="2377440"/>
-            <a:ext cx="1688592" cy="219456"/>
+            <a:off x="7395667" y="2377440"/>
+            <a:ext cx="2044598" cy="219456"/>
           </a:xfrm>
           <a:prstGeom prst="rect">
             <a:avLst/>
@@ -27378,8 +26808,8 @@
         </p:nvSpPr>
         <p:spPr>
           <a:xfrm>
-            <a:off x="6327648" y="2596896"/>
-            <a:ext cx="1670304" cy="228600"/>
+            <a:off x="7395667" y="2596896"/>
+            <a:ext cx="2026310" cy="228600"/>
           </a:xfrm>
           <a:prstGeom prst="rect">
             <a:avLst/>
@@ -27417,8 +26847,8 @@
         </p:nvSpPr>
         <p:spPr>
           <a:xfrm>
-            <a:off x="6327648" y="2907792"/>
-            <a:ext cx="1688592" cy="219456"/>
+            <a:off x="7395667" y="2907792"/>
+            <a:ext cx="2044598" cy="219456"/>
           </a:xfrm>
           <a:prstGeom prst="rect">
             <a:avLst/>
@@ -27456,8 +26886,8 @@
         </p:nvSpPr>
         <p:spPr>
           <a:xfrm>
-            <a:off x="6327648" y="3127248"/>
-            <a:ext cx="1670304" cy="228600"/>
+            <a:off x="7395667" y="3127248"/>
+            <a:ext cx="2026310" cy="228600"/>
           </a:xfrm>
           <a:prstGeom prst="rect">
             <a:avLst/>
@@ -27495,8 +26925,8 @@
         </p:nvSpPr>
         <p:spPr>
           <a:xfrm>
-            <a:off x="6327648" y="3438144"/>
-            <a:ext cx="1688592" cy="219456"/>
+            <a:off x="7395667" y="3438144"/>
+            <a:ext cx="2044598" cy="219456"/>
           </a:xfrm>
           <a:prstGeom prst="rect">
             <a:avLst/>
@@ -27534,8 +26964,8 @@
         </p:nvSpPr>
         <p:spPr>
           <a:xfrm>
-            <a:off x="6327648" y="3657600"/>
-            <a:ext cx="1670304" cy="228600"/>
+            <a:off x="7395667" y="3657600"/>
+            <a:ext cx="2026310" cy="228600"/>
           </a:xfrm>
           <a:prstGeom prst="rect">
             <a:avLst/>
@@ -27573,8 +27003,8 @@
         </p:nvSpPr>
         <p:spPr>
           <a:xfrm>
-            <a:off x="6327648" y="4123944"/>
-            <a:ext cx="1688592" cy="219456"/>
+            <a:off x="7395667" y="4123944"/>
+            <a:ext cx="2044598" cy="219456"/>
           </a:xfrm>
           <a:prstGeom prst="rect">
             <a:avLst/>
@@ -27612,8 +27042,8 @@
         </p:nvSpPr>
         <p:spPr>
           <a:xfrm>
-            <a:off x="6327648" y="4343400"/>
-            <a:ext cx="1670304" cy="228600"/>
+            <a:off x="7395667" y="4343400"/>
+            <a:ext cx="2026310" cy="228600"/>
           </a:xfrm>
           <a:prstGeom prst="rect">
             <a:avLst/>
@@ -27651,8 +27081,8 @@
         </p:nvSpPr>
         <p:spPr>
           <a:xfrm>
-            <a:off x="6327648" y="4654296"/>
-            <a:ext cx="1688592" cy="219456"/>
+            <a:off x="7395667" y="4654296"/>
+            <a:ext cx="2044598" cy="219456"/>
           </a:xfrm>
           <a:prstGeom prst="rect">
             <a:avLst/>
@@ -27690,8 +27120,8 @@
         </p:nvSpPr>
         <p:spPr>
           <a:xfrm>
-            <a:off x="6327648" y="4873752"/>
-            <a:ext cx="1670304" cy="228600"/>
+            <a:off x="7395667" y="4873752"/>
+            <a:ext cx="2026310" cy="228600"/>
           </a:xfrm>
           <a:prstGeom prst="rect">
             <a:avLst/>
@@ -27729,8 +27159,8 @@
         </p:nvSpPr>
         <p:spPr>
           <a:xfrm>
-            <a:off x="6327648" y="5184648"/>
-            <a:ext cx="1688592" cy="219456"/>
+            <a:off x="7395667" y="5184648"/>
+            <a:ext cx="2044598" cy="219456"/>
           </a:xfrm>
           <a:prstGeom prst="rect">
             <a:avLst/>
@@ -27768,8 +27198,8 @@
         </p:nvSpPr>
         <p:spPr>
           <a:xfrm>
-            <a:off x="6327648" y="5404104"/>
-            <a:ext cx="1670304" cy="228600"/>
+            <a:off x="7395667" y="5404104"/>
+            <a:ext cx="2026310" cy="228600"/>
           </a:xfrm>
           <a:prstGeom prst="rect">
             <a:avLst/>
@@ -27807,8 +27237,8 @@
         </p:nvSpPr>
         <p:spPr>
           <a:xfrm>
-            <a:off x="8089392" y="1691640"/>
-            <a:ext cx="1670304" cy="45720"/>
+            <a:off x="9513418" y="1691640"/>
+            <a:ext cx="2026310" cy="45720"/>
           </a:xfrm>
           <a:prstGeom prst="rect">
             <a:avLst/>
@@ -27827,8 +27257,8 @@
         </p:nvSpPr>
         <p:spPr>
           <a:xfrm>
-            <a:off x="8107680" y="1773936"/>
-            <a:ext cx="1633728" cy="237744"/>
+            <a:off x="9531706" y="1773936"/>
+            <a:ext cx="1989734" cy="237744"/>
           </a:xfrm>
           <a:prstGeom prst="rect">
             <a:avLst/>
@@ -27854,7 +27284,7 @@
                 <a:ea typeface="Inter" pitchFamily="34" charset="-122"/>
                 <a:cs typeface="Inter" pitchFamily="34" charset="-120"/>
               </a:rPr>
-              <a:t>CP PARTS $ PER RO</a:t>
+              <a:t>CP PARTS GP %</a:t>
             </a:r>
             <a:endParaRPr lang="en-US" sz="1300" dirty="0"/>
           </a:p>
@@ -27868,8 +27298,8 @@
         </p:nvSpPr>
         <p:spPr>
           <a:xfrm>
-            <a:off x="8107680" y="1993392"/>
-            <a:ext cx="1633728" cy="201168"/>
+            <a:off x="9531706" y="1993392"/>
+            <a:ext cx="1989734" cy="201168"/>
           </a:xfrm>
           <a:prstGeom prst="rect">
             <a:avLst/>
@@ -27893,7 +27323,7 @@
                 <a:ea typeface="Inter" pitchFamily="34" charset="-122"/>
                 <a:cs typeface="Inter" pitchFamily="34" charset="-120"/>
               </a:rPr>
-              <a:t>Group +5.1%</a:t>
+              <a:t>Group 0.0 pts</a:t>
             </a:r>
             <a:endParaRPr lang="en-US" sz="1300" dirty="0"/>
           </a:p>
@@ -27907,8 +27337,8 @@
         </p:nvSpPr>
         <p:spPr>
           <a:xfrm>
-            <a:off x="8107680" y="2377440"/>
-            <a:ext cx="1688592" cy="219456"/>
+            <a:off x="9531706" y="2377440"/>
+            <a:ext cx="2044598" cy="219456"/>
           </a:xfrm>
           <a:prstGeom prst="rect">
             <a:avLst/>
@@ -27932,6 +27362,84 @@
                 <a:ea typeface="Inter" pitchFamily="34" charset="-122"/>
                 <a:cs typeface="Inter" pitchFamily="34" charset="-120"/>
               </a:rPr>
+              <a:t>Acura</a:t>
+            </a:r>
+            <a:endParaRPr lang="en-US" sz="1300" dirty="0"/>
+          </a:p>
+        </p:txBody>
+      </p:sp>
+      <p:sp>
+        <p:nvSpPr>
+          <p:cNvPr id="83" name="Text 81"/>
+          <p:cNvSpPr txBox="1"/>
+          <p:nvPr/>
+        </p:nvSpPr>
+        <p:spPr>
+          <a:xfrm>
+            <a:off x="9531706" y="2596896"/>
+            <a:ext cx="2026310" cy="228600"/>
+          </a:xfrm>
+          <a:prstGeom prst="rect">
+            <a:avLst/>
+          </a:prstGeom>
+          <a:noFill/>
+          <a:ln/>
+        </p:spPr>
+        <p:txBody>
+          <a:bodyPr wrap="square" lIns="0" tIns="0" rIns="0" bIns="0" rtlCol="0" anchor="ctr"/>
+          <a:lstStyle/>
+          <a:p>
+            <a:pPr indent="0" marL="0">
+              <a:buNone/>
+            </a:pPr>
+            <a:r>
+              <a:rPr lang="en-US" sz="1600" b="1" dirty="0">
+                <a:solidFill>
+                  <a:srgbClr val="0B7A4A"/>
+                </a:solidFill>
+                <a:latin typeface="Inter" pitchFamily="34" charset="0"/>
+                <a:ea typeface="Inter" pitchFamily="34" charset="-122"/>
+                <a:cs typeface="Inter" pitchFamily="34" charset="-120"/>
+              </a:rPr>
+              <a:t>+7.2 pts</a:t>
+            </a:r>
+            <a:endParaRPr lang="en-US" sz="1600" dirty="0"/>
+          </a:p>
+        </p:txBody>
+      </p:sp>
+      <p:sp>
+        <p:nvSpPr>
+          <p:cNvPr id="84" name="Text 82"/>
+          <p:cNvSpPr txBox="1"/>
+          <p:nvPr/>
+        </p:nvSpPr>
+        <p:spPr>
+          <a:xfrm>
+            <a:off x="9531706" y="2907792"/>
+            <a:ext cx="2044598" cy="219456"/>
+          </a:xfrm>
+          <a:prstGeom prst="rect">
+            <a:avLst/>
+          </a:prstGeom>
+          <a:noFill/>
+          <a:ln/>
+        </p:spPr>
+        <p:txBody>
+          <a:bodyPr wrap="square" lIns="0" tIns="0" rIns="0" bIns="0" rtlCol="0" anchor="ctr"/>
+          <a:lstStyle/>
+          <a:p>
+            <a:pPr indent="0" marL="0">
+              <a:buNone/>
+            </a:pPr>
+            <a:r>
+              <a:rPr lang="en-US" sz="1300" b="1" dirty="0">
+                <a:solidFill>
+                  <a:srgbClr val="1A1A1A"/>
+                </a:solidFill>
+                <a:latin typeface="Inter" pitchFamily="34" charset="0"/>
+                <a:ea typeface="Inter" pitchFamily="34" charset="-122"/>
+                <a:cs typeface="Inter" pitchFamily="34" charset="-120"/>
+              </a:rPr>
               <a:t>VW St George</a:t>
             </a:r>
             <a:endParaRPr lang="en-US" sz="1300" dirty="0"/>
@@ -27940,14 +27448,14 @@
       </p:sp>
       <p:sp>
         <p:nvSpPr>
-          <p:cNvPr id="83" name="Text 81"/>
-          <p:cNvSpPr txBox="1"/>
-          <p:nvPr/>
-        </p:nvSpPr>
-        <p:spPr>
-          <a:xfrm>
-            <a:off x="8107680" y="2596896"/>
-            <a:ext cx="1670304" cy="228600"/>
+          <p:cNvPr id="85" name="Text 83"/>
+          <p:cNvSpPr txBox="1"/>
+          <p:nvPr/>
+        </p:nvSpPr>
+        <p:spPr>
+          <a:xfrm>
+            <a:off x="9531706" y="3127248"/>
+            <a:ext cx="2026310" cy="228600"/>
           </a:xfrm>
           <a:prstGeom prst="rect">
             <a:avLst/>
@@ -27971,7 +27479,7 @@
                 <a:ea typeface="Inter" pitchFamily="34" charset="-122"/>
                 <a:cs typeface="Inter" pitchFamily="34" charset="-120"/>
               </a:rPr>
-              <a:t>+32.9%</a:t>
+              <a:t>+4.6 pts</a:t>
             </a:r>
             <a:endParaRPr lang="en-US" sz="1600" dirty="0"/>
           </a:p>
@@ -27979,14 +27487,14 @@
       </p:sp>
       <p:sp>
         <p:nvSpPr>
-          <p:cNvPr id="84" name="Text 82"/>
-          <p:cNvSpPr txBox="1"/>
-          <p:nvPr/>
-        </p:nvSpPr>
-        <p:spPr>
-          <a:xfrm>
-            <a:off x="8107680" y="2907792"/>
-            <a:ext cx="1688592" cy="219456"/>
+          <p:cNvPr id="86" name="Text 84"/>
+          <p:cNvSpPr txBox="1"/>
+          <p:nvPr/>
+        </p:nvSpPr>
+        <p:spPr>
+          <a:xfrm>
+            <a:off x="9531706" y="3438144"/>
+            <a:ext cx="2044598" cy="219456"/>
           </a:xfrm>
           <a:prstGeom prst="rect">
             <a:avLst/>
@@ -28010,7 +27518,7 @@
                 <a:ea typeface="Inter" pitchFamily="34" charset="-122"/>
                 <a:cs typeface="Inter" pitchFamily="34" charset="-120"/>
               </a:rPr>
-              <a:t>LR Reno</a:t>
+              <a:t>GMC Prescott</a:t>
             </a:r>
             <a:endParaRPr lang="en-US" sz="1300" dirty="0"/>
           </a:p>
@@ -28018,14 +27526,14 @@
       </p:sp>
       <p:sp>
         <p:nvSpPr>
-          <p:cNvPr id="85" name="Text 83"/>
-          <p:cNvSpPr txBox="1"/>
-          <p:nvPr/>
-        </p:nvSpPr>
-        <p:spPr>
-          <a:xfrm>
-            <a:off x="8107680" y="3127248"/>
-            <a:ext cx="1670304" cy="228600"/>
+          <p:cNvPr id="87" name="Text 85"/>
+          <p:cNvSpPr txBox="1"/>
+          <p:nvPr/>
+        </p:nvSpPr>
+        <p:spPr>
+          <a:xfrm>
+            <a:off x="9531706" y="3657600"/>
+            <a:ext cx="2026310" cy="228600"/>
           </a:xfrm>
           <a:prstGeom prst="rect">
             <a:avLst/>
@@ -28049,7 +27557,7 @@
                 <a:ea typeface="Inter" pitchFamily="34" charset="-122"/>
                 <a:cs typeface="Inter" pitchFamily="34" charset="-120"/>
               </a:rPr>
-              <a:t>+26.6%</a:t>
+              <a:t>+3.9 pts</a:t>
             </a:r>
             <a:endParaRPr lang="en-US" sz="1600" dirty="0"/>
           </a:p>
@@ -28057,14 +27565,14 @@
       </p:sp>
       <p:sp>
         <p:nvSpPr>
-          <p:cNvPr id="86" name="Text 84"/>
-          <p:cNvSpPr txBox="1"/>
-          <p:nvPr/>
-        </p:nvSpPr>
-        <p:spPr>
-          <a:xfrm>
-            <a:off x="8107680" y="3438144"/>
-            <a:ext cx="1688592" cy="219456"/>
+          <p:cNvPr id="88" name="Text 86"/>
+          <p:cNvSpPr txBox="1"/>
+          <p:nvPr/>
+        </p:nvSpPr>
+        <p:spPr>
+          <a:xfrm>
+            <a:off x="9531706" y="4123944"/>
+            <a:ext cx="2044598" cy="219456"/>
           </a:xfrm>
           <a:prstGeom prst="rect">
             <a:avLst/>
@@ -28088,7 +27596,7 @@
                 <a:ea typeface="Inter" pitchFamily="34" charset="-122"/>
                 <a:cs typeface="Inter" pitchFamily="34" charset="-120"/>
               </a:rPr>
-              <a:t>Acura</a:t>
+              <a:t>Chevy LV</a:t>
             </a:r>
             <a:endParaRPr lang="en-US" sz="1300" dirty="0"/>
           </a:p>
@@ -28096,14 +27604,14 @@
       </p:sp>
       <p:sp>
         <p:nvSpPr>
-          <p:cNvPr id="87" name="Text 85"/>
-          <p:cNvSpPr txBox="1"/>
-          <p:nvPr/>
-        </p:nvSpPr>
-        <p:spPr>
-          <a:xfrm>
-            <a:off x="8107680" y="3657600"/>
-            <a:ext cx="1670304" cy="228600"/>
+          <p:cNvPr id="89" name="Text 87"/>
+          <p:cNvSpPr txBox="1"/>
+          <p:nvPr/>
+        </p:nvSpPr>
+        <p:spPr>
+          <a:xfrm>
+            <a:off x="9531706" y="4343400"/>
+            <a:ext cx="2026310" cy="228600"/>
           </a:xfrm>
           <a:prstGeom prst="rect">
             <a:avLst/>
@@ -28121,13 +27629,13 @@
             <a:r>
               <a:rPr lang="en-US" sz="1600" b="1" dirty="0">
                 <a:solidFill>
-                  <a:srgbClr val="0B7A4A"/>
-                </a:solidFill>
-                <a:latin typeface="Inter" pitchFamily="34" charset="0"/>
-                <a:ea typeface="Inter" pitchFamily="34" charset="-122"/>
-                <a:cs typeface="Inter" pitchFamily="34" charset="-120"/>
-              </a:rPr>
-              <a:t>+22.9%</a:t>
+                  <a:srgbClr val="A82B26"/>
+                </a:solidFill>
+                <a:latin typeface="Inter" pitchFamily="34" charset="0"/>
+                <a:ea typeface="Inter" pitchFamily="34" charset="-122"/>
+                <a:cs typeface="Inter" pitchFamily="34" charset="-120"/>
+              </a:rPr>
+              <a:t>−3.1 pts</a:t>
             </a:r>
             <a:endParaRPr lang="en-US" sz="1600" dirty="0"/>
           </a:p>
@@ -28135,14 +27643,14 @@
       </p:sp>
       <p:sp>
         <p:nvSpPr>
-          <p:cNvPr id="88" name="Text 86"/>
-          <p:cNvSpPr txBox="1"/>
-          <p:nvPr/>
-        </p:nvSpPr>
-        <p:spPr>
-          <a:xfrm>
-            <a:off x="8107680" y="4123944"/>
-            <a:ext cx="1688592" cy="219456"/>
+          <p:cNvPr id="90" name="Text 88"/>
+          <p:cNvSpPr txBox="1"/>
+          <p:nvPr/>
+        </p:nvSpPr>
+        <p:spPr>
+          <a:xfrm>
+            <a:off x="9531706" y="4654296"/>
+            <a:ext cx="2044598" cy="219456"/>
           </a:xfrm>
           <a:prstGeom prst="rect">
             <a:avLst/>
@@ -28166,7 +27674,7 @@
                 <a:ea typeface="Inter" pitchFamily="34" charset="-122"/>
                 <a:cs typeface="Inter" pitchFamily="34" charset="-120"/>
               </a:rPr>
-              <a:t>LR LV</a:t>
+              <a:t>Lincoln</a:t>
             </a:r>
             <a:endParaRPr lang="en-US" sz="1300" dirty="0"/>
           </a:p>
@@ -28174,14 +27682,14 @@
       </p:sp>
       <p:sp>
         <p:nvSpPr>
-          <p:cNvPr id="89" name="Text 87"/>
-          <p:cNvSpPr txBox="1"/>
-          <p:nvPr/>
-        </p:nvSpPr>
-        <p:spPr>
-          <a:xfrm>
-            <a:off x="8107680" y="4343400"/>
-            <a:ext cx="1670304" cy="228600"/>
+          <p:cNvPr id="91" name="Text 89"/>
+          <p:cNvSpPr txBox="1"/>
+          <p:nvPr/>
+        </p:nvSpPr>
+        <p:spPr>
+          <a:xfrm>
+            <a:off x="9531706" y="4873752"/>
+            <a:ext cx="2026310" cy="228600"/>
           </a:xfrm>
           <a:prstGeom prst="rect">
             <a:avLst/>
@@ -28205,7 +27713,7 @@
                 <a:ea typeface="Inter" pitchFamily="34" charset="-122"/>
                 <a:cs typeface="Inter" pitchFamily="34" charset="-120"/>
               </a:rPr>
-              <a:t>−4.4%</a:t>
+              <a:t>−3.8 pts</a:t>
             </a:r>
             <a:endParaRPr lang="en-US" sz="1600" dirty="0"/>
           </a:p>
@@ -28213,14 +27721,14 @@
       </p:sp>
       <p:sp>
         <p:nvSpPr>
-          <p:cNvPr id="90" name="Text 88"/>
-          <p:cNvSpPr txBox="1"/>
-          <p:nvPr/>
-        </p:nvSpPr>
-        <p:spPr>
-          <a:xfrm>
-            <a:off x="8107680" y="4654296"/>
-            <a:ext cx="1688592" cy="219456"/>
+          <p:cNvPr id="92" name="Text 90"/>
+          <p:cNvSpPr txBox="1"/>
+          <p:nvPr/>
+        </p:nvSpPr>
+        <p:spPr>
+          <a:xfrm>
+            <a:off x="9531706" y="5184648"/>
+            <a:ext cx="2044598" cy="219456"/>
           </a:xfrm>
           <a:prstGeom prst="rect">
             <a:avLst/>
@@ -28244,7 +27752,7 @@
                 <a:ea typeface="Inter" pitchFamily="34" charset="-122"/>
                 <a:cs typeface="Inter" pitchFamily="34" charset="-120"/>
               </a:rPr>
-              <a:t>GMC Prescott</a:t>
+              <a:t>Honda Henderson</a:t>
             </a:r>
             <a:endParaRPr lang="en-US" sz="1300" dirty="0"/>
           </a:p>
@@ -28252,14 +27760,14 @@
       </p:sp>
       <p:sp>
         <p:nvSpPr>
-          <p:cNvPr id="91" name="Text 89"/>
-          <p:cNvSpPr txBox="1"/>
-          <p:nvPr/>
-        </p:nvSpPr>
-        <p:spPr>
-          <a:xfrm>
-            <a:off x="8107680" y="4873752"/>
-            <a:ext cx="1670304" cy="228600"/>
+          <p:cNvPr id="93" name="Text 91"/>
+          <p:cNvSpPr txBox="1"/>
+          <p:nvPr/>
+        </p:nvSpPr>
+        <p:spPr>
+          <a:xfrm>
+            <a:off x="9531706" y="5404104"/>
+            <a:ext cx="2026310" cy="228600"/>
           </a:xfrm>
           <a:prstGeom prst="rect">
             <a:avLst/>
@@ -28283,7 +27791,7 @@
                 <a:ea typeface="Inter" pitchFamily="34" charset="-122"/>
                 <a:cs typeface="Inter" pitchFamily="34" charset="-120"/>
               </a:rPr>
-              <a:t>−5.6%</a:t>
+              <a:t>−4.2 pts</a:t>
             </a:r>
             <a:endParaRPr lang="en-US" sz="1600" dirty="0"/>
           </a:p>
@@ -28291,660 +27799,14 @@
       </p:sp>
       <p:sp>
         <p:nvSpPr>
-          <p:cNvPr id="92" name="Text 90"/>
-          <p:cNvSpPr txBox="1"/>
-          <p:nvPr/>
-        </p:nvSpPr>
-        <p:spPr>
-          <a:xfrm>
-            <a:off x="8107680" y="5184648"/>
-            <a:ext cx="1688592" cy="219456"/>
-          </a:xfrm>
-          <a:prstGeom prst="rect">
-            <a:avLst/>
-          </a:prstGeom>
-          <a:noFill/>
-          <a:ln/>
-        </p:spPr>
-        <p:txBody>
-          <a:bodyPr wrap="square" lIns="0" tIns="0" rIns="0" bIns="0" rtlCol="0" anchor="ctr"/>
-          <a:lstStyle/>
-          <a:p>
-            <a:pPr indent="0" marL="0">
-              <a:buNone/>
-            </a:pPr>
-            <a:r>
-              <a:rPr lang="en-US" sz="1300" b="1" dirty="0">
-                <a:solidFill>
-                  <a:srgbClr val="1A1A1A"/>
-                </a:solidFill>
-                <a:latin typeface="Inter" pitchFamily="34" charset="0"/>
-                <a:ea typeface="Inter" pitchFamily="34" charset="-122"/>
-                <a:cs typeface="Inter" pitchFamily="34" charset="-120"/>
-              </a:rPr>
-              <a:t>Honda Henderson</a:t>
-            </a:r>
-            <a:endParaRPr lang="en-US" sz="1300" dirty="0"/>
-          </a:p>
-        </p:txBody>
-      </p:sp>
-      <p:sp>
-        <p:nvSpPr>
-          <p:cNvPr id="93" name="Text 91"/>
-          <p:cNvSpPr txBox="1"/>
-          <p:nvPr/>
-        </p:nvSpPr>
-        <p:spPr>
-          <a:xfrm>
-            <a:off x="8107680" y="5404104"/>
-            <a:ext cx="1670304" cy="228600"/>
-          </a:xfrm>
-          <a:prstGeom prst="rect">
-            <a:avLst/>
-          </a:prstGeom>
-          <a:noFill/>
-          <a:ln/>
-        </p:spPr>
-        <p:txBody>
-          <a:bodyPr wrap="square" lIns="0" tIns="0" rIns="0" bIns="0" rtlCol="0" anchor="ctr"/>
-          <a:lstStyle/>
-          <a:p>
-            <a:pPr indent="0" marL="0">
-              <a:buNone/>
-            </a:pPr>
-            <a:r>
-              <a:rPr lang="en-US" sz="1600" b="1" dirty="0">
-                <a:solidFill>
-                  <a:srgbClr val="A82B26"/>
-                </a:solidFill>
-                <a:latin typeface="Inter" pitchFamily="34" charset="0"/>
-                <a:ea typeface="Inter" pitchFamily="34" charset="-122"/>
-                <a:cs typeface="Inter" pitchFamily="34" charset="-120"/>
-              </a:rPr>
-              <a:t>−6.0%</a:t>
-            </a:r>
-            <a:endParaRPr lang="en-US" sz="1600" dirty="0"/>
-          </a:p>
-        </p:txBody>
-      </p:sp>
-      <p:sp>
-        <p:nvSpPr>
-          <p:cNvPr id="94" name="Shape 92"/>
+          <p:cNvPr id="95" name="Shape 92"/>
           <p:cNvSpPr/>
           <p:nvPr/>
         </p:nvSpPr>
         <p:spPr>
           <a:xfrm>
-            <a:off x="9869424" y="1691640"/>
-            <a:ext cx="1670304" cy="45720"/>
-          </a:xfrm>
-          <a:prstGeom prst="rect">
-            <a:avLst/>
-          </a:prstGeom>
-          <a:solidFill>
-            <a:srgbClr val="12A566"/>
-          </a:solidFill>
-          <a:ln/>
-        </p:spPr>
-      </p:sp>
-      <p:sp>
-        <p:nvSpPr>
-          <p:cNvPr id="95" name="Text 93"/>
-          <p:cNvSpPr txBox="1"/>
-          <p:nvPr/>
-        </p:nvSpPr>
-        <p:spPr>
-          <a:xfrm>
-            <a:off x="9887712" y="1773936"/>
-            <a:ext cx="1633728" cy="237744"/>
-          </a:xfrm>
-          <a:prstGeom prst="rect">
-            <a:avLst/>
-          </a:prstGeom>
-          <a:noFill/>
-          <a:ln/>
-        </p:spPr>
-        <p:txBody>
-          <a:bodyPr wrap="square" lIns="0" tIns="0" rIns="0" bIns="0" rtlCol="0" anchor="ctr">
-            <a:normAutofit/>
-          </a:bodyPr>
-          <a:lstStyle/>
-          <a:p>
-            <a:pPr indent="0" marL="0">
-              <a:buNone/>
-            </a:pPr>
-            <a:r>
-              <a:rPr lang="en-US" sz="1300" b="1" spc="30" kern="0" dirty="0">
-                <a:solidFill>
-                  <a:srgbClr val="595959"/>
-                </a:solidFill>
-                <a:latin typeface="Inter" pitchFamily="34" charset="0"/>
-                <a:ea typeface="Inter" pitchFamily="34" charset="-122"/>
-                <a:cs typeface="Inter" pitchFamily="34" charset="-120"/>
-              </a:rPr>
-              <a:t>CP PARTS GP %</a:t>
-            </a:r>
-            <a:endParaRPr lang="en-US" sz="1300" dirty="0"/>
-          </a:p>
-        </p:txBody>
-      </p:sp>
-      <p:sp>
-        <p:nvSpPr>
-          <p:cNvPr id="96" name="Text 94"/>
-          <p:cNvSpPr txBox="1"/>
-          <p:nvPr/>
-        </p:nvSpPr>
-        <p:spPr>
-          <a:xfrm>
-            <a:off x="9887712" y="1993392"/>
-            <a:ext cx="1633728" cy="201168"/>
-          </a:xfrm>
-          <a:prstGeom prst="rect">
-            <a:avLst/>
-          </a:prstGeom>
-          <a:noFill/>
-          <a:ln/>
-        </p:spPr>
-        <p:txBody>
-          <a:bodyPr wrap="square" lIns="0" tIns="0" rIns="0" bIns="0" rtlCol="0" anchor="ctr"/>
-          <a:lstStyle/>
-          <a:p>
-            <a:pPr indent="0" marL="0">
-              <a:buNone/>
-            </a:pPr>
-            <a:r>
-              <a:rPr lang="en-US" sz="1300" dirty="0">
-                <a:solidFill>
-                  <a:srgbClr val="595959"/>
-                </a:solidFill>
-                <a:latin typeface="Inter" pitchFamily="34" charset="0"/>
-                <a:ea typeface="Inter" pitchFamily="34" charset="-122"/>
-                <a:cs typeface="Inter" pitchFamily="34" charset="-120"/>
-              </a:rPr>
-              <a:t>Group 0.0 pts</a:t>
-            </a:r>
-            <a:endParaRPr lang="en-US" sz="1300" dirty="0"/>
-          </a:p>
-        </p:txBody>
-      </p:sp>
-      <p:sp>
-        <p:nvSpPr>
-          <p:cNvPr id="97" name="Text 95"/>
-          <p:cNvSpPr txBox="1"/>
-          <p:nvPr/>
-        </p:nvSpPr>
-        <p:spPr>
-          <a:xfrm>
-            <a:off x="9887712" y="2377440"/>
-            <a:ext cx="1688592" cy="219456"/>
-          </a:xfrm>
-          <a:prstGeom prst="rect">
-            <a:avLst/>
-          </a:prstGeom>
-          <a:noFill/>
-          <a:ln/>
-        </p:spPr>
-        <p:txBody>
-          <a:bodyPr wrap="square" lIns="0" tIns="0" rIns="0" bIns="0" rtlCol="0" anchor="ctr"/>
-          <a:lstStyle/>
-          <a:p>
-            <a:pPr indent="0" marL="0">
-              <a:buNone/>
-            </a:pPr>
-            <a:r>
-              <a:rPr lang="en-US" sz="1300" b="1" dirty="0">
-                <a:solidFill>
-                  <a:srgbClr val="1A1A1A"/>
-                </a:solidFill>
-                <a:latin typeface="Inter" pitchFamily="34" charset="0"/>
-                <a:ea typeface="Inter" pitchFamily="34" charset="-122"/>
-                <a:cs typeface="Inter" pitchFamily="34" charset="-120"/>
-              </a:rPr>
-              <a:t>Acura</a:t>
-            </a:r>
-            <a:endParaRPr lang="en-US" sz="1300" dirty="0"/>
-          </a:p>
-        </p:txBody>
-      </p:sp>
-      <p:sp>
-        <p:nvSpPr>
-          <p:cNvPr id="98" name="Text 96"/>
-          <p:cNvSpPr txBox="1"/>
-          <p:nvPr/>
-        </p:nvSpPr>
-        <p:spPr>
-          <a:xfrm>
-            <a:off x="9887712" y="2596896"/>
-            <a:ext cx="1670304" cy="228600"/>
-          </a:xfrm>
-          <a:prstGeom prst="rect">
-            <a:avLst/>
-          </a:prstGeom>
-          <a:noFill/>
-          <a:ln/>
-        </p:spPr>
-        <p:txBody>
-          <a:bodyPr wrap="square" lIns="0" tIns="0" rIns="0" bIns="0" rtlCol="0" anchor="ctr"/>
-          <a:lstStyle/>
-          <a:p>
-            <a:pPr indent="0" marL="0">
-              <a:buNone/>
-            </a:pPr>
-            <a:r>
-              <a:rPr lang="en-US" sz="1600" b="1" dirty="0">
-                <a:solidFill>
-                  <a:srgbClr val="0B7A4A"/>
-                </a:solidFill>
-                <a:latin typeface="Inter" pitchFamily="34" charset="0"/>
-                <a:ea typeface="Inter" pitchFamily="34" charset="-122"/>
-                <a:cs typeface="Inter" pitchFamily="34" charset="-120"/>
-              </a:rPr>
-              <a:t>+7.2 pts</a:t>
-            </a:r>
-            <a:endParaRPr lang="en-US" sz="1600" dirty="0"/>
-          </a:p>
-        </p:txBody>
-      </p:sp>
-      <p:sp>
-        <p:nvSpPr>
-          <p:cNvPr id="99" name="Text 97"/>
-          <p:cNvSpPr txBox="1"/>
-          <p:nvPr/>
-        </p:nvSpPr>
-        <p:spPr>
-          <a:xfrm>
-            <a:off x="9887712" y="2907792"/>
-            <a:ext cx="1688592" cy="219456"/>
-          </a:xfrm>
-          <a:prstGeom prst="rect">
-            <a:avLst/>
-          </a:prstGeom>
-          <a:noFill/>
-          <a:ln/>
-        </p:spPr>
-        <p:txBody>
-          <a:bodyPr wrap="square" lIns="0" tIns="0" rIns="0" bIns="0" rtlCol="0" anchor="ctr"/>
-          <a:lstStyle/>
-          <a:p>
-            <a:pPr indent="0" marL="0">
-              <a:buNone/>
-            </a:pPr>
-            <a:r>
-              <a:rPr lang="en-US" sz="1300" b="1" dirty="0">
-                <a:solidFill>
-                  <a:srgbClr val="1A1A1A"/>
-                </a:solidFill>
-                <a:latin typeface="Inter" pitchFamily="34" charset="0"/>
-                <a:ea typeface="Inter" pitchFamily="34" charset="-122"/>
-                <a:cs typeface="Inter" pitchFamily="34" charset="-120"/>
-              </a:rPr>
-              <a:t>VW St George</a:t>
-            </a:r>
-            <a:endParaRPr lang="en-US" sz="1300" dirty="0"/>
-          </a:p>
-        </p:txBody>
-      </p:sp>
-      <p:sp>
-        <p:nvSpPr>
-          <p:cNvPr id="100" name="Text 98"/>
-          <p:cNvSpPr txBox="1"/>
-          <p:nvPr/>
-        </p:nvSpPr>
-        <p:spPr>
-          <a:xfrm>
-            <a:off x="9887712" y="3127248"/>
-            <a:ext cx="1670304" cy="228600"/>
-          </a:xfrm>
-          <a:prstGeom prst="rect">
-            <a:avLst/>
-          </a:prstGeom>
-          <a:noFill/>
-          <a:ln/>
-        </p:spPr>
-        <p:txBody>
-          <a:bodyPr wrap="square" lIns="0" tIns="0" rIns="0" bIns="0" rtlCol="0" anchor="ctr"/>
-          <a:lstStyle/>
-          <a:p>
-            <a:pPr indent="0" marL="0">
-              <a:buNone/>
-            </a:pPr>
-            <a:r>
-              <a:rPr lang="en-US" sz="1600" b="1" dirty="0">
-                <a:solidFill>
-                  <a:srgbClr val="0B7A4A"/>
-                </a:solidFill>
-                <a:latin typeface="Inter" pitchFamily="34" charset="0"/>
-                <a:ea typeface="Inter" pitchFamily="34" charset="-122"/>
-                <a:cs typeface="Inter" pitchFamily="34" charset="-120"/>
-              </a:rPr>
-              <a:t>+4.6 pts</a:t>
-            </a:r>
-            <a:endParaRPr lang="en-US" sz="1600" dirty="0"/>
-          </a:p>
-        </p:txBody>
-      </p:sp>
-      <p:sp>
-        <p:nvSpPr>
-          <p:cNvPr id="101" name="Text 99"/>
-          <p:cNvSpPr txBox="1"/>
-          <p:nvPr/>
-        </p:nvSpPr>
-        <p:spPr>
-          <a:xfrm>
-            <a:off x="9887712" y="3438144"/>
-            <a:ext cx="1688592" cy="219456"/>
-          </a:xfrm>
-          <a:prstGeom prst="rect">
-            <a:avLst/>
-          </a:prstGeom>
-          <a:noFill/>
-          <a:ln/>
-        </p:spPr>
-        <p:txBody>
-          <a:bodyPr wrap="square" lIns="0" tIns="0" rIns="0" bIns="0" rtlCol="0" anchor="ctr"/>
-          <a:lstStyle/>
-          <a:p>
-            <a:pPr indent="0" marL="0">
-              <a:buNone/>
-            </a:pPr>
-            <a:r>
-              <a:rPr lang="en-US" sz="1300" b="1" dirty="0">
-                <a:solidFill>
-                  <a:srgbClr val="1A1A1A"/>
-                </a:solidFill>
-                <a:latin typeface="Inter" pitchFamily="34" charset="0"/>
-                <a:ea typeface="Inter" pitchFamily="34" charset="-122"/>
-                <a:cs typeface="Inter" pitchFamily="34" charset="-120"/>
-              </a:rPr>
-              <a:t>GMC Prescott</a:t>
-            </a:r>
-            <a:endParaRPr lang="en-US" sz="1300" dirty="0"/>
-          </a:p>
-        </p:txBody>
-      </p:sp>
-      <p:sp>
-        <p:nvSpPr>
-          <p:cNvPr id="102" name="Text 100"/>
-          <p:cNvSpPr txBox="1"/>
-          <p:nvPr/>
-        </p:nvSpPr>
-        <p:spPr>
-          <a:xfrm>
-            <a:off x="9887712" y="3657600"/>
-            <a:ext cx="1670304" cy="228600"/>
-          </a:xfrm>
-          <a:prstGeom prst="rect">
-            <a:avLst/>
-          </a:prstGeom>
-          <a:noFill/>
-          <a:ln/>
-        </p:spPr>
-        <p:txBody>
-          <a:bodyPr wrap="square" lIns="0" tIns="0" rIns="0" bIns="0" rtlCol="0" anchor="ctr"/>
-          <a:lstStyle/>
-          <a:p>
-            <a:pPr indent="0" marL="0">
-              <a:buNone/>
-            </a:pPr>
-            <a:r>
-              <a:rPr lang="en-US" sz="1600" b="1" dirty="0">
-                <a:solidFill>
-                  <a:srgbClr val="0B7A4A"/>
-                </a:solidFill>
-                <a:latin typeface="Inter" pitchFamily="34" charset="0"/>
-                <a:ea typeface="Inter" pitchFamily="34" charset="-122"/>
-                <a:cs typeface="Inter" pitchFamily="34" charset="-120"/>
-              </a:rPr>
-              <a:t>+3.9 pts</a:t>
-            </a:r>
-            <a:endParaRPr lang="en-US" sz="1600" dirty="0"/>
-          </a:p>
-        </p:txBody>
-      </p:sp>
-      <p:sp>
-        <p:nvSpPr>
-          <p:cNvPr id="103" name="Text 101"/>
-          <p:cNvSpPr txBox="1"/>
-          <p:nvPr/>
-        </p:nvSpPr>
-        <p:spPr>
-          <a:xfrm>
-            <a:off x="9887712" y="4123944"/>
-            <a:ext cx="1688592" cy="219456"/>
-          </a:xfrm>
-          <a:prstGeom prst="rect">
-            <a:avLst/>
-          </a:prstGeom>
-          <a:noFill/>
-          <a:ln/>
-        </p:spPr>
-        <p:txBody>
-          <a:bodyPr wrap="square" lIns="0" tIns="0" rIns="0" bIns="0" rtlCol="0" anchor="ctr"/>
-          <a:lstStyle/>
-          <a:p>
-            <a:pPr indent="0" marL="0">
-              <a:buNone/>
-            </a:pPr>
-            <a:r>
-              <a:rPr lang="en-US" sz="1300" b="1" dirty="0">
-                <a:solidFill>
-                  <a:srgbClr val="1A1A1A"/>
-                </a:solidFill>
-                <a:latin typeface="Inter" pitchFamily="34" charset="0"/>
-                <a:ea typeface="Inter" pitchFamily="34" charset="-122"/>
-                <a:cs typeface="Inter" pitchFamily="34" charset="-120"/>
-              </a:rPr>
-              <a:t>Chevy LV</a:t>
-            </a:r>
-            <a:endParaRPr lang="en-US" sz="1300" dirty="0"/>
-          </a:p>
-        </p:txBody>
-      </p:sp>
-      <p:sp>
-        <p:nvSpPr>
-          <p:cNvPr id="104" name="Text 102"/>
-          <p:cNvSpPr txBox="1"/>
-          <p:nvPr/>
-        </p:nvSpPr>
-        <p:spPr>
-          <a:xfrm>
-            <a:off x="9887712" y="4343400"/>
-            <a:ext cx="1670304" cy="228600"/>
-          </a:xfrm>
-          <a:prstGeom prst="rect">
-            <a:avLst/>
-          </a:prstGeom>
-          <a:noFill/>
-          <a:ln/>
-        </p:spPr>
-        <p:txBody>
-          <a:bodyPr wrap="square" lIns="0" tIns="0" rIns="0" bIns="0" rtlCol="0" anchor="ctr"/>
-          <a:lstStyle/>
-          <a:p>
-            <a:pPr indent="0" marL="0">
-              <a:buNone/>
-            </a:pPr>
-            <a:r>
-              <a:rPr lang="en-US" sz="1600" b="1" dirty="0">
-                <a:solidFill>
-                  <a:srgbClr val="A82B26"/>
-                </a:solidFill>
-                <a:latin typeface="Inter" pitchFamily="34" charset="0"/>
-                <a:ea typeface="Inter" pitchFamily="34" charset="-122"/>
-                <a:cs typeface="Inter" pitchFamily="34" charset="-120"/>
-              </a:rPr>
-              <a:t>−3.1 pts</a:t>
-            </a:r>
-            <a:endParaRPr lang="en-US" sz="1600" dirty="0"/>
-          </a:p>
-        </p:txBody>
-      </p:sp>
-      <p:sp>
-        <p:nvSpPr>
-          <p:cNvPr id="105" name="Text 103"/>
-          <p:cNvSpPr txBox="1"/>
-          <p:nvPr/>
-        </p:nvSpPr>
-        <p:spPr>
-          <a:xfrm>
-            <a:off x="9887712" y="4654296"/>
-            <a:ext cx="1688592" cy="219456"/>
-          </a:xfrm>
-          <a:prstGeom prst="rect">
-            <a:avLst/>
-          </a:prstGeom>
-          <a:noFill/>
-          <a:ln/>
-        </p:spPr>
-        <p:txBody>
-          <a:bodyPr wrap="square" lIns="0" tIns="0" rIns="0" bIns="0" rtlCol="0" anchor="ctr"/>
-          <a:lstStyle/>
-          <a:p>
-            <a:pPr indent="0" marL="0">
-              <a:buNone/>
-            </a:pPr>
-            <a:r>
-              <a:rPr lang="en-US" sz="1300" b="1" dirty="0">
-                <a:solidFill>
-                  <a:srgbClr val="1A1A1A"/>
-                </a:solidFill>
-                <a:latin typeface="Inter" pitchFamily="34" charset="0"/>
-                <a:ea typeface="Inter" pitchFamily="34" charset="-122"/>
-                <a:cs typeface="Inter" pitchFamily="34" charset="-120"/>
-              </a:rPr>
-              <a:t>Lincoln</a:t>
-            </a:r>
-            <a:endParaRPr lang="en-US" sz="1300" dirty="0"/>
-          </a:p>
-        </p:txBody>
-      </p:sp>
-      <p:sp>
-        <p:nvSpPr>
-          <p:cNvPr id="106" name="Text 104"/>
-          <p:cNvSpPr txBox="1"/>
-          <p:nvPr/>
-        </p:nvSpPr>
-        <p:spPr>
-          <a:xfrm>
-            <a:off x="9887712" y="4873752"/>
-            <a:ext cx="1670304" cy="228600"/>
-          </a:xfrm>
-          <a:prstGeom prst="rect">
-            <a:avLst/>
-          </a:prstGeom>
-          <a:noFill/>
-          <a:ln/>
-        </p:spPr>
-        <p:txBody>
-          <a:bodyPr wrap="square" lIns="0" tIns="0" rIns="0" bIns="0" rtlCol="0" anchor="ctr"/>
-          <a:lstStyle/>
-          <a:p>
-            <a:pPr indent="0" marL="0">
-              <a:buNone/>
-            </a:pPr>
-            <a:r>
-              <a:rPr lang="en-US" sz="1600" b="1" dirty="0">
-                <a:solidFill>
-                  <a:srgbClr val="A82B26"/>
-                </a:solidFill>
-                <a:latin typeface="Inter" pitchFamily="34" charset="0"/>
-                <a:ea typeface="Inter" pitchFamily="34" charset="-122"/>
-                <a:cs typeface="Inter" pitchFamily="34" charset="-120"/>
-              </a:rPr>
-              <a:t>−3.8 pts</a:t>
-            </a:r>
-            <a:endParaRPr lang="en-US" sz="1600" dirty="0"/>
-          </a:p>
-        </p:txBody>
-      </p:sp>
-      <p:sp>
-        <p:nvSpPr>
-          <p:cNvPr id="107" name="Text 105"/>
-          <p:cNvSpPr txBox="1"/>
-          <p:nvPr/>
-        </p:nvSpPr>
-        <p:spPr>
-          <a:xfrm>
-            <a:off x="9887712" y="5184648"/>
-            <a:ext cx="1688592" cy="219456"/>
-          </a:xfrm>
-          <a:prstGeom prst="rect">
-            <a:avLst/>
-          </a:prstGeom>
-          <a:noFill/>
-          <a:ln/>
-        </p:spPr>
-        <p:txBody>
-          <a:bodyPr wrap="square" lIns="0" tIns="0" rIns="0" bIns="0" rtlCol="0" anchor="ctr"/>
-          <a:lstStyle/>
-          <a:p>
-            <a:pPr indent="0" marL="0">
-              <a:buNone/>
-            </a:pPr>
-            <a:r>
-              <a:rPr lang="en-US" sz="1300" b="1" dirty="0">
-                <a:solidFill>
-                  <a:srgbClr val="1A1A1A"/>
-                </a:solidFill>
-                <a:latin typeface="Inter" pitchFamily="34" charset="0"/>
-                <a:ea typeface="Inter" pitchFamily="34" charset="-122"/>
-                <a:cs typeface="Inter" pitchFamily="34" charset="-120"/>
-              </a:rPr>
-              <a:t>Honda Henderson</a:t>
-            </a:r>
-            <a:endParaRPr lang="en-US" sz="1300" dirty="0"/>
-          </a:p>
-        </p:txBody>
-      </p:sp>
-      <p:sp>
-        <p:nvSpPr>
-          <p:cNvPr id="108" name="Text 106"/>
-          <p:cNvSpPr txBox="1"/>
-          <p:nvPr/>
-        </p:nvSpPr>
-        <p:spPr>
-          <a:xfrm>
-            <a:off x="9887712" y="5404104"/>
-            <a:ext cx="1670304" cy="228600"/>
-          </a:xfrm>
-          <a:prstGeom prst="rect">
-            <a:avLst/>
-          </a:prstGeom>
-          <a:noFill/>
-          <a:ln/>
-        </p:spPr>
-        <p:txBody>
-          <a:bodyPr wrap="square" lIns="0" tIns="0" rIns="0" bIns="0" rtlCol="0" anchor="ctr"/>
-          <a:lstStyle/>
-          <a:p>
-            <a:pPr indent="0" marL="0">
-              <a:buNone/>
-            </a:pPr>
-            <a:r>
-              <a:rPr lang="en-US" sz="1600" b="1" dirty="0">
-                <a:solidFill>
-                  <a:srgbClr val="A82B26"/>
-                </a:solidFill>
-                <a:latin typeface="Inter" pitchFamily="34" charset="0"/>
-                <a:ea typeface="Inter" pitchFamily="34" charset="-122"/>
-                <a:cs typeface="Inter" pitchFamily="34" charset="-120"/>
-              </a:rPr>
-              <a:t>−4.2 pts</a:t>
-            </a:r>
-            <a:endParaRPr lang="en-US" sz="1600" dirty="0"/>
-          </a:p>
-        </p:txBody>
-      </p:sp>
-      <p:sp>
-        <p:nvSpPr>
-          <p:cNvPr id="110" name="Shape 107"/>
-          <p:cNvSpPr/>
-          <p:nvPr/>
-        </p:nvSpPr>
-        <p:spPr>
-          <a:xfrm>
             <a:off x="457200" y="6126480"/>
-            <a:ext cx="11274552" cy="371856"/>
+            <a:ext cx="11274552" cy="615696"/>
           </a:xfrm>
           <a:prstGeom prst="rect">
             <a:avLst/>
@@ -28957,14 +27819,14 @@
       </p:sp>
       <p:sp>
         <p:nvSpPr>
-          <p:cNvPr id="111" name="Text 108"/>
+          <p:cNvPr id="96" name="Text 93"/>
           <p:cNvSpPr txBox="1"/>
           <p:nvPr/>
         </p:nvSpPr>
         <p:spPr>
           <a:xfrm>
             <a:off x="658368" y="6144768"/>
-            <a:ext cx="10927080" cy="335280"/>
+            <a:ext cx="10927080" cy="579120"/>
           </a:xfrm>
           <a:prstGeom prst="rect">
             <a:avLst/>
@@ -28988,7 +27850,7 @@
                 <a:ea typeface="Inter" pitchFamily="34" charset="-122"/>
                 <a:cs typeface="Inter" pitchFamily="34" charset="-120"/>
               </a:rPr>
-              <a:t>Most top-three finishes: VW St George (3 of 6). Most bottom-three: Honda Henderson (4 of 6).</a:t>
+              <a:t>Most top-three finishes: Mazda, CDJR Post Falls and VW St George (2 of 5). Most bottom-three: Honda Henderson and Cadillac (3 of 5).</a:t>
             </a:r>
             <a:endParaRPr lang="en-US" sz="1600" dirty="0"/>
           </a:p>
@@ -44920,7 +43782,7 @@
                 <a:ea typeface="Inter" pitchFamily="34" charset="-122"/>
                 <a:cs typeface="Inter" pitchFamily="34" charset="-120"/>
               </a:rPr>
-              <a:t>Top-5 finishes, of six measures</a:t>
+              <a:t>Top-5 finishes, of five measures</a:t>
             </a:r>
             <a:endParaRPr lang="en-US" sz="1400" dirty="0"/>
           </a:p>
@@ -44979,7 +43841,7 @@
                 <a:ea typeface="Inter" pitchFamily="34" charset="-122"/>
                 <a:cs typeface="Inter" pitchFamily="34" charset="-120"/>
               </a:rPr>
-              <a:t>LINCOLN</a:t>
+              <a:t>SUBARU PRESCOTT</a:t>
             </a:r>
             <a:endParaRPr lang="en-US" sz="1400" dirty="0"/>
           </a:p>
@@ -45018,7 +43880,7 @@
                 <a:ea typeface="Inter" pitchFamily="34" charset="-122"/>
                 <a:cs typeface="Inter" pitchFamily="34" charset="-120"/>
               </a:rPr>
-              <a:t>CP gross, ELR, parts $/RO, parts GP%</a:t>
+              <a:t>CP gross, hours/RO, ELR, parts GP%</a:t>
             </a:r>
             <a:endParaRPr lang="en-US" sz="1300" dirty="0"/>
           </a:p>
@@ -45116,7 +43978,7 @@
                 <a:ea typeface="Inter" pitchFamily="34" charset="-122"/>
                 <a:cs typeface="Inter" pitchFamily="34" charset="-120"/>
               </a:rPr>
-              <a:t>SUBARU PRESCOTT</a:t>
+              <a:t>LINCOLN</a:t>
             </a:r>
             <a:endParaRPr lang="en-US" sz="1400" dirty="0"/>
           </a:p>
@@ -45155,7 +44017,7 @@
                 <a:ea typeface="Inter" pitchFamily="34" charset="-122"/>
                 <a:cs typeface="Inter" pitchFamily="34" charset="-120"/>
               </a:rPr>
-              <a:t>CP gross, hours/RO, ELR, parts GP%</a:t>
+              <a:t>CP gross, ELR, parts GP%</a:t>
             </a:r>
             <a:endParaRPr lang="en-US" sz="1300" dirty="0"/>
           </a:p>
@@ -45170,7 +44032,7 @@
         <p:spPr>
           <a:xfrm>
             <a:off x="4343400" y="2937053"/>
-            <a:ext cx="960120" cy="234086"/>
+            <a:ext cx="720090" cy="234086"/>
           </a:xfrm>
           <a:prstGeom prst="rect">
             <a:avLst/>
@@ -45214,7 +44076,7 @@
                 <a:ea typeface="Inter" pitchFamily="34" charset="-122"/>
                 <a:cs typeface="Inter" pitchFamily="34" charset="-120"/>
               </a:rPr>
-              <a:t>4</a:t>
+              <a:t>3</a:t>
             </a:r>
             <a:endParaRPr lang="en-US" sz="1800" dirty="0"/>
           </a:p>
@@ -45312,7 +44174,7 @@
                 <a:ea typeface="Inter" pitchFamily="34" charset="-122"/>
                 <a:cs typeface="Inter" pitchFamily="34" charset="-120"/>
               </a:rPr>
-              <a:t>CP gross, CP ROs, hours/RO, parts $/RO</a:t>
+              <a:t>CP gross, CP ROs, hours/RO</a:t>
             </a:r>
             <a:endParaRPr lang="en-US" sz="1300" dirty="0"/>
           </a:p>
@@ -45327,7 +44189,7 @@
         <p:spPr>
           <a:xfrm>
             <a:off x="4343400" y="3522269"/>
-            <a:ext cx="960120" cy="234086"/>
+            <a:ext cx="720090" cy="234086"/>
           </a:xfrm>
           <a:prstGeom prst="rect">
             <a:avLst/>
@@ -45371,7 +44233,7 @@
                 <a:ea typeface="Inter" pitchFamily="34" charset="-122"/>
                 <a:cs typeface="Inter" pitchFamily="34" charset="-120"/>
               </a:rPr>
-              <a:t>4</a:t>
+              <a:t>3</a:t>
             </a:r>
             <a:endParaRPr lang="en-US" sz="1800" dirty="0"/>
           </a:p>
@@ -45567,7 +44429,7 @@
                 <a:ea typeface="Inter" pitchFamily="34" charset="-122"/>
                 <a:cs typeface="Inter" pitchFamily="34" charset="-120"/>
               </a:rPr>
-              <a:t>LEXUS</a:t>
+              <a:t>KIA LV</a:t>
             </a:r>
             <a:endParaRPr lang="en-US" sz="1400" dirty="0"/>
           </a:p>
@@ -45606,7 +44468,7 @@
                 <a:ea typeface="Inter" pitchFamily="34" charset="-122"/>
                 <a:cs typeface="Inter" pitchFamily="34" charset="-120"/>
               </a:rPr>
-              <a:t>CP gross, parts $/RO</a:t>
+              <a:t>CP ROs, hours/RO</a:t>
             </a:r>
             <a:endParaRPr lang="en-US" sz="1300" dirty="0"/>
           </a:p>
@@ -45704,7 +44566,7 @@
                 <a:ea typeface="Inter" pitchFamily="34" charset="-122"/>
                 <a:cs typeface="Inter" pitchFamily="34" charset="-120"/>
               </a:rPr>
-              <a:t>KIA LV</a:t>
+              <a:t>LR RENO</a:t>
             </a:r>
             <a:endParaRPr lang="en-US" sz="1400" dirty="0"/>
           </a:p>
@@ -45743,7 +44605,7 @@
                 <a:ea typeface="Inter" pitchFamily="34" charset="-122"/>
                 <a:cs typeface="Inter" pitchFamily="34" charset="-120"/>
               </a:rPr>
-              <a:t>CP ROs, hours/RO</a:t>
+              <a:t>CP ROs, parts GP%</a:t>
             </a:r>
             <a:endParaRPr lang="en-US" sz="1300" dirty="0"/>
           </a:p>
@@ -45920,7 +44782,7 @@
                 <a:ea typeface="Inter" pitchFamily="34" charset="-122"/>
                 <a:cs typeface="Inter" pitchFamily="34" charset="-120"/>
               </a:rPr>
-              <a:t>Top-5 finishes, of six measures</a:t>
+              <a:t>Top-5 finishes, of five measures</a:t>
             </a:r>
             <a:endParaRPr lang="en-US" sz="1400" dirty="0"/>
           </a:p>
@@ -45979,7 +44841,7 @@
                 <a:ea typeface="Inter" pitchFamily="34" charset="-122"/>
                 <a:cs typeface="Inter" pitchFamily="34" charset="-120"/>
               </a:rPr>
-              <a:t>VW ST GEORGE</a:t>
+              <a:t>MAZDA</a:t>
             </a:r>
             <a:endParaRPr lang="en-US" sz="1400" dirty="0"/>
           </a:p>
@@ -46018,7 +44880,7 @@
                 <a:ea typeface="Inter" pitchFamily="34" charset="-122"/>
                 <a:cs typeface="Inter" pitchFamily="34" charset="-120"/>
               </a:rPr>
-              <a:t>CP gross, ELR, parts $/RO, parts GP%</a:t>
+              <a:t>CP gross, CP ROs, hours/RO</a:t>
             </a:r>
             <a:endParaRPr lang="en-US" sz="1300" dirty="0"/>
           </a:p>
@@ -46077,7 +44939,7 @@
                 <a:ea typeface="Inter" pitchFamily="34" charset="-122"/>
                 <a:cs typeface="Inter" pitchFamily="34" charset="-120"/>
               </a:rPr>
-              <a:t>4</a:t>
+              <a:t>3</a:t>
             </a:r>
             <a:endParaRPr lang="en-US" sz="1800" dirty="0"/>
           </a:p>
@@ -46116,7 +44978,7 @@
                 <a:ea typeface="Inter" pitchFamily="34" charset="-122"/>
                 <a:cs typeface="Inter" pitchFamily="34" charset="-120"/>
               </a:rPr>
-              <a:t>MAZDA</a:t>
+              <a:t>KIA ST GEORGE</a:t>
             </a:r>
             <a:endParaRPr lang="en-US" sz="1400" dirty="0"/>
           </a:p>
@@ -46155,7 +45017,7 @@
                 <a:ea typeface="Inter" pitchFamily="34" charset="-122"/>
                 <a:cs typeface="Inter" pitchFamily="34" charset="-120"/>
               </a:rPr>
-              <a:t>CP gross, CP ROs, hours/RO</a:t>
+              <a:t>CP gross, hours/RO, ELR</a:t>
             </a:r>
             <a:endParaRPr lang="en-US" sz="1300" dirty="0"/>
           </a:p>
@@ -46170,7 +45032,7 @@
         <p:spPr>
           <a:xfrm>
             <a:off x="10058400" y="2937053"/>
-            <a:ext cx="720090" cy="234086"/>
+            <a:ext cx="960120" cy="234086"/>
           </a:xfrm>
           <a:prstGeom prst="rect">
             <a:avLst/>
@@ -46273,7 +45135,7 @@
                 <a:ea typeface="Inter" pitchFamily="34" charset="-122"/>
                 <a:cs typeface="Inter" pitchFamily="34" charset="-120"/>
               </a:rPr>
-              <a:t>KIA ST GEORGE</a:t>
+              <a:t>VW ST GEORGE</a:t>
             </a:r>
             <a:endParaRPr lang="en-US" sz="1400" dirty="0"/>
           </a:p>
@@ -46312,7 +45174,7 @@
                 <a:ea typeface="Inter" pitchFamily="34" charset="-122"/>
                 <a:cs typeface="Inter" pitchFamily="34" charset="-120"/>
               </a:rPr>
-              <a:t>CP gross, hours/RO, ELR</a:t>
+              <a:t>CP gross, ELR, parts GP%</a:t>
             </a:r>
             <a:endParaRPr lang="en-US" sz="1300" dirty="0"/>
           </a:p>
@@ -46327,7 +45189,7 @@
         <p:spPr>
           <a:xfrm>
             <a:off x="10058400" y="3522269"/>
-            <a:ext cx="720090" cy="234086"/>
+            <a:ext cx="960120" cy="234086"/>
           </a:xfrm>
           <a:prstGeom prst="rect">
             <a:avLst/>
@@ -46464,7 +45326,7 @@
         <p:spPr>
           <a:xfrm>
             <a:off x="10058400" y="4107485"/>
-            <a:ext cx="480060" cy="234086"/>
+            <a:ext cx="640080" cy="234086"/>
           </a:xfrm>
           <a:prstGeom prst="rect">
             <a:avLst/>
@@ -46621,7 +45483,7 @@
         <p:spPr>
           <a:xfrm>
             <a:off x="10058400" y="4692701"/>
-            <a:ext cx="480060" cy="234086"/>
+            <a:ext cx="640080" cy="234086"/>
           </a:xfrm>
           <a:prstGeom prst="rect">
             <a:avLst/>
@@ -46704,7 +45566,7 @@
                 <a:ea typeface="Inter" pitchFamily="34" charset="-122"/>
                 <a:cs typeface="Inter" pitchFamily="34" charset="-120"/>
               </a:rPr>
-              <a:t>HONDA FLAGSTAFF</a:t>
+              <a:t>AUDI RENO</a:t>
             </a:r>
             <a:endParaRPr lang="en-US" sz="1400" dirty="0"/>
           </a:p>
@@ -46743,7 +45605,7 @@
                 <a:ea typeface="Inter" pitchFamily="34" charset="-122"/>
                 <a:cs typeface="Inter" pitchFamily="34" charset="-120"/>
               </a:rPr>
-              <a:t>CP ROs, parts $/RO</a:t>
+              <a:t>ELR, parts GP%</a:t>
             </a:r>
             <a:endParaRPr lang="en-US" sz="1300" dirty="0"/>
           </a:p>
@@ -46758,7 +45620,7 @@
         <p:spPr>
           <a:xfrm>
             <a:off x="10058400" y="5277917"/>
-            <a:ext cx="480060" cy="234086"/>
+            <a:ext cx="640080" cy="234086"/>
           </a:xfrm>
           <a:prstGeom prst="rect">
             <a:avLst/>
@@ -46861,7 +45723,7 @@
                 <a:ea typeface="Inter" pitchFamily="34" charset="-122"/>
                 <a:cs typeface="Inter" pitchFamily="34" charset="-120"/>
               </a:rPr>
-              <a:t>Last year: Three stores tie. Moving now: VW St George leads. Ten stores make both views.</a:t>
+              <a:t>Last year: Subaru Prescott leads. Moving now: Three stores tie. Eight stores make both views.</a:t>
             </a:r>
             <a:endParaRPr lang="en-US" sz="1600" dirty="0"/>
           </a:p>

--- a/day2-deck/decks/Most Improved v2 - Review.pptx
+++ b/day2-deck/decks/Most Improved v2 - Review.pptx
@@ -23783,7 +23783,7 @@
                 <a:ea typeface="Inter" pitchFamily="34" charset="-122"/>
                 <a:cs typeface="Inter" pitchFamily="34" charset="-120"/>
               </a:rPr>
-              <a:t>VW ST GEORGE</a:t>
+              <a:t>ACURA</a:t>
             </a:r>
             <a:endParaRPr lang="en-US" sz="1500" dirty="0"/>
           </a:p>
@@ -23822,7 +23822,7 @@
                 <a:ea typeface="Inter" pitchFamily="34" charset="-122"/>
                 <a:cs typeface="Inter" pitchFamily="34" charset="-120"/>
               </a:rPr>
-              <a:t>CP Parts $ per RO</a:t>
+              <a:t>CP Parts GP %</a:t>
             </a:r>
             <a:endParaRPr lang="en-US" sz="1500" dirty="0"/>
           </a:p>
@@ -23861,7 +23861,7 @@
                 <a:ea typeface="Inter" pitchFamily="34" charset="-122"/>
                 <a:cs typeface="Inter" pitchFamily="34" charset="-120"/>
               </a:rPr>
-              <a:t>$224 → $298</a:t>
+              <a:t>39.4% → 46.6%</a:t>
             </a:r>
             <a:endParaRPr lang="en-US" sz="1500" dirty="0"/>
           </a:p>
@@ -23900,7 +23900,7 @@
                 <a:ea typeface="Inter" pitchFamily="34" charset="-122"/>
                 <a:cs typeface="Inter" pitchFamily="34" charset="-120"/>
               </a:rPr>
-              <a:t>June</a:t>
+              <a:t>April</a:t>
             </a:r>
             <a:endParaRPr lang="en-US" sz="1500" dirty="0"/>
           </a:p>
@@ -23939,7 +23939,7 @@
                 <a:ea typeface="Inter" pitchFamily="34" charset="-122"/>
                 <a:cs typeface="Inter" pitchFamily="34" charset="-120"/>
               </a:rPr>
-              <a:t>+32.9%</a:t>
+              <a:t>+7.2 pts</a:t>
             </a:r>
             <a:endParaRPr lang="en-US" sz="1500" dirty="0"/>
           </a:p>
@@ -23978,7 +23978,7 @@
                 <a:ea typeface="Inter" pitchFamily="34" charset="-122"/>
                 <a:cs typeface="Inter" pitchFamily="34" charset="-120"/>
               </a:rPr>
-              <a:t>ACURA</a:t>
+              <a:t>MAZDA</a:t>
             </a:r>
             <a:endParaRPr lang="en-US" sz="1500" dirty="0"/>
           </a:p>
@@ -24017,7 +24017,7 @@
                 <a:ea typeface="Inter" pitchFamily="34" charset="-122"/>
                 <a:cs typeface="Inter" pitchFamily="34" charset="-120"/>
               </a:rPr>
-              <a:t>CP Parts GP %</a:t>
+              <a:t>Opcodes · alignment</a:t>
             </a:r>
             <a:endParaRPr lang="en-US" sz="1500" dirty="0"/>
           </a:p>
@@ -24056,7 +24056,7 @@
                 <a:ea typeface="Inter" pitchFamily="34" charset="-122"/>
                 <a:cs typeface="Inter" pitchFamily="34" charset="-120"/>
               </a:rPr>
-              <a:t>39.4% → 46.6%</a:t>
+              <a:t>12.6% → 22.8%</a:t>
             </a:r>
             <a:endParaRPr lang="en-US" sz="1500" dirty="0"/>
           </a:p>
@@ -24095,7 +24095,7 @@
                 <a:ea typeface="Inter" pitchFamily="34" charset="-122"/>
                 <a:cs typeface="Inter" pitchFamily="34" charset="-120"/>
               </a:rPr>
-              <a:t>April</a:t>
+              <a:t>August</a:t>
             </a:r>
             <a:endParaRPr lang="en-US" sz="1500" dirty="0"/>
           </a:p>
@@ -24134,7 +24134,7 @@
                 <a:ea typeface="Inter" pitchFamily="34" charset="-122"/>
                 <a:cs typeface="Inter" pitchFamily="34" charset="-120"/>
               </a:rPr>
-              <a:t>+7.2 pts</a:t>
+              <a:t>+10.1 pts</a:t>
             </a:r>
             <a:endParaRPr lang="en-US" sz="1500" dirty="0"/>
           </a:p>
@@ -24143,221 +24143,6 @@
       <p:sp>
         <p:nvSpPr>
           <p:cNvPr id="44" name="Shape 42"/>
-          <p:cNvSpPr/>
-          <p:nvPr/>
-        </p:nvSpPr>
-        <p:spPr>
-          <a:xfrm>
-            <a:off x="621792" y="5065776"/>
-            <a:ext cx="10945368" cy="548640"/>
-          </a:xfrm>
-          <a:prstGeom prst="rect">
-            <a:avLst/>
-          </a:prstGeom>
-          <a:solidFill>
-            <a:srgbClr val="F7F7F7"/>
-          </a:solidFill>
-          <a:ln/>
-        </p:spPr>
-      </p:sp>
-      <p:sp>
-        <p:nvSpPr>
-          <p:cNvPr id="45" name="Text 43"/>
-          <p:cNvSpPr txBox="1"/>
-          <p:nvPr/>
-        </p:nvSpPr>
-        <p:spPr>
-          <a:xfrm>
-            <a:off x="749808" y="5065776"/>
-            <a:ext cx="2651760" cy="548640"/>
-          </a:xfrm>
-          <a:prstGeom prst="rect">
-            <a:avLst/>
-          </a:prstGeom>
-          <a:noFill/>
-          <a:ln/>
-        </p:spPr>
-        <p:txBody>
-          <a:bodyPr wrap="square" lIns="0" tIns="0" rIns="0" bIns="0" rtlCol="0" anchor="ctr"/>
-          <a:lstStyle/>
-          <a:p>
-            <a:pPr indent="0" marL="0">
-              <a:buNone/>
-            </a:pPr>
-            <a:r>
-              <a:rPr lang="en-US" sz="1500" b="1" dirty="0">
-                <a:solidFill>
-                  <a:srgbClr val="1A1A1A"/>
-                </a:solidFill>
-                <a:latin typeface="Inter" pitchFamily="34" charset="0"/>
-                <a:ea typeface="Inter" pitchFamily="34" charset="-122"/>
-                <a:cs typeface="Inter" pitchFamily="34" charset="-120"/>
-              </a:rPr>
-              <a:t>MAZDA</a:t>
-            </a:r>
-            <a:endParaRPr lang="en-US" sz="1500" dirty="0"/>
-          </a:p>
-        </p:txBody>
-      </p:sp>
-      <p:sp>
-        <p:nvSpPr>
-          <p:cNvPr id="46" name="Text 44"/>
-          <p:cNvSpPr txBox="1"/>
-          <p:nvPr/>
-        </p:nvSpPr>
-        <p:spPr>
-          <a:xfrm>
-            <a:off x="3520440" y="5065776"/>
-            <a:ext cx="2103120" cy="548640"/>
-          </a:xfrm>
-          <a:prstGeom prst="rect">
-            <a:avLst/>
-          </a:prstGeom>
-          <a:noFill/>
-          <a:ln/>
-        </p:spPr>
-        <p:txBody>
-          <a:bodyPr wrap="square" lIns="0" tIns="0" rIns="0" bIns="0" rtlCol="0" anchor="ctr"/>
-          <a:lstStyle/>
-          <a:p>
-            <a:pPr indent="0" marL="0">
-              <a:buNone/>
-            </a:pPr>
-            <a:r>
-              <a:rPr lang="en-US" sz="1500" dirty="0">
-                <a:solidFill>
-                  <a:srgbClr val="1A1A1A"/>
-                </a:solidFill>
-                <a:latin typeface="Inter" pitchFamily="34" charset="0"/>
-                <a:ea typeface="Inter" pitchFamily="34" charset="-122"/>
-                <a:cs typeface="Inter" pitchFamily="34" charset="-120"/>
-              </a:rPr>
-              <a:t>Opcodes · alignment</a:t>
-            </a:r>
-            <a:endParaRPr lang="en-US" sz="1500" dirty="0"/>
-          </a:p>
-        </p:txBody>
-      </p:sp>
-      <p:sp>
-        <p:nvSpPr>
-          <p:cNvPr id="47" name="Text 45"/>
-          <p:cNvSpPr txBox="1"/>
-          <p:nvPr/>
-        </p:nvSpPr>
-        <p:spPr>
-          <a:xfrm>
-            <a:off x="5669280" y="5065776"/>
-            <a:ext cx="2011680" cy="548640"/>
-          </a:xfrm>
-          <a:prstGeom prst="rect">
-            <a:avLst/>
-          </a:prstGeom>
-          <a:noFill/>
-          <a:ln/>
-        </p:spPr>
-        <p:txBody>
-          <a:bodyPr wrap="square" lIns="0" tIns="0" rIns="0" bIns="0" rtlCol="0" anchor="ctr"/>
-          <a:lstStyle/>
-          <a:p>
-            <a:pPr indent="0" marL="0">
-              <a:buNone/>
-            </a:pPr>
-            <a:r>
-              <a:rPr lang="en-US" sz="1500" dirty="0">
-                <a:solidFill>
-                  <a:srgbClr val="1A1A1A"/>
-                </a:solidFill>
-                <a:latin typeface="Inter" pitchFamily="34" charset="0"/>
-                <a:ea typeface="Inter" pitchFamily="34" charset="-122"/>
-                <a:cs typeface="Inter" pitchFamily="34" charset="-120"/>
-              </a:rPr>
-              <a:t>12.6% → 22.8%</a:t>
-            </a:r>
-            <a:endParaRPr lang="en-US" sz="1500" dirty="0"/>
-          </a:p>
-        </p:txBody>
-      </p:sp>
-      <p:sp>
-        <p:nvSpPr>
-          <p:cNvPr id="48" name="Text 46"/>
-          <p:cNvSpPr txBox="1"/>
-          <p:nvPr/>
-        </p:nvSpPr>
-        <p:spPr>
-          <a:xfrm>
-            <a:off x="7726680" y="5065776"/>
-            <a:ext cx="1554480" cy="548640"/>
-          </a:xfrm>
-          <a:prstGeom prst="rect">
-            <a:avLst/>
-          </a:prstGeom>
-          <a:noFill/>
-          <a:ln/>
-        </p:spPr>
-        <p:txBody>
-          <a:bodyPr wrap="square" lIns="0" tIns="0" rIns="0" bIns="0" rtlCol="0" anchor="ctr"/>
-          <a:lstStyle/>
-          <a:p>
-            <a:pPr indent="0" marL="0">
-              <a:buNone/>
-            </a:pPr>
-            <a:r>
-              <a:rPr lang="en-US" sz="1500" b="1" dirty="0">
-                <a:solidFill>
-                  <a:srgbClr val="0B2C4A"/>
-                </a:solidFill>
-                <a:latin typeface="Inter" pitchFamily="34" charset="0"/>
-                <a:ea typeface="Inter" pitchFamily="34" charset="-122"/>
-                <a:cs typeface="Inter" pitchFamily="34" charset="-120"/>
-              </a:rPr>
-              <a:t>August</a:t>
-            </a:r>
-            <a:endParaRPr lang="en-US" sz="1500" dirty="0"/>
-          </a:p>
-        </p:txBody>
-      </p:sp>
-      <p:sp>
-        <p:nvSpPr>
-          <p:cNvPr id="49" name="Text 47"/>
-          <p:cNvSpPr txBox="1"/>
-          <p:nvPr/>
-        </p:nvSpPr>
-        <p:spPr>
-          <a:xfrm>
-            <a:off x="9326880" y="5065776"/>
-            <a:ext cx="1280160" cy="548640"/>
-          </a:xfrm>
-          <a:prstGeom prst="rect">
-            <a:avLst/>
-          </a:prstGeom>
-          <a:noFill/>
-          <a:ln/>
-        </p:spPr>
-        <p:txBody>
-          <a:bodyPr wrap="square" lIns="0" tIns="0" rIns="0" bIns="0" rtlCol="0" anchor="ctr"/>
-          <a:lstStyle/>
-          <a:p>
-            <a:pPr indent="0" marL="0">
-              <a:buNone/>
-            </a:pPr>
-            <a:r>
-              <a:rPr lang="en-US" sz="1500" b="1" dirty="0">
-                <a:solidFill>
-                  <a:srgbClr val="0B7A4A"/>
-                </a:solidFill>
-                <a:latin typeface="Inter" pitchFamily="34" charset="0"/>
-                <a:ea typeface="Inter" pitchFamily="34" charset="-122"/>
-                <a:cs typeface="Inter" pitchFamily="34" charset="-120"/>
-              </a:rPr>
-              <a:t>+10.1 pts</a:t>
-            </a:r>
-            <a:endParaRPr lang="en-US" sz="1500" dirty="0"/>
-          </a:p>
-        </p:txBody>
-      </p:sp>
-      <p:sp>
-        <p:nvSpPr>
-          <p:cNvPr id="50" name="Shape 48"/>
           <p:cNvSpPr/>
           <p:nvPr/>
         </p:nvSpPr>
@@ -24377,7 +24162,7 @@
       </p:sp>
       <p:sp>
         <p:nvSpPr>
-          <p:cNvPr id="51" name="Text 49"/>
+          <p:cNvPr id="45" name="Text 43"/>
           <p:cNvSpPr txBox="1"/>
           <p:nvPr/>
         </p:nvSpPr>

--- a/day2-deck/decks/Most Improved v2 - Review.pptx
+++ b/day2-deck/decks/Most Improved v2 - Review.pptx
@@ -17977,7 +17977,7 @@
 CP RO Count: top KIA LV 7,156 → 8,133; HYUNDAI PRESCOTT 1,784 → 2,010; GMC PRESCOTT 2,810 → 3,107. Bottom AUDI RENO 4,379 → 3,917; HYUNDAI ST GEORGE 3,784 → 3,349; VW ST GEORGE 2,251 → 1,919.
 CP Hours per RO: top HYUNDAI ST GEORGE 1.03 → 1.43; SUBARU ST GEORGE 1.75 → 2.30; KIA ST GEORGE 0.99 → 1.29. Bottom VOLVO 2.58 → 2.28; VW ST GEORGE 1.95 → 1.71; LR RENO 4.04 → 3.48.
 CP ELR: top HONDA SPOKANE $117.05 → $143.89; VOLVO $181.59 → $222.12; LINCOLN $139.55 → $167.64. Bottom ACURA $221.78 → $210.50; SUBARU ST GEORGE $148.84 → $138.48; KIA LV $184.36 → $149.23.
-CP Parts GP %: top ACURA 38.7% → 44.9%; NISSAN 38.2% → 42.7%; SUBARU PRESCOTT 31.0% → 34.8%. Bottom HYUNDAI PRESCOTT 39.9% → 39.4%; TOYOTA SPOKANE 45.3% → 44.5%; AUDI HENDERSON 35.8% → 33.6%.Source: Qlik - Closed Repair Orders. Customer pay, by close date. Same-store, 33 stores (INEOS excluded, opened 2026). GMC Prescott body shop labor types excluded. CP gross = CP labor gross + CP parts gross. Change is Jan-Sep 2026 vs Jan-Sep 2025. Ranked by percent change (points for parts GP %), so store size does not drive the ranking.</a:t>
+CP Parts GP %: top ACURA 38.7% → 44.9%; NISSAN 38.2% → 42.7%; SUBARU PRESCOTT 31.0% → 34.8%. Bottom HYUNDAI PRESCOTT 39.9% → 39.4%; TOYOTA SPOKANE 45.3% → 44.5%; AUDI HENDERSON 35.8% → 33.6%.Takeaway (off the slide): Most top-three finishes: Lincoln, Subaru Prescott and Subaru St George (2 of 5). Most bottom-three: VW St George (3 of 5).Source: Qlik - Closed Repair Orders. Customer pay, by close date. Same-store, 33 stores (INEOS excluded, opened 2026). GMC Prescott body shop labor types excluded. CP gross = CP labor gross + CP parts gross. Change is Jan-Sep 2026 vs Jan-Sep 2025. Ranked by percent change (points for parts GP %), so store size does not drive the ranking.</a:t>
             </a:r>
             <a:endParaRPr lang="en-US" dirty="0"/>
           </a:p>
@@ -18160,7 +18160,7 @@
 CP ROs per Month: top LEXUS 425 → 570; CDJR POST FALLS 543 → 667; LR LV 350 → 415. Bottom VW ST GEORGE 207 → 203; HYUNDAI ST GEORGE 377 → 365; CADILLAC 609 → 582.
 CP Hours per RO: top MAZDA 1.35 → 1.65; HYUNDAI PRESCOTT 1.56 → 1.76; HYUNDAI ST GEORGE 1.37 → 1.54. Bottom HONDA HENDERSON 2.06 → 1.86; VW HENDERSON 2.66 → 2.37; CADILLAC 2.85 → 2.45.
 CP ELR: top VW ST GEORGE $128.27 → $141.89; AUDI RENO $227.34 → $244.12; HONDA SPOKANE $139.40 → $147.93. Bottom SUBARU ST GEORGE $141.07 → $136.71; LEXUS $196.84 → $187.42; ACURA $232.02 → $199.04.
-CP Parts GP %: top ACURA 39.4% → 46.6%; VW ST GEORGE 39.1% → 43.8%; GMC PRESCOTT 35.3% → 39.2%. Bottom CHEVY LV 38.2% → 35.0%; LINCOLN 39.9% → 36.0%; HONDA HENDERSON 44.3% → 40.0%.Source: Qlik - Closed Repair Orders. Customer pay, by close date. Same-store, 33 stores (INEOS excluded, opened 2026). GMC Prescott body shop labor types excluded. CP gross = CP labor gross + CP parts gross. Change is Jul-Sep 2026 (Q3) vs Jan-Mar 2026 (Q1), each store against itself. Gross and ROs are per-month averages of each quarter. The group's own Q1-to-Q3 change is the seasonal baseline: it is the same for every store, so ranking by a store's change is the same as ranking by how far it beat the group. 'Stepped up in' = the month that best splits the store's year into a lower stretch before and a higher stretch after (at least three months before, two after). It is a conversation starter, not proof of cause.</a:t>
+CP Parts GP %: top ACURA 39.4% → 46.6%; VW ST GEORGE 39.1% → 43.8%; GMC PRESCOTT 35.3% → 39.2%. Bottom CHEVY LV 38.2% → 35.0%; LINCOLN 39.9% → 36.0%; HONDA HENDERSON 44.3% → 40.0%.Takeaway (off the slide): Most top-three finishes: Mazda, CDJR Post Falls and VW St George (2 of 5). Most bottom-three: Honda Henderson and Cadillac (3 of 5).Source: Qlik - Closed Repair Orders. Customer pay, by close date. Same-store, 33 stores (INEOS excluded, opened 2026). GMC Prescott body shop labor types excluded. CP gross = CP labor gross + CP parts gross. Change is Jul-Sep 2026 (Q3) vs Jan-Mar 2026 (Q1), each store against itself. Gross and ROs are per-month averages of each quarter. The group's own Q1-to-Q3 change is the seasonal baseline: it is the same for every store, so ranking by a store's change is the same as ranking by how far it beat the group. 'Stepped up in' = the month that best splits the store's year into a lower stretch before and a higher stretch after (at least three months before, two after). It is a conversation starter, not proof of cause.</a:t>
             </a:r>
             <a:endParaRPr lang="en-US" dirty="0"/>
           </a:p>
@@ -18248,7 +18248,7 @@
           <a:p>
             <a:r>
               <a:rPr lang="en-US" dirty="0"/>
-              <a:t>Source: Qlik - Closed Repair Orders. Customer pay, by close date. Same-store, 33 stores (INEOS excluded, opened 2026). GMC Prescott body shop labor types excluded. CP gross = CP labor gross + CP parts gross. Change is Jul-Sep 2026 (Q3) vs Jan-Mar 2026 (Q1), each store against itself. Gross and ROs are per-month averages of each quarter. The group's own Q1-to-Q3 change is the seasonal baseline: it is the same for every store, so ranking by a store's change is the same as ranking by how far it beat the group. 'Stepped up in' = the month that best splits the store's year into a lower stretch before and a higher stretch after (at least three months before, two after). It is a conversation starter, not proof of cause.
+              <a:t>Takeaway (off the slide): Mazda went $155K to $209K, stepping up in August. Ask what changed that month.Source: Qlik - Closed Repair Orders. Customer pay, by close date. Same-store, 33 stores (INEOS excluded, opened 2026). GMC Prescott body shop labor types excluded. CP gross = CP labor gross + CP parts gross. Change is Jul-Sep 2026 (Q3) vs Jan-Mar 2026 (Q1), each store against itself. Gross and ROs are per-month averages of each quarter. The group's own Q1-to-Q3 change is the seasonal baseline: it is the same for every store, so ranking by a store's change is the same as ranking by how far it beat the group. 'Stepped up in' = the month that best splits the store's year into a lower stretch before and a higher stretch after (at least three months before, two after). It is a conversation starter, not proof of cause.
 Review note: the month line is the store's own monthly cp gross per month, so a step up shows as the line moving to a higher level and staying there. Volume measures (gross, ROs) still carry some store-specific seasonality (snowbird markets) the group baseline cannot fully remove; the rate measures are the cleanest read.</a:t>
             </a:r>
             <a:endParaRPr lang="en-US" dirty="0"/>
@@ -18337,7 +18337,7 @@
           <a:p>
             <a:r>
               <a:rPr lang="en-US" dirty="0"/>
-              <a:t>Source: Qlik - Closed Repair Orders. Customer pay, by close date. Same-store, 33 stores (INEOS excluded, opened 2026). GMC Prescott body shop labor types excluded. CP gross = CP labor gross + CP parts gross. Change is Jul-Sep 2026 (Q3) vs Jan-Mar 2026 (Q1), each store against itself. Gross and ROs are per-month averages of each quarter. The group's own Q1-to-Q3 change is the seasonal baseline: it is the same for every store, so ranking by a store's change is the same as ranking by how far it beat the group. 'Stepped up in' = the month that best splits the store's year into a lower stretch before and a higher stretch after (at least three months before, two after). It is a conversation starter, not proof of cause.
+              <a:t>Takeaway (off the slide): Lexus went 425 to 570, stepping up in April. Ask what changed that month.Source: Qlik - Closed Repair Orders. Customer pay, by close date. Same-store, 33 stores (INEOS excluded, opened 2026). GMC Prescott body shop labor types excluded. CP gross = CP labor gross + CP parts gross. Change is Jul-Sep 2026 (Q3) vs Jan-Mar 2026 (Q1), each store against itself. Gross and ROs are per-month averages of each quarter. The group's own Q1-to-Q3 change is the seasonal baseline: it is the same for every store, so ranking by a store's change is the same as ranking by how far it beat the group. 'Stepped up in' = the month that best splits the store's year into a lower stretch before and a higher stretch after (at least three months before, two after). It is a conversation starter, not proof of cause.
 Review note: the month line is the store's own monthly cp ros per month, so a step up shows as the line moving to a higher level and staying there. Volume measures (gross, ROs) still carry some store-specific seasonality (snowbird markets) the group baseline cannot fully remove; the rate measures are the cleanest read.</a:t>
             </a:r>
             <a:endParaRPr lang="en-US" dirty="0"/>
@@ -18426,7 +18426,7 @@
           <a:p>
             <a:r>
               <a:rPr lang="en-US" dirty="0"/>
-              <a:t>Source: Qlik - Closed Repair Orders. Customer pay, by close date. Same-store, 33 stores (INEOS excluded, opened 2026). GMC Prescott body shop labor types excluded. CP gross = CP labor gross + CP parts gross. Change is Jul-Sep 2026 (Q3) vs Jan-Mar 2026 (Q1), each store against itself. Gross and ROs are per-month averages of each quarter. The group's own Q1-to-Q3 change is the seasonal baseline: it is the same for every store, so ranking by a store's change is the same as ranking by how far it beat the group. 'Stepped up in' = the month that best splits the store's year into a lower stretch before and a higher stretch after (at least three months before, two after). It is a conversation starter, not proof of cause.
+              <a:t>Takeaway (off the slide): Mazda went 1.35 to 1.65, stepping up in August. Ask what changed that month.Source: Qlik - Closed Repair Orders. Customer pay, by close date. Same-store, 33 stores (INEOS excluded, opened 2026). GMC Prescott body shop labor types excluded. CP gross = CP labor gross + CP parts gross. Change is Jul-Sep 2026 (Q3) vs Jan-Mar 2026 (Q1), each store against itself. Gross and ROs are per-month averages of each quarter. The group's own Q1-to-Q3 change is the seasonal baseline: it is the same for every store, so ranking by a store's change is the same as ranking by how far it beat the group. 'Stepped up in' = the month that best splits the store's year into a lower stretch before and a higher stretch after (at least three months before, two after). It is a conversation starter, not proof of cause.
 Review note: the month line is the store's own monthly cp hours per ro, so a step up shows as the line moving to a higher level and staying there. Volume measures (gross, ROs) still carry some store-specific seasonality (snowbird markets) the group baseline cannot fully remove; the rate measures are the cleanest read.</a:t>
             </a:r>
             <a:endParaRPr lang="en-US" dirty="0"/>
@@ -18515,7 +18515,7 @@
           <a:p>
             <a:r>
               <a:rPr lang="en-US" dirty="0"/>
-              <a:t>Source: Qlik - Closed Repair Orders. Customer pay, by close date. Same-store, 33 stores (INEOS excluded, opened 2026). GMC Prescott body shop labor types excluded. CP gross = CP labor gross + CP parts gross. Change is Jul-Sep 2026 (Q3) vs Jan-Mar 2026 (Q1), each store against itself. Gross and ROs are per-month averages of each quarter. The group's own Q1-to-Q3 change is the seasonal baseline: it is the same for every store, so ranking by a store's change is the same as ranking by how far it beat the group. 'Stepped up in' = the month that best splits the store's year into a lower stretch before and a higher stretch after (at least three months before, two after). It is a conversation starter, not proof of cause.
+              <a:t>Takeaway (off the slide): VW St George went $128.27 to $141.89, stepping up in June. Ask what changed that month.Source: Qlik - Closed Repair Orders. Customer pay, by close date. Same-store, 33 stores (INEOS excluded, opened 2026). GMC Prescott body shop labor types excluded. CP gross = CP labor gross + CP parts gross. Change is Jul-Sep 2026 (Q3) vs Jan-Mar 2026 (Q1), each store against itself. Gross and ROs are per-month averages of each quarter. The group's own Q1-to-Q3 change is the seasonal baseline: it is the same for every store, so ranking by a store's change is the same as ranking by how far it beat the group. 'Stepped up in' = the month that best splits the store's year into a lower stretch before and a higher stretch after (at least three months before, two after). It is a conversation starter, not proof of cause.
 Review note: the month line is the store's own monthly cp elr, so a step up shows as the line moving to a higher level and staying there. Volume measures (gross, ROs) still carry some store-specific seasonality (snowbird markets) the group baseline cannot fully remove; the rate measures are the cleanest read.</a:t>
             </a:r>
             <a:endParaRPr lang="en-US" dirty="0"/>
@@ -18604,7 +18604,7 @@
           <a:p>
             <a:r>
               <a:rPr lang="en-US" dirty="0"/>
-              <a:t>Source: Qlik - Closed Repair Orders. Customer pay, by close date. Same-store, 33 stores (INEOS excluded, opened 2026). GMC Prescott body shop labor types excluded. CP gross = CP labor gross + CP parts gross. Change is Jul-Sep 2026 (Q3) vs Jan-Mar 2026 (Q1), each store against itself. Gross and ROs are per-month averages of each quarter. The group's own Q1-to-Q3 change is the seasonal baseline: it is the same for every store, so ranking by a store's change is the same as ranking by how far it beat the group. 'Stepped up in' = the month that best splits the store's year into a lower stretch before and a higher stretch after (at least three months before, two after). It is a conversation starter, not proof of cause.
+              <a:t>Takeaway (off the slide): VW St George went $224 to $298, stepping up in June. Ask what changed that month.Source: Qlik - Closed Repair Orders. Customer pay, by close date. Same-store, 33 stores (INEOS excluded, opened 2026). GMC Prescott body shop labor types excluded. CP gross = CP labor gross + CP parts gross. Change is Jul-Sep 2026 (Q3) vs Jan-Mar 2026 (Q1), each store against itself. Gross and ROs are per-month averages of each quarter. The group's own Q1-to-Q3 change is the seasonal baseline: it is the same for every store, so ranking by a store's change is the same as ranking by how far it beat the group. 'Stepped up in' = the month that best splits the store's year into a lower stretch before and a higher stretch after (at least three months before, two after). It is a conversation starter, not proof of cause.
 Review note: the month line is the store's own monthly cp parts $ per ro, so a step up shows as the line moving to a higher level and staying there. Volume measures (gross, ROs) still carry some store-specific seasonality (snowbird markets) the group baseline cannot fully remove; the rate measures are the cleanest read.</a:t>
             </a:r>
             <a:endParaRPr lang="en-US" dirty="0"/>
@@ -18693,7 +18693,7 @@
           <a:p>
             <a:r>
               <a:rPr lang="en-US" dirty="0"/>
-              <a:t>Source: Qlik - Closed Repair Orders. Customer pay, by close date. Same-store, 33 stores (INEOS excluded, opened 2026). GMC Prescott body shop labor types excluded. CP gross = CP labor gross + CP parts gross. Change is Jul-Sep 2026 (Q3) vs Jan-Mar 2026 (Q1), each store against itself. Gross and ROs are per-month averages of each quarter. The group's own Q1-to-Q3 change is the seasonal baseline: it is the same for every store, so ranking by a store's change is the same as ranking by how far it beat the group. 'Stepped up in' = the month that best splits the store's year into a lower stretch before and a higher stretch after (at least three months before, two after). It is a conversation starter, not proof of cause.
+              <a:t>Takeaway (off the slide): Acura went 39.4% to 46.6%, stepping up in April. Ask what changed that month.Source: Qlik - Closed Repair Orders. Customer pay, by close date. Same-store, 33 stores (INEOS excluded, opened 2026). GMC Prescott body shop labor types excluded. CP gross = CP labor gross + CP parts gross. Change is Jul-Sep 2026 (Q3) vs Jan-Mar 2026 (Q1), each store against itself. Gross and ROs are per-month averages of each quarter. The group's own Q1-to-Q3 change is the seasonal baseline: it is the same for every store, so ranking by a store's change is the same as ranking by how far it beat the group. 'Stepped up in' = the month that best splits the store's year into a lower stretch before and a higher stretch after (at least three months before, two after). It is a conversation starter, not proof of cause.
 Review note: the month line is the store's own monthly cp parts gp %, so a step up shows as the line moving to a higher level and staying there. Volume measures (gross, ROs) still carry some store-specific seasonality (snowbird markets) the group baseline cannot fully remove; the rate measures are the cleanest read.</a:t>
             </a:r>
             <a:endParaRPr lang="en-US" dirty="0"/>
@@ -18782,7 +18782,7 @@
           <a:p>
             <a:r>
               <a:rPr lang="en-US" dirty="0"/>
-              <a:t>Source: Qlik - Closed Repair Orders. Customer pay, by close date. Same-store, 33 stores (INEOS excluded, opened 2026). GMC Prescott body shop labor types excluded. CP gross = CP labor gross + CP parts gross. Left: Jan-Sep 2026 vs Jan-Sep 2025. Right: Q3 2026 vs Q1 2026. Top-5 finishes counted across five measures (parts $ per RO dropped, Oct 23); top six stores shown in each view.</a:t>
+              <a:t>Takeaway (off the slide): Last year: Subaru Prescott leads. Moving now: Three stores tie. Eight stores make both views.Source: Qlik - Closed Repair Orders. Customer pay, by close date. Same-store, 33 stores (INEOS excluded, opened 2026). GMC Prescott body shop labor types excluded. CP gross = CP labor gross + CP parts gross. Left: Jan-Sep 2026 vs Jan-Sep 2025. Right: Q3 2026 vs Q1 2026. Top-5 finishes counted across five measures (parts $ per RO dropped, Oct 23); top six stores shown in each view.</a:t>
             </a:r>
             <a:endParaRPr lang="en-US" dirty="0"/>
           </a:p>
@@ -22506,65 +22506,6 @@
           </a:p>
         </p:txBody>
       </p:sp>
-      <p:sp>
-        <p:nvSpPr>
-          <p:cNvPr id="95" name="Shape 92"/>
-          <p:cNvSpPr/>
-          <p:nvPr/>
-        </p:nvSpPr>
-        <p:spPr>
-          <a:xfrm>
-            <a:off x="457200" y="6126480"/>
-            <a:ext cx="11274552" cy="615696"/>
-          </a:xfrm>
-          <a:prstGeom prst="rect">
-            <a:avLst/>
-          </a:prstGeom>
-          <a:solidFill>
-            <a:srgbClr val="EDF4FA"/>
-          </a:solidFill>
-          <a:ln/>
-        </p:spPr>
-      </p:sp>
-      <p:sp>
-        <p:nvSpPr>
-          <p:cNvPr id="96" name="Text 93"/>
-          <p:cNvSpPr txBox="1"/>
-          <p:nvPr/>
-        </p:nvSpPr>
-        <p:spPr>
-          <a:xfrm>
-            <a:off x="658368" y="6144768"/>
-            <a:ext cx="10927080" cy="579120"/>
-          </a:xfrm>
-          <a:prstGeom prst="rect">
-            <a:avLst/>
-          </a:prstGeom>
-          <a:noFill/>
-          <a:ln/>
-        </p:spPr>
-        <p:txBody>
-          <a:bodyPr wrap="square" lIns="0" tIns="0" rIns="0" bIns="0" rtlCol="0" anchor="ctr"/>
-          <a:lstStyle/>
-          <a:p>
-            <a:pPr indent="0" marL="0">
-              <a:buNone/>
-            </a:pPr>
-            <a:r>
-              <a:rPr lang="en-US" sz="1600" b="1" dirty="0">
-                <a:solidFill>
-                  <a:srgbClr val="0B2C4A"/>
-                </a:solidFill>
-                <a:latin typeface="Inter" pitchFamily="34" charset="0"/>
-                <a:ea typeface="Inter" pitchFamily="34" charset="-122"/>
-                <a:cs typeface="Inter" pitchFamily="34" charset="-120"/>
-              </a:rPr>
-              <a:t>Most top-three finishes: Lincoln, Subaru Prescott and Subaru St George (2 of 5). Most bottom-three: VW St George (3 of 5).</a:t>
-            </a:r>
-            <a:endParaRPr lang="en-US" sz="1600" dirty="0"/>
-          </a:p>
-        </p:txBody>
-      </p:sp>
     </p:spTree>
   </p:cSld>
   <p:clrMapOvr>
@@ -27582,65 +27523,6 @@
           </a:p>
         </p:txBody>
       </p:sp>
-      <p:sp>
-        <p:nvSpPr>
-          <p:cNvPr id="95" name="Shape 92"/>
-          <p:cNvSpPr/>
-          <p:nvPr/>
-        </p:nvSpPr>
-        <p:spPr>
-          <a:xfrm>
-            <a:off x="457200" y="6126480"/>
-            <a:ext cx="11274552" cy="615696"/>
-          </a:xfrm>
-          <a:prstGeom prst="rect">
-            <a:avLst/>
-          </a:prstGeom>
-          <a:solidFill>
-            <a:srgbClr val="EDF4FA"/>
-          </a:solidFill>
-          <a:ln/>
-        </p:spPr>
-      </p:sp>
-      <p:sp>
-        <p:nvSpPr>
-          <p:cNvPr id="96" name="Text 93"/>
-          <p:cNvSpPr txBox="1"/>
-          <p:nvPr/>
-        </p:nvSpPr>
-        <p:spPr>
-          <a:xfrm>
-            <a:off x="658368" y="6144768"/>
-            <a:ext cx="10927080" cy="579120"/>
-          </a:xfrm>
-          <a:prstGeom prst="rect">
-            <a:avLst/>
-          </a:prstGeom>
-          <a:noFill/>
-          <a:ln/>
-        </p:spPr>
-        <p:txBody>
-          <a:bodyPr wrap="square" lIns="0" tIns="0" rIns="0" bIns="0" rtlCol="0" anchor="ctr"/>
-          <a:lstStyle/>
-          <a:p>
-            <a:pPr indent="0" marL="0">
-              <a:buNone/>
-            </a:pPr>
-            <a:r>
-              <a:rPr lang="en-US" sz="1600" b="1" dirty="0">
-                <a:solidFill>
-                  <a:srgbClr val="0B2C4A"/>
-                </a:solidFill>
-                <a:latin typeface="Inter" pitchFamily="34" charset="0"/>
-                <a:ea typeface="Inter" pitchFamily="34" charset="-122"/>
-                <a:cs typeface="Inter" pitchFamily="34" charset="-120"/>
-              </a:rPr>
-              <a:t>Most top-three finishes: Mazda, CDJR Post Falls and VW St George (2 of 5). Most bottom-three: Honda Henderson and Cadillac (3 of 5).</a:t>
-            </a:r>
-            <a:endParaRPr lang="en-US" sz="1600" dirty="0"/>
-          </a:p>
-        </p:txBody>
-      </p:sp>
     </p:spTree>
   </p:cSld>
   <p:clrMapOvr>
@@ -30196,65 +30078,6 @@
           </a:p>
         </p:txBody>
       </p:sp>
-      <p:sp>
-        <p:nvSpPr>
-          <p:cNvPr id="76" name="Shape 64"/>
-          <p:cNvSpPr/>
-          <p:nvPr/>
-        </p:nvSpPr>
-        <p:spPr>
-          <a:xfrm>
-            <a:off x="457200" y="6126480"/>
-            <a:ext cx="11274552" cy="371856"/>
-          </a:xfrm>
-          <a:prstGeom prst="rect">
-            <a:avLst/>
-          </a:prstGeom>
-          <a:solidFill>
-            <a:srgbClr val="E6F6EE"/>
-          </a:solidFill>
-          <a:ln/>
-        </p:spPr>
-      </p:sp>
-      <p:sp>
-        <p:nvSpPr>
-          <p:cNvPr id="77" name="Text 65"/>
-          <p:cNvSpPr txBox="1"/>
-          <p:nvPr/>
-        </p:nvSpPr>
-        <p:spPr>
-          <a:xfrm>
-            <a:off x="658368" y="6144768"/>
-            <a:ext cx="10927080" cy="335280"/>
-          </a:xfrm>
-          <a:prstGeom prst="rect">
-            <a:avLst/>
-          </a:prstGeom>
-          <a:noFill/>
-          <a:ln/>
-        </p:spPr>
-        <p:txBody>
-          <a:bodyPr wrap="square" lIns="0" tIns="0" rIns="0" bIns="0" rtlCol="0" anchor="ctr"/>
-          <a:lstStyle/>
-          <a:p>
-            <a:pPr indent="0" marL="0">
-              <a:buNone/>
-            </a:pPr>
-            <a:r>
-              <a:rPr lang="en-US" sz="1600" b="1" dirty="0">
-                <a:solidFill>
-                  <a:srgbClr val="0B7A4A"/>
-                </a:solidFill>
-                <a:latin typeface="Inter" pitchFamily="34" charset="0"/>
-                <a:ea typeface="Inter" pitchFamily="34" charset="-122"/>
-                <a:cs typeface="Inter" pitchFamily="34" charset="-120"/>
-              </a:rPr>
-              <a:t>Mazda went $155K to $209K, stepping up in August. Ask what changed that month.</a:t>
-            </a:r>
-            <a:endParaRPr lang="en-US" sz="1600" dirty="0"/>
-          </a:p>
-        </p:txBody>
-      </p:sp>
     </p:spTree>
   </p:cSld>
   <p:clrMapOvr>
@@ -32810,65 +32633,6 @@
           </a:p>
         </p:txBody>
       </p:sp>
-      <p:sp>
-        <p:nvSpPr>
-          <p:cNvPr id="76" name="Shape 64"/>
-          <p:cNvSpPr/>
-          <p:nvPr/>
-        </p:nvSpPr>
-        <p:spPr>
-          <a:xfrm>
-            <a:off x="457200" y="6126480"/>
-            <a:ext cx="11274552" cy="371856"/>
-          </a:xfrm>
-          <a:prstGeom prst="rect">
-            <a:avLst/>
-          </a:prstGeom>
-          <a:solidFill>
-            <a:srgbClr val="E6F6EE"/>
-          </a:solidFill>
-          <a:ln/>
-        </p:spPr>
-      </p:sp>
-      <p:sp>
-        <p:nvSpPr>
-          <p:cNvPr id="77" name="Text 65"/>
-          <p:cNvSpPr txBox="1"/>
-          <p:nvPr/>
-        </p:nvSpPr>
-        <p:spPr>
-          <a:xfrm>
-            <a:off x="658368" y="6144768"/>
-            <a:ext cx="10927080" cy="335280"/>
-          </a:xfrm>
-          <a:prstGeom prst="rect">
-            <a:avLst/>
-          </a:prstGeom>
-          <a:noFill/>
-          <a:ln/>
-        </p:spPr>
-        <p:txBody>
-          <a:bodyPr wrap="square" lIns="0" tIns="0" rIns="0" bIns="0" rtlCol="0" anchor="ctr"/>
-          <a:lstStyle/>
-          <a:p>
-            <a:pPr indent="0" marL="0">
-              <a:buNone/>
-            </a:pPr>
-            <a:r>
-              <a:rPr lang="en-US" sz="1600" b="1" dirty="0">
-                <a:solidFill>
-                  <a:srgbClr val="0B7A4A"/>
-                </a:solidFill>
-                <a:latin typeface="Inter" pitchFamily="34" charset="0"/>
-                <a:ea typeface="Inter" pitchFamily="34" charset="-122"/>
-                <a:cs typeface="Inter" pitchFamily="34" charset="-120"/>
-              </a:rPr>
-              <a:t>Lexus went 425 to 570, stepping up in April. Ask what changed that month.</a:t>
-            </a:r>
-            <a:endParaRPr lang="en-US" sz="1600" dirty="0"/>
-          </a:p>
-        </p:txBody>
-      </p:sp>
     </p:spTree>
   </p:cSld>
   <p:clrMapOvr>
@@ -35424,65 +35188,6 @@
           </a:p>
         </p:txBody>
       </p:sp>
-      <p:sp>
-        <p:nvSpPr>
-          <p:cNvPr id="76" name="Shape 64"/>
-          <p:cNvSpPr/>
-          <p:nvPr/>
-        </p:nvSpPr>
-        <p:spPr>
-          <a:xfrm>
-            <a:off x="457200" y="6126480"/>
-            <a:ext cx="11274552" cy="371856"/>
-          </a:xfrm>
-          <a:prstGeom prst="rect">
-            <a:avLst/>
-          </a:prstGeom>
-          <a:solidFill>
-            <a:srgbClr val="E6F6EE"/>
-          </a:solidFill>
-          <a:ln/>
-        </p:spPr>
-      </p:sp>
-      <p:sp>
-        <p:nvSpPr>
-          <p:cNvPr id="77" name="Text 65"/>
-          <p:cNvSpPr txBox="1"/>
-          <p:nvPr/>
-        </p:nvSpPr>
-        <p:spPr>
-          <a:xfrm>
-            <a:off x="658368" y="6144768"/>
-            <a:ext cx="10927080" cy="335280"/>
-          </a:xfrm>
-          <a:prstGeom prst="rect">
-            <a:avLst/>
-          </a:prstGeom>
-          <a:noFill/>
-          <a:ln/>
-        </p:spPr>
-        <p:txBody>
-          <a:bodyPr wrap="square" lIns="0" tIns="0" rIns="0" bIns="0" rtlCol="0" anchor="ctr"/>
-          <a:lstStyle/>
-          <a:p>
-            <a:pPr indent="0" marL="0">
-              <a:buNone/>
-            </a:pPr>
-            <a:r>
-              <a:rPr lang="en-US" sz="1600" b="1" dirty="0">
-                <a:solidFill>
-                  <a:srgbClr val="0B7A4A"/>
-                </a:solidFill>
-                <a:latin typeface="Inter" pitchFamily="34" charset="0"/>
-                <a:ea typeface="Inter" pitchFamily="34" charset="-122"/>
-                <a:cs typeface="Inter" pitchFamily="34" charset="-120"/>
-              </a:rPr>
-              <a:t>Mazda went 1.35 to 1.65, stepping up in August. Ask what changed that month.</a:t>
-            </a:r>
-            <a:endParaRPr lang="en-US" sz="1600" dirty="0"/>
-          </a:p>
-        </p:txBody>
-      </p:sp>
     </p:spTree>
   </p:cSld>
   <p:clrMapOvr>
@@ -38038,65 +37743,6 @@
           </a:p>
         </p:txBody>
       </p:sp>
-      <p:sp>
-        <p:nvSpPr>
-          <p:cNvPr id="76" name="Shape 64"/>
-          <p:cNvSpPr/>
-          <p:nvPr/>
-        </p:nvSpPr>
-        <p:spPr>
-          <a:xfrm>
-            <a:off x="457200" y="6126480"/>
-            <a:ext cx="11274552" cy="371856"/>
-          </a:xfrm>
-          <a:prstGeom prst="rect">
-            <a:avLst/>
-          </a:prstGeom>
-          <a:solidFill>
-            <a:srgbClr val="E6F6EE"/>
-          </a:solidFill>
-          <a:ln/>
-        </p:spPr>
-      </p:sp>
-      <p:sp>
-        <p:nvSpPr>
-          <p:cNvPr id="77" name="Text 65"/>
-          <p:cNvSpPr txBox="1"/>
-          <p:nvPr/>
-        </p:nvSpPr>
-        <p:spPr>
-          <a:xfrm>
-            <a:off x="658368" y="6144768"/>
-            <a:ext cx="10927080" cy="335280"/>
-          </a:xfrm>
-          <a:prstGeom prst="rect">
-            <a:avLst/>
-          </a:prstGeom>
-          <a:noFill/>
-          <a:ln/>
-        </p:spPr>
-        <p:txBody>
-          <a:bodyPr wrap="square" lIns="0" tIns="0" rIns="0" bIns="0" rtlCol="0" anchor="ctr"/>
-          <a:lstStyle/>
-          <a:p>
-            <a:pPr indent="0" marL="0">
-              <a:buNone/>
-            </a:pPr>
-            <a:r>
-              <a:rPr lang="en-US" sz="1600" b="1" dirty="0">
-                <a:solidFill>
-                  <a:srgbClr val="0B7A4A"/>
-                </a:solidFill>
-                <a:latin typeface="Inter" pitchFamily="34" charset="0"/>
-                <a:ea typeface="Inter" pitchFamily="34" charset="-122"/>
-                <a:cs typeface="Inter" pitchFamily="34" charset="-120"/>
-              </a:rPr>
-              <a:t>VW St George went $128.27 to $141.89, stepping up in June. Ask what changed that month.</a:t>
-            </a:r>
-            <a:endParaRPr lang="en-US" sz="1600" dirty="0"/>
-          </a:p>
-        </p:txBody>
-      </p:sp>
     </p:spTree>
   </p:cSld>
   <p:clrMapOvr>
@@ -40652,65 +40298,6 @@
           </a:p>
         </p:txBody>
       </p:sp>
-      <p:sp>
-        <p:nvSpPr>
-          <p:cNvPr id="76" name="Shape 64"/>
-          <p:cNvSpPr/>
-          <p:nvPr/>
-        </p:nvSpPr>
-        <p:spPr>
-          <a:xfrm>
-            <a:off x="457200" y="6126480"/>
-            <a:ext cx="11274552" cy="371856"/>
-          </a:xfrm>
-          <a:prstGeom prst="rect">
-            <a:avLst/>
-          </a:prstGeom>
-          <a:solidFill>
-            <a:srgbClr val="E6F6EE"/>
-          </a:solidFill>
-          <a:ln/>
-        </p:spPr>
-      </p:sp>
-      <p:sp>
-        <p:nvSpPr>
-          <p:cNvPr id="77" name="Text 65"/>
-          <p:cNvSpPr txBox="1"/>
-          <p:nvPr/>
-        </p:nvSpPr>
-        <p:spPr>
-          <a:xfrm>
-            <a:off x="658368" y="6144768"/>
-            <a:ext cx="10927080" cy="335280"/>
-          </a:xfrm>
-          <a:prstGeom prst="rect">
-            <a:avLst/>
-          </a:prstGeom>
-          <a:noFill/>
-          <a:ln/>
-        </p:spPr>
-        <p:txBody>
-          <a:bodyPr wrap="square" lIns="0" tIns="0" rIns="0" bIns="0" rtlCol="0" anchor="ctr"/>
-          <a:lstStyle/>
-          <a:p>
-            <a:pPr indent="0" marL="0">
-              <a:buNone/>
-            </a:pPr>
-            <a:r>
-              <a:rPr lang="en-US" sz="1600" b="1" dirty="0">
-                <a:solidFill>
-                  <a:srgbClr val="0B7A4A"/>
-                </a:solidFill>
-                <a:latin typeface="Inter" pitchFamily="34" charset="0"/>
-                <a:ea typeface="Inter" pitchFamily="34" charset="-122"/>
-                <a:cs typeface="Inter" pitchFamily="34" charset="-120"/>
-              </a:rPr>
-              <a:t>VW St George went $224 to $298, stepping up in June. Ask what changed that month.</a:t>
-            </a:r>
-            <a:endParaRPr lang="en-US" sz="1600" dirty="0"/>
-          </a:p>
-        </p:txBody>
-      </p:sp>
     </p:spTree>
   </p:cSld>
   <p:clrMapOvr>
@@ -43266,65 +42853,6 @@
           </a:p>
         </p:txBody>
       </p:sp>
-      <p:sp>
-        <p:nvSpPr>
-          <p:cNvPr id="76" name="Shape 64"/>
-          <p:cNvSpPr/>
-          <p:nvPr/>
-        </p:nvSpPr>
-        <p:spPr>
-          <a:xfrm>
-            <a:off x="457200" y="6126480"/>
-            <a:ext cx="11274552" cy="371856"/>
-          </a:xfrm>
-          <a:prstGeom prst="rect">
-            <a:avLst/>
-          </a:prstGeom>
-          <a:solidFill>
-            <a:srgbClr val="E6F6EE"/>
-          </a:solidFill>
-          <a:ln/>
-        </p:spPr>
-      </p:sp>
-      <p:sp>
-        <p:nvSpPr>
-          <p:cNvPr id="77" name="Text 65"/>
-          <p:cNvSpPr txBox="1"/>
-          <p:nvPr/>
-        </p:nvSpPr>
-        <p:spPr>
-          <a:xfrm>
-            <a:off x="658368" y="6144768"/>
-            <a:ext cx="10927080" cy="335280"/>
-          </a:xfrm>
-          <a:prstGeom prst="rect">
-            <a:avLst/>
-          </a:prstGeom>
-          <a:noFill/>
-          <a:ln/>
-        </p:spPr>
-        <p:txBody>
-          <a:bodyPr wrap="square" lIns="0" tIns="0" rIns="0" bIns="0" rtlCol="0" anchor="ctr"/>
-          <a:lstStyle/>
-          <a:p>
-            <a:pPr indent="0" marL="0">
-              <a:buNone/>
-            </a:pPr>
-            <a:r>
-              <a:rPr lang="en-US" sz="1600" b="1" dirty="0">
-                <a:solidFill>
-                  <a:srgbClr val="0B7A4A"/>
-                </a:solidFill>
-                <a:latin typeface="Inter" pitchFamily="34" charset="0"/>
-                <a:ea typeface="Inter" pitchFamily="34" charset="-122"/>
-                <a:cs typeface="Inter" pitchFamily="34" charset="-120"/>
-              </a:rPr>
-              <a:t>Acura went 39.4% to 46.6%, stepping up in April. Ask what changed that month.</a:t>
-            </a:r>
-            <a:endParaRPr lang="en-US" sz="1600" dirty="0"/>
-          </a:p>
-        </p:txBody>
-      </p:sp>
     </p:spTree>
   </p:cSld>
   <p:clrMapOvr>
@@ -45452,65 +44980,6 @@
               <a:t>2</a:t>
             </a:r>
             <a:endParaRPr lang="en-US" sz="1800" dirty="0"/>
-          </a:p>
-        </p:txBody>
-      </p:sp>
-      <p:sp>
-        <p:nvSpPr>
-          <p:cNvPr id="67" name="Shape 65"/>
-          <p:cNvSpPr/>
-          <p:nvPr/>
-        </p:nvSpPr>
-        <p:spPr>
-          <a:xfrm>
-            <a:off x="457200" y="6126480"/>
-            <a:ext cx="11274552" cy="371856"/>
-          </a:xfrm>
-          <a:prstGeom prst="rect">
-            <a:avLst/>
-          </a:prstGeom>
-          <a:solidFill>
-            <a:srgbClr val="E6F6EE"/>
-          </a:solidFill>
-          <a:ln/>
-        </p:spPr>
-      </p:sp>
-      <p:sp>
-        <p:nvSpPr>
-          <p:cNvPr id="68" name="Text 66"/>
-          <p:cNvSpPr txBox="1"/>
-          <p:nvPr/>
-        </p:nvSpPr>
-        <p:spPr>
-          <a:xfrm>
-            <a:off x="658368" y="6144768"/>
-            <a:ext cx="10927080" cy="335280"/>
-          </a:xfrm>
-          <a:prstGeom prst="rect">
-            <a:avLst/>
-          </a:prstGeom>
-          <a:noFill/>
-          <a:ln/>
-        </p:spPr>
-        <p:txBody>
-          <a:bodyPr wrap="square" lIns="0" tIns="0" rIns="0" bIns="0" rtlCol="0" anchor="ctr"/>
-          <a:lstStyle/>
-          <a:p>
-            <a:pPr indent="0" marL="0">
-              <a:buNone/>
-            </a:pPr>
-            <a:r>
-              <a:rPr lang="en-US" sz="1600" b="1" dirty="0">
-                <a:solidFill>
-                  <a:srgbClr val="0B7A4A"/>
-                </a:solidFill>
-                <a:latin typeface="Inter" pitchFamily="34" charset="0"/>
-                <a:ea typeface="Inter" pitchFamily="34" charset="-122"/>
-                <a:cs typeface="Inter" pitchFamily="34" charset="-120"/>
-              </a:rPr>
-              <a:t>Last year: Subaru Prescott leads. Moving now: Three stores tie. Eight stores make both views.</a:t>
-            </a:r>
-            <a:endParaRPr lang="en-US" sz="1600" dirty="0"/>
           </a:p>
         </p:txBody>
       </p:sp>

--- a/day2-deck/decks/Most Improved v2 - Review.pptx
+++ b/day2-deck/decks/Most Improved v2 - Review.pptx
@@ -17977,7 +17977,7 @@
 CP RO Count: top KIA LV 7,156 → 8,133; HYUNDAI PRESCOTT 1,784 → 2,010; GMC PRESCOTT 2,810 → 3,107. Bottom AUDI RENO 4,379 → 3,917; HYUNDAI ST GEORGE 3,784 → 3,349; VW ST GEORGE 2,251 → 1,919.
 CP Hours per RO: top HYUNDAI ST GEORGE 1.03 → 1.43; SUBARU ST GEORGE 1.75 → 2.30; KIA ST GEORGE 0.99 → 1.29. Bottom VOLVO 2.58 → 2.28; VW ST GEORGE 1.95 → 1.71; LR RENO 4.04 → 3.48.
 CP ELR: top HONDA SPOKANE $117.05 → $143.89; VOLVO $181.59 → $222.12; LINCOLN $139.55 → $167.64. Bottom ACURA $221.78 → $210.50; SUBARU ST GEORGE $148.84 → $138.48; KIA LV $184.36 → $149.23.
-CP Parts GP %: top ACURA 38.7% → 44.9%; NISSAN 38.2% → 42.7%; SUBARU PRESCOTT 31.0% → 34.8%. Bottom HYUNDAI PRESCOTT 39.9% → 39.4%; TOYOTA SPOKANE 45.3% → 44.5%; AUDI HENDERSON 35.8% → 33.6%.Takeaway (off the slide): Most top-three finishes: Lincoln, Subaru Prescott and Subaru St George (2 of 5). Most bottom-three: VW St George (3 of 5).Source: Qlik - Closed Repair Orders. Customer pay, by close date. Same-store, 33 stores (INEOS excluded, opened 2026). GMC Prescott body shop labor types excluded. CP gross = CP labor gross + CP parts gross. Change is Jan-Sep 2026 vs Jan-Sep 2025. Ranked by percent change (points for parts GP %), so store size does not drive the ranking.</a:t>
+CP Parts GP %: top ACURA 38.7% → 44.9%; NISSAN 38.2% → 42.7%; SUBARU PRESCOTT 31.0% → 34.8%. Bottom HYUNDAI PRESCOTT 39.9% → 39.4%; TOYOTA SPOKANE 45.3% → 44.5%; AUDI HENDERSON 35.8% → 33.6%.Takeaway with the store call-outs (off the slide): Most top-three finishes: Lincoln, Subaru Prescott and Subaru St George (2 of 5). Most bottom-three: VW St George (3 of 5).Source: Qlik - Closed Repair Orders. Customer pay, by close date. Same-store, 33 stores (INEOS excluded, opened 2026). GMC Prescott body shop labor types excluded. CP gross = CP labor gross + CP parts gross. Change is Jan-Sep 2026 vs Jan-Sep 2025. Ranked by percent change (points for parts GP %), so store size does not drive the ranking.</a:t>
             </a:r>
             <a:endParaRPr lang="en-US" dirty="0"/>
           </a:p>
@@ -18160,7 +18160,7 @@
 CP ROs per Month: top LEXUS 425 → 570; CDJR POST FALLS 543 → 667; LR LV 350 → 415. Bottom VW ST GEORGE 207 → 203; HYUNDAI ST GEORGE 377 → 365; CADILLAC 609 → 582.
 CP Hours per RO: top MAZDA 1.35 → 1.65; HYUNDAI PRESCOTT 1.56 → 1.76; HYUNDAI ST GEORGE 1.37 → 1.54. Bottom HONDA HENDERSON 2.06 → 1.86; VW HENDERSON 2.66 → 2.37; CADILLAC 2.85 → 2.45.
 CP ELR: top VW ST GEORGE $128.27 → $141.89; AUDI RENO $227.34 → $244.12; HONDA SPOKANE $139.40 → $147.93. Bottom SUBARU ST GEORGE $141.07 → $136.71; LEXUS $196.84 → $187.42; ACURA $232.02 → $199.04.
-CP Parts GP %: top ACURA 39.4% → 46.6%; VW ST GEORGE 39.1% → 43.8%; GMC PRESCOTT 35.3% → 39.2%. Bottom CHEVY LV 38.2% → 35.0%; LINCOLN 39.9% → 36.0%; HONDA HENDERSON 44.3% → 40.0%.Takeaway (off the slide): Most top-three finishes: Mazda, CDJR Post Falls and VW St George (2 of 5). Most bottom-three: Honda Henderson and Cadillac (3 of 5).Source: Qlik - Closed Repair Orders. Customer pay, by close date. Same-store, 33 stores (INEOS excluded, opened 2026). GMC Prescott body shop labor types excluded. CP gross = CP labor gross + CP parts gross. Change is Jul-Sep 2026 (Q3) vs Jan-Mar 2026 (Q1), each store against itself. Gross and ROs are per-month averages of each quarter. The group's own Q1-to-Q3 change is the seasonal baseline: it is the same for every store, so ranking by a store's change is the same as ranking by how far it beat the group. 'Stepped up in' = the month that best splits the store's year into a lower stretch before and a higher stretch after (at least three months before, two after). It is a conversation starter, not proof of cause.</a:t>
+CP Parts GP %: top ACURA 39.4% → 46.6%; VW ST GEORGE 39.1% → 43.8%; GMC PRESCOTT 35.3% → 39.2%. Bottom CHEVY LV 38.2% → 35.0%; LINCOLN 39.9% → 36.0%; HONDA HENDERSON 44.3% → 40.0%.Takeaway with the store call-outs (off the slide): Most top-three finishes: Mazda, CDJR Post Falls and VW St George (2 of 5). Most bottom-three: Honda Henderson and Cadillac (3 of 5).Source: Qlik - Closed Repair Orders. Customer pay, by close date. Same-store, 33 stores (INEOS excluded, opened 2026). GMC Prescott body shop labor types excluded. CP gross = CP labor gross + CP parts gross. Change is Jul-Sep 2026 (Q3) vs Jan-Mar 2026 (Q1), each store against itself. Gross and ROs are per-month averages of each quarter. The group's own Q1-to-Q3 change is the seasonal baseline: it is the same for every store, so ranking by a store's change is the same as ranking by how far it beat the group. 'Stepped up in' = the month that best splits the store's year into a lower stretch before and a higher stretch after (at least three months before, two after). It is a conversation starter, not proof of cause.</a:t>
             </a:r>
             <a:endParaRPr lang="en-US" dirty="0"/>
           </a:p>
@@ -18248,7 +18248,7 @@
           <a:p>
             <a:r>
               <a:rPr lang="en-US" dirty="0"/>
-              <a:t>Takeaway (off the slide): Mazda went $155K to $209K, stepping up in August. Ask what changed that month.Source: Qlik - Closed Repair Orders. Customer pay, by close date. Same-store, 33 stores (INEOS excluded, opened 2026). GMC Prescott body shop labor types excluded. CP gross = CP labor gross + CP parts gross. Change is Jul-Sep 2026 (Q3) vs Jan-Mar 2026 (Q1), each store against itself. Gross and ROs are per-month averages of each quarter. The group's own Q1-to-Q3 change is the seasonal baseline: it is the same for every store, so ranking by a store's change is the same as ranking by how far it beat the group. 'Stepped up in' = the month that best splits the store's year into a lower stretch before and a higher stretch after (at least three months before, two after). It is a conversation starter, not proof of cause.
+              <a:t>Takeaway with the store call-outs (off the slide): Mazda went $155K to $209K, stepping up in August. Ask what changed that month.Source: Qlik - Closed Repair Orders. Customer pay, by close date. Same-store, 33 stores (INEOS excluded, opened 2026). GMC Prescott body shop labor types excluded. CP gross = CP labor gross + CP parts gross. Change is Jul-Sep 2026 (Q3) vs Jan-Mar 2026 (Q1), each store against itself. Gross and ROs are per-month averages of each quarter. The group's own Q1-to-Q3 change is the seasonal baseline: it is the same for every store, so ranking by a store's change is the same as ranking by how far it beat the group. 'Stepped up in' = the month that best splits the store's year into a lower stretch before and a higher stretch after (at least three months before, two after). It is a conversation starter, not proof of cause.
 Review note: the month line is the store's own monthly cp gross per month, so a step up shows as the line moving to a higher level and staying there. Volume measures (gross, ROs) still carry some store-specific seasonality (snowbird markets) the group baseline cannot fully remove; the rate measures are the cleanest read.</a:t>
             </a:r>
             <a:endParaRPr lang="en-US" dirty="0"/>
@@ -18337,7 +18337,7 @@
           <a:p>
             <a:r>
               <a:rPr lang="en-US" dirty="0"/>
-              <a:t>Takeaway (off the slide): Lexus went 425 to 570, stepping up in April. Ask what changed that month.Source: Qlik - Closed Repair Orders. Customer pay, by close date. Same-store, 33 stores (INEOS excluded, opened 2026). GMC Prescott body shop labor types excluded. CP gross = CP labor gross + CP parts gross. Change is Jul-Sep 2026 (Q3) vs Jan-Mar 2026 (Q1), each store against itself. Gross and ROs are per-month averages of each quarter. The group's own Q1-to-Q3 change is the seasonal baseline: it is the same for every store, so ranking by a store's change is the same as ranking by how far it beat the group. 'Stepped up in' = the month that best splits the store's year into a lower stretch before and a higher stretch after (at least three months before, two after). It is a conversation starter, not proof of cause.
+              <a:t>Takeaway with the store call-outs (off the slide): Lexus went 425 to 570, stepping up in April. Ask what changed that month.Source: Qlik - Closed Repair Orders. Customer pay, by close date. Same-store, 33 stores (INEOS excluded, opened 2026). GMC Prescott body shop labor types excluded. CP gross = CP labor gross + CP parts gross. Change is Jul-Sep 2026 (Q3) vs Jan-Mar 2026 (Q1), each store against itself. Gross and ROs are per-month averages of each quarter. The group's own Q1-to-Q3 change is the seasonal baseline: it is the same for every store, so ranking by a store's change is the same as ranking by how far it beat the group. 'Stepped up in' = the month that best splits the store's year into a lower stretch before and a higher stretch after (at least three months before, two after). It is a conversation starter, not proof of cause.
 Review note: the month line is the store's own monthly cp ros per month, so a step up shows as the line moving to a higher level and staying there. Volume measures (gross, ROs) still carry some store-specific seasonality (snowbird markets) the group baseline cannot fully remove; the rate measures are the cleanest read.</a:t>
             </a:r>
             <a:endParaRPr lang="en-US" dirty="0"/>
@@ -18426,7 +18426,7 @@
           <a:p>
             <a:r>
               <a:rPr lang="en-US" dirty="0"/>
-              <a:t>Takeaway (off the slide): Mazda went 1.35 to 1.65, stepping up in August. Ask what changed that month.Source: Qlik - Closed Repair Orders. Customer pay, by close date. Same-store, 33 stores (INEOS excluded, opened 2026). GMC Prescott body shop labor types excluded. CP gross = CP labor gross + CP parts gross. Change is Jul-Sep 2026 (Q3) vs Jan-Mar 2026 (Q1), each store against itself. Gross and ROs are per-month averages of each quarter. The group's own Q1-to-Q3 change is the seasonal baseline: it is the same for every store, so ranking by a store's change is the same as ranking by how far it beat the group. 'Stepped up in' = the month that best splits the store's year into a lower stretch before and a higher stretch after (at least three months before, two after). It is a conversation starter, not proof of cause.
+              <a:t>Takeaway with the store call-outs (off the slide): Mazda went 1.35 to 1.65, stepping up in August. Ask what changed that month.Source: Qlik - Closed Repair Orders. Customer pay, by close date. Same-store, 33 stores (INEOS excluded, opened 2026). GMC Prescott body shop labor types excluded. CP gross = CP labor gross + CP parts gross. Change is Jul-Sep 2026 (Q3) vs Jan-Mar 2026 (Q1), each store against itself. Gross and ROs are per-month averages of each quarter. The group's own Q1-to-Q3 change is the seasonal baseline: it is the same for every store, so ranking by a store's change is the same as ranking by how far it beat the group. 'Stepped up in' = the month that best splits the store's year into a lower stretch before and a higher stretch after (at least three months before, two after). It is a conversation starter, not proof of cause.
 Review note: the month line is the store's own monthly cp hours per ro, so a step up shows as the line moving to a higher level and staying there. Volume measures (gross, ROs) still carry some store-specific seasonality (snowbird markets) the group baseline cannot fully remove; the rate measures are the cleanest read.</a:t>
             </a:r>
             <a:endParaRPr lang="en-US" dirty="0"/>
@@ -18515,7 +18515,7 @@
           <a:p>
             <a:r>
               <a:rPr lang="en-US" dirty="0"/>
-              <a:t>Takeaway (off the slide): VW St George went $128.27 to $141.89, stepping up in June. Ask what changed that month.Source: Qlik - Closed Repair Orders. Customer pay, by close date. Same-store, 33 stores (INEOS excluded, opened 2026). GMC Prescott body shop labor types excluded. CP gross = CP labor gross + CP parts gross. Change is Jul-Sep 2026 (Q3) vs Jan-Mar 2026 (Q1), each store against itself. Gross and ROs are per-month averages of each quarter. The group's own Q1-to-Q3 change is the seasonal baseline: it is the same for every store, so ranking by a store's change is the same as ranking by how far it beat the group. 'Stepped up in' = the month that best splits the store's year into a lower stretch before and a higher stretch after (at least three months before, two after). It is a conversation starter, not proof of cause.
+              <a:t>Takeaway with the store call-outs (off the slide): VW St George went $128.27 to $141.89, stepping up in June. Ask what changed that month.Source: Qlik - Closed Repair Orders. Customer pay, by close date. Same-store, 33 stores (INEOS excluded, opened 2026). GMC Prescott body shop labor types excluded. CP gross = CP labor gross + CP parts gross. Change is Jul-Sep 2026 (Q3) vs Jan-Mar 2026 (Q1), each store against itself. Gross and ROs are per-month averages of each quarter. The group's own Q1-to-Q3 change is the seasonal baseline: it is the same for every store, so ranking by a store's change is the same as ranking by how far it beat the group. 'Stepped up in' = the month that best splits the store's year into a lower stretch before and a higher stretch after (at least three months before, two after). It is a conversation starter, not proof of cause.
 Review note: the month line is the store's own monthly cp elr, so a step up shows as the line moving to a higher level and staying there. Volume measures (gross, ROs) still carry some store-specific seasonality (snowbird markets) the group baseline cannot fully remove; the rate measures are the cleanest read.</a:t>
             </a:r>
             <a:endParaRPr lang="en-US" dirty="0"/>
@@ -18604,7 +18604,7 @@
           <a:p>
             <a:r>
               <a:rPr lang="en-US" dirty="0"/>
-              <a:t>Takeaway (off the slide): VW St George went $224 to $298, stepping up in June. Ask what changed that month.Source: Qlik - Closed Repair Orders. Customer pay, by close date. Same-store, 33 stores (INEOS excluded, opened 2026). GMC Prescott body shop labor types excluded. CP gross = CP labor gross + CP parts gross. Change is Jul-Sep 2026 (Q3) vs Jan-Mar 2026 (Q1), each store against itself. Gross and ROs are per-month averages of each quarter. The group's own Q1-to-Q3 change is the seasonal baseline: it is the same for every store, so ranking by a store's change is the same as ranking by how far it beat the group. 'Stepped up in' = the month that best splits the store's year into a lower stretch before and a higher stretch after (at least three months before, two after). It is a conversation starter, not proof of cause.
+              <a:t>Takeaway with the store call-outs (off the slide): VW St George went $224 to $298, stepping up in June. Ask what changed that month.Source: Qlik - Closed Repair Orders. Customer pay, by close date. Same-store, 33 stores (INEOS excluded, opened 2026). GMC Prescott body shop labor types excluded. CP gross = CP labor gross + CP parts gross. Change is Jul-Sep 2026 (Q3) vs Jan-Mar 2026 (Q1), each store against itself. Gross and ROs are per-month averages of each quarter. The group's own Q1-to-Q3 change is the seasonal baseline: it is the same for every store, so ranking by a store's change is the same as ranking by how far it beat the group. 'Stepped up in' = the month that best splits the store's year into a lower stretch before and a higher stretch after (at least three months before, two after). It is a conversation starter, not proof of cause.
 Review note: the month line is the store's own monthly cp parts $ per ro, so a step up shows as the line moving to a higher level and staying there. Volume measures (gross, ROs) still carry some store-specific seasonality (snowbird markets) the group baseline cannot fully remove; the rate measures are the cleanest read.</a:t>
             </a:r>
             <a:endParaRPr lang="en-US" dirty="0"/>
@@ -18693,7 +18693,7 @@
           <a:p>
             <a:r>
               <a:rPr lang="en-US" dirty="0"/>
-              <a:t>Takeaway (off the slide): Acura went 39.4% to 46.6%, stepping up in April. Ask what changed that month.Source: Qlik - Closed Repair Orders. Customer pay, by close date. Same-store, 33 stores (INEOS excluded, opened 2026). GMC Prescott body shop labor types excluded. CP gross = CP labor gross + CP parts gross. Change is Jul-Sep 2026 (Q3) vs Jan-Mar 2026 (Q1), each store against itself. Gross and ROs are per-month averages of each quarter. The group's own Q1-to-Q3 change is the seasonal baseline: it is the same for every store, so ranking by a store's change is the same as ranking by how far it beat the group. 'Stepped up in' = the month that best splits the store's year into a lower stretch before and a higher stretch after (at least three months before, two after). It is a conversation starter, not proof of cause.
+              <a:t>Takeaway with the store call-outs (off the slide): Acura went 39.4% to 46.6%, stepping up in April. Ask what changed that month.Source: Qlik - Closed Repair Orders. Customer pay, by close date. Same-store, 33 stores (INEOS excluded, opened 2026). GMC Prescott body shop labor types excluded. CP gross = CP labor gross + CP parts gross. Change is Jul-Sep 2026 (Q3) vs Jan-Mar 2026 (Q1), each store against itself. Gross and ROs are per-month averages of each quarter. The group's own Q1-to-Q3 change is the seasonal baseline: it is the same for every store, so ranking by a store's change is the same as ranking by how far it beat the group. 'Stepped up in' = the month that best splits the store's year into a lower stretch before and a higher stretch after (at least three months before, two after). It is a conversation starter, not proof of cause.
 Review note: the month line is the store's own monthly cp parts gp %, so a step up shows as the line moving to a higher level and staying there. Volume measures (gross, ROs) still carry some store-specific seasonality (snowbird markets) the group baseline cannot fully remove; the rate measures are the cleanest read.</a:t>
             </a:r>
             <a:endParaRPr lang="en-US" dirty="0"/>
@@ -18782,7 +18782,7 @@
           <a:p>
             <a:r>
               <a:rPr lang="en-US" dirty="0"/>
-              <a:t>Takeaway (off the slide): Last year: Subaru Prescott leads. Moving now: Three stores tie. Eight stores make both views.Source: Qlik - Closed Repair Orders. Customer pay, by close date. Same-store, 33 stores (INEOS excluded, opened 2026). GMC Prescott body shop labor types excluded. CP gross = CP labor gross + CP parts gross. Left: Jan-Sep 2026 vs Jan-Sep 2025. Right: Q3 2026 vs Q1 2026. Top-5 finishes counted across five measures (parts $ per RO dropped, Oct 23); top six stores shown in each view.</a:t>
+              <a:t>Takeaway with the store call-outs (off the slide): Last year: Subaru Prescott leads. Moving now: Three stores tie. Eight stores make both views.Source: Qlik - Closed Repair Orders. Customer pay, by close date. Same-store, 33 stores (INEOS excluded, opened 2026). GMC Prescott body shop labor types excluded. CP gross = CP labor gross + CP parts gross. Left: Jan-Sep 2026 vs Jan-Sep 2025. Right: Q3 2026 vs Q1 2026. Top-5 finishes counted across five measures (parts $ per RO dropped, Oct 23); top six stores shown in each view.</a:t>
             </a:r>
             <a:endParaRPr lang="en-US" dirty="0"/>
           </a:p>
@@ -44983,6 +44983,65 @@
           </a:p>
         </p:txBody>
       </p:sp>
+      <p:sp>
+        <p:nvSpPr>
+          <p:cNvPr id="68" name="Shape 65"/>
+          <p:cNvSpPr/>
+          <p:nvPr/>
+        </p:nvSpPr>
+        <p:spPr>
+          <a:xfrm>
+            <a:off x="457200" y="6126480"/>
+            <a:ext cx="11274552" cy="371856"/>
+          </a:xfrm>
+          <a:prstGeom prst="rect">
+            <a:avLst/>
+          </a:prstGeom>
+          <a:solidFill>
+            <a:srgbClr val="E6F6EE"/>
+          </a:solidFill>
+          <a:ln/>
+        </p:spPr>
+      </p:sp>
+      <p:sp>
+        <p:nvSpPr>
+          <p:cNvPr id="69" name="Text 66"/>
+          <p:cNvSpPr txBox="1"/>
+          <p:nvPr/>
+        </p:nvSpPr>
+        <p:spPr>
+          <a:xfrm>
+            <a:off x="658368" y="6144768"/>
+            <a:ext cx="10927080" cy="335280"/>
+          </a:xfrm>
+          <a:prstGeom prst="rect">
+            <a:avLst/>
+          </a:prstGeom>
+          <a:noFill/>
+          <a:ln/>
+        </p:spPr>
+        <p:txBody>
+          <a:bodyPr wrap="square" lIns="0" tIns="0" rIns="0" bIns="0" rtlCol="0" anchor="ctr"/>
+          <a:lstStyle/>
+          <a:p>
+            <a:pPr indent="0" marL="0">
+              <a:buNone/>
+            </a:pPr>
+            <a:r>
+              <a:rPr lang="en-US" sz="1600" b="1" dirty="0">
+                <a:solidFill>
+                  <a:srgbClr val="0B7A4A"/>
+                </a:solidFill>
+                <a:latin typeface="Inter" pitchFamily="34" charset="0"/>
+                <a:ea typeface="Inter" pitchFamily="34" charset="-122"/>
+                <a:cs typeface="Inter" pitchFamily="34" charset="-120"/>
+              </a:rPr>
+              <a:t>Moving now: Three stores tie. Eight stores make both views.</a:t>
+            </a:r>
+            <a:endParaRPr lang="en-US" sz="1600" dirty="0"/>
+          </a:p>
+        </p:txBody>
+      </p:sp>
     </p:spTree>
   </p:cSld>
   <p:clrMapOvr>

--- a/day2-deck/decks/Most Improved v2 - Review.pptx
+++ b/day2-deck/decks/Most Improved v2 - Review.pptx
@@ -18782,7 +18782,7 @@
           <a:p>
             <a:r>
               <a:rPr lang="en-US" dirty="0"/>
-              <a:t>Takeaway with the store call-outs (off the slide): Last year: Subaru Prescott leads. Moving now: Three stores tie. Eight stores make both views.Source: Qlik - Closed Repair Orders. Customer pay, by close date. Same-store, 33 stores (INEOS excluded, opened 2026). GMC Prescott body shop labor types excluded. CP gross = CP labor gross + CP parts gross. Left: Jan-Sep 2026 vs Jan-Sep 2025. Right: Q3 2026 vs Q1 2026. Top-5 finishes counted across five measures (parts $ per RO dropped, Oct 23); top six stores shown in each view.</a:t>
+              <a:t>Takeaway with the store call-outs (off the slide): Last year: Subaru Prescott leads. Moving now: Three stores tie. One store is on both lists (green bar).Source: Qlik - Closed Repair Orders. Customer pay, by close date. Same-store, 33 stores (INEOS excluded, opened 2026). GMC Prescott body shop labor types excluded. CP gross = CP labor gross + CP parts gross. Left: Jan-Sep 2026 vs Jan-Sep 2025. Right: Q3 2026 vs Q1 2026. Top-5 finishes counted across five measures (parts $ per RO dropped, Oct 23); top six stores shown in each view.</a:t>
             </a:r>
             <a:endParaRPr lang="en-US" dirty="0"/>
           </a:p>
@@ -19674,6 +19674,86 @@
         </p:nvSpPr>
         <p:spPr>
           <a:xfrm>
+            <a:off x="3044952" y="1691640"/>
+            <a:ext cx="10973" cy="3977640"/>
+          </a:xfrm>
+          <a:prstGeom prst="rect">
+            <a:avLst/>
+          </a:prstGeom>
+          <a:solidFill>
+            <a:srgbClr val="D9D9D9"/>
+          </a:solidFill>
+          <a:ln/>
+        </p:spPr>
+      </p:sp>
+      <p:sp>
+        <p:nvSpPr>
+          <p:cNvPr id="20" name="Shape 18"/>
+          <p:cNvSpPr/>
+          <p:nvPr/>
+        </p:nvSpPr>
+        <p:spPr>
+          <a:xfrm>
+            <a:off x="5180990" y="1691640"/>
+            <a:ext cx="10973" cy="3977640"/>
+          </a:xfrm>
+          <a:prstGeom prst="rect">
+            <a:avLst/>
+          </a:prstGeom>
+          <a:solidFill>
+            <a:srgbClr val="D9D9D9"/>
+          </a:solidFill>
+          <a:ln/>
+        </p:spPr>
+      </p:sp>
+      <p:sp>
+        <p:nvSpPr>
+          <p:cNvPr id="21" name="Shape 19"/>
+          <p:cNvSpPr/>
+          <p:nvPr/>
+        </p:nvSpPr>
+        <p:spPr>
+          <a:xfrm>
+            <a:off x="7317029" y="1691640"/>
+            <a:ext cx="10973" cy="3977640"/>
+          </a:xfrm>
+          <a:prstGeom prst="rect">
+            <a:avLst/>
+          </a:prstGeom>
+          <a:solidFill>
+            <a:srgbClr val="D9D9D9"/>
+          </a:solidFill>
+          <a:ln/>
+        </p:spPr>
+      </p:sp>
+      <p:sp>
+        <p:nvSpPr>
+          <p:cNvPr id="22" name="Shape 20"/>
+          <p:cNvSpPr/>
+          <p:nvPr/>
+        </p:nvSpPr>
+        <p:spPr>
+          <a:xfrm>
+            <a:off x="9453067" y="1691640"/>
+            <a:ext cx="10973" cy="3977640"/>
+          </a:xfrm>
+          <a:prstGeom prst="rect">
+            <a:avLst/>
+          </a:prstGeom>
+          <a:solidFill>
+            <a:srgbClr val="D9D9D9"/>
+          </a:solidFill>
+          <a:ln/>
+        </p:spPr>
+      </p:sp>
+      <p:sp>
+        <p:nvSpPr>
+          <p:cNvPr id="23" name="Shape 21"/>
+          <p:cNvSpPr/>
+          <p:nvPr/>
+        </p:nvSpPr>
+        <p:spPr>
+          <a:xfrm>
             <a:off x="969264" y="1691640"/>
             <a:ext cx="2026310" cy="45720"/>
           </a:xfrm>
@@ -19688,7 +19768,7 @@
       </p:sp>
       <p:sp>
         <p:nvSpPr>
-          <p:cNvPr id="20" name="Text 18"/>
+          <p:cNvPr id="24" name="Text 22"/>
           <p:cNvSpPr txBox="1"/>
           <p:nvPr/>
         </p:nvSpPr>
@@ -19729,7 +19809,7 @@
       </p:sp>
       <p:sp>
         <p:nvSpPr>
-          <p:cNvPr id="21" name="Text 19"/>
+          <p:cNvPr id="25" name="Text 23"/>
           <p:cNvSpPr txBox="1"/>
           <p:nvPr/>
         </p:nvSpPr>
@@ -19768,7 +19848,7 @@
       </p:sp>
       <p:sp>
         <p:nvSpPr>
-          <p:cNvPr id="22" name="Text 20"/>
+          <p:cNvPr id="26" name="Text 24"/>
           <p:cNvSpPr txBox="1"/>
           <p:nvPr/>
         </p:nvSpPr>
@@ -19807,7 +19887,7 @@
       </p:sp>
       <p:sp>
         <p:nvSpPr>
-          <p:cNvPr id="23" name="Text 21"/>
+          <p:cNvPr id="27" name="Text 25"/>
           <p:cNvSpPr txBox="1"/>
           <p:nvPr/>
         </p:nvSpPr>
@@ -19846,7 +19926,7 @@
       </p:sp>
       <p:sp>
         <p:nvSpPr>
-          <p:cNvPr id="24" name="Text 22"/>
+          <p:cNvPr id="28" name="Text 26"/>
           <p:cNvSpPr txBox="1"/>
           <p:nvPr/>
         </p:nvSpPr>
@@ -19885,7 +19965,7 @@
       </p:sp>
       <p:sp>
         <p:nvSpPr>
-          <p:cNvPr id="25" name="Text 23"/>
+          <p:cNvPr id="29" name="Text 27"/>
           <p:cNvSpPr txBox="1"/>
           <p:nvPr/>
         </p:nvSpPr>
@@ -19924,7 +20004,7 @@
       </p:sp>
       <p:sp>
         <p:nvSpPr>
-          <p:cNvPr id="26" name="Text 24"/>
+          <p:cNvPr id="30" name="Text 28"/>
           <p:cNvSpPr txBox="1"/>
           <p:nvPr/>
         </p:nvSpPr>
@@ -19963,7 +20043,7 @@
       </p:sp>
       <p:sp>
         <p:nvSpPr>
-          <p:cNvPr id="27" name="Text 25"/>
+          <p:cNvPr id="31" name="Text 29"/>
           <p:cNvSpPr txBox="1"/>
           <p:nvPr/>
         </p:nvSpPr>
@@ -20002,7 +20082,7 @@
       </p:sp>
       <p:sp>
         <p:nvSpPr>
-          <p:cNvPr id="28" name="Text 26"/>
+          <p:cNvPr id="32" name="Text 30"/>
           <p:cNvSpPr txBox="1"/>
           <p:nvPr/>
         </p:nvSpPr>
@@ -20041,7 +20121,7 @@
       </p:sp>
       <p:sp>
         <p:nvSpPr>
-          <p:cNvPr id="29" name="Text 27"/>
+          <p:cNvPr id="33" name="Text 31"/>
           <p:cNvSpPr txBox="1"/>
           <p:nvPr/>
         </p:nvSpPr>
@@ -20080,7 +20160,7 @@
       </p:sp>
       <p:sp>
         <p:nvSpPr>
-          <p:cNvPr id="30" name="Text 28"/>
+          <p:cNvPr id="34" name="Text 32"/>
           <p:cNvSpPr txBox="1"/>
           <p:nvPr/>
         </p:nvSpPr>
@@ -20119,7 +20199,7 @@
       </p:sp>
       <p:sp>
         <p:nvSpPr>
-          <p:cNvPr id="31" name="Text 29"/>
+          <p:cNvPr id="35" name="Text 33"/>
           <p:cNvSpPr txBox="1"/>
           <p:nvPr/>
         </p:nvSpPr>
@@ -20158,7 +20238,7 @@
       </p:sp>
       <p:sp>
         <p:nvSpPr>
-          <p:cNvPr id="32" name="Text 30"/>
+          <p:cNvPr id="36" name="Text 34"/>
           <p:cNvSpPr txBox="1"/>
           <p:nvPr/>
         </p:nvSpPr>
@@ -20197,7 +20277,7 @@
       </p:sp>
       <p:sp>
         <p:nvSpPr>
-          <p:cNvPr id="33" name="Text 31"/>
+          <p:cNvPr id="37" name="Text 35"/>
           <p:cNvSpPr txBox="1"/>
           <p:nvPr/>
         </p:nvSpPr>
@@ -20236,7 +20316,7 @@
       </p:sp>
       <p:sp>
         <p:nvSpPr>
-          <p:cNvPr id="34" name="Shape 32"/>
+          <p:cNvPr id="38" name="Shape 36"/>
           <p:cNvSpPr/>
           <p:nvPr/>
         </p:nvSpPr>
@@ -20256,7 +20336,7 @@
       </p:sp>
       <p:sp>
         <p:nvSpPr>
-          <p:cNvPr id="35" name="Text 33"/>
+          <p:cNvPr id="39" name="Text 37"/>
           <p:cNvSpPr txBox="1"/>
           <p:nvPr/>
         </p:nvSpPr>
@@ -20297,7 +20377,7 @@
       </p:sp>
       <p:sp>
         <p:nvSpPr>
-          <p:cNvPr id="36" name="Text 34"/>
+          <p:cNvPr id="40" name="Text 38"/>
           <p:cNvSpPr txBox="1"/>
           <p:nvPr/>
         </p:nvSpPr>
@@ -20336,7 +20416,7 @@
       </p:sp>
       <p:sp>
         <p:nvSpPr>
-          <p:cNvPr id="37" name="Text 35"/>
+          <p:cNvPr id="41" name="Text 39"/>
           <p:cNvSpPr txBox="1"/>
           <p:nvPr/>
         </p:nvSpPr>
@@ -20375,7 +20455,7 @@
       </p:sp>
       <p:sp>
         <p:nvSpPr>
-          <p:cNvPr id="38" name="Text 36"/>
+          <p:cNvPr id="42" name="Text 40"/>
           <p:cNvSpPr txBox="1"/>
           <p:nvPr/>
         </p:nvSpPr>
@@ -20414,7 +20494,7 @@
       </p:sp>
       <p:sp>
         <p:nvSpPr>
-          <p:cNvPr id="39" name="Text 37"/>
+          <p:cNvPr id="43" name="Text 41"/>
           <p:cNvSpPr txBox="1"/>
           <p:nvPr/>
         </p:nvSpPr>
@@ -20453,7 +20533,7 @@
       </p:sp>
       <p:sp>
         <p:nvSpPr>
-          <p:cNvPr id="40" name="Text 38"/>
+          <p:cNvPr id="44" name="Text 42"/>
           <p:cNvSpPr txBox="1"/>
           <p:nvPr/>
         </p:nvSpPr>
@@ -20492,7 +20572,7 @@
       </p:sp>
       <p:sp>
         <p:nvSpPr>
-          <p:cNvPr id="41" name="Text 39"/>
+          <p:cNvPr id="45" name="Text 43"/>
           <p:cNvSpPr txBox="1"/>
           <p:nvPr/>
         </p:nvSpPr>
@@ -20531,7 +20611,7 @@
       </p:sp>
       <p:sp>
         <p:nvSpPr>
-          <p:cNvPr id="42" name="Text 40"/>
+          <p:cNvPr id="46" name="Text 44"/>
           <p:cNvSpPr txBox="1"/>
           <p:nvPr/>
         </p:nvSpPr>
@@ -20570,7 +20650,7 @@
       </p:sp>
       <p:sp>
         <p:nvSpPr>
-          <p:cNvPr id="43" name="Text 41"/>
+          <p:cNvPr id="47" name="Text 45"/>
           <p:cNvSpPr txBox="1"/>
           <p:nvPr/>
         </p:nvSpPr>
@@ -20609,7 +20689,7 @@
       </p:sp>
       <p:sp>
         <p:nvSpPr>
-          <p:cNvPr id="44" name="Text 42"/>
+          <p:cNvPr id="48" name="Text 46"/>
           <p:cNvSpPr txBox="1"/>
           <p:nvPr/>
         </p:nvSpPr>
@@ -20648,7 +20728,7 @@
       </p:sp>
       <p:sp>
         <p:nvSpPr>
-          <p:cNvPr id="45" name="Text 43"/>
+          <p:cNvPr id="49" name="Text 47"/>
           <p:cNvSpPr txBox="1"/>
           <p:nvPr/>
         </p:nvSpPr>
@@ -20687,7 +20767,7 @@
       </p:sp>
       <p:sp>
         <p:nvSpPr>
-          <p:cNvPr id="46" name="Text 44"/>
+          <p:cNvPr id="50" name="Text 48"/>
           <p:cNvSpPr txBox="1"/>
           <p:nvPr/>
         </p:nvSpPr>
@@ -20726,7 +20806,7 @@
       </p:sp>
       <p:sp>
         <p:nvSpPr>
-          <p:cNvPr id="47" name="Text 45"/>
+          <p:cNvPr id="51" name="Text 49"/>
           <p:cNvSpPr txBox="1"/>
           <p:nvPr/>
         </p:nvSpPr>
@@ -20765,7 +20845,7 @@
       </p:sp>
       <p:sp>
         <p:nvSpPr>
-          <p:cNvPr id="48" name="Text 46"/>
+          <p:cNvPr id="52" name="Text 50"/>
           <p:cNvSpPr txBox="1"/>
           <p:nvPr/>
         </p:nvSpPr>
@@ -20804,7 +20884,7 @@
       </p:sp>
       <p:sp>
         <p:nvSpPr>
-          <p:cNvPr id="49" name="Shape 47"/>
+          <p:cNvPr id="53" name="Shape 51"/>
           <p:cNvSpPr/>
           <p:nvPr/>
         </p:nvSpPr>
@@ -20824,7 +20904,7 @@
       </p:sp>
       <p:sp>
         <p:nvSpPr>
-          <p:cNvPr id="50" name="Text 48"/>
+          <p:cNvPr id="54" name="Text 52"/>
           <p:cNvSpPr txBox="1"/>
           <p:nvPr/>
         </p:nvSpPr>
@@ -20865,7 +20945,7 @@
       </p:sp>
       <p:sp>
         <p:nvSpPr>
-          <p:cNvPr id="51" name="Text 49"/>
+          <p:cNvPr id="55" name="Text 53"/>
           <p:cNvSpPr txBox="1"/>
           <p:nvPr/>
         </p:nvSpPr>
@@ -20904,7 +20984,7 @@
       </p:sp>
       <p:sp>
         <p:nvSpPr>
-          <p:cNvPr id="52" name="Text 50"/>
+          <p:cNvPr id="56" name="Text 54"/>
           <p:cNvSpPr txBox="1"/>
           <p:nvPr/>
         </p:nvSpPr>
@@ -20943,7 +21023,7 @@
       </p:sp>
       <p:sp>
         <p:nvSpPr>
-          <p:cNvPr id="53" name="Text 51"/>
+          <p:cNvPr id="57" name="Text 55"/>
           <p:cNvSpPr txBox="1"/>
           <p:nvPr/>
         </p:nvSpPr>
@@ -20982,7 +21062,7 @@
       </p:sp>
       <p:sp>
         <p:nvSpPr>
-          <p:cNvPr id="54" name="Text 52"/>
+          <p:cNvPr id="58" name="Text 56"/>
           <p:cNvSpPr txBox="1"/>
           <p:nvPr/>
         </p:nvSpPr>
@@ -21021,7 +21101,7 @@
       </p:sp>
       <p:sp>
         <p:nvSpPr>
-          <p:cNvPr id="55" name="Text 53"/>
+          <p:cNvPr id="59" name="Text 57"/>
           <p:cNvSpPr txBox="1"/>
           <p:nvPr/>
         </p:nvSpPr>
@@ -21060,7 +21140,7 @@
       </p:sp>
       <p:sp>
         <p:nvSpPr>
-          <p:cNvPr id="56" name="Text 54"/>
+          <p:cNvPr id="60" name="Text 58"/>
           <p:cNvSpPr txBox="1"/>
           <p:nvPr/>
         </p:nvSpPr>
@@ -21099,7 +21179,7 @@
       </p:sp>
       <p:sp>
         <p:nvSpPr>
-          <p:cNvPr id="57" name="Text 55"/>
+          <p:cNvPr id="61" name="Text 59"/>
           <p:cNvSpPr txBox="1"/>
           <p:nvPr/>
         </p:nvSpPr>
@@ -21138,7 +21218,7 @@
       </p:sp>
       <p:sp>
         <p:nvSpPr>
-          <p:cNvPr id="58" name="Text 56"/>
+          <p:cNvPr id="62" name="Text 60"/>
           <p:cNvSpPr txBox="1"/>
           <p:nvPr/>
         </p:nvSpPr>
@@ -21177,7 +21257,7 @@
       </p:sp>
       <p:sp>
         <p:nvSpPr>
-          <p:cNvPr id="59" name="Text 57"/>
+          <p:cNvPr id="63" name="Text 61"/>
           <p:cNvSpPr txBox="1"/>
           <p:nvPr/>
         </p:nvSpPr>
@@ -21216,7 +21296,7 @@
       </p:sp>
       <p:sp>
         <p:nvSpPr>
-          <p:cNvPr id="60" name="Text 58"/>
+          <p:cNvPr id="64" name="Text 62"/>
           <p:cNvSpPr txBox="1"/>
           <p:nvPr/>
         </p:nvSpPr>
@@ -21255,7 +21335,7 @@
       </p:sp>
       <p:sp>
         <p:nvSpPr>
-          <p:cNvPr id="61" name="Text 59"/>
+          <p:cNvPr id="65" name="Text 63"/>
           <p:cNvSpPr txBox="1"/>
           <p:nvPr/>
         </p:nvSpPr>
@@ -21294,7 +21374,7 @@
       </p:sp>
       <p:sp>
         <p:nvSpPr>
-          <p:cNvPr id="62" name="Text 60"/>
+          <p:cNvPr id="66" name="Text 64"/>
           <p:cNvSpPr txBox="1"/>
           <p:nvPr/>
         </p:nvSpPr>
@@ -21333,7 +21413,7 @@
       </p:sp>
       <p:sp>
         <p:nvSpPr>
-          <p:cNvPr id="63" name="Text 61"/>
+          <p:cNvPr id="67" name="Text 65"/>
           <p:cNvSpPr txBox="1"/>
           <p:nvPr/>
         </p:nvSpPr>
@@ -21372,7 +21452,7 @@
       </p:sp>
       <p:sp>
         <p:nvSpPr>
-          <p:cNvPr id="64" name="Shape 62"/>
+          <p:cNvPr id="68" name="Shape 66"/>
           <p:cNvSpPr/>
           <p:nvPr/>
         </p:nvSpPr>
@@ -21392,7 +21472,7 @@
       </p:sp>
       <p:sp>
         <p:nvSpPr>
-          <p:cNvPr id="65" name="Text 63"/>
+          <p:cNvPr id="69" name="Text 67"/>
           <p:cNvSpPr txBox="1"/>
           <p:nvPr/>
         </p:nvSpPr>
@@ -21433,7 +21513,7 @@
       </p:sp>
       <p:sp>
         <p:nvSpPr>
-          <p:cNvPr id="66" name="Text 64"/>
+          <p:cNvPr id="70" name="Text 68"/>
           <p:cNvSpPr txBox="1"/>
           <p:nvPr/>
         </p:nvSpPr>
@@ -21472,7 +21552,7 @@
       </p:sp>
       <p:sp>
         <p:nvSpPr>
-          <p:cNvPr id="67" name="Text 65"/>
+          <p:cNvPr id="71" name="Text 69"/>
           <p:cNvSpPr txBox="1"/>
           <p:nvPr/>
         </p:nvSpPr>
@@ -21511,7 +21591,7 @@
       </p:sp>
       <p:sp>
         <p:nvSpPr>
-          <p:cNvPr id="68" name="Text 66"/>
+          <p:cNvPr id="72" name="Text 70"/>
           <p:cNvSpPr txBox="1"/>
           <p:nvPr/>
         </p:nvSpPr>
@@ -21550,7 +21630,7 @@
       </p:sp>
       <p:sp>
         <p:nvSpPr>
-          <p:cNvPr id="69" name="Text 67"/>
+          <p:cNvPr id="73" name="Text 71"/>
           <p:cNvSpPr txBox="1"/>
           <p:nvPr/>
         </p:nvSpPr>
@@ -21589,7 +21669,7 @@
       </p:sp>
       <p:sp>
         <p:nvSpPr>
-          <p:cNvPr id="70" name="Text 68"/>
+          <p:cNvPr id="74" name="Text 72"/>
           <p:cNvSpPr txBox="1"/>
           <p:nvPr/>
         </p:nvSpPr>
@@ -21628,7 +21708,7 @@
       </p:sp>
       <p:sp>
         <p:nvSpPr>
-          <p:cNvPr id="71" name="Text 69"/>
+          <p:cNvPr id="75" name="Text 73"/>
           <p:cNvSpPr txBox="1"/>
           <p:nvPr/>
         </p:nvSpPr>
@@ -21667,7 +21747,7 @@
       </p:sp>
       <p:sp>
         <p:nvSpPr>
-          <p:cNvPr id="72" name="Text 70"/>
+          <p:cNvPr id="76" name="Text 74"/>
           <p:cNvSpPr txBox="1"/>
           <p:nvPr/>
         </p:nvSpPr>
@@ -21706,7 +21786,7 @@
       </p:sp>
       <p:sp>
         <p:nvSpPr>
-          <p:cNvPr id="73" name="Text 71"/>
+          <p:cNvPr id="77" name="Text 75"/>
           <p:cNvSpPr txBox="1"/>
           <p:nvPr/>
         </p:nvSpPr>
@@ -21745,7 +21825,7 @@
       </p:sp>
       <p:sp>
         <p:nvSpPr>
-          <p:cNvPr id="74" name="Text 72"/>
+          <p:cNvPr id="78" name="Text 76"/>
           <p:cNvSpPr txBox="1"/>
           <p:nvPr/>
         </p:nvSpPr>
@@ -21784,7 +21864,7 @@
       </p:sp>
       <p:sp>
         <p:nvSpPr>
-          <p:cNvPr id="75" name="Text 73"/>
+          <p:cNvPr id="79" name="Text 77"/>
           <p:cNvSpPr txBox="1"/>
           <p:nvPr/>
         </p:nvSpPr>
@@ -21823,7 +21903,7 @@
       </p:sp>
       <p:sp>
         <p:nvSpPr>
-          <p:cNvPr id="76" name="Text 74"/>
+          <p:cNvPr id="80" name="Text 78"/>
           <p:cNvSpPr txBox="1"/>
           <p:nvPr/>
         </p:nvSpPr>
@@ -21862,7 +21942,7 @@
       </p:sp>
       <p:sp>
         <p:nvSpPr>
-          <p:cNvPr id="77" name="Text 75"/>
+          <p:cNvPr id="81" name="Text 79"/>
           <p:cNvSpPr txBox="1"/>
           <p:nvPr/>
         </p:nvSpPr>
@@ -21901,7 +21981,7 @@
       </p:sp>
       <p:sp>
         <p:nvSpPr>
-          <p:cNvPr id="78" name="Text 76"/>
+          <p:cNvPr id="82" name="Text 80"/>
           <p:cNvSpPr txBox="1"/>
           <p:nvPr/>
         </p:nvSpPr>
@@ -21940,7 +22020,7 @@
       </p:sp>
       <p:sp>
         <p:nvSpPr>
-          <p:cNvPr id="79" name="Shape 77"/>
+          <p:cNvPr id="83" name="Shape 81"/>
           <p:cNvSpPr/>
           <p:nvPr/>
         </p:nvSpPr>
@@ -21960,7 +22040,7 @@
       </p:sp>
       <p:sp>
         <p:nvSpPr>
-          <p:cNvPr id="80" name="Text 78"/>
+          <p:cNvPr id="84" name="Text 82"/>
           <p:cNvSpPr txBox="1"/>
           <p:nvPr/>
         </p:nvSpPr>
@@ -22001,7 +22081,7 @@
       </p:sp>
       <p:sp>
         <p:nvSpPr>
-          <p:cNvPr id="81" name="Text 79"/>
+          <p:cNvPr id="85" name="Text 83"/>
           <p:cNvSpPr txBox="1"/>
           <p:nvPr/>
         </p:nvSpPr>
@@ -22040,7 +22120,7 @@
       </p:sp>
       <p:sp>
         <p:nvSpPr>
-          <p:cNvPr id="82" name="Text 80"/>
+          <p:cNvPr id="86" name="Text 84"/>
           <p:cNvSpPr txBox="1"/>
           <p:nvPr/>
         </p:nvSpPr>
@@ -22079,7 +22159,7 @@
       </p:sp>
       <p:sp>
         <p:nvSpPr>
-          <p:cNvPr id="83" name="Text 81"/>
+          <p:cNvPr id="87" name="Text 85"/>
           <p:cNvSpPr txBox="1"/>
           <p:nvPr/>
         </p:nvSpPr>
@@ -22118,7 +22198,7 @@
       </p:sp>
       <p:sp>
         <p:nvSpPr>
-          <p:cNvPr id="84" name="Text 82"/>
+          <p:cNvPr id="88" name="Text 86"/>
           <p:cNvSpPr txBox="1"/>
           <p:nvPr/>
         </p:nvSpPr>
@@ -22157,7 +22237,7 @@
       </p:sp>
       <p:sp>
         <p:nvSpPr>
-          <p:cNvPr id="85" name="Text 83"/>
+          <p:cNvPr id="89" name="Text 87"/>
           <p:cNvSpPr txBox="1"/>
           <p:nvPr/>
         </p:nvSpPr>
@@ -22196,7 +22276,7 @@
       </p:sp>
       <p:sp>
         <p:nvSpPr>
-          <p:cNvPr id="86" name="Text 84"/>
+          <p:cNvPr id="90" name="Text 88"/>
           <p:cNvSpPr txBox="1"/>
           <p:nvPr/>
         </p:nvSpPr>
@@ -22235,7 +22315,7 @@
       </p:sp>
       <p:sp>
         <p:nvSpPr>
-          <p:cNvPr id="87" name="Text 85"/>
+          <p:cNvPr id="91" name="Text 89"/>
           <p:cNvSpPr txBox="1"/>
           <p:nvPr/>
         </p:nvSpPr>
@@ -22274,7 +22354,7 @@
       </p:sp>
       <p:sp>
         <p:nvSpPr>
-          <p:cNvPr id="88" name="Text 86"/>
+          <p:cNvPr id="92" name="Text 90"/>
           <p:cNvSpPr txBox="1"/>
           <p:nvPr/>
         </p:nvSpPr>
@@ -22313,7 +22393,7 @@
       </p:sp>
       <p:sp>
         <p:nvSpPr>
-          <p:cNvPr id="89" name="Text 87"/>
+          <p:cNvPr id="93" name="Text 91"/>
           <p:cNvSpPr txBox="1"/>
           <p:nvPr/>
         </p:nvSpPr>
@@ -22352,7 +22432,7 @@
       </p:sp>
       <p:sp>
         <p:nvSpPr>
-          <p:cNvPr id="90" name="Text 88"/>
+          <p:cNvPr id="94" name="Text 92"/>
           <p:cNvSpPr txBox="1"/>
           <p:nvPr/>
         </p:nvSpPr>
@@ -22391,7 +22471,7 @@
       </p:sp>
       <p:sp>
         <p:nvSpPr>
-          <p:cNvPr id="91" name="Text 89"/>
+          <p:cNvPr id="95" name="Text 93"/>
           <p:cNvSpPr txBox="1"/>
           <p:nvPr/>
         </p:nvSpPr>
@@ -22430,7 +22510,7 @@
       </p:sp>
       <p:sp>
         <p:nvSpPr>
-          <p:cNvPr id="92" name="Text 90"/>
+          <p:cNvPr id="96" name="Text 94"/>
           <p:cNvSpPr txBox="1"/>
           <p:nvPr/>
         </p:nvSpPr>
@@ -22469,7 +22549,7 @@
       </p:sp>
       <p:sp>
         <p:nvSpPr>
-          <p:cNvPr id="93" name="Text 91"/>
+          <p:cNvPr id="97" name="Text 95"/>
           <p:cNvSpPr txBox="1"/>
           <p:nvPr/>
         </p:nvSpPr>
@@ -24691,6 +24771,86 @@
         </p:nvSpPr>
         <p:spPr>
           <a:xfrm>
+            <a:off x="3044952" y="1691640"/>
+            <a:ext cx="10973" cy="3977640"/>
+          </a:xfrm>
+          <a:prstGeom prst="rect">
+            <a:avLst/>
+          </a:prstGeom>
+          <a:solidFill>
+            <a:srgbClr val="D9D9D9"/>
+          </a:solidFill>
+          <a:ln/>
+        </p:spPr>
+      </p:sp>
+      <p:sp>
+        <p:nvSpPr>
+          <p:cNvPr id="20" name="Shape 18"/>
+          <p:cNvSpPr/>
+          <p:nvPr/>
+        </p:nvSpPr>
+        <p:spPr>
+          <a:xfrm>
+            <a:off x="5180990" y="1691640"/>
+            <a:ext cx="10973" cy="3977640"/>
+          </a:xfrm>
+          <a:prstGeom prst="rect">
+            <a:avLst/>
+          </a:prstGeom>
+          <a:solidFill>
+            <a:srgbClr val="D9D9D9"/>
+          </a:solidFill>
+          <a:ln/>
+        </p:spPr>
+      </p:sp>
+      <p:sp>
+        <p:nvSpPr>
+          <p:cNvPr id="21" name="Shape 19"/>
+          <p:cNvSpPr/>
+          <p:nvPr/>
+        </p:nvSpPr>
+        <p:spPr>
+          <a:xfrm>
+            <a:off x="7317029" y="1691640"/>
+            <a:ext cx="10973" cy="3977640"/>
+          </a:xfrm>
+          <a:prstGeom prst="rect">
+            <a:avLst/>
+          </a:prstGeom>
+          <a:solidFill>
+            <a:srgbClr val="D9D9D9"/>
+          </a:solidFill>
+          <a:ln/>
+        </p:spPr>
+      </p:sp>
+      <p:sp>
+        <p:nvSpPr>
+          <p:cNvPr id="22" name="Shape 20"/>
+          <p:cNvSpPr/>
+          <p:nvPr/>
+        </p:nvSpPr>
+        <p:spPr>
+          <a:xfrm>
+            <a:off x="9453067" y="1691640"/>
+            <a:ext cx="10973" cy="3977640"/>
+          </a:xfrm>
+          <a:prstGeom prst="rect">
+            <a:avLst/>
+          </a:prstGeom>
+          <a:solidFill>
+            <a:srgbClr val="D9D9D9"/>
+          </a:solidFill>
+          <a:ln/>
+        </p:spPr>
+      </p:sp>
+      <p:sp>
+        <p:nvSpPr>
+          <p:cNvPr id="23" name="Shape 21"/>
+          <p:cNvSpPr/>
+          <p:nvPr/>
+        </p:nvSpPr>
+        <p:spPr>
+          <a:xfrm>
             <a:off x="969264" y="1691640"/>
             <a:ext cx="2026310" cy="45720"/>
           </a:xfrm>
@@ -24705,7 +24865,7 @@
       </p:sp>
       <p:sp>
         <p:nvSpPr>
-          <p:cNvPr id="20" name="Text 18"/>
+          <p:cNvPr id="24" name="Text 22"/>
           <p:cNvSpPr txBox="1"/>
           <p:nvPr/>
         </p:nvSpPr>
@@ -24746,7 +24906,7 @@
       </p:sp>
       <p:sp>
         <p:nvSpPr>
-          <p:cNvPr id="21" name="Text 19"/>
+          <p:cNvPr id="25" name="Text 23"/>
           <p:cNvSpPr txBox="1"/>
           <p:nvPr/>
         </p:nvSpPr>
@@ -24785,7 +24945,7 @@
       </p:sp>
       <p:sp>
         <p:nvSpPr>
-          <p:cNvPr id="22" name="Text 20"/>
+          <p:cNvPr id="26" name="Text 24"/>
           <p:cNvSpPr txBox="1"/>
           <p:nvPr/>
         </p:nvSpPr>
@@ -24824,7 +24984,7 @@
       </p:sp>
       <p:sp>
         <p:nvSpPr>
-          <p:cNvPr id="23" name="Text 21"/>
+          <p:cNvPr id="27" name="Text 25"/>
           <p:cNvSpPr txBox="1"/>
           <p:nvPr/>
         </p:nvSpPr>
@@ -24863,7 +25023,7 @@
       </p:sp>
       <p:sp>
         <p:nvSpPr>
-          <p:cNvPr id="24" name="Text 22"/>
+          <p:cNvPr id="28" name="Text 26"/>
           <p:cNvSpPr txBox="1"/>
           <p:nvPr/>
         </p:nvSpPr>
@@ -24902,7 +25062,7 @@
       </p:sp>
       <p:sp>
         <p:nvSpPr>
-          <p:cNvPr id="25" name="Text 23"/>
+          <p:cNvPr id="29" name="Text 27"/>
           <p:cNvSpPr txBox="1"/>
           <p:nvPr/>
         </p:nvSpPr>
@@ -24941,7 +25101,7 @@
       </p:sp>
       <p:sp>
         <p:nvSpPr>
-          <p:cNvPr id="26" name="Text 24"/>
+          <p:cNvPr id="30" name="Text 28"/>
           <p:cNvSpPr txBox="1"/>
           <p:nvPr/>
         </p:nvSpPr>
@@ -24980,7 +25140,7 @@
       </p:sp>
       <p:sp>
         <p:nvSpPr>
-          <p:cNvPr id="27" name="Text 25"/>
+          <p:cNvPr id="31" name="Text 29"/>
           <p:cNvSpPr txBox="1"/>
           <p:nvPr/>
         </p:nvSpPr>
@@ -25019,7 +25179,7 @@
       </p:sp>
       <p:sp>
         <p:nvSpPr>
-          <p:cNvPr id="28" name="Text 26"/>
+          <p:cNvPr id="32" name="Text 30"/>
           <p:cNvSpPr txBox="1"/>
           <p:nvPr/>
         </p:nvSpPr>
@@ -25058,7 +25218,7 @@
       </p:sp>
       <p:sp>
         <p:nvSpPr>
-          <p:cNvPr id="29" name="Text 27"/>
+          <p:cNvPr id="33" name="Text 31"/>
           <p:cNvSpPr txBox="1"/>
           <p:nvPr/>
         </p:nvSpPr>
@@ -25097,7 +25257,7 @@
       </p:sp>
       <p:sp>
         <p:nvSpPr>
-          <p:cNvPr id="30" name="Text 28"/>
+          <p:cNvPr id="34" name="Text 32"/>
           <p:cNvSpPr txBox="1"/>
           <p:nvPr/>
         </p:nvSpPr>
@@ -25136,7 +25296,7 @@
       </p:sp>
       <p:sp>
         <p:nvSpPr>
-          <p:cNvPr id="31" name="Text 29"/>
+          <p:cNvPr id="35" name="Text 33"/>
           <p:cNvSpPr txBox="1"/>
           <p:nvPr/>
         </p:nvSpPr>
@@ -25175,7 +25335,7 @@
       </p:sp>
       <p:sp>
         <p:nvSpPr>
-          <p:cNvPr id="32" name="Text 30"/>
+          <p:cNvPr id="36" name="Text 34"/>
           <p:cNvSpPr txBox="1"/>
           <p:nvPr/>
         </p:nvSpPr>
@@ -25214,7 +25374,7 @@
       </p:sp>
       <p:sp>
         <p:nvSpPr>
-          <p:cNvPr id="33" name="Text 31"/>
+          <p:cNvPr id="37" name="Text 35"/>
           <p:cNvSpPr txBox="1"/>
           <p:nvPr/>
         </p:nvSpPr>
@@ -25253,7 +25413,7 @@
       </p:sp>
       <p:sp>
         <p:nvSpPr>
-          <p:cNvPr id="34" name="Shape 32"/>
+          <p:cNvPr id="38" name="Shape 36"/>
           <p:cNvSpPr/>
           <p:nvPr/>
         </p:nvSpPr>
@@ -25273,7 +25433,7 @@
       </p:sp>
       <p:sp>
         <p:nvSpPr>
-          <p:cNvPr id="35" name="Text 33"/>
+          <p:cNvPr id="39" name="Text 37"/>
           <p:cNvSpPr txBox="1"/>
           <p:nvPr/>
         </p:nvSpPr>
@@ -25314,7 +25474,7 @@
       </p:sp>
       <p:sp>
         <p:nvSpPr>
-          <p:cNvPr id="36" name="Text 34"/>
+          <p:cNvPr id="40" name="Text 38"/>
           <p:cNvSpPr txBox="1"/>
           <p:nvPr/>
         </p:nvSpPr>
@@ -25353,7 +25513,7 @@
       </p:sp>
       <p:sp>
         <p:nvSpPr>
-          <p:cNvPr id="37" name="Text 35"/>
+          <p:cNvPr id="41" name="Text 39"/>
           <p:cNvSpPr txBox="1"/>
           <p:nvPr/>
         </p:nvSpPr>
@@ -25392,7 +25552,7 @@
       </p:sp>
       <p:sp>
         <p:nvSpPr>
-          <p:cNvPr id="38" name="Text 36"/>
+          <p:cNvPr id="42" name="Text 40"/>
           <p:cNvSpPr txBox="1"/>
           <p:nvPr/>
         </p:nvSpPr>
@@ -25431,7 +25591,7 @@
       </p:sp>
       <p:sp>
         <p:nvSpPr>
-          <p:cNvPr id="39" name="Text 37"/>
+          <p:cNvPr id="43" name="Text 41"/>
           <p:cNvSpPr txBox="1"/>
           <p:nvPr/>
         </p:nvSpPr>
@@ -25470,7 +25630,7 @@
       </p:sp>
       <p:sp>
         <p:nvSpPr>
-          <p:cNvPr id="40" name="Text 38"/>
+          <p:cNvPr id="44" name="Text 42"/>
           <p:cNvSpPr txBox="1"/>
           <p:nvPr/>
         </p:nvSpPr>
@@ -25509,7 +25669,7 @@
       </p:sp>
       <p:sp>
         <p:nvSpPr>
-          <p:cNvPr id="41" name="Text 39"/>
+          <p:cNvPr id="45" name="Text 43"/>
           <p:cNvSpPr txBox="1"/>
           <p:nvPr/>
         </p:nvSpPr>
@@ -25548,7 +25708,7 @@
       </p:sp>
       <p:sp>
         <p:nvSpPr>
-          <p:cNvPr id="42" name="Text 40"/>
+          <p:cNvPr id="46" name="Text 44"/>
           <p:cNvSpPr txBox="1"/>
           <p:nvPr/>
         </p:nvSpPr>
@@ -25587,7 +25747,7 @@
       </p:sp>
       <p:sp>
         <p:nvSpPr>
-          <p:cNvPr id="43" name="Text 41"/>
+          <p:cNvPr id="47" name="Text 45"/>
           <p:cNvSpPr txBox="1"/>
           <p:nvPr/>
         </p:nvSpPr>
@@ -25626,7 +25786,7 @@
       </p:sp>
       <p:sp>
         <p:nvSpPr>
-          <p:cNvPr id="44" name="Text 42"/>
+          <p:cNvPr id="48" name="Text 46"/>
           <p:cNvSpPr txBox="1"/>
           <p:nvPr/>
         </p:nvSpPr>
@@ -25665,7 +25825,7 @@
       </p:sp>
       <p:sp>
         <p:nvSpPr>
-          <p:cNvPr id="45" name="Text 43"/>
+          <p:cNvPr id="49" name="Text 47"/>
           <p:cNvSpPr txBox="1"/>
           <p:nvPr/>
         </p:nvSpPr>
@@ -25704,7 +25864,7 @@
       </p:sp>
       <p:sp>
         <p:nvSpPr>
-          <p:cNvPr id="46" name="Text 44"/>
+          <p:cNvPr id="50" name="Text 48"/>
           <p:cNvSpPr txBox="1"/>
           <p:nvPr/>
         </p:nvSpPr>
@@ -25743,7 +25903,7 @@
       </p:sp>
       <p:sp>
         <p:nvSpPr>
-          <p:cNvPr id="47" name="Text 45"/>
+          <p:cNvPr id="51" name="Text 49"/>
           <p:cNvSpPr txBox="1"/>
           <p:nvPr/>
         </p:nvSpPr>
@@ -25782,7 +25942,7 @@
       </p:sp>
       <p:sp>
         <p:nvSpPr>
-          <p:cNvPr id="48" name="Text 46"/>
+          <p:cNvPr id="52" name="Text 50"/>
           <p:cNvSpPr txBox="1"/>
           <p:nvPr/>
         </p:nvSpPr>
@@ -25821,7 +25981,7 @@
       </p:sp>
       <p:sp>
         <p:nvSpPr>
-          <p:cNvPr id="49" name="Shape 47"/>
+          <p:cNvPr id="53" name="Shape 51"/>
           <p:cNvSpPr/>
           <p:nvPr/>
         </p:nvSpPr>
@@ -25841,7 +26001,7 @@
       </p:sp>
       <p:sp>
         <p:nvSpPr>
-          <p:cNvPr id="50" name="Text 48"/>
+          <p:cNvPr id="54" name="Text 52"/>
           <p:cNvSpPr txBox="1"/>
           <p:nvPr/>
         </p:nvSpPr>
@@ -25882,7 +26042,7 @@
       </p:sp>
       <p:sp>
         <p:nvSpPr>
-          <p:cNvPr id="51" name="Text 49"/>
+          <p:cNvPr id="55" name="Text 53"/>
           <p:cNvSpPr txBox="1"/>
           <p:nvPr/>
         </p:nvSpPr>
@@ -25921,7 +26081,7 @@
       </p:sp>
       <p:sp>
         <p:nvSpPr>
-          <p:cNvPr id="52" name="Text 50"/>
+          <p:cNvPr id="56" name="Text 54"/>
           <p:cNvSpPr txBox="1"/>
           <p:nvPr/>
         </p:nvSpPr>
@@ -25960,7 +26120,7 @@
       </p:sp>
       <p:sp>
         <p:nvSpPr>
-          <p:cNvPr id="53" name="Text 51"/>
+          <p:cNvPr id="57" name="Text 55"/>
           <p:cNvSpPr txBox="1"/>
           <p:nvPr/>
         </p:nvSpPr>
@@ -25999,7 +26159,7 @@
       </p:sp>
       <p:sp>
         <p:nvSpPr>
-          <p:cNvPr id="54" name="Text 52"/>
+          <p:cNvPr id="58" name="Text 56"/>
           <p:cNvSpPr txBox="1"/>
           <p:nvPr/>
         </p:nvSpPr>
@@ -26038,7 +26198,7 @@
       </p:sp>
       <p:sp>
         <p:nvSpPr>
-          <p:cNvPr id="55" name="Text 53"/>
+          <p:cNvPr id="59" name="Text 57"/>
           <p:cNvSpPr txBox="1"/>
           <p:nvPr/>
         </p:nvSpPr>
@@ -26077,7 +26237,7 @@
       </p:sp>
       <p:sp>
         <p:nvSpPr>
-          <p:cNvPr id="56" name="Text 54"/>
+          <p:cNvPr id="60" name="Text 58"/>
           <p:cNvSpPr txBox="1"/>
           <p:nvPr/>
         </p:nvSpPr>
@@ -26116,7 +26276,7 @@
       </p:sp>
       <p:sp>
         <p:nvSpPr>
-          <p:cNvPr id="57" name="Text 55"/>
+          <p:cNvPr id="61" name="Text 59"/>
           <p:cNvSpPr txBox="1"/>
           <p:nvPr/>
         </p:nvSpPr>
@@ -26155,7 +26315,7 @@
       </p:sp>
       <p:sp>
         <p:nvSpPr>
-          <p:cNvPr id="58" name="Text 56"/>
+          <p:cNvPr id="62" name="Text 60"/>
           <p:cNvSpPr txBox="1"/>
           <p:nvPr/>
         </p:nvSpPr>
@@ -26194,7 +26354,7 @@
       </p:sp>
       <p:sp>
         <p:nvSpPr>
-          <p:cNvPr id="59" name="Text 57"/>
+          <p:cNvPr id="63" name="Text 61"/>
           <p:cNvSpPr txBox="1"/>
           <p:nvPr/>
         </p:nvSpPr>
@@ -26233,7 +26393,7 @@
       </p:sp>
       <p:sp>
         <p:nvSpPr>
-          <p:cNvPr id="60" name="Text 58"/>
+          <p:cNvPr id="64" name="Text 62"/>
           <p:cNvSpPr txBox="1"/>
           <p:nvPr/>
         </p:nvSpPr>
@@ -26272,7 +26432,7 @@
       </p:sp>
       <p:sp>
         <p:nvSpPr>
-          <p:cNvPr id="61" name="Text 59"/>
+          <p:cNvPr id="65" name="Text 63"/>
           <p:cNvSpPr txBox="1"/>
           <p:nvPr/>
         </p:nvSpPr>
@@ -26311,7 +26471,7 @@
       </p:sp>
       <p:sp>
         <p:nvSpPr>
-          <p:cNvPr id="62" name="Text 60"/>
+          <p:cNvPr id="66" name="Text 64"/>
           <p:cNvSpPr txBox="1"/>
           <p:nvPr/>
         </p:nvSpPr>
@@ -26350,7 +26510,7 @@
       </p:sp>
       <p:sp>
         <p:nvSpPr>
-          <p:cNvPr id="63" name="Text 61"/>
+          <p:cNvPr id="67" name="Text 65"/>
           <p:cNvSpPr txBox="1"/>
           <p:nvPr/>
         </p:nvSpPr>
@@ -26389,7 +26549,7 @@
       </p:sp>
       <p:sp>
         <p:nvSpPr>
-          <p:cNvPr id="64" name="Shape 62"/>
+          <p:cNvPr id="68" name="Shape 66"/>
           <p:cNvSpPr/>
           <p:nvPr/>
         </p:nvSpPr>
@@ -26409,7 +26569,7 @@
       </p:sp>
       <p:sp>
         <p:nvSpPr>
-          <p:cNvPr id="65" name="Text 63"/>
+          <p:cNvPr id="69" name="Text 67"/>
           <p:cNvSpPr txBox="1"/>
           <p:nvPr/>
         </p:nvSpPr>
@@ -26450,7 +26610,7 @@
       </p:sp>
       <p:sp>
         <p:nvSpPr>
-          <p:cNvPr id="66" name="Text 64"/>
+          <p:cNvPr id="70" name="Text 68"/>
           <p:cNvSpPr txBox="1"/>
           <p:nvPr/>
         </p:nvSpPr>
@@ -26489,7 +26649,7 @@
       </p:sp>
       <p:sp>
         <p:nvSpPr>
-          <p:cNvPr id="67" name="Text 65"/>
+          <p:cNvPr id="71" name="Text 69"/>
           <p:cNvSpPr txBox="1"/>
           <p:nvPr/>
         </p:nvSpPr>
@@ -26528,7 +26688,7 @@
       </p:sp>
       <p:sp>
         <p:nvSpPr>
-          <p:cNvPr id="68" name="Text 66"/>
+          <p:cNvPr id="72" name="Text 70"/>
           <p:cNvSpPr txBox="1"/>
           <p:nvPr/>
         </p:nvSpPr>
@@ -26567,7 +26727,7 @@
       </p:sp>
       <p:sp>
         <p:nvSpPr>
-          <p:cNvPr id="69" name="Text 67"/>
+          <p:cNvPr id="73" name="Text 71"/>
           <p:cNvSpPr txBox="1"/>
           <p:nvPr/>
         </p:nvSpPr>
@@ -26606,7 +26766,7 @@
       </p:sp>
       <p:sp>
         <p:nvSpPr>
-          <p:cNvPr id="70" name="Text 68"/>
+          <p:cNvPr id="74" name="Text 72"/>
           <p:cNvSpPr txBox="1"/>
           <p:nvPr/>
         </p:nvSpPr>
@@ -26645,7 +26805,7 @@
       </p:sp>
       <p:sp>
         <p:nvSpPr>
-          <p:cNvPr id="71" name="Text 69"/>
+          <p:cNvPr id="75" name="Text 73"/>
           <p:cNvSpPr txBox="1"/>
           <p:nvPr/>
         </p:nvSpPr>
@@ -26684,7 +26844,7 @@
       </p:sp>
       <p:sp>
         <p:nvSpPr>
-          <p:cNvPr id="72" name="Text 70"/>
+          <p:cNvPr id="76" name="Text 74"/>
           <p:cNvSpPr txBox="1"/>
           <p:nvPr/>
         </p:nvSpPr>
@@ -26723,7 +26883,7 @@
       </p:sp>
       <p:sp>
         <p:nvSpPr>
-          <p:cNvPr id="73" name="Text 71"/>
+          <p:cNvPr id="77" name="Text 75"/>
           <p:cNvSpPr txBox="1"/>
           <p:nvPr/>
         </p:nvSpPr>
@@ -26762,7 +26922,7 @@
       </p:sp>
       <p:sp>
         <p:nvSpPr>
-          <p:cNvPr id="74" name="Text 72"/>
+          <p:cNvPr id="78" name="Text 76"/>
           <p:cNvSpPr txBox="1"/>
           <p:nvPr/>
         </p:nvSpPr>
@@ -26801,7 +26961,7 @@
       </p:sp>
       <p:sp>
         <p:nvSpPr>
-          <p:cNvPr id="75" name="Text 73"/>
+          <p:cNvPr id="79" name="Text 77"/>
           <p:cNvSpPr txBox="1"/>
           <p:nvPr/>
         </p:nvSpPr>
@@ -26840,7 +27000,7 @@
       </p:sp>
       <p:sp>
         <p:nvSpPr>
-          <p:cNvPr id="76" name="Text 74"/>
+          <p:cNvPr id="80" name="Text 78"/>
           <p:cNvSpPr txBox="1"/>
           <p:nvPr/>
         </p:nvSpPr>
@@ -26879,7 +27039,7 @@
       </p:sp>
       <p:sp>
         <p:nvSpPr>
-          <p:cNvPr id="77" name="Text 75"/>
+          <p:cNvPr id="81" name="Text 79"/>
           <p:cNvSpPr txBox="1"/>
           <p:nvPr/>
         </p:nvSpPr>
@@ -26918,7 +27078,7 @@
       </p:sp>
       <p:sp>
         <p:nvSpPr>
-          <p:cNvPr id="78" name="Text 76"/>
+          <p:cNvPr id="82" name="Text 80"/>
           <p:cNvSpPr txBox="1"/>
           <p:nvPr/>
         </p:nvSpPr>
@@ -26957,7 +27117,7 @@
       </p:sp>
       <p:sp>
         <p:nvSpPr>
-          <p:cNvPr id="79" name="Shape 77"/>
+          <p:cNvPr id="83" name="Shape 81"/>
           <p:cNvSpPr/>
           <p:nvPr/>
         </p:nvSpPr>
@@ -26977,7 +27137,7 @@
       </p:sp>
       <p:sp>
         <p:nvSpPr>
-          <p:cNvPr id="80" name="Text 78"/>
+          <p:cNvPr id="84" name="Text 82"/>
           <p:cNvSpPr txBox="1"/>
           <p:nvPr/>
         </p:nvSpPr>
@@ -27018,7 +27178,7 @@
       </p:sp>
       <p:sp>
         <p:nvSpPr>
-          <p:cNvPr id="81" name="Text 79"/>
+          <p:cNvPr id="85" name="Text 83"/>
           <p:cNvSpPr txBox="1"/>
           <p:nvPr/>
         </p:nvSpPr>
@@ -27057,7 +27217,7 @@
       </p:sp>
       <p:sp>
         <p:nvSpPr>
-          <p:cNvPr id="82" name="Text 80"/>
+          <p:cNvPr id="86" name="Text 84"/>
           <p:cNvSpPr txBox="1"/>
           <p:nvPr/>
         </p:nvSpPr>
@@ -27096,7 +27256,7 @@
       </p:sp>
       <p:sp>
         <p:nvSpPr>
-          <p:cNvPr id="83" name="Text 81"/>
+          <p:cNvPr id="87" name="Text 85"/>
           <p:cNvSpPr txBox="1"/>
           <p:nvPr/>
         </p:nvSpPr>
@@ -27135,7 +27295,7 @@
       </p:sp>
       <p:sp>
         <p:nvSpPr>
-          <p:cNvPr id="84" name="Text 82"/>
+          <p:cNvPr id="88" name="Text 86"/>
           <p:cNvSpPr txBox="1"/>
           <p:nvPr/>
         </p:nvSpPr>
@@ -27174,7 +27334,7 @@
       </p:sp>
       <p:sp>
         <p:nvSpPr>
-          <p:cNvPr id="85" name="Text 83"/>
+          <p:cNvPr id="89" name="Text 87"/>
           <p:cNvSpPr txBox="1"/>
           <p:nvPr/>
         </p:nvSpPr>
@@ -27213,7 +27373,7 @@
       </p:sp>
       <p:sp>
         <p:nvSpPr>
-          <p:cNvPr id="86" name="Text 84"/>
+          <p:cNvPr id="90" name="Text 88"/>
           <p:cNvSpPr txBox="1"/>
           <p:nvPr/>
         </p:nvSpPr>
@@ -27252,7 +27412,7 @@
       </p:sp>
       <p:sp>
         <p:nvSpPr>
-          <p:cNvPr id="87" name="Text 85"/>
+          <p:cNvPr id="91" name="Text 89"/>
           <p:cNvSpPr txBox="1"/>
           <p:nvPr/>
         </p:nvSpPr>
@@ -27291,7 +27451,7 @@
       </p:sp>
       <p:sp>
         <p:nvSpPr>
-          <p:cNvPr id="88" name="Text 86"/>
+          <p:cNvPr id="92" name="Text 90"/>
           <p:cNvSpPr txBox="1"/>
           <p:nvPr/>
         </p:nvSpPr>
@@ -27330,7 +27490,7 @@
       </p:sp>
       <p:sp>
         <p:nvSpPr>
-          <p:cNvPr id="89" name="Text 87"/>
+          <p:cNvPr id="93" name="Text 91"/>
           <p:cNvSpPr txBox="1"/>
           <p:nvPr/>
         </p:nvSpPr>
@@ -27369,7 +27529,7 @@
       </p:sp>
       <p:sp>
         <p:nvSpPr>
-          <p:cNvPr id="90" name="Text 88"/>
+          <p:cNvPr id="94" name="Text 92"/>
           <p:cNvSpPr txBox="1"/>
           <p:nvPr/>
         </p:nvSpPr>
@@ -27408,7 +27568,7 @@
       </p:sp>
       <p:sp>
         <p:nvSpPr>
-          <p:cNvPr id="91" name="Text 89"/>
+          <p:cNvPr id="95" name="Text 93"/>
           <p:cNvSpPr txBox="1"/>
           <p:nvPr/>
         </p:nvSpPr>
@@ -27447,7 +27607,7 @@
       </p:sp>
       <p:sp>
         <p:nvSpPr>
-          <p:cNvPr id="92" name="Text 90"/>
+          <p:cNvPr id="96" name="Text 94"/>
           <p:cNvSpPr txBox="1"/>
           <p:nvPr/>
         </p:nvSpPr>
@@ -27486,7 +27646,7 @@
       </p:sp>
       <p:sp>
         <p:nvSpPr>
-          <p:cNvPr id="93" name="Text 91"/>
+          <p:cNvPr id="97" name="Text 95"/>
           <p:cNvSpPr txBox="1"/>
           <p:nvPr/>
         </p:nvSpPr>
@@ -43697,6 +43857,26 @@
         </p:nvSpPr>
         <p:spPr>
           <a:xfrm>
+            <a:off x="5788152" y="3968496"/>
+            <a:ext cx="64008" cy="512064"/>
+          </a:xfrm>
+          <a:prstGeom prst="rect">
+            <a:avLst/>
+          </a:prstGeom>
+          <a:solidFill>
+            <a:srgbClr val="12A566"/>
+          </a:solidFill>
+          <a:ln/>
+        </p:spPr>
+      </p:sp>
+      <p:sp>
+        <p:nvSpPr>
+          <p:cNvPr id="28" name="Shape 26"/>
+          <p:cNvSpPr/>
+          <p:nvPr/>
+        </p:nvSpPr>
+        <p:spPr>
+          <a:xfrm>
             <a:off x="621792" y="4517136"/>
             <a:ext cx="5230368" cy="585216"/>
           </a:xfrm>
@@ -43711,7 +43891,7 @@
       </p:sp>
       <p:sp>
         <p:nvSpPr>
-          <p:cNvPr id="28" name="Text 26"/>
+          <p:cNvPr id="29" name="Text 27"/>
           <p:cNvSpPr txBox="1"/>
           <p:nvPr/>
         </p:nvSpPr>
@@ -43750,7 +43930,7 @@
       </p:sp>
       <p:sp>
         <p:nvSpPr>
-          <p:cNvPr id="29" name="Text 27"/>
+          <p:cNvPr id="30" name="Text 28"/>
           <p:cNvSpPr txBox="1"/>
           <p:nvPr/>
         </p:nvSpPr>
@@ -43789,7 +43969,7 @@
       </p:sp>
       <p:sp>
         <p:nvSpPr>
-          <p:cNvPr id="30" name="Shape 28"/>
+          <p:cNvPr id="31" name="Shape 29"/>
           <p:cNvSpPr/>
           <p:nvPr/>
         </p:nvSpPr>
@@ -43809,7 +43989,7 @@
       </p:sp>
       <p:sp>
         <p:nvSpPr>
-          <p:cNvPr id="31" name="Text 29"/>
+          <p:cNvPr id="32" name="Text 30"/>
           <p:cNvSpPr txBox="1"/>
           <p:nvPr/>
         </p:nvSpPr>
@@ -43848,7 +44028,7 @@
       </p:sp>
       <p:sp>
         <p:nvSpPr>
-          <p:cNvPr id="32" name="Text 30"/>
+          <p:cNvPr id="33" name="Text 31"/>
           <p:cNvSpPr txBox="1"/>
           <p:nvPr/>
         </p:nvSpPr>
@@ -43887,7 +44067,7 @@
       </p:sp>
       <p:sp>
         <p:nvSpPr>
-          <p:cNvPr id="33" name="Text 31"/>
+          <p:cNvPr id="34" name="Text 32"/>
           <p:cNvSpPr txBox="1"/>
           <p:nvPr/>
         </p:nvSpPr>
@@ -43926,7 +44106,7 @@
       </p:sp>
       <p:sp>
         <p:nvSpPr>
-          <p:cNvPr id="34" name="Shape 32"/>
+          <p:cNvPr id="35" name="Shape 33"/>
           <p:cNvSpPr/>
           <p:nvPr/>
         </p:nvSpPr>
@@ -43946,7 +44126,7 @@
       </p:sp>
       <p:sp>
         <p:nvSpPr>
-          <p:cNvPr id="35" name="Text 33"/>
+          <p:cNvPr id="36" name="Text 34"/>
           <p:cNvSpPr txBox="1"/>
           <p:nvPr/>
         </p:nvSpPr>
@@ -43985,7 +44165,7 @@
       </p:sp>
       <p:sp>
         <p:nvSpPr>
-          <p:cNvPr id="36" name="Shape 34"/>
+          <p:cNvPr id="37" name="Shape 35"/>
           <p:cNvSpPr/>
           <p:nvPr/>
         </p:nvSpPr>
@@ -44005,7 +44185,7 @@
       </p:sp>
       <p:sp>
         <p:nvSpPr>
-          <p:cNvPr id="37" name="Text 35"/>
+          <p:cNvPr id="38" name="Text 36"/>
           <p:cNvSpPr txBox="1"/>
           <p:nvPr/>
         </p:nvSpPr>
@@ -44044,7 +44224,7 @@
       </p:sp>
       <p:sp>
         <p:nvSpPr>
-          <p:cNvPr id="38" name="Shape 36"/>
+          <p:cNvPr id="39" name="Shape 37"/>
           <p:cNvSpPr/>
           <p:nvPr/>
         </p:nvSpPr>
@@ -44064,7 +44244,7 @@
       </p:sp>
       <p:sp>
         <p:nvSpPr>
-          <p:cNvPr id="39" name="Text 37"/>
+          <p:cNvPr id="40" name="Text 38"/>
           <p:cNvSpPr txBox="1"/>
           <p:nvPr/>
         </p:nvSpPr>
@@ -44103,7 +44283,7 @@
       </p:sp>
       <p:sp>
         <p:nvSpPr>
-          <p:cNvPr id="40" name="Shape 38"/>
+          <p:cNvPr id="41" name="Shape 39"/>
           <p:cNvSpPr/>
           <p:nvPr/>
         </p:nvSpPr>
@@ -44123,7 +44303,7 @@
       </p:sp>
       <p:sp>
         <p:nvSpPr>
-          <p:cNvPr id="41" name="Text 39"/>
+          <p:cNvPr id="42" name="Text 40"/>
           <p:cNvSpPr txBox="1"/>
           <p:nvPr/>
         </p:nvSpPr>
@@ -44162,7 +44342,7 @@
       </p:sp>
       <p:sp>
         <p:nvSpPr>
-          <p:cNvPr id="42" name="Text 40"/>
+          <p:cNvPr id="43" name="Text 41"/>
           <p:cNvSpPr txBox="1"/>
           <p:nvPr/>
         </p:nvSpPr>
@@ -44201,7 +44381,7 @@
       </p:sp>
       <p:sp>
         <p:nvSpPr>
-          <p:cNvPr id="43" name="Shape 41"/>
+          <p:cNvPr id="44" name="Shape 42"/>
           <p:cNvSpPr/>
           <p:nvPr/>
         </p:nvSpPr>
@@ -44221,7 +44401,7 @@
       </p:sp>
       <p:sp>
         <p:nvSpPr>
-          <p:cNvPr id="44" name="Text 42"/>
+          <p:cNvPr id="45" name="Text 43"/>
           <p:cNvSpPr txBox="1"/>
           <p:nvPr/>
         </p:nvSpPr>
@@ -44260,7 +44440,7 @@
       </p:sp>
       <p:sp>
         <p:nvSpPr>
-          <p:cNvPr id="45" name="Text 43"/>
+          <p:cNvPr id="46" name="Text 44"/>
           <p:cNvSpPr txBox="1"/>
           <p:nvPr/>
         </p:nvSpPr>
@@ -44299,7 +44479,7 @@
       </p:sp>
       <p:sp>
         <p:nvSpPr>
-          <p:cNvPr id="46" name="Text 44"/>
+          <p:cNvPr id="47" name="Text 45"/>
           <p:cNvSpPr txBox="1"/>
           <p:nvPr/>
         </p:nvSpPr>
@@ -44338,7 +44518,7 @@
       </p:sp>
       <p:sp>
         <p:nvSpPr>
-          <p:cNvPr id="47" name="Shape 45"/>
+          <p:cNvPr id="48" name="Shape 46"/>
           <p:cNvSpPr/>
           <p:nvPr/>
         </p:nvSpPr>
@@ -44358,7 +44538,7 @@
       </p:sp>
       <p:sp>
         <p:nvSpPr>
-          <p:cNvPr id="48" name="Text 46"/>
+          <p:cNvPr id="49" name="Text 47"/>
           <p:cNvSpPr txBox="1"/>
           <p:nvPr/>
         </p:nvSpPr>
@@ -44397,7 +44577,27 @@
       </p:sp>
       <p:sp>
         <p:nvSpPr>
-          <p:cNvPr id="49" name="Shape 47"/>
+          <p:cNvPr id="50" name="Shape 48"/>
+          <p:cNvSpPr/>
+          <p:nvPr/>
+        </p:nvSpPr>
+        <p:spPr>
+          <a:xfrm>
+            <a:off x="11503152" y="2798064"/>
+            <a:ext cx="64008" cy="512064"/>
+          </a:xfrm>
+          <a:prstGeom prst="rect">
+            <a:avLst/>
+          </a:prstGeom>
+          <a:solidFill>
+            <a:srgbClr val="12A566"/>
+          </a:solidFill>
+          <a:ln/>
+        </p:spPr>
+      </p:sp>
+      <p:sp>
+        <p:nvSpPr>
+          <p:cNvPr id="51" name="Shape 49"/>
           <p:cNvSpPr/>
           <p:nvPr/>
         </p:nvSpPr>
@@ -44417,7 +44617,7 @@
       </p:sp>
       <p:sp>
         <p:nvSpPr>
-          <p:cNvPr id="50" name="Text 48"/>
+          <p:cNvPr id="52" name="Text 50"/>
           <p:cNvSpPr txBox="1"/>
           <p:nvPr/>
         </p:nvSpPr>
@@ -44456,7 +44656,7 @@
       </p:sp>
       <p:sp>
         <p:nvSpPr>
-          <p:cNvPr id="51" name="Text 49"/>
+          <p:cNvPr id="53" name="Text 51"/>
           <p:cNvSpPr txBox="1"/>
           <p:nvPr/>
         </p:nvSpPr>
@@ -44495,7 +44695,7 @@
       </p:sp>
       <p:sp>
         <p:nvSpPr>
-          <p:cNvPr id="52" name="Shape 50"/>
+          <p:cNvPr id="54" name="Shape 52"/>
           <p:cNvSpPr/>
           <p:nvPr/>
         </p:nvSpPr>
@@ -44515,7 +44715,7 @@
       </p:sp>
       <p:sp>
         <p:nvSpPr>
-          <p:cNvPr id="53" name="Text 51"/>
+          <p:cNvPr id="55" name="Text 53"/>
           <p:cNvSpPr txBox="1"/>
           <p:nvPr/>
         </p:nvSpPr>
@@ -44554,7 +44754,7 @@
       </p:sp>
       <p:sp>
         <p:nvSpPr>
-          <p:cNvPr id="54" name="Text 52"/>
+          <p:cNvPr id="56" name="Text 54"/>
           <p:cNvSpPr txBox="1"/>
           <p:nvPr/>
         </p:nvSpPr>
@@ -44593,7 +44793,7 @@
       </p:sp>
       <p:sp>
         <p:nvSpPr>
-          <p:cNvPr id="55" name="Text 53"/>
+          <p:cNvPr id="57" name="Text 55"/>
           <p:cNvSpPr txBox="1"/>
           <p:nvPr/>
         </p:nvSpPr>
@@ -44632,7 +44832,7 @@
       </p:sp>
       <p:sp>
         <p:nvSpPr>
-          <p:cNvPr id="56" name="Shape 54"/>
+          <p:cNvPr id="58" name="Shape 56"/>
           <p:cNvSpPr/>
           <p:nvPr/>
         </p:nvSpPr>
@@ -44652,7 +44852,7 @@
       </p:sp>
       <p:sp>
         <p:nvSpPr>
-          <p:cNvPr id="57" name="Text 55"/>
+          <p:cNvPr id="59" name="Text 57"/>
           <p:cNvSpPr txBox="1"/>
           <p:nvPr/>
         </p:nvSpPr>
@@ -44691,7 +44891,7 @@
       </p:sp>
       <p:sp>
         <p:nvSpPr>
-          <p:cNvPr id="58" name="Shape 56"/>
+          <p:cNvPr id="60" name="Shape 58"/>
           <p:cNvSpPr/>
           <p:nvPr/>
         </p:nvSpPr>
@@ -44711,7 +44911,7 @@
       </p:sp>
       <p:sp>
         <p:nvSpPr>
-          <p:cNvPr id="59" name="Text 57"/>
+          <p:cNvPr id="61" name="Text 59"/>
           <p:cNvSpPr txBox="1"/>
           <p:nvPr/>
         </p:nvSpPr>
@@ -44750,7 +44950,7 @@
       </p:sp>
       <p:sp>
         <p:nvSpPr>
-          <p:cNvPr id="60" name="Text 58"/>
+          <p:cNvPr id="62" name="Text 60"/>
           <p:cNvSpPr txBox="1"/>
           <p:nvPr/>
         </p:nvSpPr>
@@ -44789,7 +44989,7 @@
       </p:sp>
       <p:sp>
         <p:nvSpPr>
-          <p:cNvPr id="61" name="Shape 59"/>
+          <p:cNvPr id="63" name="Shape 61"/>
           <p:cNvSpPr/>
           <p:nvPr/>
         </p:nvSpPr>
@@ -44809,7 +45009,7 @@
       </p:sp>
       <p:sp>
         <p:nvSpPr>
-          <p:cNvPr id="62" name="Text 60"/>
+          <p:cNvPr id="64" name="Text 62"/>
           <p:cNvSpPr txBox="1"/>
           <p:nvPr/>
         </p:nvSpPr>
@@ -44848,7 +45048,7 @@
       </p:sp>
       <p:sp>
         <p:nvSpPr>
-          <p:cNvPr id="63" name="Text 61"/>
+          <p:cNvPr id="65" name="Text 63"/>
           <p:cNvSpPr txBox="1"/>
           <p:nvPr/>
         </p:nvSpPr>
@@ -44887,7 +45087,7 @@
       </p:sp>
       <p:sp>
         <p:nvSpPr>
-          <p:cNvPr id="64" name="Text 62"/>
+          <p:cNvPr id="66" name="Text 64"/>
           <p:cNvSpPr txBox="1"/>
           <p:nvPr/>
         </p:nvSpPr>
@@ -44926,7 +45126,7 @@
       </p:sp>
       <p:sp>
         <p:nvSpPr>
-          <p:cNvPr id="65" name="Shape 63"/>
+          <p:cNvPr id="67" name="Shape 65"/>
           <p:cNvSpPr/>
           <p:nvPr/>
         </p:nvSpPr>
@@ -44946,7 +45146,7 @@
       </p:sp>
       <p:sp>
         <p:nvSpPr>
-          <p:cNvPr id="66" name="Text 64"/>
+          <p:cNvPr id="68" name="Text 66"/>
           <p:cNvSpPr txBox="1"/>
           <p:nvPr/>
         </p:nvSpPr>
@@ -44985,7 +45185,7 @@
       </p:sp>
       <p:sp>
         <p:nvSpPr>
-          <p:cNvPr id="68" name="Shape 65"/>
+          <p:cNvPr id="70" name="Shape 67"/>
           <p:cNvSpPr/>
           <p:nvPr/>
         </p:nvSpPr>
@@ -45005,7 +45205,7 @@
       </p:sp>
       <p:sp>
         <p:nvSpPr>
-          <p:cNvPr id="69" name="Text 66"/>
+          <p:cNvPr id="71" name="Text 68"/>
           <p:cNvSpPr txBox="1"/>
           <p:nvPr/>
         </p:nvSpPr>
@@ -45036,7 +45236,7 @@
                 <a:ea typeface="Inter" pitchFamily="34" charset="-122"/>
                 <a:cs typeface="Inter" pitchFamily="34" charset="-120"/>
               </a:rPr>
-              <a:t>Moving now: Three stores tie. Eight stores make both views.</a:t>
+              <a:t>Moving now: Three stores tie. One store is on both lists (green bar).</a:t>
             </a:r>
             <a:endParaRPr lang="en-US" sz="1600" dirty="0"/>
           </a:p>

--- a/day2-deck/decks/Most Improved v2 - Review.pptx
+++ b/day2-deck/decks/Most Improved v2 - Review.pptx
@@ -19840,7 +19840,7 @@
                 <a:ea typeface="Inter" pitchFamily="34" charset="-122"/>
                 <a:cs typeface="Inter" pitchFamily="34" charset="-120"/>
               </a:rPr>
-              <a:t>Group +6.4%</a:t>
+              <a:t>Group +6.5%</a:t>
             </a:r>
             <a:endParaRPr lang="en-US" sz="1300" dirty="0"/>
           </a:p>
@@ -19918,7 +19918,7 @@
                 <a:ea typeface="Inter" pitchFamily="34" charset="-122"/>
                 <a:cs typeface="Inter" pitchFamily="34" charset="-120"/>
               </a:rPr>
-              <a:t>+46.0%</a:t>
+              <a:t>+46.1%</a:t>
             </a:r>
             <a:endParaRPr lang="en-US" sz="1600" dirty="0"/>
           </a:p>
@@ -19996,7 +19996,7 @@
                 <a:ea typeface="Inter" pitchFamily="34" charset="-122"/>
                 <a:cs typeface="Inter" pitchFamily="34" charset="-120"/>
               </a:rPr>
-              <a:t>+45.3%</a:t>
+              <a:t>+45.4%</a:t>
             </a:r>
             <a:endParaRPr lang="en-US" sz="1600" dirty="0"/>
           </a:p>
@@ -20408,7 +20408,7 @@
                 <a:ea typeface="Inter" pitchFamily="34" charset="-122"/>
                 <a:cs typeface="Inter" pitchFamily="34" charset="-120"/>
               </a:rPr>
-              <a:t>Group +0.1%</a:t>
+              <a:t>Group +0.2%</a:t>
             </a:r>
             <a:endParaRPr lang="en-US" sz="1300" dirty="0"/>
           </a:p>
@@ -20486,7 +20486,7 @@
                 <a:ea typeface="Inter" pitchFamily="34" charset="-122"/>
                 <a:cs typeface="Inter" pitchFamily="34" charset="-120"/>
               </a:rPr>
-              <a:t>+13.6%</a:t>
+              <a:t>+13.7%</a:t>
             </a:r>
             <a:endParaRPr lang="en-US" sz="1600" dirty="0"/>
           </a:p>
@@ -20564,7 +20564,7 @@
                 <a:ea typeface="Inter" pitchFamily="34" charset="-122"/>
                 <a:cs typeface="Inter" pitchFamily="34" charset="-120"/>
               </a:rPr>
-              <a:t>+12.6%</a:t>
+              <a:t>+12.7%</a:t>
             </a:r>
             <a:endParaRPr lang="en-US" sz="1600" dirty="0"/>
           </a:p>
@@ -20642,7 +20642,7 @@
                 <a:ea typeface="Inter" pitchFamily="34" charset="-122"/>
                 <a:cs typeface="Inter" pitchFamily="34" charset="-120"/>
               </a:rPr>
-              <a:t>+10.5%</a:t>
+              <a:t>+10.6%</a:t>
             </a:r>
             <a:endParaRPr lang="en-US" sz="1600" dirty="0"/>
           </a:p>
@@ -20720,7 +20720,7 @@
                 <a:ea typeface="Inter" pitchFamily="34" charset="-122"/>
                 <a:cs typeface="Inter" pitchFamily="34" charset="-120"/>
               </a:rPr>
-              <a:t>−10.5%</a:t>
+              <a:t>−10.6%</a:t>
             </a:r>
             <a:endParaRPr lang="en-US" sz="1600" dirty="0"/>
           </a:p>
@@ -20798,7 +20798,7 @@
                 <a:ea typeface="Inter" pitchFamily="34" charset="-122"/>
                 <a:cs typeface="Inter" pitchFamily="34" charset="-120"/>
               </a:rPr>
-              <a:t>−11.4%</a:t>
+              <a:t>−11.5%</a:t>
             </a:r>
             <a:endParaRPr lang="en-US" sz="1600" dirty="0"/>
           </a:p>
@@ -21054,7 +21054,7 @@
                 <a:ea typeface="Inter" pitchFamily="34" charset="-122"/>
                 <a:cs typeface="Inter" pitchFamily="34" charset="-120"/>
               </a:rPr>
-              <a:t>+39.1%</a:t>
+              <a:t>+39.2%</a:t>
             </a:r>
             <a:endParaRPr lang="en-US" sz="1600" dirty="0"/>
           </a:p>
@@ -21210,7 +21210,7 @@
                 <a:ea typeface="Inter" pitchFamily="34" charset="-122"/>
                 <a:cs typeface="Inter" pitchFamily="34" charset="-120"/>
               </a:rPr>
-              <a:t>+30.7%</a:t>
+              <a:t>+30.8%</a:t>
             </a:r>
             <a:endParaRPr lang="en-US" sz="1600" dirty="0"/>
           </a:p>
@@ -21856,7 +21856,7 @@
                 <a:ea typeface="Inter" pitchFamily="34" charset="-122"/>
                 <a:cs typeface="Inter" pitchFamily="34" charset="-120"/>
               </a:rPr>
-              <a:t>−5.0%</a:t>
+              <a:t>−5.1%</a:t>
             </a:r>
             <a:endParaRPr lang="en-US" sz="1600" dirty="0"/>
           </a:p>
@@ -21934,7 +21934,7 @@
                 <a:ea typeface="Inter" pitchFamily="34" charset="-122"/>
                 <a:cs typeface="Inter" pitchFamily="34" charset="-120"/>
               </a:rPr>
-              <a:t>−6.9%</a:t>
+              <a:t>−7.0%</a:t>
             </a:r>
             <a:endParaRPr lang="en-US" sz="1600" dirty="0"/>
           </a:p>
@@ -22012,7 +22012,7 @@
                 <a:ea typeface="Inter" pitchFamily="34" charset="-122"/>
                 <a:cs typeface="Inter" pitchFamily="34" charset="-120"/>
               </a:rPr>
-              <a:t>−19.0%</a:t>
+              <a:t>−19.1%</a:t>
             </a:r>
             <a:endParaRPr lang="en-US" sz="1600" dirty="0"/>
           </a:p>
@@ -22112,7 +22112,7 @@
                 <a:ea typeface="Inter" pitchFamily="34" charset="-122"/>
                 <a:cs typeface="Inter" pitchFamily="34" charset="-120"/>
               </a:rPr>
-              <a:t>Group +1.2 pts</a:t>
+              <a:t>Group +1.3 pts</a:t>
             </a:r>
             <a:endParaRPr lang="en-US" sz="1300" dirty="0"/>
           </a:p>
@@ -22190,7 +22190,7 @@
                 <a:ea typeface="Inter" pitchFamily="34" charset="-122"/>
                 <a:cs typeface="Inter" pitchFamily="34" charset="-120"/>
               </a:rPr>
-              <a:t>+6.1 pts</a:t>
+              <a:t>+6.2 pts</a:t>
             </a:r>
             <a:endParaRPr lang="en-US" sz="1600" dirty="0"/>
           </a:p>
@@ -22580,7 +22580,7 @@
                 <a:ea typeface="Inter" pitchFamily="34" charset="-122"/>
                 <a:cs typeface="Inter" pitchFamily="34" charset="-120"/>
               </a:rPr>
-              <a:t>−2.1 pts</a:t>
+              <a:t>−2.2 pts</a:t>
             </a:r>
             <a:endParaRPr lang="en-US" sz="1600" dirty="0"/>
           </a:p>
@@ -23550,7 +23550,7 @@
                 <a:ea typeface="Inter" pitchFamily="34" charset="-122"/>
                 <a:cs typeface="Inter" pitchFamily="34" charset="-120"/>
               </a:rPr>
-              <a:t>+22.1%</a:t>
+              <a:t>+22.2%</a:t>
             </a:r>
             <a:endParaRPr lang="en-US" sz="1500" dirty="0"/>
           </a:p>
@@ -24155,7 +24155,7 @@
                 <a:ea typeface="Inter" pitchFamily="34" charset="-122"/>
                 <a:cs typeface="Inter" pitchFamily="34" charset="-120"/>
               </a:rPr>
-              <a:t>+10.1 pts</a:t>
+              <a:t>+10.2 pts</a:t>
             </a:r>
             <a:endParaRPr lang="en-US" sz="1500" dirty="0"/>
           </a:p>
@@ -25249,7 +25249,7 @@
                 <a:ea typeface="Inter" pitchFamily="34" charset="-122"/>
                 <a:cs typeface="Inter" pitchFamily="34" charset="-120"/>
               </a:rPr>
-              <a:t>−0.9%</a:t>
+              <a:t>−1.0%</a:t>
             </a:r>
             <a:endParaRPr lang="en-US" sz="1600" dirty="0"/>
           </a:p>
@@ -25327,7 +25327,7 @@
                 <a:ea typeface="Inter" pitchFamily="34" charset="-122"/>
                 <a:cs typeface="Inter" pitchFamily="34" charset="-120"/>
               </a:rPr>
-              <a:t>−2.0%</a:t>
+              <a:t>−2.1%</a:t>
             </a:r>
             <a:endParaRPr lang="en-US" sz="1600" dirty="0"/>
           </a:p>
@@ -25739,7 +25739,7 @@
                 <a:ea typeface="Inter" pitchFamily="34" charset="-122"/>
                 <a:cs typeface="Inter" pitchFamily="34" charset="-120"/>
               </a:rPr>
-              <a:t>+18.6%</a:t>
+              <a:t>+18.7%</a:t>
             </a:r>
             <a:endParaRPr lang="en-US" sz="1600" dirty="0"/>
           </a:p>
@@ -25817,7 +25817,7 @@
                 <a:ea typeface="Inter" pitchFamily="34" charset="-122"/>
                 <a:cs typeface="Inter" pitchFamily="34" charset="-120"/>
               </a:rPr>
-              <a:t>−2.0%</a:t>
+              <a:t>−2.1%</a:t>
             </a:r>
             <a:endParaRPr lang="en-US" sz="1600" dirty="0"/>
           </a:p>
@@ -25895,7 +25895,7 @@
                 <a:ea typeface="Inter" pitchFamily="34" charset="-122"/>
                 <a:cs typeface="Inter" pitchFamily="34" charset="-120"/>
               </a:rPr>
-              <a:t>−3.0%</a:t>
+              <a:t>−3.1%</a:t>
             </a:r>
             <a:endParaRPr lang="en-US" sz="1600" dirty="0"/>
           </a:p>
@@ -25973,7 +25973,7 @@
                 <a:ea typeface="Inter" pitchFamily="34" charset="-122"/>
                 <a:cs typeface="Inter" pitchFamily="34" charset="-120"/>
               </a:rPr>
-              <a:t>−4.3%</a:t>
+              <a:t>−4.4%</a:t>
             </a:r>
             <a:endParaRPr lang="en-US" sz="1600" dirty="0"/>
           </a:p>
@@ -26073,7 +26073,7 @@
                 <a:ea typeface="Inter" pitchFamily="34" charset="-122"/>
                 <a:cs typeface="Inter" pitchFamily="34" charset="-120"/>
               </a:rPr>
-              <a:t>Group −1.8%</a:t>
+              <a:t>Group −1.9%</a:t>
             </a:r>
             <a:endParaRPr lang="en-US" sz="1300" dirty="0"/>
           </a:p>
@@ -26151,7 +26151,7 @@
                 <a:ea typeface="Inter" pitchFamily="34" charset="-122"/>
                 <a:cs typeface="Inter" pitchFamily="34" charset="-120"/>
               </a:rPr>
-              <a:t>+22.1%</a:t>
+              <a:t>+22.2%</a:t>
             </a:r>
             <a:endParaRPr lang="en-US" sz="1600" dirty="0"/>
           </a:p>
@@ -26229,7 +26229,7 @@
                 <a:ea typeface="Inter" pitchFamily="34" charset="-122"/>
                 <a:cs typeface="Inter" pitchFamily="34" charset="-120"/>
               </a:rPr>
-              <a:t>+13.1%</a:t>
+              <a:t>+13.2%</a:t>
             </a:r>
             <a:endParaRPr lang="en-US" sz="1600" dirty="0"/>
           </a:p>
@@ -26385,7 +26385,7 @@
                 <a:ea typeface="Inter" pitchFamily="34" charset="-122"/>
                 <a:cs typeface="Inter" pitchFamily="34" charset="-120"/>
               </a:rPr>
-              <a:t>−9.9%</a:t>
+              <a:t>−10.0%</a:t>
             </a:r>
             <a:endParaRPr lang="en-US" sz="1600" dirty="0"/>
           </a:p>
@@ -26463,7 +26463,7 @@
                 <a:ea typeface="Inter" pitchFamily="34" charset="-122"/>
                 <a:cs typeface="Inter" pitchFamily="34" charset="-120"/>
               </a:rPr>
-              <a:t>−10.6%</a:t>
+              <a:t>−10.7%</a:t>
             </a:r>
             <a:endParaRPr lang="en-US" sz="1600" dirty="0"/>
           </a:p>
@@ -26541,7 +26541,7 @@
                 <a:ea typeface="Inter" pitchFamily="34" charset="-122"/>
                 <a:cs typeface="Inter" pitchFamily="34" charset="-120"/>
               </a:rPr>
-              <a:t>−14.0%</a:t>
+              <a:t>−14.1%</a:t>
             </a:r>
             <a:endParaRPr lang="en-US" sz="1600" dirty="0"/>
           </a:p>
@@ -26797,7 +26797,7 @@
                 <a:ea typeface="Inter" pitchFamily="34" charset="-122"/>
                 <a:cs typeface="Inter" pitchFamily="34" charset="-120"/>
               </a:rPr>
-              <a:t>+7.3%</a:t>
+              <a:t>+7.4%</a:t>
             </a:r>
             <a:endParaRPr lang="en-US" sz="1600" dirty="0"/>
           </a:p>
@@ -26953,7 +26953,7 @@
                 <a:ea typeface="Inter" pitchFamily="34" charset="-122"/>
                 <a:cs typeface="Inter" pitchFamily="34" charset="-120"/>
               </a:rPr>
-              <a:t>−3.0%</a:t>
+              <a:t>−3.1%</a:t>
             </a:r>
             <a:endParaRPr lang="en-US" sz="1600" dirty="0"/>
           </a:p>
@@ -27031,7 +27031,7 @@
                 <a:ea typeface="Inter" pitchFamily="34" charset="-122"/>
                 <a:cs typeface="Inter" pitchFamily="34" charset="-120"/>
               </a:rPr>
-              <a:t>−4.7%</a:t>
+              <a:t>−4.8%</a:t>
             </a:r>
             <a:endParaRPr lang="en-US" sz="1600" dirty="0"/>
           </a:p>
@@ -27365,7 +27365,7 @@
                 <a:ea typeface="Inter" pitchFamily="34" charset="-122"/>
                 <a:cs typeface="Inter" pitchFamily="34" charset="-120"/>
               </a:rPr>
-              <a:t>+4.6 pts</a:t>
+              <a:t>+4.7 pts</a:t>
             </a:r>
             <a:endParaRPr lang="en-US" sz="1600" dirty="0"/>
           </a:p>
@@ -27521,7 +27521,7 @@
                 <a:ea typeface="Inter" pitchFamily="34" charset="-122"/>
                 <a:cs typeface="Inter" pitchFamily="34" charset="-120"/>
               </a:rPr>
-              <a:t>−3.1 pts</a:t>
+              <a:t>−3.2 pts</a:t>
             </a:r>
             <a:endParaRPr lang="en-US" sz="1600" dirty="0"/>
           </a:p>
@@ -27599,7 +27599,7 @@
                 <a:ea typeface="Inter" pitchFamily="34" charset="-122"/>
                 <a:cs typeface="Inter" pitchFamily="34" charset="-120"/>
               </a:rPr>
-              <a:t>−3.8 pts</a:t>
+              <a:t>−3.9 pts</a:t>
             </a:r>
             <a:endParaRPr lang="en-US" sz="1600" dirty="0"/>
           </a:p>
@@ -27677,7 +27677,7 @@
                 <a:ea typeface="Inter" pitchFamily="34" charset="-122"/>
                 <a:cs typeface="Inter" pitchFamily="34" charset="-120"/>
               </a:rPr>
-              <a:t>−4.2 pts</a:t>
+              <a:t>−4.3 pts</a:t>
             </a:r>
             <a:endParaRPr lang="en-US" sz="1600" dirty="0"/>
           </a:p>
@@ -28906,7 +28906,7 @@
                 <a:ea typeface="Inter" pitchFamily="34" charset="-122"/>
                 <a:cs typeface="Inter" pitchFamily="34" charset="-120"/>
               </a:rPr>
-              <a:t>+23.2%</a:t>
+              <a:t>+23.3%</a:t>
             </a:r>
             <a:endParaRPr lang="en-US" sz="1600" dirty="0"/>
           </a:p>
@@ -29348,7 +29348,7 @@
                 <a:ea typeface="Inter" pitchFamily="34" charset="-122"/>
                 <a:cs typeface="Inter" pitchFamily="34" charset="-120"/>
               </a:rPr>
-              <a:t>+21.9%</a:t>
+              <a:t>+22.0%</a:t>
             </a:r>
             <a:endParaRPr lang="en-US" sz="1600" dirty="0"/>
           </a:p>
@@ -29579,7 +29579,7 @@
                 <a:ea typeface="Inter" pitchFamily="34" charset="-122"/>
                 <a:cs typeface="Inter" pitchFamily="34" charset="-120"/>
               </a:rPr>
-              <a:t>+20.4%</a:t>
+              <a:t>+20.5%</a:t>
             </a:r>
             <a:endParaRPr lang="en-US" sz="1600" dirty="0"/>
           </a:p>
@@ -30021,7 +30021,7 @@
                 <a:ea typeface="Inter" pitchFamily="34" charset="-122"/>
                 <a:cs typeface="Inter" pitchFamily="34" charset="-120"/>
               </a:rPr>
-              <a:t>+18.8%</a:t>
+              <a:t>+18.9%</a:t>
             </a:r>
             <a:endParaRPr lang="en-US" sz="1600" dirty="0"/>
           </a:p>
@@ -31250,7 +31250,7 @@
                 <a:ea typeface="Inter" pitchFamily="34" charset="-122"/>
                 <a:cs typeface="Inter" pitchFamily="34" charset="-120"/>
               </a:rPr>
-              <a:t>+18.6%</a:t>
+              <a:t>+18.7%</a:t>
             </a:r>
             <a:endParaRPr lang="en-US" sz="1600" dirty="0"/>
           </a:p>
@@ -31903,7 +31903,7 @@
                 <a:ea typeface="Inter" pitchFamily="34" charset="-122"/>
                 <a:cs typeface="Inter" pitchFamily="34" charset="-120"/>
               </a:rPr>
-              <a:t>+13.0%</a:t>
+              <a:t>+13.1%</a:t>
             </a:r>
             <a:endParaRPr lang="en-US" sz="1600" dirty="0"/>
           </a:p>
@@ -32134,7 +32134,7 @@
                 <a:ea typeface="Inter" pitchFamily="34" charset="-122"/>
                 <a:cs typeface="Inter" pitchFamily="34" charset="-120"/>
               </a:rPr>
-              <a:t>+12.6%</a:t>
+              <a:t>+12.7%</a:t>
             </a:r>
             <a:endParaRPr lang="en-US" sz="1600" dirty="0"/>
           </a:p>
@@ -32576,7 +32576,7 @@
                 <a:ea typeface="Inter" pitchFamily="34" charset="-122"/>
                 <a:cs typeface="Inter" pitchFamily="34" charset="-120"/>
               </a:rPr>
-              <a:t>+11.3%</a:t>
+              <a:t>+11.4%</a:t>
             </a:r>
             <a:endParaRPr lang="en-US" sz="1600" dirty="0"/>
           </a:p>
@@ -32976,7 +32976,7 @@
                 <a:ea typeface="Inter" pitchFamily="34" charset="-122"/>
                 <a:cs typeface="Inter" pitchFamily="34" charset="-120"/>
               </a:rPr>
-              <a:t>Q1 → Q3 2026. Group 1.87 → 1.84, −1.8%: that is the season. 22 of 33 stores beat it.</a:t>
+              <a:t>Q1 → Q3 2026. Group 1.87 → 1.84, −1.9%: that is the season. 22 of 33 stores beat it.</a:t>
             </a:r>
             <a:endParaRPr lang="en-US" sz="1400" dirty="0"/>
           </a:p>
@@ -33363,7 +33363,7 @@
                 <a:ea typeface="Inter" pitchFamily="34" charset="-122"/>
                 <a:cs typeface="Inter" pitchFamily="34" charset="-120"/>
               </a:rPr>
-              <a:t>+22.1%</a:t>
+              <a:t>+22.2%</a:t>
             </a:r>
             <a:endParaRPr lang="en-US" sz="1600" dirty="0"/>
           </a:p>
@@ -33574,7 +33574,7 @@
                 <a:ea typeface="Inter" pitchFamily="34" charset="-122"/>
                 <a:cs typeface="Inter" pitchFamily="34" charset="-120"/>
               </a:rPr>
-              <a:t>+13.1%</a:t>
+              <a:t>+13.2%</a:t>
             </a:r>
             <a:endParaRPr lang="en-US" sz="1600" dirty="0"/>
           </a:p>
@@ -34016,7 +34016,7 @@
                 <a:ea typeface="Inter" pitchFamily="34" charset="-122"/>
                 <a:cs typeface="Inter" pitchFamily="34" charset="-120"/>
               </a:rPr>
-              <a:t>+11.7%</a:t>
+              <a:t>+11.8%</a:t>
             </a:r>
             <a:endParaRPr lang="en-US" sz="1600" dirty="0"/>
           </a:p>
@@ -34458,7 +34458,7 @@
                 <a:ea typeface="Inter" pitchFamily="34" charset="-122"/>
                 <a:cs typeface="Inter" pitchFamily="34" charset="-120"/>
               </a:rPr>
-              <a:t>+8.2%</a:t>
+              <a:t>+8.3%</a:t>
             </a:r>
             <a:endParaRPr lang="en-US" sz="1600" dirty="0"/>
           </a:p>
@@ -35131,7 +35131,7 @@
                 <a:ea typeface="Inter" pitchFamily="34" charset="-122"/>
                 <a:cs typeface="Inter" pitchFamily="34" charset="-120"/>
               </a:rPr>
-              <a:t>+4.8%</a:t>
+              <a:t>+4.9%</a:t>
             </a:r>
             <a:endParaRPr lang="en-US" sz="1600" dirty="0"/>
           </a:p>
@@ -36129,7 +36129,7 @@
                 <a:ea typeface="Inter" pitchFamily="34" charset="-122"/>
                 <a:cs typeface="Inter" pitchFamily="34" charset="-120"/>
               </a:rPr>
-              <a:t>+7.3%</a:t>
+              <a:t>+7.4%</a:t>
             </a:r>
             <a:endParaRPr lang="en-US" sz="1600" dirty="0"/>
           </a:p>
@@ -37244,7 +37244,7 @@
                 <a:ea typeface="Inter" pitchFamily="34" charset="-122"/>
                 <a:cs typeface="Inter" pitchFamily="34" charset="-120"/>
               </a:rPr>
-              <a:t>+4.2%</a:t>
+              <a:t>+4.3%</a:t>
             </a:r>
             <a:endParaRPr lang="en-US" sz="1600" dirty="0"/>
           </a:p>
@@ -37455,7 +37455,7 @@
                 <a:ea typeface="Inter" pitchFamily="34" charset="-122"/>
                 <a:cs typeface="Inter" pitchFamily="34" charset="-120"/>
               </a:rPr>
-              <a:t>+4.0%</a:t>
+              <a:t>+4.1%</a:t>
             </a:r>
             <a:endParaRPr lang="en-US" sz="1600" dirty="0"/>
           </a:p>
@@ -38086,7 +38086,7 @@
                 <a:ea typeface="Inter" pitchFamily="34" charset="-122"/>
                 <a:cs typeface="Inter" pitchFamily="34" charset="-120"/>
               </a:rPr>
-              <a:t>Q1 → Q3 2026. Group $230 → $242, +5.1%: that is the season. 19 of 33 stores beat it.</a:t>
+              <a:t>Q1 → Q3 2026. Group $230 → $242, +5.2%: that is the season. 19 of 33 stores beat it.</a:t>
             </a:r>
             <a:endParaRPr lang="en-US" sz="1400" dirty="0"/>
           </a:p>
@@ -38684,7 +38684,7 @@
                 <a:ea typeface="Inter" pitchFamily="34" charset="-122"/>
                 <a:cs typeface="Inter" pitchFamily="34" charset="-120"/>
               </a:rPr>
-              <a:t>+26.6%</a:t>
+              <a:t>+26.7%</a:t>
             </a:r>
             <a:endParaRPr lang="en-US" sz="1600" dirty="0"/>
           </a:p>
@@ -40241,7 +40241,7 @@
                 <a:ea typeface="Inter" pitchFamily="34" charset="-122"/>
                 <a:cs typeface="Inter" pitchFamily="34" charset="-120"/>
               </a:rPr>
-              <a:t>+10.1%</a:t>
+              <a:t>+10.2%</a:t>
             </a:r>
             <a:endParaRPr lang="en-US" sz="1600" dirty="0"/>
           </a:p>
@@ -41239,7 +41239,7 @@
                 <a:ea typeface="Inter" pitchFamily="34" charset="-122"/>
                 <a:cs typeface="Inter" pitchFamily="34" charset="-120"/>
               </a:rPr>
-              <a:t>+4.6 pts</a:t>
+              <a:t>+4.7 pts</a:t>
             </a:r>
             <a:endParaRPr lang="en-US" sz="1600" dirty="0"/>
           </a:p>
@@ -41912,7 +41912,7 @@
                 <a:ea typeface="Inter" pitchFamily="34" charset="-122"/>
                 <a:cs typeface="Inter" pitchFamily="34" charset="-120"/>
               </a:rPr>
-              <a:t>+2.2 pts</a:t>
+              <a:t>+2.3 pts</a:t>
             </a:r>
             <a:endParaRPr lang="en-US" sz="1600" dirty="0"/>
           </a:p>
@@ -42123,7 +42123,7 @@
                 <a:ea typeface="Inter" pitchFamily="34" charset="-122"/>
                 <a:cs typeface="Inter" pitchFamily="34" charset="-120"/>
               </a:rPr>
-              <a:t>+2.2 pts</a:t>
+              <a:t>+2.3 pts</a:t>
             </a:r>
             <a:endParaRPr lang="en-US" sz="1600" dirty="0"/>
           </a:p>
@@ -42354,7 +42354,7 @@
                 <a:ea typeface="Inter" pitchFamily="34" charset="-122"/>
                 <a:cs typeface="Inter" pitchFamily="34" charset="-120"/>
               </a:rPr>
-              <a:t>+1.8 pts</a:t>
+              <a:t>+1.9 pts</a:t>
             </a:r>
             <a:endParaRPr lang="en-US" sz="1600" dirty="0"/>
           </a:p>
@@ -42796,7 +42796,7 @@
                 <a:ea typeface="Inter" pitchFamily="34" charset="-122"/>
                 <a:cs typeface="Inter" pitchFamily="34" charset="-120"/>
               </a:rPr>
-              <a:t>+1.2 pts</a:t>
+              <a:t>+1.3 pts</a:t>
             </a:r>
             <a:endParaRPr lang="en-US" sz="1600" dirty="0"/>
           </a:p>

--- a/day2-deck/decks/Most Improved v2 - Review.pptx
+++ b/day2-deck/decks/Most Improved v2 - Review.pptx
@@ -18065,7 +18065,7 @@
           <a:p>
             <a:r>
               <a:rPr lang="en-US" dirty="0"/>
-              <a:t>Source: Qlik - Closed Repair Orders. Customer pay, by close date. Same-store, 33 stores (INEOS excluded, opened 2026). GMC Prescott body shop labor types excluded. CP gross = CP labor gross + CP parts gross. Change is Jul-Sep 2026 (Q3) vs Jan-Mar 2026 (Q1), each store against itself. Gross and ROs are per-month averages of each quarter. The group's own Q1-to-Q3 change is the seasonal baseline: it is the same for every store, so ranking by a store's change is the same as ranking by how far it beat the group. 'Stepped up in' = the month that best splits the store's year into a lower stretch before and a higher stretch after (at least three months before, two after). It is a conversation starter, not proof of cause. Each row is the top Q1-to-Q3 mover on that measure. Opcode row: MAZDA tops 3 of the four opcode lists; its biggest move is shown. Opcode closing % = ROs with the service ÷ customer-pay ROs on the op-code report basis.
+              <a:t>Source: Qlik - Closed Repair Orders. Customer pay, by close date. Same-store, 33 stores (INEOS excluded, opened 2026). GMC Prescott body shop labor types excluded. CP gross = CP labor gross + CP parts gross. Change is Jul-Sep 2026 (Q3) vs Jan-Mar 2026 (Q1), each store against itself. Gross and ROs are per-month averages of each quarter. The group's own Q1-to-Q3 change is the seasonal baseline: it is the same for every store, so ranking by a store's change is the same as ranking by how far it beat the group. 'Stepped up in' = the month that best splits the store's year into a lower stretch before and a higher stretch after (at least three months before, two after). It is a conversation starter, not proof of cause. Each row is the top Q1-to-Q3 mover on that measure. Opcode row: MAZDA tops 3 of the four opcode lists; the biggest of those moves is shown. Opcode closing % = ROs with the service ÷ customer-pay ROs on the op-code report basis.
 MAZDA's August opcode increase was confirmed with the store as a real change (Noah, Oct 19 2026).</a:t>
             </a:r>
             <a:endParaRPr lang="en-US" dirty="0"/>
@@ -18782,7 +18782,7 @@
           <a:p>
             <a:r>
               <a:rPr lang="en-US" dirty="0"/>
-              <a:t>Takeaway with the store call-outs (off the slide): Last year: Subaru Prescott leads. Moving now: Three stores tie. One store is on both lists (green bar).Source: Qlik - Closed Repair Orders. Customer pay, by close date. Same-store, 33 stores (INEOS excluded, opened 2026). GMC Prescott body shop labor types excluded. CP gross = CP labor gross + CP parts gross. Left: Jan-Sep 2026 vs Jan-Sep 2025. Right: Q3 2026 vs Q1 2026. Top-5 finishes counted across five measures (parts $ per RO dropped, Oct 23); top six stores shown in each view.</a:t>
+              <a:t>Takeaway with the store call-outs (off the slide): Last year: SUBARU PRESCOTT leads. Moving now: Three stores tie. One store is on both lists (green bar).Source: Qlik - Closed Repair Orders. Customer pay, by close date. Same-store, 33 stores (INEOS excluded, opened 2026). GMC Prescott body shop labor types excluded. CP gross = CP labor gross + CP parts gross. Left: Jan-Sep 2026 vs Jan-Sep 2025. Right: Q3 2026 vs Q1 2026. Top-5 finishes counted across five measures (parts $ per RO dropped, Oct 23); top six stores shown in each view.</a:t>
             </a:r>
             <a:endParaRPr lang="en-US" dirty="0"/>
           </a:p>
@@ -24038,7 +24038,7 @@
                 <a:ea typeface="Inter" pitchFamily="34" charset="-122"/>
                 <a:cs typeface="Inter" pitchFamily="34" charset="-120"/>
               </a:rPr>
-              <a:t>Opcodes · alignment</a:t>
+              <a:t>Opcodes · balance</a:t>
             </a:r>
             <a:endParaRPr lang="en-US" sz="1500" dirty="0"/>
           </a:p>
@@ -24077,7 +24077,7 @@
                 <a:ea typeface="Inter" pitchFamily="34" charset="-122"/>
                 <a:cs typeface="Inter" pitchFamily="34" charset="-120"/>
               </a:rPr>
-              <a:t>12.6% → 22.8%</a:t>
+              <a:t>10.1% → 19.3%</a:t>
             </a:r>
             <a:endParaRPr lang="en-US" sz="1500" dirty="0"/>
           </a:p>
@@ -24155,7 +24155,7 @@
                 <a:ea typeface="Inter" pitchFamily="34" charset="-122"/>
                 <a:cs typeface="Inter" pitchFamily="34" charset="-120"/>
               </a:rPr>
-              <a:t>+10.2 pts</a:t>
+              <a:t>+9.2 pts</a:t>
             </a:r>
             <a:endParaRPr lang="en-US" sz="1500" dirty="0"/>
           </a:p>
@@ -45236,7 +45236,7 @@
                 <a:ea typeface="Inter" pitchFamily="34" charset="-122"/>
                 <a:cs typeface="Inter" pitchFamily="34" charset="-120"/>
               </a:rPr>
-              <a:t>Moving now: Three stores tie. One store is on both lists (green bar).</a:t>
+              <a:t>Moving now: Three stores tie. One store is on both lists (green bar). Also tied at 2 last year: Nissan.</a:t>
             </a:r>
             <a:endParaRPr lang="en-US" sz="1600" dirty="0"/>
           </a:p>

--- a/day2-deck/decks/Most Improved v2 - Review.pptx
+++ b/day2-deck/decks/Most Improved v2 - Review.pptx
@@ -18065,7 +18065,7 @@
           <a:p>
             <a:r>
               <a:rPr lang="en-US" dirty="0"/>
-              <a:t>Source: Qlik - Closed Repair Orders. Customer pay, by close date. Same-store, 33 stores (INEOS excluded, opened 2026). GMC Prescott body shop labor types excluded. CP gross = CP labor gross + CP parts gross. Change is Jul-Sep 2026 (Q3) vs Jan-Mar 2026 (Q1), each store against itself. Gross and ROs are per-month averages of each quarter. The group's own Q1-to-Q3 change is the seasonal baseline: it is the same for every store, so ranking by a store's change is the same as ranking by how far it beat the group. 'Stepped up in' = the month that best splits the store's year into a lower stretch before and a higher stretch after (at least three months before, two after). It is a conversation starter, not proof of cause. Each row is the top Q1-to-Q3 mover on that measure. Opcode row: MAZDA tops 3 of the four opcode lists; the biggest of those moves is shown. Opcode closing % = ROs with the service ÷ customer-pay ROs on the op-code report basis.
+              <a:t>Source: Qlik - Closed Repair Orders. Customer pay, by close date. Same-store, 33 stores (INEOS excluded, opened 2026). GMC Prescott body shop labor types excluded. CP gross = CP labor gross + CP parts gross. Change is Jul-Sep 2026 (Q3) vs Jan-Mar 2026 (Q1), each store against itself. Gross and ROs are per-month averages of each quarter. The group's own Q1-to-Q3 change is the seasonal baseline: it is the same for every store, so ranking by a store's change is the same as ranking by how far it beat the group. 'Stepped up in' = the month that best splits the store's year into a lower stretch before and a higher stretch after (at least three months before, two after). It is a conversation starter, not proof of cause. Each row is the top Q1-to-Q3 mover on that measure, the four opcodes included. Opcode closing % = ROs with the service ÷ customer-pay ROs on the op-code report basis.
 MAZDA's August opcode increase was confirmed with the store as a real change (Noah, Oct 19 2026).</a:t>
             </a:r>
             <a:endParaRPr lang="en-US" dirty="0"/>
@@ -22939,8 +22939,8 @@
         </p:nvSpPr>
         <p:spPr>
           <a:xfrm>
-            <a:off x="621792" y="1773936"/>
-            <a:ext cx="10945368" cy="548640"/>
+            <a:off x="621792" y="1755648"/>
+            <a:ext cx="10945368" cy="438912"/>
           </a:xfrm>
           <a:prstGeom prst="rect">
             <a:avLst/>
@@ -22959,24 +22959,24 @@
         </p:nvSpPr>
         <p:spPr>
           <a:xfrm>
-            <a:off x="749808" y="1773936"/>
-            <a:ext cx="2651760" cy="548640"/>
-          </a:xfrm>
-          <a:prstGeom prst="rect">
-            <a:avLst/>
-          </a:prstGeom>
-          <a:noFill/>
-          <a:ln/>
-        </p:spPr>
-        <p:txBody>
-          <a:bodyPr wrap="square" lIns="0" tIns="0" rIns="0" bIns="0" rtlCol="0" anchor="ctr"/>
-          <a:lstStyle/>
-          <a:p>
-            <a:pPr indent="0" marL="0">
-              <a:buNone/>
-            </a:pPr>
-            <a:r>
-              <a:rPr lang="en-US" sz="1500" b="1" dirty="0">
+            <a:off x="749808" y="1755648"/>
+            <a:ext cx="2651760" cy="438912"/>
+          </a:xfrm>
+          <a:prstGeom prst="rect">
+            <a:avLst/>
+          </a:prstGeom>
+          <a:noFill/>
+          <a:ln/>
+        </p:spPr>
+        <p:txBody>
+          <a:bodyPr wrap="square" lIns="0" tIns="0" rIns="0" bIns="0" rtlCol="0" anchor="ctr"/>
+          <a:lstStyle/>
+          <a:p>
+            <a:pPr indent="0" marL="0">
+              <a:buNone/>
+            </a:pPr>
+            <a:r>
+              <a:rPr lang="en-US" sz="1400" b="1" dirty="0">
                 <a:solidFill>
                   <a:srgbClr val="1A1A1A"/>
                 </a:solidFill>
@@ -22986,7 +22986,7 @@
               </a:rPr>
               <a:t>MAZDA</a:t>
             </a:r>
-            <a:endParaRPr lang="en-US" sz="1500" dirty="0"/>
+            <a:endParaRPr lang="en-US" sz="1400" dirty="0"/>
           </a:p>
         </p:txBody>
       </p:sp>
@@ -22998,24 +22998,24 @@
         </p:nvSpPr>
         <p:spPr>
           <a:xfrm>
-            <a:off x="3520440" y="1773936"/>
-            <a:ext cx="2103120" cy="548640"/>
-          </a:xfrm>
-          <a:prstGeom prst="rect">
-            <a:avLst/>
-          </a:prstGeom>
-          <a:noFill/>
-          <a:ln/>
-        </p:spPr>
-        <p:txBody>
-          <a:bodyPr wrap="square" lIns="0" tIns="0" rIns="0" bIns="0" rtlCol="0" anchor="ctr"/>
-          <a:lstStyle/>
-          <a:p>
-            <a:pPr indent="0" marL="0">
-              <a:buNone/>
-            </a:pPr>
-            <a:r>
-              <a:rPr lang="en-US" sz="1500" dirty="0">
+            <a:off x="3520440" y="1755648"/>
+            <a:ext cx="2103120" cy="438912"/>
+          </a:xfrm>
+          <a:prstGeom prst="rect">
+            <a:avLst/>
+          </a:prstGeom>
+          <a:noFill/>
+          <a:ln/>
+        </p:spPr>
+        <p:txBody>
+          <a:bodyPr wrap="square" lIns="0" tIns="0" rIns="0" bIns="0" rtlCol="0" anchor="ctr"/>
+          <a:lstStyle/>
+          <a:p>
+            <a:pPr indent="0" marL="0">
+              <a:buNone/>
+            </a:pPr>
+            <a:r>
+              <a:rPr lang="en-US" sz="1400" dirty="0">
                 <a:solidFill>
                   <a:srgbClr val="1A1A1A"/>
                 </a:solidFill>
@@ -23025,7 +23025,7 @@
               </a:rPr>
               <a:t>CP Gross per Month</a:t>
             </a:r>
-            <a:endParaRPr lang="en-US" sz="1500" dirty="0"/>
+            <a:endParaRPr lang="en-US" sz="1400" dirty="0"/>
           </a:p>
         </p:txBody>
       </p:sp>
@@ -23037,24 +23037,24 @@
         </p:nvSpPr>
         <p:spPr>
           <a:xfrm>
-            <a:off x="5669280" y="1773936"/>
-            <a:ext cx="2011680" cy="548640"/>
-          </a:xfrm>
-          <a:prstGeom prst="rect">
-            <a:avLst/>
-          </a:prstGeom>
-          <a:noFill/>
-          <a:ln/>
-        </p:spPr>
-        <p:txBody>
-          <a:bodyPr wrap="square" lIns="0" tIns="0" rIns="0" bIns="0" rtlCol="0" anchor="ctr"/>
-          <a:lstStyle/>
-          <a:p>
-            <a:pPr indent="0" marL="0">
-              <a:buNone/>
-            </a:pPr>
-            <a:r>
-              <a:rPr lang="en-US" sz="1500" dirty="0">
+            <a:off x="5669280" y="1755648"/>
+            <a:ext cx="2011680" cy="438912"/>
+          </a:xfrm>
+          <a:prstGeom prst="rect">
+            <a:avLst/>
+          </a:prstGeom>
+          <a:noFill/>
+          <a:ln/>
+        </p:spPr>
+        <p:txBody>
+          <a:bodyPr wrap="square" lIns="0" tIns="0" rIns="0" bIns="0" rtlCol="0" anchor="ctr"/>
+          <a:lstStyle/>
+          <a:p>
+            <a:pPr indent="0" marL="0">
+              <a:buNone/>
+            </a:pPr>
+            <a:r>
+              <a:rPr lang="en-US" sz="1400" dirty="0">
                 <a:solidFill>
                   <a:srgbClr val="1A1A1A"/>
                 </a:solidFill>
@@ -23064,7 +23064,7 @@
               </a:rPr>
               <a:t>$155K → $209K</a:t>
             </a:r>
-            <a:endParaRPr lang="en-US" sz="1500" dirty="0"/>
+            <a:endParaRPr lang="en-US" sz="1400" dirty="0"/>
           </a:p>
         </p:txBody>
       </p:sp>
@@ -23076,24 +23076,24 @@
         </p:nvSpPr>
         <p:spPr>
           <a:xfrm>
-            <a:off x="7726680" y="1773936"/>
-            <a:ext cx="1554480" cy="548640"/>
-          </a:xfrm>
-          <a:prstGeom prst="rect">
-            <a:avLst/>
-          </a:prstGeom>
-          <a:noFill/>
-          <a:ln/>
-        </p:spPr>
-        <p:txBody>
-          <a:bodyPr wrap="square" lIns="0" tIns="0" rIns="0" bIns="0" rtlCol="0" anchor="ctr"/>
-          <a:lstStyle/>
-          <a:p>
-            <a:pPr indent="0" marL="0">
-              <a:buNone/>
-            </a:pPr>
-            <a:r>
-              <a:rPr lang="en-US" sz="1500" b="1" dirty="0">
+            <a:off x="7726680" y="1755648"/>
+            <a:ext cx="1554480" cy="438912"/>
+          </a:xfrm>
+          <a:prstGeom prst="rect">
+            <a:avLst/>
+          </a:prstGeom>
+          <a:noFill/>
+          <a:ln/>
+        </p:spPr>
+        <p:txBody>
+          <a:bodyPr wrap="square" lIns="0" tIns="0" rIns="0" bIns="0" rtlCol="0" anchor="ctr"/>
+          <a:lstStyle/>
+          <a:p>
+            <a:pPr indent="0" marL="0">
+              <a:buNone/>
+            </a:pPr>
+            <a:r>
+              <a:rPr lang="en-US" sz="1400" b="1" dirty="0">
                 <a:solidFill>
                   <a:srgbClr val="0B2C4A"/>
                 </a:solidFill>
@@ -23103,7 +23103,7 @@
               </a:rPr>
               <a:t>August</a:t>
             </a:r>
-            <a:endParaRPr lang="en-US" sz="1500" dirty="0"/>
+            <a:endParaRPr lang="en-US" sz="1400" dirty="0"/>
           </a:p>
         </p:txBody>
       </p:sp>
@@ -23115,24 +23115,24 @@
         </p:nvSpPr>
         <p:spPr>
           <a:xfrm>
-            <a:off x="9326880" y="1773936"/>
-            <a:ext cx="1280160" cy="548640"/>
-          </a:xfrm>
-          <a:prstGeom prst="rect">
-            <a:avLst/>
-          </a:prstGeom>
-          <a:noFill/>
-          <a:ln/>
-        </p:spPr>
-        <p:txBody>
-          <a:bodyPr wrap="square" lIns="0" tIns="0" rIns="0" bIns="0" rtlCol="0" anchor="ctr"/>
-          <a:lstStyle/>
-          <a:p>
-            <a:pPr indent="0" marL="0">
-              <a:buNone/>
-            </a:pPr>
-            <a:r>
-              <a:rPr lang="en-US" sz="1500" b="1" dirty="0">
+            <a:off x="9326880" y="1755648"/>
+            <a:ext cx="1280160" cy="438912"/>
+          </a:xfrm>
+          <a:prstGeom prst="rect">
+            <a:avLst/>
+          </a:prstGeom>
+          <a:noFill/>
+          <a:ln/>
+        </p:spPr>
+        <p:txBody>
+          <a:bodyPr wrap="square" lIns="0" tIns="0" rIns="0" bIns="0" rtlCol="0" anchor="ctr"/>
+          <a:lstStyle/>
+          <a:p>
+            <a:pPr indent="0" marL="0">
+              <a:buNone/>
+            </a:pPr>
+            <a:r>
+              <a:rPr lang="en-US" sz="1400" b="1" dirty="0">
                 <a:solidFill>
                   <a:srgbClr val="0B7A4A"/>
                 </a:solidFill>
@@ -23142,7 +23142,7 @@
               </a:rPr>
               <a:t>+34.6%</a:t>
             </a:r>
-            <a:endParaRPr lang="en-US" sz="1500" dirty="0"/>
+            <a:endParaRPr lang="en-US" sz="1400" dirty="0"/>
           </a:p>
         </p:txBody>
       </p:sp>
@@ -23154,24 +23154,24 @@
         </p:nvSpPr>
         <p:spPr>
           <a:xfrm>
-            <a:off x="749808" y="2322576"/>
-            <a:ext cx="2651760" cy="548640"/>
-          </a:xfrm>
-          <a:prstGeom prst="rect">
-            <a:avLst/>
-          </a:prstGeom>
-          <a:noFill/>
-          <a:ln/>
-        </p:spPr>
-        <p:txBody>
-          <a:bodyPr wrap="square" lIns="0" tIns="0" rIns="0" bIns="0" rtlCol="0" anchor="ctr"/>
-          <a:lstStyle/>
-          <a:p>
-            <a:pPr indent="0" marL="0">
-              <a:buNone/>
-            </a:pPr>
-            <a:r>
-              <a:rPr lang="en-US" sz="1500" b="1" dirty="0">
+            <a:off x="749808" y="2194560"/>
+            <a:ext cx="2651760" cy="438912"/>
+          </a:xfrm>
+          <a:prstGeom prst="rect">
+            <a:avLst/>
+          </a:prstGeom>
+          <a:noFill/>
+          <a:ln/>
+        </p:spPr>
+        <p:txBody>
+          <a:bodyPr wrap="square" lIns="0" tIns="0" rIns="0" bIns="0" rtlCol="0" anchor="ctr"/>
+          <a:lstStyle/>
+          <a:p>
+            <a:pPr indent="0" marL="0">
+              <a:buNone/>
+            </a:pPr>
+            <a:r>
+              <a:rPr lang="en-US" sz="1400" b="1" dirty="0">
                 <a:solidFill>
                   <a:srgbClr val="1A1A1A"/>
                 </a:solidFill>
@@ -23181,7 +23181,7 @@
               </a:rPr>
               <a:t>LEXUS</a:t>
             </a:r>
-            <a:endParaRPr lang="en-US" sz="1500" dirty="0"/>
+            <a:endParaRPr lang="en-US" sz="1400" dirty="0"/>
           </a:p>
         </p:txBody>
       </p:sp>
@@ -23193,24 +23193,24 @@
         </p:nvSpPr>
         <p:spPr>
           <a:xfrm>
-            <a:off x="3520440" y="2322576"/>
-            <a:ext cx="2103120" cy="548640"/>
-          </a:xfrm>
-          <a:prstGeom prst="rect">
-            <a:avLst/>
-          </a:prstGeom>
-          <a:noFill/>
-          <a:ln/>
-        </p:spPr>
-        <p:txBody>
-          <a:bodyPr wrap="square" lIns="0" tIns="0" rIns="0" bIns="0" rtlCol="0" anchor="ctr"/>
-          <a:lstStyle/>
-          <a:p>
-            <a:pPr indent="0" marL="0">
-              <a:buNone/>
-            </a:pPr>
-            <a:r>
-              <a:rPr lang="en-US" sz="1500" dirty="0">
+            <a:off x="3520440" y="2194560"/>
+            <a:ext cx="2103120" cy="438912"/>
+          </a:xfrm>
+          <a:prstGeom prst="rect">
+            <a:avLst/>
+          </a:prstGeom>
+          <a:noFill/>
+          <a:ln/>
+        </p:spPr>
+        <p:txBody>
+          <a:bodyPr wrap="square" lIns="0" tIns="0" rIns="0" bIns="0" rtlCol="0" anchor="ctr"/>
+          <a:lstStyle/>
+          <a:p>
+            <a:pPr indent="0" marL="0">
+              <a:buNone/>
+            </a:pPr>
+            <a:r>
+              <a:rPr lang="en-US" sz="1400" dirty="0">
                 <a:solidFill>
                   <a:srgbClr val="1A1A1A"/>
                 </a:solidFill>
@@ -23220,7 +23220,7 @@
               </a:rPr>
               <a:t>CP ROs per Month</a:t>
             </a:r>
-            <a:endParaRPr lang="en-US" sz="1500" dirty="0"/>
+            <a:endParaRPr lang="en-US" sz="1400" dirty="0"/>
           </a:p>
         </p:txBody>
       </p:sp>
@@ -23232,24 +23232,24 @@
         </p:nvSpPr>
         <p:spPr>
           <a:xfrm>
-            <a:off x="5669280" y="2322576"/>
-            <a:ext cx="2011680" cy="548640"/>
-          </a:xfrm>
-          <a:prstGeom prst="rect">
-            <a:avLst/>
-          </a:prstGeom>
-          <a:noFill/>
-          <a:ln/>
-        </p:spPr>
-        <p:txBody>
-          <a:bodyPr wrap="square" lIns="0" tIns="0" rIns="0" bIns="0" rtlCol="0" anchor="ctr"/>
-          <a:lstStyle/>
-          <a:p>
-            <a:pPr indent="0" marL="0">
-              <a:buNone/>
-            </a:pPr>
-            <a:r>
-              <a:rPr lang="en-US" sz="1500" dirty="0">
+            <a:off x="5669280" y="2194560"/>
+            <a:ext cx="2011680" cy="438912"/>
+          </a:xfrm>
+          <a:prstGeom prst="rect">
+            <a:avLst/>
+          </a:prstGeom>
+          <a:noFill/>
+          <a:ln/>
+        </p:spPr>
+        <p:txBody>
+          <a:bodyPr wrap="square" lIns="0" tIns="0" rIns="0" bIns="0" rtlCol="0" anchor="ctr"/>
+          <a:lstStyle/>
+          <a:p>
+            <a:pPr indent="0" marL="0">
+              <a:buNone/>
+            </a:pPr>
+            <a:r>
+              <a:rPr lang="en-US" sz="1400" dirty="0">
                 <a:solidFill>
                   <a:srgbClr val="1A1A1A"/>
                 </a:solidFill>
@@ -23259,7 +23259,7 @@
               </a:rPr>
               <a:t>425 → 570</a:t>
             </a:r>
-            <a:endParaRPr lang="en-US" sz="1500" dirty="0"/>
+            <a:endParaRPr lang="en-US" sz="1400" dirty="0"/>
           </a:p>
         </p:txBody>
       </p:sp>
@@ -23271,24 +23271,24 @@
         </p:nvSpPr>
         <p:spPr>
           <a:xfrm>
-            <a:off x="7726680" y="2322576"/>
-            <a:ext cx="1554480" cy="548640"/>
-          </a:xfrm>
-          <a:prstGeom prst="rect">
-            <a:avLst/>
-          </a:prstGeom>
-          <a:noFill/>
-          <a:ln/>
-        </p:spPr>
-        <p:txBody>
-          <a:bodyPr wrap="square" lIns="0" tIns="0" rIns="0" bIns="0" rtlCol="0" anchor="ctr"/>
-          <a:lstStyle/>
-          <a:p>
-            <a:pPr indent="0" marL="0">
-              <a:buNone/>
-            </a:pPr>
-            <a:r>
-              <a:rPr lang="en-US" sz="1500" b="1" dirty="0">
+            <a:off x="7726680" y="2194560"/>
+            <a:ext cx="1554480" cy="438912"/>
+          </a:xfrm>
+          <a:prstGeom prst="rect">
+            <a:avLst/>
+          </a:prstGeom>
+          <a:noFill/>
+          <a:ln/>
+        </p:spPr>
+        <p:txBody>
+          <a:bodyPr wrap="square" lIns="0" tIns="0" rIns="0" bIns="0" rtlCol="0" anchor="ctr"/>
+          <a:lstStyle/>
+          <a:p>
+            <a:pPr indent="0" marL="0">
+              <a:buNone/>
+            </a:pPr>
+            <a:r>
+              <a:rPr lang="en-US" sz="1400" b="1" dirty="0">
                 <a:solidFill>
                   <a:srgbClr val="0B2C4A"/>
                 </a:solidFill>
@@ -23298,7 +23298,7 @@
               </a:rPr>
               <a:t>April</a:t>
             </a:r>
-            <a:endParaRPr lang="en-US" sz="1500" dirty="0"/>
+            <a:endParaRPr lang="en-US" sz="1400" dirty="0"/>
           </a:p>
         </p:txBody>
       </p:sp>
@@ -23310,24 +23310,24 @@
         </p:nvSpPr>
         <p:spPr>
           <a:xfrm>
-            <a:off x="9326880" y="2322576"/>
-            <a:ext cx="1280160" cy="548640"/>
-          </a:xfrm>
-          <a:prstGeom prst="rect">
-            <a:avLst/>
-          </a:prstGeom>
-          <a:noFill/>
-          <a:ln/>
-        </p:spPr>
-        <p:txBody>
-          <a:bodyPr wrap="square" lIns="0" tIns="0" rIns="0" bIns="0" rtlCol="0" anchor="ctr"/>
-          <a:lstStyle/>
-          <a:p>
-            <a:pPr indent="0" marL="0">
-              <a:buNone/>
-            </a:pPr>
-            <a:r>
-              <a:rPr lang="en-US" sz="1500" b="1" dirty="0">
+            <a:off x="9326880" y="2194560"/>
+            <a:ext cx="1280160" cy="438912"/>
+          </a:xfrm>
+          <a:prstGeom prst="rect">
+            <a:avLst/>
+          </a:prstGeom>
+          <a:noFill/>
+          <a:ln/>
+        </p:spPr>
+        <p:txBody>
+          <a:bodyPr wrap="square" lIns="0" tIns="0" rIns="0" bIns="0" rtlCol="0" anchor="ctr"/>
+          <a:lstStyle/>
+          <a:p>
+            <a:pPr indent="0" marL="0">
+              <a:buNone/>
+            </a:pPr>
+            <a:r>
+              <a:rPr lang="en-US" sz="1400" b="1" dirty="0">
                 <a:solidFill>
                   <a:srgbClr val="0B7A4A"/>
                 </a:solidFill>
@@ -23337,7 +23337,7 @@
               </a:rPr>
               <a:t>+34.0%</a:t>
             </a:r>
-            <a:endParaRPr lang="en-US" sz="1500" dirty="0"/>
+            <a:endParaRPr lang="en-US" sz="1400" dirty="0"/>
           </a:p>
         </p:txBody>
       </p:sp>
@@ -23349,8 +23349,8 @@
         </p:nvSpPr>
         <p:spPr>
           <a:xfrm>
-            <a:off x="621792" y="2871216"/>
-            <a:ext cx="10945368" cy="548640"/>
+            <a:off x="621792" y="2633472"/>
+            <a:ext cx="10945368" cy="438912"/>
           </a:xfrm>
           <a:prstGeom prst="rect">
             <a:avLst/>
@@ -23369,24 +23369,24 @@
         </p:nvSpPr>
         <p:spPr>
           <a:xfrm>
-            <a:off x="749808" y="2871216"/>
-            <a:ext cx="2651760" cy="548640"/>
-          </a:xfrm>
-          <a:prstGeom prst="rect">
-            <a:avLst/>
-          </a:prstGeom>
-          <a:noFill/>
-          <a:ln/>
-        </p:spPr>
-        <p:txBody>
-          <a:bodyPr wrap="square" lIns="0" tIns="0" rIns="0" bIns="0" rtlCol="0" anchor="ctr"/>
-          <a:lstStyle/>
-          <a:p>
-            <a:pPr indent="0" marL="0">
-              <a:buNone/>
-            </a:pPr>
-            <a:r>
-              <a:rPr lang="en-US" sz="1500" b="1" dirty="0">
+            <a:off x="749808" y="2633472"/>
+            <a:ext cx="2651760" cy="438912"/>
+          </a:xfrm>
+          <a:prstGeom prst="rect">
+            <a:avLst/>
+          </a:prstGeom>
+          <a:noFill/>
+          <a:ln/>
+        </p:spPr>
+        <p:txBody>
+          <a:bodyPr wrap="square" lIns="0" tIns="0" rIns="0" bIns="0" rtlCol="0" anchor="ctr"/>
+          <a:lstStyle/>
+          <a:p>
+            <a:pPr indent="0" marL="0">
+              <a:buNone/>
+            </a:pPr>
+            <a:r>
+              <a:rPr lang="en-US" sz="1400" b="1" dirty="0">
                 <a:solidFill>
                   <a:srgbClr val="1A1A1A"/>
                 </a:solidFill>
@@ -23396,7 +23396,7 @@
               </a:rPr>
               <a:t>MAZDA</a:t>
             </a:r>
-            <a:endParaRPr lang="en-US" sz="1500" dirty="0"/>
+            <a:endParaRPr lang="en-US" sz="1400" dirty="0"/>
           </a:p>
         </p:txBody>
       </p:sp>
@@ -23408,24 +23408,24 @@
         </p:nvSpPr>
         <p:spPr>
           <a:xfrm>
-            <a:off x="3520440" y="2871216"/>
-            <a:ext cx="2103120" cy="548640"/>
-          </a:xfrm>
-          <a:prstGeom prst="rect">
-            <a:avLst/>
-          </a:prstGeom>
-          <a:noFill/>
-          <a:ln/>
-        </p:spPr>
-        <p:txBody>
-          <a:bodyPr wrap="square" lIns="0" tIns="0" rIns="0" bIns="0" rtlCol="0" anchor="ctr"/>
-          <a:lstStyle/>
-          <a:p>
-            <a:pPr indent="0" marL="0">
-              <a:buNone/>
-            </a:pPr>
-            <a:r>
-              <a:rPr lang="en-US" sz="1500" dirty="0">
+            <a:off x="3520440" y="2633472"/>
+            <a:ext cx="2103120" cy="438912"/>
+          </a:xfrm>
+          <a:prstGeom prst="rect">
+            <a:avLst/>
+          </a:prstGeom>
+          <a:noFill/>
+          <a:ln/>
+        </p:spPr>
+        <p:txBody>
+          <a:bodyPr wrap="square" lIns="0" tIns="0" rIns="0" bIns="0" rtlCol="0" anchor="ctr"/>
+          <a:lstStyle/>
+          <a:p>
+            <a:pPr indent="0" marL="0">
+              <a:buNone/>
+            </a:pPr>
+            <a:r>
+              <a:rPr lang="en-US" sz="1400" dirty="0">
                 <a:solidFill>
                   <a:srgbClr val="1A1A1A"/>
                 </a:solidFill>
@@ -23435,7 +23435,7 @@
               </a:rPr>
               <a:t>CP Hours per RO</a:t>
             </a:r>
-            <a:endParaRPr lang="en-US" sz="1500" dirty="0"/>
+            <a:endParaRPr lang="en-US" sz="1400" dirty="0"/>
           </a:p>
         </p:txBody>
       </p:sp>
@@ -23447,24 +23447,24 @@
         </p:nvSpPr>
         <p:spPr>
           <a:xfrm>
-            <a:off x="5669280" y="2871216"/>
-            <a:ext cx="2011680" cy="548640"/>
-          </a:xfrm>
-          <a:prstGeom prst="rect">
-            <a:avLst/>
-          </a:prstGeom>
-          <a:noFill/>
-          <a:ln/>
-        </p:spPr>
-        <p:txBody>
-          <a:bodyPr wrap="square" lIns="0" tIns="0" rIns="0" bIns="0" rtlCol="0" anchor="ctr"/>
-          <a:lstStyle/>
-          <a:p>
-            <a:pPr indent="0" marL="0">
-              <a:buNone/>
-            </a:pPr>
-            <a:r>
-              <a:rPr lang="en-US" sz="1500" dirty="0">
+            <a:off x="5669280" y="2633472"/>
+            <a:ext cx="2011680" cy="438912"/>
+          </a:xfrm>
+          <a:prstGeom prst="rect">
+            <a:avLst/>
+          </a:prstGeom>
+          <a:noFill/>
+          <a:ln/>
+        </p:spPr>
+        <p:txBody>
+          <a:bodyPr wrap="square" lIns="0" tIns="0" rIns="0" bIns="0" rtlCol="0" anchor="ctr"/>
+          <a:lstStyle/>
+          <a:p>
+            <a:pPr indent="0" marL="0">
+              <a:buNone/>
+            </a:pPr>
+            <a:r>
+              <a:rPr lang="en-US" sz="1400" dirty="0">
                 <a:solidFill>
                   <a:srgbClr val="1A1A1A"/>
                 </a:solidFill>
@@ -23474,7 +23474,7 @@
               </a:rPr>
               <a:t>1.35 → 1.65</a:t>
             </a:r>
-            <a:endParaRPr lang="en-US" sz="1500" dirty="0"/>
+            <a:endParaRPr lang="en-US" sz="1400" dirty="0"/>
           </a:p>
         </p:txBody>
       </p:sp>
@@ -23486,24 +23486,24 @@
         </p:nvSpPr>
         <p:spPr>
           <a:xfrm>
-            <a:off x="7726680" y="2871216"/>
-            <a:ext cx="1554480" cy="548640"/>
-          </a:xfrm>
-          <a:prstGeom prst="rect">
-            <a:avLst/>
-          </a:prstGeom>
-          <a:noFill/>
-          <a:ln/>
-        </p:spPr>
-        <p:txBody>
-          <a:bodyPr wrap="square" lIns="0" tIns="0" rIns="0" bIns="0" rtlCol="0" anchor="ctr"/>
-          <a:lstStyle/>
-          <a:p>
-            <a:pPr indent="0" marL="0">
-              <a:buNone/>
-            </a:pPr>
-            <a:r>
-              <a:rPr lang="en-US" sz="1500" b="1" dirty="0">
+            <a:off x="7726680" y="2633472"/>
+            <a:ext cx="1554480" cy="438912"/>
+          </a:xfrm>
+          <a:prstGeom prst="rect">
+            <a:avLst/>
+          </a:prstGeom>
+          <a:noFill/>
+          <a:ln/>
+        </p:spPr>
+        <p:txBody>
+          <a:bodyPr wrap="square" lIns="0" tIns="0" rIns="0" bIns="0" rtlCol="0" anchor="ctr"/>
+          <a:lstStyle/>
+          <a:p>
+            <a:pPr indent="0" marL="0">
+              <a:buNone/>
+            </a:pPr>
+            <a:r>
+              <a:rPr lang="en-US" sz="1400" b="1" dirty="0">
                 <a:solidFill>
                   <a:srgbClr val="0B2C4A"/>
                 </a:solidFill>
@@ -23513,7 +23513,7 @@
               </a:rPr>
               <a:t>August</a:t>
             </a:r>
-            <a:endParaRPr lang="en-US" sz="1500" dirty="0"/>
+            <a:endParaRPr lang="en-US" sz="1400" dirty="0"/>
           </a:p>
         </p:txBody>
       </p:sp>
@@ -23525,24 +23525,24 @@
         </p:nvSpPr>
         <p:spPr>
           <a:xfrm>
-            <a:off x="9326880" y="2871216"/>
-            <a:ext cx="1280160" cy="548640"/>
-          </a:xfrm>
-          <a:prstGeom prst="rect">
-            <a:avLst/>
-          </a:prstGeom>
-          <a:noFill/>
-          <a:ln/>
-        </p:spPr>
-        <p:txBody>
-          <a:bodyPr wrap="square" lIns="0" tIns="0" rIns="0" bIns="0" rtlCol="0" anchor="ctr"/>
-          <a:lstStyle/>
-          <a:p>
-            <a:pPr indent="0" marL="0">
-              <a:buNone/>
-            </a:pPr>
-            <a:r>
-              <a:rPr lang="en-US" sz="1500" b="1" dirty="0">
+            <a:off x="9326880" y="2633472"/>
+            <a:ext cx="1280160" cy="438912"/>
+          </a:xfrm>
+          <a:prstGeom prst="rect">
+            <a:avLst/>
+          </a:prstGeom>
+          <a:noFill/>
+          <a:ln/>
+        </p:spPr>
+        <p:txBody>
+          <a:bodyPr wrap="square" lIns="0" tIns="0" rIns="0" bIns="0" rtlCol="0" anchor="ctr"/>
+          <a:lstStyle/>
+          <a:p>
+            <a:pPr indent="0" marL="0">
+              <a:buNone/>
+            </a:pPr>
+            <a:r>
+              <a:rPr lang="en-US" sz="1400" b="1" dirty="0">
                 <a:solidFill>
                   <a:srgbClr val="0B7A4A"/>
                 </a:solidFill>
@@ -23552,7 +23552,7 @@
               </a:rPr>
               <a:t>+22.2%</a:t>
             </a:r>
-            <a:endParaRPr lang="en-US" sz="1500" dirty="0"/>
+            <a:endParaRPr lang="en-US" sz="1400" dirty="0"/>
           </a:p>
         </p:txBody>
       </p:sp>
@@ -23564,24 +23564,24 @@
         </p:nvSpPr>
         <p:spPr>
           <a:xfrm>
-            <a:off x="749808" y="3419856"/>
-            <a:ext cx="2651760" cy="548640"/>
-          </a:xfrm>
-          <a:prstGeom prst="rect">
-            <a:avLst/>
-          </a:prstGeom>
-          <a:noFill/>
-          <a:ln/>
-        </p:spPr>
-        <p:txBody>
-          <a:bodyPr wrap="square" lIns="0" tIns="0" rIns="0" bIns="0" rtlCol="0" anchor="ctr"/>
-          <a:lstStyle/>
-          <a:p>
-            <a:pPr indent="0" marL="0">
-              <a:buNone/>
-            </a:pPr>
-            <a:r>
-              <a:rPr lang="en-US" sz="1500" b="1" dirty="0">
+            <a:off x="749808" y="3072384"/>
+            <a:ext cx="2651760" cy="438912"/>
+          </a:xfrm>
+          <a:prstGeom prst="rect">
+            <a:avLst/>
+          </a:prstGeom>
+          <a:noFill/>
+          <a:ln/>
+        </p:spPr>
+        <p:txBody>
+          <a:bodyPr wrap="square" lIns="0" tIns="0" rIns="0" bIns="0" rtlCol="0" anchor="ctr"/>
+          <a:lstStyle/>
+          <a:p>
+            <a:pPr indent="0" marL="0">
+              <a:buNone/>
+            </a:pPr>
+            <a:r>
+              <a:rPr lang="en-US" sz="1400" b="1" dirty="0">
                 <a:solidFill>
                   <a:srgbClr val="1A1A1A"/>
                 </a:solidFill>
@@ -23591,7 +23591,7 @@
               </a:rPr>
               <a:t>VW ST GEORGE</a:t>
             </a:r>
-            <a:endParaRPr lang="en-US" sz="1500" dirty="0"/>
+            <a:endParaRPr lang="en-US" sz="1400" dirty="0"/>
           </a:p>
         </p:txBody>
       </p:sp>
@@ -23603,24 +23603,24 @@
         </p:nvSpPr>
         <p:spPr>
           <a:xfrm>
-            <a:off x="3520440" y="3419856"/>
-            <a:ext cx="2103120" cy="548640"/>
-          </a:xfrm>
-          <a:prstGeom prst="rect">
-            <a:avLst/>
-          </a:prstGeom>
-          <a:noFill/>
-          <a:ln/>
-        </p:spPr>
-        <p:txBody>
-          <a:bodyPr wrap="square" lIns="0" tIns="0" rIns="0" bIns="0" rtlCol="0" anchor="ctr"/>
-          <a:lstStyle/>
-          <a:p>
-            <a:pPr indent="0" marL="0">
-              <a:buNone/>
-            </a:pPr>
-            <a:r>
-              <a:rPr lang="en-US" sz="1500" dirty="0">
+            <a:off x="3520440" y="3072384"/>
+            <a:ext cx="2103120" cy="438912"/>
+          </a:xfrm>
+          <a:prstGeom prst="rect">
+            <a:avLst/>
+          </a:prstGeom>
+          <a:noFill/>
+          <a:ln/>
+        </p:spPr>
+        <p:txBody>
+          <a:bodyPr wrap="square" lIns="0" tIns="0" rIns="0" bIns="0" rtlCol="0" anchor="ctr"/>
+          <a:lstStyle/>
+          <a:p>
+            <a:pPr indent="0" marL="0">
+              <a:buNone/>
+            </a:pPr>
+            <a:r>
+              <a:rPr lang="en-US" sz="1400" dirty="0">
                 <a:solidFill>
                   <a:srgbClr val="1A1A1A"/>
                 </a:solidFill>
@@ -23630,7 +23630,7 @@
               </a:rPr>
               <a:t>CP ELR</a:t>
             </a:r>
-            <a:endParaRPr lang="en-US" sz="1500" dirty="0"/>
+            <a:endParaRPr lang="en-US" sz="1400" dirty="0"/>
           </a:p>
         </p:txBody>
       </p:sp>
@@ -23642,24 +23642,24 @@
         </p:nvSpPr>
         <p:spPr>
           <a:xfrm>
-            <a:off x="5669280" y="3419856"/>
-            <a:ext cx="2011680" cy="548640"/>
-          </a:xfrm>
-          <a:prstGeom prst="rect">
-            <a:avLst/>
-          </a:prstGeom>
-          <a:noFill/>
-          <a:ln/>
-        </p:spPr>
-        <p:txBody>
-          <a:bodyPr wrap="square" lIns="0" tIns="0" rIns="0" bIns="0" rtlCol="0" anchor="ctr"/>
-          <a:lstStyle/>
-          <a:p>
-            <a:pPr indent="0" marL="0">
-              <a:buNone/>
-            </a:pPr>
-            <a:r>
-              <a:rPr lang="en-US" sz="1500" dirty="0">
+            <a:off x="5669280" y="3072384"/>
+            <a:ext cx="2011680" cy="438912"/>
+          </a:xfrm>
+          <a:prstGeom prst="rect">
+            <a:avLst/>
+          </a:prstGeom>
+          <a:noFill/>
+          <a:ln/>
+        </p:spPr>
+        <p:txBody>
+          <a:bodyPr wrap="square" lIns="0" tIns="0" rIns="0" bIns="0" rtlCol="0" anchor="ctr"/>
+          <a:lstStyle/>
+          <a:p>
+            <a:pPr indent="0" marL="0">
+              <a:buNone/>
+            </a:pPr>
+            <a:r>
+              <a:rPr lang="en-US" sz="1400" dirty="0">
                 <a:solidFill>
                   <a:srgbClr val="1A1A1A"/>
                 </a:solidFill>
@@ -23669,7 +23669,7 @@
               </a:rPr>
               <a:t>$128.27 → $141.89</a:t>
             </a:r>
-            <a:endParaRPr lang="en-US" sz="1500" dirty="0"/>
+            <a:endParaRPr lang="en-US" sz="1400" dirty="0"/>
           </a:p>
         </p:txBody>
       </p:sp>
@@ -23681,24 +23681,24 @@
         </p:nvSpPr>
         <p:spPr>
           <a:xfrm>
-            <a:off x="7726680" y="3419856"/>
-            <a:ext cx="1554480" cy="548640"/>
-          </a:xfrm>
-          <a:prstGeom prst="rect">
-            <a:avLst/>
-          </a:prstGeom>
-          <a:noFill/>
-          <a:ln/>
-        </p:spPr>
-        <p:txBody>
-          <a:bodyPr wrap="square" lIns="0" tIns="0" rIns="0" bIns="0" rtlCol="0" anchor="ctr"/>
-          <a:lstStyle/>
-          <a:p>
-            <a:pPr indent="0" marL="0">
-              <a:buNone/>
-            </a:pPr>
-            <a:r>
-              <a:rPr lang="en-US" sz="1500" b="1" dirty="0">
+            <a:off x="7726680" y="3072384"/>
+            <a:ext cx="1554480" cy="438912"/>
+          </a:xfrm>
+          <a:prstGeom prst="rect">
+            <a:avLst/>
+          </a:prstGeom>
+          <a:noFill/>
+          <a:ln/>
+        </p:spPr>
+        <p:txBody>
+          <a:bodyPr wrap="square" lIns="0" tIns="0" rIns="0" bIns="0" rtlCol="0" anchor="ctr"/>
+          <a:lstStyle/>
+          <a:p>
+            <a:pPr indent="0" marL="0">
+              <a:buNone/>
+            </a:pPr>
+            <a:r>
+              <a:rPr lang="en-US" sz="1400" b="1" dirty="0">
                 <a:solidFill>
                   <a:srgbClr val="0B2C4A"/>
                 </a:solidFill>
@@ -23708,7 +23708,7 @@
               </a:rPr>
               <a:t>June</a:t>
             </a:r>
-            <a:endParaRPr lang="en-US" sz="1500" dirty="0"/>
+            <a:endParaRPr lang="en-US" sz="1400" dirty="0"/>
           </a:p>
         </p:txBody>
       </p:sp>
@@ -23720,24 +23720,24 @@
         </p:nvSpPr>
         <p:spPr>
           <a:xfrm>
-            <a:off x="9326880" y="3419856"/>
-            <a:ext cx="1280160" cy="548640"/>
-          </a:xfrm>
-          <a:prstGeom prst="rect">
-            <a:avLst/>
-          </a:prstGeom>
-          <a:noFill/>
-          <a:ln/>
-        </p:spPr>
-        <p:txBody>
-          <a:bodyPr wrap="square" lIns="0" tIns="0" rIns="0" bIns="0" rtlCol="0" anchor="ctr"/>
-          <a:lstStyle/>
-          <a:p>
-            <a:pPr indent="0" marL="0">
-              <a:buNone/>
-            </a:pPr>
-            <a:r>
-              <a:rPr lang="en-US" sz="1500" b="1" dirty="0">
+            <a:off x="9326880" y="3072384"/>
+            <a:ext cx="1280160" cy="438912"/>
+          </a:xfrm>
+          <a:prstGeom prst="rect">
+            <a:avLst/>
+          </a:prstGeom>
+          <a:noFill/>
+          <a:ln/>
+        </p:spPr>
+        <p:txBody>
+          <a:bodyPr wrap="square" lIns="0" tIns="0" rIns="0" bIns="0" rtlCol="0" anchor="ctr"/>
+          <a:lstStyle/>
+          <a:p>
+            <a:pPr indent="0" marL="0">
+              <a:buNone/>
+            </a:pPr>
+            <a:r>
+              <a:rPr lang="en-US" sz="1400" b="1" dirty="0">
                 <a:solidFill>
                   <a:srgbClr val="0B7A4A"/>
                 </a:solidFill>
@@ -23747,7 +23747,7 @@
               </a:rPr>
               <a:t>+10.6%</a:t>
             </a:r>
-            <a:endParaRPr lang="en-US" sz="1500" dirty="0"/>
+            <a:endParaRPr lang="en-US" sz="1400" dirty="0"/>
           </a:p>
         </p:txBody>
       </p:sp>
@@ -23759,8 +23759,8 @@
         </p:nvSpPr>
         <p:spPr>
           <a:xfrm>
-            <a:off x="621792" y="3968496"/>
-            <a:ext cx="10945368" cy="548640"/>
+            <a:off x="621792" y="3511296"/>
+            <a:ext cx="10945368" cy="438912"/>
           </a:xfrm>
           <a:prstGeom prst="rect">
             <a:avLst/>
@@ -23779,24 +23779,24 @@
         </p:nvSpPr>
         <p:spPr>
           <a:xfrm>
-            <a:off x="749808" y="3968496"/>
-            <a:ext cx="2651760" cy="548640"/>
-          </a:xfrm>
-          <a:prstGeom prst="rect">
-            <a:avLst/>
-          </a:prstGeom>
-          <a:noFill/>
-          <a:ln/>
-        </p:spPr>
-        <p:txBody>
-          <a:bodyPr wrap="square" lIns="0" tIns="0" rIns="0" bIns="0" rtlCol="0" anchor="ctr"/>
-          <a:lstStyle/>
-          <a:p>
-            <a:pPr indent="0" marL="0">
-              <a:buNone/>
-            </a:pPr>
-            <a:r>
-              <a:rPr lang="en-US" sz="1500" b="1" dirty="0">
+            <a:off x="749808" y="3511296"/>
+            <a:ext cx="2651760" cy="438912"/>
+          </a:xfrm>
+          <a:prstGeom prst="rect">
+            <a:avLst/>
+          </a:prstGeom>
+          <a:noFill/>
+          <a:ln/>
+        </p:spPr>
+        <p:txBody>
+          <a:bodyPr wrap="square" lIns="0" tIns="0" rIns="0" bIns="0" rtlCol="0" anchor="ctr"/>
+          <a:lstStyle/>
+          <a:p>
+            <a:pPr indent="0" marL="0">
+              <a:buNone/>
+            </a:pPr>
+            <a:r>
+              <a:rPr lang="en-US" sz="1400" b="1" dirty="0">
                 <a:solidFill>
                   <a:srgbClr val="1A1A1A"/>
                 </a:solidFill>
@@ -23806,7 +23806,7 @@
               </a:rPr>
               <a:t>ACURA</a:t>
             </a:r>
-            <a:endParaRPr lang="en-US" sz="1500" dirty="0"/>
+            <a:endParaRPr lang="en-US" sz="1400" dirty="0"/>
           </a:p>
         </p:txBody>
       </p:sp>
@@ -23818,24 +23818,24 @@
         </p:nvSpPr>
         <p:spPr>
           <a:xfrm>
-            <a:off x="3520440" y="3968496"/>
-            <a:ext cx="2103120" cy="548640"/>
-          </a:xfrm>
-          <a:prstGeom prst="rect">
-            <a:avLst/>
-          </a:prstGeom>
-          <a:noFill/>
-          <a:ln/>
-        </p:spPr>
-        <p:txBody>
-          <a:bodyPr wrap="square" lIns="0" tIns="0" rIns="0" bIns="0" rtlCol="0" anchor="ctr"/>
-          <a:lstStyle/>
-          <a:p>
-            <a:pPr indent="0" marL="0">
-              <a:buNone/>
-            </a:pPr>
-            <a:r>
-              <a:rPr lang="en-US" sz="1500" dirty="0">
+            <a:off x="3520440" y="3511296"/>
+            <a:ext cx="2103120" cy="438912"/>
+          </a:xfrm>
+          <a:prstGeom prst="rect">
+            <a:avLst/>
+          </a:prstGeom>
+          <a:noFill/>
+          <a:ln/>
+        </p:spPr>
+        <p:txBody>
+          <a:bodyPr wrap="square" lIns="0" tIns="0" rIns="0" bIns="0" rtlCol="0" anchor="ctr"/>
+          <a:lstStyle/>
+          <a:p>
+            <a:pPr indent="0" marL="0">
+              <a:buNone/>
+            </a:pPr>
+            <a:r>
+              <a:rPr lang="en-US" sz="1400" dirty="0">
                 <a:solidFill>
                   <a:srgbClr val="1A1A1A"/>
                 </a:solidFill>
@@ -23845,7 +23845,7 @@
               </a:rPr>
               <a:t>CP Parts GP %</a:t>
             </a:r>
-            <a:endParaRPr lang="en-US" sz="1500" dirty="0"/>
+            <a:endParaRPr lang="en-US" sz="1400" dirty="0"/>
           </a:p>
         </p:txBody>
       </p:sp>
@@ -23857,24 +23857,24 @@
         </p:nvSpPr>
         <p:spPr>
           <a:xfrm>
-            <a:off x="5669280" y="3968496"/>
-            <a:ext cx="2011680" cy="548640"/>
-          </a:xfrm>
-          <a:prstGeom prst="rect">
-            <a:avLst/>
-          </a:prstGeom>
-          <a:noFill/>
-          <a:ln/>
-        </p:spPr>
-        <p:txBody>
-          <a:bodyPr wrap="square" lIns="0" tIns="0" rIns="0" bIns="0" rtlCol="0" anchor="ctr"/>
-          <a:lstStyle/>
-          <a:p>
-            <a:pPr indent="0" marL="0">
-              <a:buNone/>
-            </a:pPr>
-            <a:r>
-              <a:rPr lang="en-US" sz="1500" dirty="0">
+            <a:off x="5669280" y="3511296"/>
+            <a:ext cx="2011680" cy="438912"/>
+          </a:xfrm>
+          <a:prstGeom prst="rect">
+            <a:avLst/>
+          </a:prstGeom>
+          <a:noFill/>
+          <a:ln/>
+        </p:spPr>
+        <p:txBody>
+          <a:bodyPr wrap="square" lIns="0" tIns="0" rIns="0" bIns="0" rtlCol="0" anchor="ctr"/>
+          <a:lstStyle/>
+          <a:p>
+            <a:pPr indent="0" marL="0">
+              <a:buNone/>
+            </a:pPr>
+            <a:r>
+              <a:rPr lang="en-US" sz="1400" dirty="0">
                 <a:solidFill>
                   <a:srgbClr val="1A1A1A"/>
                 </a:solidFill>
@@ -23884,7 +23884,7 @@
               </a:rPr>
               <a:t>39.4% → 46.6%</a:t>
             </a:r>
-            <a:endParaRPr lang="en-US" sz="1500" dirty="0"/>
+            <a:endParaRPr lang="en-US" sz="1400" dirty="0"/>
           </a:p>
         </p:txBody>
       </p:sp>
@@ -23896,24 +23896,24 @@
         </p:nvSpPr>
         <p:spPr>
           <a:xfrm>
-            <a:off x="7726680" y="3968496"/>
-            <a:ext cx="1554480" cy="548640"/>
-          </a:xfrm>
-          <a:prstGeom prst="rect">
-            <a:avLst/>
-          </a:prstGeom>
-          <a:noFill/>
-          <a:ln/>
-        </p:spPr>
-        <p:txBody>
-          <a:bodyPr wrap="square" lIns="0" tIns="0" rIns="0" bIns="0" rtlCol="0" anchor="ctr"/>
-          <a:lstStyle/>
-          <a:p>
-            <a:pPr indent="0" marL="0">
-              <a:buNone/>
-            </a:pPr>
-            <a:r>
-              <a:rPr lang="en-US" sz="1500" b="1" dirty="0">
+            <a:off x="7726680" y="3511296"/>
+            <a:ext cx="1554480" cy="438912"/>
+          </a:xfrm>
+          <a:prstGeom prst="rect">
+            <a:avLst/>
+          </a:prstGeom>
+          <a:noFill/>
+          <a:ln/>
+        </p:spPr>
+        <p:txBody>
+          <a:bodyPr wrap="square" lIns="0" tIns="0" rIns="0" bIns="0" rtlCol="0" anchor="ctr"/>
+          <a:lstStyle/>
+          <a:p>
+            <a:pPr indent="0" marL="0">
+              <a:buNone/>
+            </a:pPr>
+            <a:r>
+              <a:rPr lang="en-US" sz="1400" b="1" dirty="0">
                 <a:solidFill>
                   <a:srgbClr val="0B2C4A"/>
                 </a:solidFill>
@@ -23923,7 +23923,7 @@
               </a:rPr>
               <a:t>April</a:t>
             </a:r>
-            <a:endParaRPr lang="en-US" sz="1500" dirty="0"/>
+            <a:endParaRPr lang="en-US" sz="1400" dirty="0"/>
           </a:p>
         </p:txBody>
       </p:sp>
@@ -23935,24 +23935,24 @@
         </p:nvSpPr>
         <p:spPr>
           <a:xfrm>
-            <a:off x="9326880" y="3968496"/>
-            <a:ext cx="1280160" cy="548640"/>
-          </a:xfrm>
-          <a:prstGeom prst="rect">
-            <a:avLst/>
-          </a:prstGeom>
-          <a:noFill/>
-          <a:ln/>
-        </p:spPr>
-        <p:txBody>
-          <a:bodyPr wrap="square" lIns="0" tIns="0" rIns="0" bIns="0" rtlCol="0" anchor="ctr"/>
-          <a:lstStyle/>
-          <a:p>
-            <a:pPr indent="0" marL="0">
-              <a:buNone/>
-            </a:pPr>
-            <a:r>
-              <a:rPr lang="en-US" sz="1500" b="1" dirty="0">
+            <a:off x="9326880" y="3511296"/>
+            <a:ext cx="1280160" cy="438912"/>
+          </a:xfrm>
+          <a:prstGeom prst="rect">
+            <a:avLst/>
+          </a:prstGeom>
+          <a:noFill/>
+          <a:ln/>
+        </p:spPr>
+        <p:txBody>
+          <a:bodyPr wrap="square" lIns="0" tIns="0" rIns="0" bIns="0" rtlCol="0" anchor="ctr"/>
+          <a:lstStyle/>
+          <a:p>
+            <a:pPr indent="0" marL="0">
+              <a:buNone/>
+            </a:pPr>
+            <a:r>
+              <a:rPr lang="en-US" sz="1400" b="1" dirty="0">
                 <a:solidFill>
                   <a:srgbClr val="0B7A4A"/>
                 </a:solidFill>
@@ -23962,7 +23962,7 @@
               </a:rPr>
               <a:t>+7.2 pts</a:t>
             </a:r>
-            <a:endParaRPr lang="en-US" sz="1500" dirty="0"/>
+            <a:endParaRPr lang="en-US" sz="1400" dirty="0"/>
           </a:p>
         </p:txBody>
       </p:sp>
@@ -23974,24 +23974,24 @@
         </p:nvSpPr>
         <p:spPr>
           <a:xfrm>
-            <a:off x="749808" y="4517136"/>
-            <a:ext cx="2651760" cy="548640"/>
-          </a:xfrm>
-          <a:prstGeom prst="rect">
-            <a:avLst/>
-          </a:prstGeom>
-          <a:noFill/>
-          <a:ln/>
-        </p:spPr>
-        <p:txBody>
-          <a:bodyPr wrap="square" lIns="0" tIns="0" rIns="0" bIns="0" rtlCol="0" anchor="ctr"/>
-          <a:lstStyle/>
-          <a:p>
-            <a:pPr indent="0" marL="0">
-              <a:buNone/>
-            </a:pPr>
-            <a:r>
-              <a:rPr lang="en-US" sz="1500" b="1" dirty="0">
+            <a:off x="749808" y="3950208"/>
+            <a:ext cx="2651760" cy="438912"/>
+          </a:xfrm>
+          <a:prstGeom prst="rect">
+            <a:avLst/>
+          </a:prstGeom>
+          <a:noFill/>
+          <a:ln/>
+        </p:spPr>
+        <p:txBody>
+          <a:bodyPr wrap="square" lIns="0" tIns="0" rIns="0" bIns="0" rtlCol="0" anchor="ctr"/>
+          <a:lstStyle/>
+          <a:p>
+            <a:pPr indent="0" marL="0">
+              <a:buNone/>
+            </a:pPr>
+            <a:r>
+              <a:rPr lang="en-US" sz="1400" b="1" dirty="0">
                 <a:solidFill>
                   <a:srgbClr val="1A1A1A"/>
                 </a:solidFill>
@@ -23999,38 +23999,253 @@
                 <a:ea typeface="Inter" pitchFamily="34" charset="-122"/>
                 <a:cs typeface="Inter" pitchFamily="34" charset="-120"/>
               </a:rPr>
+              <a:t>AUDI HENDERSON</a:t>
+            </a:r>
+            <a:endParaRPr lang="en-US" sz="1400" dirty="0"/>
+          </a:p>
+        </p:txBody>
+      </p:sp>
+      <p:sp>
+        <p:nvSpPr>
+          <p:cNvPr id="40" name="Text 38"/>
+          <p:cNvSpPr txBox="1"/>
+          <p:nvPr/>
+        </p:nvSpPr>
+        <p:spPr>
+          <a:xfrm>
+            <a:off x="3520440" y="3950208"/>
+            <a:ext cx="2103120" cy="438912"/>
+          </a:xfrm>
+          <a:prstGeom prst="rect">
+            <a:avLst/>
+          </a:prstGeom>
+          <a:noFill/>
+          <a:ln/>
+        </p:spPr>
+        <p:txBody>
+          <a:bodyPr wrap="square" lIns="0" tIns="0" rIns="0" bIns="0" rtlCol="0" anchor="ctr"/>
+          <a:lstStyle/>
+          <a:p>
+            <a:pPr indent="0" marL="0">
+              <a:buNone/>
+            </a:pPr>
+            <a:r>
+              <a:rPr lang="en-US" sz="1400" dirty="0">
+                <a:solidFill>
+                  <a:srgbClr val="1A1A1A"/>
+                </a:solidFill>
+                <a:latin typeface="Inter" pitchFamily="34" charset="0"/>
+                <a:ea typeface="Inter" pitchFamily="34" charset="-122"/>
+                <a:cs typeface="Inter" pitchFamily="34" charset="-120"/>
+              </a:rPr>
+              <a:t>Opcodes · alignment</a:t>
+            </a:r>
+            <a:endParaRPr lang="en-US" sz="1400" dirty="0"/>
+          </a:p>
+        </p:txBody>
+      </p:sp>
+      <p:sp>
+        <p:nvSpPr>
+          <p:cNvPr id="41" name="Text 39"/>
+          <p:cNvSpPr txBox="1"/>
+          <p:nvPr/>
+        </p:nvSpPr>
+        <p:spPr>
+          <a:xfrm>
+            <a:off x="5669280" y="3950208"/>
+            <a:ext cx="2011680" cy="438912"/>
+          </a:xfrm>
+          <a:prstGeom prst="rect">
+            <a:avLst/>
+          </a:prstGeom>
+          <a:noFill/>
+          <a:ln/>
+        </p:spPr>
+        <p:txBody>
+          <a:bodyPr wrap="square" lIns="0" tIns="0" rIns="0" bIns="0" rtlCol="0" anchor="ctr"/>
+          <a:lstStyle/>
+          <a:p>
+            <a:pPr indent="0" marL="0">
+              <a:buNone/>
+            </a:pPr>
+            <a:r>
+              <a:rPr lang="en-US" sz="1400" dirty="0">
+                <a:solidFill>
+                  <a:srgbClr val="1A1A1A"/>
+                </a:solidFill>
+                <a:latin typeface="Inter" pitchFamily="34" charset="0"/>
+                <a:ea typeface="Inter" pitchFamily="34" charset="-122"/>
+                <a:cs typeface="Inter" pitchFamily="34" charset="-120"/>
+              </a:rPr>
+              <a:t>21.0% → 31.7%</a:t>
+            </a:r>
+            <a:endParaRPr lang="en-US" sz="1400" dirty="0"/>
+          </a:p>
+        </p:txBody>
+      </p:sp>
+      <p:sp>
+        <p:nvSpPr>
+          <p:cNvPr id="42" name="Text 40"/>
+          <p:cNvSpPr txBox="1"/>
+          <p:nvPr/>
+        </p:nvSpPr>
+        <p:spPr>
+          <a:xfrm>
+            <a:off x="7726680" y="3950208"/>
+            <a:ext cx="1554480" cy="438912"/>
+          </a:xfrm>
+          <a:prstGeom prst="rect">
+            <a:avLst/>
+          </a:prstGeom>
+          <a:noFill/>
+          <a:ln/>
+        </p:spPr>
+        <p:txBody>
+          <a:bodyPr wrap="square" lIns="0" tIns="0" rIns="0" bIns="0" rtlCol="0" anchor="ctr"/>
+          <a:lstStyle/>
+          <a:p>
+            <a:pPr indent="0" marL="0">
+              <a:buNone/>
+            </a:pPr>
+            <a:r>
+              <a:rPr lang="en-US" sz="1400" b="1" dirty="0">
+                <a:solidFill>
+                  <a:srgbClr val="0B2C4A"/>
+                </a:solidFill>
+                <a:latin typeface="Inter" pitchFamily="34" charset="0"/>
+                <a:ea typeface="Inter" pitchFamily="34" charset="-122"/>
+                <a:cs typeface="Inter" pitchFamily="34" charset="-120"/>
+              </a:rPr>
+              <a:t>May</a:t>
+            </a:r>
+            <a:endParaRPr lang="en-US" sz="1400" dirty="0"/>
+          </a:p>
+        </p:txBody>
+      </p:sp>
+      <p:sp>
+        <p:nvSpPr>
+          <p:cNvPr id="43" name="Text 41"/>
+          <p:cNvSpPr txBox="1"/>
+          <p:nvPr/>
+        </p:nvSpPr>
+        <p:spPr>
+          <a:xfrm>
+            <a:off x="9326880" y="3950208"/>
+            <a:ext cx="1280160" cy="438912"/>
+          </a:xfrm>
+          <a:prstGeom prst="rect">
+            <a:avLst/>
+          </a:prstGeom>
+          <a:noFill/>
+          <a:ln/>
+        </p:spPr>
+        <p:txBody>
+          <a:bodyPr wrap="square" lIns="0" tIns="0" rIns="0" bIns="0" rtlCol="0" anchor="ctr"/>
+          <a:lstStyle/>
+          <a:p>
+            <a:pPr indent="0" marL="0">
+              <a:buNone/>
+            </a:pPr>
+            <a:r>
+              <a:rPr lang="en-US" sz="1400" b="1" dirty="0">
+                <a:solidFill>
+                  <a:srgbClr val="0B7A4A"/>
+                </a:solidFill>
+                <a:latin typeface="Inter" pitchFamily="34" charset="0"/>
+                <a:ea typeface="Inter" pitchFamily="34" charset="-122"/>
+                <a:cs typeface="Inter" pitchFamily="34" charset="-120"/>
+              </a:rPr>
+              <a:t>+10.7 pts</a:t>
+            </a:r>
+            <a:endParaRPr lang="en-US" sz="1400" dirty="0"/>
+          </a:p>
+        </p:txBody>
+      </p:sp>
+      <p:sp>
+        <p:nvSpPr>
+          <p:cNvPr id="44" name="Shape 42"/>
+          <p:cNvSpPr/>
+          <p:nvPr/>
+        </p:nvSpPr>
+        <p:spPr>
+          <a:xfrm>
+            <a:off x="621792" y="4389120"/>
+            <a:ext cx="10945368" cy="438912"/>
+          </a:xfrm>
+          <a:prstGeom prst="rect">
+            <a:avLst/>
+          </a:prstGeom>
+          <a:solidFill>
+            <a:srgbClr val="F7F7F7"/>
+          </a:solidFill>
+          <a:ln/>
+        </p:spPr>
+      </p:sp>
+      <p:sp>
+        <p:nvSpPr>
+          <p:cNvPr id="45" name="Text 43"/>
+          <p:cNvSpPr txBox="1"/>
+          <p:nvPr/>
+        </p:nvSpPr>
+        <p:spPr>
+          <a:xfrm>
+            <a:off x="749808" y="4389120"/>
+            <a:ext cx="2651760" cy="438912"/>
+          </a:xfrm>
+          <a:prstGeom prst="rect">
+            <a:avLst/>
+          </a:prstGeom>
+          <a:noFill/>
+          <a:ln/>
+        </p:spPr>
+        <p:txBody>
+          <a:bodyPr wrap="square" lIns="0" tIns="0" rIns="0" bIns="0" rtlCol="0" anchor="ctr"/>
+          <a:lstStyle/>
+          <a:p>
+            <a:pPr indent="0" marL="0">
+              <a:buNone/>
+            </a:pPr>
+            <a:r>
+              <a:rPr lang="en-US" sz="1400" b="1" dirty="0">
+                <a:solidFill>
+                  <a:srgbClr val="1A1A1A"/>
+                </a:solidFill>
+                <a:latin typeface="Inter" pitchFamily="34" charset="0"/>
+                <a:ea typeface="Inter" pitchFamily="34" charset="-122"/>
+                <a:cs typeface="Inter" pitchFamily="34" charset="-120"/>
+              </a:rPr>
               <a:t>MAZDA</a:t>
             </a:r>
-            <a:endParaRPr lang="en-US" sz="1500" dirty="0"/>
-          </a:p>
-        </p:txBody>
-      </p:sp>
-      <p:sp>
-        <p:nvSpPr>
-          <p:cNvPr id="40" name="Text 38"/>
-          <p:cNvSpPr txBox="1"/>
-          <p:nvPr/>
-        </p:nvSpPr>
-        <p:spPr>
-          <a:xfrm>
-            <a:off x="3520440" y="4517136"/>
-            <a:ext cx="2103120" cy="548640"/>
-          </a:xfrm>
-          <a:prstGeom prst="rect">
-            <a:avLst/>
-          </a:prstGeom>
-          <a:noFill/>
-          <a:ln/>
-        </p:spPr>
-        <p:txBody>
-          <a:bodyPr wrap="square" lIns="0" tIns="0" rIns="0" bIns="0" rtlCol="0" anchor="ctr"/>
-          <a:lstStyle/>
-          <a:p>
-            <a:pPr indent="0" marL="0">
-              <a:buNone/>
-            </a:pPr>
-            <a:r>
-              <a:rPr lang="en-US" sz="1500" dirty="0">
+            <a:endParaRPr lang="en-US" sz="1400" dirty="0"/>
+          </a:p>
+        </p:txBody>
+      </p:sp>
+      <p:sp>
+        <p:nvSpPr>
+          <p:cNvPr id="46" name="Text 44"/>
+          <p:cNvSpPr txBox="1"/>
+          <p:nvPr/>
+        </p:nvSpPr>
+        <p:spPr>
+          <a:xfrm>
+            <a:off x="3520440" y="4389120"/>
+            <a:ext cx="2103120" cy="438912"/>
+          </a:xfrm>
+          <a:prstGeom prst="rect">
+            <a:avLst/>
+          </a:prstGeom>
+          <a:noFill/>
+          <a:ln/>
+        </p:spPr>
+        <p:txBody>
+          <a:bodyPr wrap="square" lIns="0" tIns="0" rIns="0" bIns="0" rtlCol="0" anchor="ctr"/>
+          <a:lstStyle/>
+          <a:p>
+            <a:pPr indent="0" marL="0">
+              <a:buNone/>
+            </a:pPr>
+            <a:r>
+              <a:rPr lang="en-US" sz="1400" dirty="0">
                 <a:solidFill>
                   <a:srgbClr val="1A1A1A"/>
                 </a:solidFill>
@@ -24040,36 +24255,36 @@
               </a:rPr>
               <a:t>Opcodes · balance</a:t>
             </a:r>
-            <a:endParaRPr lang="en-US" sz="1500" dirty="0"/>
-          </a:p>
-        </p:txBody>
-      </p:sp>
-      <p:sp>
-        <p:nvSpPr>
-          <p:cNvPr id="41" name="Text 39"/>
-          <p:cNvSpPr txBox="1"/>
-          <p:nvPr/>
-        </p:nvSpPr>
-        <p:spPr>
-          <a:xfrm>
-            <a:off x="5669280" y="4517136"/>
-            <a:ext cx="2011680" cy="548640"/>
-          </a:xfrm>
-          <a:prstGeom prst="rect">
-            <a:avLst/>
-          </a:prstGeom>
-          <a:noFill/>
-          <a:ln/>
-        </p:spPr>
-        <p:txBody>
-          <a:bodyPr wrap="square" lIns="0" tIns="0" rIns="0" bIns="0" rtlCol="0" anchor="ctr"/>
-          <a:lstStyle/>
-          <a:p>
-            <a:pPr indent="0" marL="0">
-              <a:buNone/>
-            </a:pPr>
-            <a:r>
-              <a:rPr lang="en-US" sz="1500" dirty="0">
+            <a:endParaRPr lang="en-US" sz="1400" dirty="0"/>
+          </a:p>
+        </p:txBody>
+      </p:sp>
+      <p:sp>
+        <p:nvSpPr>
+          <p:cNvPr id="47" name="Text 45"/>
+          <p:cNvSpPr txBox="1"/>
+          <p:nvPr/>
+        </p:nvSpPr>
+        <p:spPr>
+          <a:xfrm>
+            <a:off x="5669280" y="4389120"/>
+            <a:ext cx="2011680" cy="438912"/>
+          </a:xfrm>
+          <a:prstGeom prst="rect">
+            <a:avLst/>
+          </a:prstGeom>
+          <a:noFill/>
+          <a:ln/>
+        </p:spPr>
+        <p:txBody>
+          <a:bodyPr wrap="square" lIns="0" tIns="0" rIns="0" bIns="0" rtlCol="0" anchor="ctr"/>
+          <a:lstStyle/>
+          <a:p>
+            <a:pPr indent="0" marL="0">
+              <a:buNone/>
+            </a:pPr>
+            <a:r>
+              <a:rPr lang="en-US" sz="1400" dirty="0">
                 <a:solidFill>
                   <a:srgbClr val="1A1A1A"/>
                 </a:solidFill>
@@ -24079,36 +24294,36 @@
               </a:rPr>
               <a:t>10.1% → 19.3%</a:t>
             </a:r>
-            <a:endParaRPr lang="en-US" sz="1500" dirty="0"/>
-          </a:p>
-        </p:txBody>
-      </p:sp>
-      <p:sp>
-        <p:nvSpPr>
-          <p:cNvPr id="42" name="Text 40"/>
-          <p:cNvSpPr txBox="1"/>
-          <p:nvPr/>
-        </p:nvSpPr>
-        <p:spPr>
-          <a:xfrm>
-            <a:off x="7726680" y="4517136"/>
-            <a:ext cx="1554480" cy="548640"/>
-          </a:xfrm>
-          <a:prstGeom prst="rect">
-            <a:avLst/>
-          </a:prstGeom>
-          <a:noFill/>
-          <a:ln/>
-        </p:spPr>
-        <p:txBody>
-          <a:bodyPr wrap="square" lIns="0" tIns="0" rIns="0" bIns="0" rtlCol="0" anchor="ctr"/>
-          <a:lstStyle/>
-          <a:p>
-            <a:pPr indent="0" marL="0">
-              <a:buNone/>
-            </a:pPr>
-            <a:r>
-              <a:rPr lang="en-US" sz="1500" b="1" dirty="0">
+            <a:endParaRPr lang="en-US" sz="1400" dirty="0"/>
+          </a:p>
+        </p:txBody>
+      </p:sp>
+      <p:sp>
+        <p:nvSpPr>
+          <p:cNvPr id="48" name="Text 46"/>
+          <p:cNvSpPr txBox="1"/>
+          <p:nvPr/>
+        </p:nvSpPr>
+        <p:spPr>
+          <a:xfrm>
+            <a:off x="7726680" y="4389120"/>
+            <a:ext cx="1554480" cy="438912"/>
+          </a:xfrm>
+          <a:prstGeom prst="rect">
+            <a:avLst/>
+          </a:prstGeom>
+          <a:noFill/>
+          <a:ln/>
+        </p:spPr>
+        <p:txBody>
+          <a:bodyPr wrap="square" lIns="0" tIns="0" rIns="0" bIns="0" rtlCol="0" anchor="ctr"/>
+          <a:lstStyle/>
+          <a:p>
+            <a:pPr indent="0" marL="0">
+              <a:buNone/>
+            </a:pPr>
+            <a:r>
+              <a:rPr lang="en-US" sz="1400" b="1" dirty="0">
                 <a:solidFill>
                   <a:srgbClr val="0B2C4A"/>
                 </a:solidFill>
@@ -24118,36 +24333,36 @@
               </a:rPr>
               <a:t>August</a:t>
             </a:r>
-            <a:endParaRPr lang="en-US" sz="1500" dirty="0"/>
-          </a:p>
-        </p:txBody>
-      </p:sp>
-      <p:sp>
-        <p:nvSpPr>
-          <p:cNvPr id="43" name="Text 41"/>
-          <p:cNvSpPr txBox="1"/>
-          <p:nvPr/>
-        </p:nvSpPr>
-        <p:spPr>
-          <a:xfrm>
-            <a:off x="9326880" y="4517136"/>
-            <a:ext cx="1280160" cy="548640"/>
-          </a:xfrm>
-          <a:prstGeom prst="rect">
-            <a:avLst/>
-          </a:prstGeom>
-          <a:noFill/>
-          <a:ln/>
-        </p:spPr>
-        <p:txBody>
-          <a:bodyPr wrap="square" lIns="0" tIns="0" rIns="0" bIns="0" rtlCol="0" anchor="ctr"/>
-          <a:lstStyle/>
-          <a:p>
-            <a:pPr indent="0" marL="0">
-              <a:buNone/>
-            </a:pPr>
-            <a:r>
-              <a:rPr lang="en-US" sz="1500" b="1" dirty="0">
+            <a:endParaRPr lang="en-US" sz="1400" dirty="0"/>
+          </a:p>
+        </p:txBody>
+      </p:sp>
+      <p:sp>
+        <p:nvSpPr>
+          <p:cNvPr id="49" name="Text 47"/>
+          <p:cNvSpPr txBox="1"/>
+          <p:nvPr/>
+        </p:nvSpPr>
+        <p:spPr>
+          <a:xfrm>
+            <a:off x="9326880" y="4389120"/>
+            <a:ext cx="1280160" cy="438912"/>
+          </a:xfrm>
+          <a:prstGeom prst="rect">
+            <a:avLst/>
+          </a:prstGeom>
+          <a:noFill/>
+          <a:ln/>
+        </p:spPr>
+        <p:txBody>
+          <a:bodyPr wrap="square" lIns="0" tIns="0" rIns="0" bIns="0" rtlCol="0" anchor="ctr"/>
+          <a:lstStyle/>
+          <a:p>
+            <a:pPr indent="0" marL="0">
+              <a:buNone/>
+            </a:pPr>
+            <a:r>
+              <a:rPr lang="en-US" sz="1400" b="1" dirty="0">
                 <a:solidFill>
                   <a:srgbClr val="0B7A4A"/>
                 </a:solidFill>
@@ -24157,13 +24372,423 @@
               </a:rPr>
               <a:t>+9.2 pts</a:t>
             </a:r>
-            <a:endParaRPr lang="en-US" sz="1500" dirty="0"/>
-          </a:p>
-        </p:txBody>
-      </p:sp>
-      <p:sp>
-        <p:nvSpPr>
-          <p:cNvPr id="44" name="Shape 42"/>
+            <a:endParaRPr lang="en-US" sz="1400" dirty="0"/>
+          </a:p>
+        </p:txBody>
+      </p:sp>
+      <p:sp>
+        <p:nvSpPr>
+          <p:cNvPr id="50" name="Text 48"/>
+          <p:cNvSpPr txBox="1"/>
+          <p:nvPr/>
+        </p:nvSpPr>
+        <p:spPr>
+          <a:xfrm>
+            <a:off x="749808" y="4828032"/>
+            <a:ext cx="2651760" cy="438912"/>
+          </a:xfrm>
+          <a:prstGeom prst="rect">
+            <a:avLst/>
+          </a:prstGeom>
+          <a:noFill/>
+          <a:ln/>
+        </p:spPr>
+        <p:txBody>
+          <a:bodyPr wrap="square" lIns="0" tIns="0" rIns="0" bIns="0" rtlCol="0" anchor="ctr"/>
+          <a:lstStyle/>
+          <a:p>
+            <a:pPr indent="0" marL="0">
+              <a:buNone/>
+            </a:pPr>
+            <a:r>
+              <a:rPr lang="en-US" sz="1400" b="1" dirty="0">
+                <a:solidFill>
+                  <a:srgbClr val="1A1A1A"/>
+                </a:solidFill>
+                <a:latin typeface="Inter" pitchFamily="34" charset="0"/>
+                <a:ea typeface="Inter" pitchFamily="34" charset="-122"/>
+                <a:cs typeface="Inter" pitchFamily="34" charset="-120"/>
+              </a:rPr>
+              <a:t>MAZDA</a:t>
+            </a:r>
+            <a:endParaRPr lang="en-US" sz="1400" dirty="0"/>
+          </a:p>
+        </p:txBody>
+      </p:sp>
+      <p:sp>
+        <p:nvSpPr>
+          <p:cNvPr id="51" name="Text 49"/>
+          <p:cNvSpPr txBox="1"/>
+          <p:nvPr/>
+        </p:nvSpPr>
+        <p:spPr>
+          <a:xfrm>
+            <a:off x="3520440" y="4828032"/>
+            <a:ext cx="2103120" cy="438912"/>
+          </a:xfrm>
+          <a:prstGeom prst="rect">
+            <a:avLst/>
+          </a:prstGeom>
+          <a:noFill/>
+          <a:ln/>
+        </p:spPr>
+        <p:txBody>
+          <a:bodyPr wrap="square" lIns="0" tIns="0" rIns="0" bIns="0" rtlCol="0" anchor="ctr"/>
+          <a:lstStyle/>
+          <a:p>
+            <a:pPr indent="0" marL="0">
+              <a:buNone/>
+            </a:pPr>
+            <a:r>
+              <a:rPr lang="en-US" sz="1400" dirty="0">
+                <a:solidFill>
+                  <a:srgbClr val="1A1A1A"/>
+                </a:solidFill>
+                <a:latin typeface="Inter" pitchFamily="34" charset="0"/>
+                <a:ea typeface="Inter" pitchFamily="34" charset="-122"/>
+                <a:cs typeface="Inter" pitchFamily="34" charset="-120"/>
+              </a:rPr>
+              <a:t>Opcodes · brake fluid</a:t>
+            </a:r>
+            <a:endParaRPr lang="en-US" sz="1400" dirty="0"/>
+          </a:p>
+        </p:txBody>
+      </p:sp>
+      <p:sp>
+        <p:nvSpPr>
+          <p:cNvPr id="52" name="Text 50"/>
+          <p:cNvSpPr txBox="1"/>
+          <p:nvPr/>
+        </p:nvSpPr>
+        <p:spPr>
+          <a:xfrm>
+            <a:off x="5669280" y="4828032"/>
+            <a:ext cx="2011680" cy="438912"/>
+          </a:xfrm>
+          <a:prstGeom prst="rect">
+            <a:avLst/>
+          </a:prstGeom>
+          <a:noFill/>
+          <a:ln/>
+        </p:spPr>
+        <p:txBody>
+          <a:bodyPr wrap="square" lIns="0" tIns="0" rIns="0" bIns="0" rtlCol="0" anchor="ctr"/>
+          <a:lstStyle/>
+          <a:p>
+            <a:pPr indent="0" marL="0">
+              <a:buNone/>
+            </a:pPr>
+            <a:r>
+              <a:rPr lang="en-US" sz="1400" dirty="0">
+                <a:solidFill>
+                  <a:srgbClr val="1A1A1A"/>
+                </a:solidFill>
+                <a:latin typeface="Inter" pitchFamily="34" charset="0"/>
+                <a:ea typeface="Inter" pitchFamily="34" charset="-122"/>
+                <a:cs typeface="Inter" pitchFamily="34" charset="-120"/>
+              </a:rPr>
+              <a:t>5.1% → 14.1%</a:t>
+            </a:r>
+            <a:endParaRPr lang="en-US" sz="1400" dirty="0"/>
+          </a:p>
+        </p:txBody>
+      </p:sp>
+      <p:sp>
+        <p:nvSpPr>
+          <p:cNvPr id="53" name="Text 51"/>
+          <p:cNvSpPr txBox="1"/>
+          <p:nvPr/>
+        </p:nvSpPr>
+        <p:spPr>
+          <a:xfrm>
+            <a:off x="7726680" y="4828032"/>
+            <a:ext cx="1554480" cy="438912"/>
+          </a:xfrm>
+          <a:prstGeom prst="rect">
+            <a:avLst/>
+          </a:prstGeom>
+          <a:noFill/>
+          <a:ln/>
+        </p:spPr>
+        <p:txBody>
+          <a:bodyPr wrap="square" lIns="0" tIns="0" rIns="0" bIns="0" rtlCol="0" anchor="ctr"/>
+          <a:lstStyle/>
+          <a:p>
+            <a:pPr indent="0" marL="0">
+              <a:buNone/>
+            </a:pPr>
+            <a:r>
+              <a:rPr lang="en-US" sz="1400" b="1" dirty="0">
+                <a:solidFill>
+                  <a:srgbClr val="0B2C4A"/>
+                </a:solidFill>
+                <a:latin typeface="Inter" pitchFamily="34" charset="0"/>
+                <a:ea typeface="Inter" pitchFamily="34" charset="-122"/>
+                <a:cs typeface="Inter" pitchFamily="34" charset="-120"/>
+              </a:rPr>
+              <a:t>August</a:t>
+            </a:r>
+            <a:endParaRPr lang="en-US" sz="1400" dirty="0"/>
+          </a:p>
+        </p:txBody>
+      </p:sp>
+      <p:sp>
+        <p:nvSpPr>
+          <p:cNvPr id="54" name="Text 52"/>
+          <p:cNvSpPr txBox="1"/>
+          <p:nvPr/>
+        </p:nvSpPr>
+        <p:spPr>
+          <a:xfrm>
+            <a:off x="9326880" y="4828032"/>
+            <a:ext cx="1280160" cy="438912"/>
+          </a:xfrm>
+          <a:prstGeom prst="rect">
+            <a:avLst/>
+          </a:prstGeom>
+          <a:noFill/>
+          <a:ln/>
+        </p:spPr>
+        <p:txBody>
+          <a:bodyPr wrap="square" lIns="0" tIns="0" rIns="0" bIns="0" rtlCol="0" anchor="ctr"/>
+          <a:lstStyle/>
+          <a:p>
+            <a:pPr indent="0" marL="0">
+              <a:buNone/>
+            </a:pPr>
+            <a:r>
+              <a:rPr lang="en-US" sz="1400" b="1" dirty="0">
+                <a:solidFill>
+                  <a:srgbClr val="0B7A4A"/>
+                </a:solidFill>
+                <a:latin typeface="Inter" pitchFamily="34" charset="0"/>
+                <a:ea typeface="Inter" pitchFamily="34" charset="-122"/>
+                <a:cs typeface="Inter" pitchFamily="34" charset="-120"/>
+              </a:rPr>
+              <a:t>+9.0 pts</a:t>
+            </a:r>
+            <a:endParaRPr lang="en-US" sz="1400" dirty="0"/>
+          </a:p>
+        </p:txBody>
+      </p:sp>
+      <p:sp>
+        <p:nvSpPr>
+          <p:cNvPr id="55" name="Shape 53"/>
+          <p:cNvSpPr/>
+          <p:nvPr/>
+        </p:nvSpPr>
+        <p:spPr>
+          <a:xfrm>
+            <a:off x="621792" y="5266944"/>
+            <a:ext cx="10945368" cy="438912"/>
+          </a:xfrm>
+          <a:prstGeom prst="rect">
+            <a:avLst/>
+          </a:prstGeom>
+          <a:solidFill>
+            <a:srgbClr val="F7F7F7"/>
+          </a:solidFill>
+          <a:ln/>
+        </p:spPr>
+      </p:sp>
+      <p:sp>
+        <p:nvSpPr>
+          <p:cNvPr id="56" name="Text 54"/>
+          <p:cNvSpPr txBox="1"/>
+          <p:nvPr/>
+        </p:nvSpPr>
+        <p:spPr>
+          <a:xfrm>
+            <a:off x="749808" y="5266944"/>
+            <a:ext cx="2651760" cy="438912"/>
+          </a:xfrm>
+          <a:prstGeom prst="rect">
+            <a:avLst/>
+          </a:prstGeom>
+          <a:noFill/>
+          <a:ln/>
+        </p:spPr>
+        <p:txBody>
+          <a:bodyPr wrap="square" lIns="0" tIns="0" rIns="0" bIns="0" rtlCol="0" anchor="ctr"/>
+          <a:lstStyle/>
+          <a:p>
+            <a:pPr indent="0" marL="0">
+              <a:buNone/>
+            </a:pPr>
+            <a:r>
+              <a:rPr lang="en-US" sz="1400" b="1" dirty="0">
+                <a:solidFill>
+                  <a:srgbClr val="1A1A1A"/>
+                </a:solidFill>
+                <a:latin typeface="Inter" pitchFamily="34" charset="0"/>
+                <a:ea typeface="Inter" pitchFamily="34" charset="-122"/>
+                <a:cs typeface="Inter" pitchFamily="34" charset="-120"/>
+              </a:rPr>
+              <a:t>MAZDA</a:t>
+            </a:r>
+            <a:endParaRPr lang="en-US" sz="1400" dirty="0"/>
+          </a:p>
+        </p:txBody>
+      </p:sp>
+      <p:sp>
+        <p:nvSpPr>
+          <p:cNvPr id="57" name="Text 55"/>
+          <p:cNvSpPr txBox="1"/>
+          <p:nvPr/>
+        </p:nvSpPr>
+        <p:spPr>
+          <a:xfrm>
+            <a:off x="3520440" y="5266944"/>
+            <a:ext cx="2103120" cy="438912"/>
+          </a:xfrm>
+          <a:prstGeom prst="rect">
+            <a:avLst/>
+          </a:prstGeom>
+          <a:noFill/>
+          <a:ln/>
+        </p:spPr>
+        <p:txBody>
+          <a:bodyPr wrap="square" lIns="0" tIns="0" rIns="0" bIns="0" rtlCol="0" anchor="ctr"/>
+          <a:lstStyle/>
+          <a:p>
+            <a:pPr indent="0" marL="0">
+              <a:buNone/>
+            </a:pPr>
+            <a:r>
+              <a:rPr lang="en-US" sz="1400" dirty="0">
+                <a:solidFill>
+                  <a:srgbClr val="1A1A1A"/>
+                </a:solidFill>
+                <a:latin typeface="Inter" pitchFamily="34" charset="0"/>
+                <a:ea typeface="Inter" pitchFamily="34" charset="-122"/>
+                <a:cs typeface="Inter" pitchFamily="34" charset="-120"/>
+              </a:rPr>
+              <a:t>Opcodes · fuel service</a:t>
+            </a:r>
+            <a:endParaRPr lang="en-US" sz="1400" dirty="0"/>
+          </a:p>
+        </p:txBody>
+      </p:sp>
+      <p:sp>
+        <p:nvSpPr>
+          <p:cNvPr id="58" name="Text 56"/>
+          <p:cNvSpPr txBox="1"/>
+          <p:nvPr/>
+        </p:nvSpPr>
+        <p:spPr>
+          <a:xfrm>
+            <a:off x="5669280" y="5266944"/>
+            <a:ext cx="2011680" cy="438912"/>
+          </a:xfrm>
+          <a:prstGeom prst="rect">
+            <a:avLst/>
+          </a:prstGeom>
+          <a:noFill/>
+          <a:ln/>
+        </p:spPr>
+        <p:txBody>
+          <a:bodyPr wrap="square" lIns="0" tIns="0" rIns="0" bIns="0" rtlCol="0" anchor="ctr"/>
+          <a:lstStyle/>
+          <a:p>
+            <a:pPr indent="0" marL="0">
+              <a:buNone/>
+            </a:pPr>
+            <a:r>
+              <a:rPr lang="en-US" sz="1400" dirty="0">
+                <a:solidFill>
+                  <a:srgbClr val="1A1A1A"/>
+                </a:solidFill>
+                <a:latin typeface="Inter" pitchFamily="34" charset="0"/>
+                <a:ea typeface="Inter" pitchFamily="34" charset="-122"/>
+                <a:cs typeface="Inter" pitchFamily="34" charset="-120"/>
+              </a:rPr>
+              <a:t>2.5% → 10.6%</a:t>
+            </a:r>
+            <a:endParaRPr lang="en-US" sz="1400" dirty="0"/>
+          </a:p>
+        </p:txBody>
+      </p:sp>
+      <p:sp>
+        <p:nvSpPr>
+          <p:cNvPr id="59" name="Text 57"/>
+          <p:cNvSpPr txBox="1"/>
+          <p:nvPr/>
+        </p:nvSpPr>
+        <p:spPr>
+          <a:xfrm>
+            <a:off x="7726680" y="5266944"/>
+            <a:ext cx="1554480" cy="438912"/>
+          </a:xfrm>
+          <a:prstGeom prst="rect">
+            <a:avLst/>
+          </a:prstGeom>
+          <a:noFill/>
+          <a:ln/>
+        </p:spPr>
+        <p:txBody>
+          <a:bodyPr wrap="square" lIns="0" tIns="0" rIns="0" bIns="0" rtlCol="0" anchor="ctr"/>
+          <a:lstStyle/>
+          <a:p>
+            <a:pPr indent="0" marL="0">
+              <a:buNone/>
+            </a:pPr>
+            <a:r>
+              <a:rPr lang="en-US" sz="1400" b="1" dirty="0">
+                <a:solidFill>
+                  <a:srgbClr val="0B2C4A"/>
+                </a:solidFill>
+                <a:latin typeface="Inter" pitchFamily="34" charset="0"/>
+                <a:ea typeface="Inter" pitchFamily="34" charset="-122"/>
+                <a:cs typeface="Inter" pitchFamily="34" charset="-120"/>
+              </a:rPr>
+              <a:t>August</a:t>
+            </a:r>
+            <a:endParaRPr lang="en-US" sz="1400" dirty="0"/>
+          </a:p>
+        </p:txBody>
+      </p:sp>
+      <p:sp>
+        <p:nvSpPr>
+          <p:cNvPr id="60" name="Text 58"/>
+          <p:cNvSpPr txBox="1"/>
+          <p:nvPr/>
+        </p:nvSpPr>
+        <p:spPr>
+          <a:xfrm>
+            <a:off x="9326880" y="5266944"/>
+            <a:ext cx="1280160" cy="438912"/>
+          </a:xfrm>
+          <a:prstGeom prst="rect">
+            <a:avLst/>
+          </a:prstGeom>
+          <a:noFill/>
+          <a:ln/>
+        </p:spPr>
+        <p:txBody>
+          <a:bodyPr wrap="square" lIns="0" tIns="0" rIns="0" bIns="0" rtlCol="0" anchor="ctr"/>
+          <a:lstStyle/>
+          <a:p>
+            <a:pPr indent="0" marL="0">
+              <a:buNone/>
+            </a:pPr>
+            <a:r>
+              <a:rPr lang="en-US" sz="1400" b="1" dirty="0">
+                <a:solidFill>
+                  <a:srgbClr val="0B7A4A"/>
+                </a:solidFill>
+                <a:latin typeface="Inter" pitchFamily="34" charset="0"/>
+                <a:ea typeface="Inter" pitchFamily="34" charset="-122"/>
+                <a:cs typeface="Inter" pitchFamily="34" charset="-120"/>
+              </a:rPr>
+              <a:t>+8.1 pts</a:t>
+            </a:r>
+            <a:endParaRPr lang="en-US" sz="1400" dirty="0"/>
+          </a:p>
+        </p:txBody>
+      </p:sp>
+      <p:sp>
+        <p:nvSpPr>
+          <p:cNvPr id="61" name="Shape 59"/>
           <p:cNvSpPr/>
           <p:nvPr/>
         </p:nvSpPr>
@@ -24183,7 +24808,7 @@
       </p:sp>
       <p:sp>
         <p:nvSpPr>
-          <p:cNvPr id="45" name="Text 43"/>
+          <p:cNvPr id="62" name="Text 60"/>
           <p:cNvSpPr txBox="1"/>
           <p:nvPr/>
         </p:nvSpPr>
@@ -24214,7 +24839,7 @@
                 <a:ea typeface="Inter" pitchFamily="34" charset="-122"/>
                 <a:cs typeface="Inter" pitchFamily="34" charset="-120"/>
               </a:rPr>
-              <a:t>Four stores, one question each: what did you start doing that month? One sentence, before you leave.</a:t>
+              <a:t>Five stores, one question each: what did you start doing that month? One sentence, before you leave.</a:t>
             </a:r>
             <a:endParaRPr lang="en-US" sz="1550" dirty="0"/>
           </a:p>

--- a/day2-deck/decks/Most Improved v2 - Review.pptx
+++ b/day2-deck/decks/Most Improved v2 - Review.pptx
@@ -18156,7 +18156,7 @@
           <a:p>
             <a:r>
               <a:rPr lang="en-US" dirty="0"/>
-              <a:t>Takeaway with the store call-outs (off the slide): Last year: SUBARU PRESCOTT leads. Moving now: Three stores tie. One store is on both lists (green bar).Source: Qlik - Closed Repair Orders. Customer pay, by close date. Same-store, 33 stores (INEOS excluded, opened 2026). GMC Prescott body shop labor types excluded. CP gross = CP labor gross + CP parts gross. Left: Jan-Sep 2026 vs Jan-Sep 2025. Right: Q3 2026 vs Q1 2026. Top-5 finishes counted across five measures (parts $ per RO dropped, Oct 23); top six stores shown in each view.</a:t>
+              <a:t>Takeaway with the store call-outs (off the slide): Last year: Two stores tie. Moving now: KIA ST GEORGE leads. One store is on both lists (green bar).Source: Qlik - Closed Repair Orders. Customer pay, by close date. Same-store, 33 stores (INEOS excluded, opened 2026). GMC Prescott body shop labor types excluded. CP gross = CP labor gross + CP parts gross. Left: Jan-Sep 2026 vs Jan-Sep 2025. Right: Q3 2026 vs Q1 2026. Top-5 finishes counted across eight measures (parts $ per RO dropped, Oct 23); CP labor $ per RO (percent), fixed absorption and the four opcodes combined (points) added Oct 29; fixed ops net profit left out (ranked in dollars, it favors larger stores); top six stores shown in each view.</a:t>
             </a:r>
             <a:endParaRPr lang="en-US" dirty="0"/>
           </a:p>
@@ -25571,7 +25571,7 @@
                 <a:ea typeface="Inter" pitchFamily="34" charset="-122"/>
                 <a:cs typeface="Inter" pitchFamily="34" charset="-120"/>
               </a:rPr>
-              <a:t>Top-5 finishes, of five measures</a:t>
+              <a:t>Top-5 finishes, of eight measures</a:t>
             </a:r>
             <a:endParaRPr lang="en-US" sz="1400" dirty="0"/>
           </a:p>
@@ -25630,7 +25630,7 @@
                 <a:ea typeface="Inter" pitchFamily="34" charset="-122"/>
                 <a:cs typeface="Inter" pitchFamily="34" charset="-120"/>
               </a:rPr>
-              <a:t>SUBARU PRESCOTT</a:t>
+              <a:t>LINCOLN</a:t>
             </a:r>
             <a:endParaRPr lang="en-US" sz="1400" dirty="0"/>
           </a:p>
@@ -25645,7 +25645,7 @@
         <p:spPr>
           <a:xfrm>
             <a:off x="731520" y="2478024"/>
-            <a:ext cx="3520440" cy="237744"/>
+            <a:ext cx="4096512" cy="237744"/>
           </a:xfrm>
           <a:prstGeom prst="rect">
             <a:avLst/>
@@ -25669,7 +25669,7 @@
                 <a:ea typeface="Inter" pitchFamily="34" charset="-122"/>
                 <a:cs typeface="Inter" pitchFamily="34" charset="-120"/>
               </a:rPr>
-              <a:t>CP gross, hours/RO, ELR, parts GP%</a:t>
+              <a:t>gross, ELR, parts GP, labor/RO, absorption, opcodes</a:t>
             </a:r>
             <a:endParaRPr lang="en-US" sz="1300" dirty="0"/>
           </a:p>
@@ -25683,8 +25683,8 @@
         </p:nvSpPr>
         <p:spPr>
           <a:xfrm>
-            <a:off x="4343400" y="2351837"/>
-            <a:ext cx="960120" cy="234086"/>
+            <a:off x="4892040" y="2351837"/>
+            <a:ext cx="365760" cy="234086"/>
           </a:xfrm>
           <a:prstGeom prst="rect">
             <a:avLst/>
@@ -25728,7 +25728,7 @@
                 <a:ea typeface="Inter" pitchFamily="34" charset="-122"/>
                 <a:cs typeface="Inter" pitchFamily="34" charset="-120"/>
               </a:rPr>
-              <a:t>4</a:t>
+              <a:t>6</a:t>
             </a:r>
             <a:endParaRPr lang="en-US" sz="1800" dirty="0"/>
           </a:p>
@@ -25767,7 +25767,7 @@
                 <a:ea typeface="Inter" pitchFamily="34" charset="-122"/>
                 <a:cs typeface="Inter" pitchFamily="34" charset="-120"/>
               </a:rPr>
-              <a:t>LINCOLN</a:t>
+              <a:t>SUBARU PRESCOTT</a:t>
             </a:r>
             <a:endParaRPr lang="en-US" sz="1400" dirty="0"/>
           </a:p>
@@ -25782,7 +25782,7 @@
         <p:spPr>
           <a:xfrm>
             <a:off x="731520" y="3063240"/>
-            <a:ext cx="3520440" cy="237744"/>
+            <a:ext cx="4096512" cy="237744"/>
           </a:xfrm>
           <a:prstGeom prst="rect">
             <a:avLst/>
@@ -25806,7 +25806,7 @@
                 <a:ea typeface="Inter" pitchFamily="34" charset="-122"/>
                 <a:cs typeface="Inter" pitchFamily="34" charset="-120"/>
               </a:rPr>
-              <a:t>CP gross, ELR, parts GP%</a:t>
+              <a:t>gross, hrs/RO, ELR, parts GP, labor/RO, opcodes</a:t>
             </a:r>
             <a:endParaRPr lang="en-US" sz="1300" dirty="0"/>
           </a:p>
@@ -25820,8 +25820,8 @@
         </p:nvSpPr>
         <p:spPr>
           <a:xfrm>
-            <a:off x="4343400" y="2937053"/>
-            <a:ext cx="720090" cy="234086"/>
+            <a:off x="4892040" y="2937053"/>
+            <a:ext cx="365760" cy="234086"/>
           </a:xfrm>
           <a:prstGeom prst="rect">
             <a:avLst/>
@@ -25865,7 +25865,7 @@
                 <a:ea typeface="Inter" pitchFamily="34" charset="-122"/>
                 <a:cs typeface="Inter" pitchFamily="34" charset="-120"/>
               </a:rPr>
-              <a:t>3</a:t>
+              <a:t>6</a:t>
             </a:r>
             <a:endParaRPr lang="en-US" sz="1800" dirty="0"/>
           </a:p>
@@ -25924,7 +25924,7 @@
                 <a:ea typeface="Inter" pitchFamily="34" charset="-122"/>
                 <a:cs typeface="Inter" pitchFamily="34" charset="-120"/>
               </a:rPr>
-              <a:t>SUBARU ST GEORGE</a:t>
+              <a:t>KIA ST GEORGE</a:t>
             </a:r>
             <a:endParaRPr lang="en-US" sz="1400" dirty="0"/>
           </a:p>
@@ -25939,7 +25939,7 @@
         <p:spPr>
           <a:xfrm>
             <a:off x="731520" y="3648456"/>
-            <a:ext cx="3520440" cy="237744"/>
+            <a:ext cx="4096512" cy="237744"/>
           </a:xfrm>
           <a:prstGeom prst="rect">
             <a:avLst/>
@@ -25963,7 +25963,7 @@
                 <a:ea typeface="Inter" pitchFamily="34" charset="-122"/>
                 <a:cs typeface="Inter" pitchFamily="34" charset="-120"/>
               </a:rPr>
-              <a:t>CP gross, CP ROs, hours/RO</a:t>
+              <a:t>gross, hrs/RO, labor/RO, opcodes</a:t>
             </a:r>
             <a:endParaRPr lang="en-US" sz="1300" dirty="0"/>
           </a:p>
@@ -25977,8 +25977,8 @@
         </p:nvSpPr>
         <p:spPr>
           <a:xfrm>
-            <a:off x="4343400" y="3522269"/>
-            <a:ext cx="720090" cy="234086"/>
+            <a:off x="4892040" y="3522269"/>
+            <a:ext cx="243840" cy="234086"/>
           </a:xfrm>
           <a:prstGeom prst="rect">
             <a:avLst/>
@@ -26022,7 +26022,7 @@
                 <a:ea typeface="Inter" pitchFamily="34" charset="-122"/>
                 <a:cs typeface="Inter" pitchFamily="34" charset="-120"/>
               </a:rPr>
-              <a:t>3</a:t>
+              <a:t>4</a:t>
             </a:r>
             <a:endParaRPr lang="en-US" sz="1800" dirty="0"/>
           </a:p>
@@ -26030,92 +26030,14 @@
       </p:sp>
       <p:sp>
         <p:nvSpPr>
-          <p:cNvPr id="23" name="Text 21"/>
-          <p:cNvSpPr txBox="1"/>
-          <p:nvPr/>
-        </p:nvSpPr>
-        <p:spPr>
-          <a:xfrm>
-            <a:off x="731520" y="3977640"/>
-            <a:ext cx="2377440" cy="274320"/>
-          </a:xfrm>
-          <a:prstGeom prst="rect">
-            <a:avLst/>
-          </a:prstGeom>
-          <a:noFill/>
-          <a:ln/>
-        </p:spPr>
-        <p:txBody>
-          <a:bodyPr wrap="square" lIns="0" tIns="0" rIns="0" bIns="0" rtlCol="0" anchor="ctr"/>
-          <a:lstStyle/>
-          <a:p>
-            <a:pPr indent="0" marL="0">
-              <a:buNone/>
-            </a:pPr>
-            <a:r>
-              <a:rPr lang="en-US" sz="1400" b="1" dirty="0">
-                <a:solidFill>
-                  <a:srgbClr val="1A1A1A"/>
-                </a:solidFill>
-                <a:latin typeface="Inter" pitchFamily="34" charset="0"/>
-                <a:ea typeface="Inter" pitchFamily="34" charset="-122"/>
-                <a:cs typeface="Inter" pitchFamily="34" charset="-120"/>
-              </a:rPr>
-              <a:t>KIA ST GEORGE</a:t>
-            </a:r>
-            <a:endParaRPr lang="en-US" sz="1400" dirty="0"/>
-          </a:p>
-        </p:txBody>
-      </p:sp>
-      <p:sp>
-        <p:nvSpPr>
-          <p:cNvPr id="24" name="Text 22"/>
-          <p:cNvSpPr txBox="1"/>
-          <p:nvPr/>
-        </p:nvSpPr>
-        <p:spPr>
-          <a:xfrm>
-            <a:off x="731520" y="4233672"/>
-            <a:ext cx="3520440" cy="237744"/>
-          </a:xfrm>
-          <a:prstGeom prst="rect">
-            <a:avLst/>
-          </a:prstGeom>
-          <a:noFill/>
-          <a:ln/>
-        </p:spPr>
-        <p:txBody>
-          <a:bodyPr wrap="square" lIns="0" tIns="0" rIns="0" bIns="0" rtlCol="0" anchor="ctr"/>
-          <a:lstStyle/>
-          <a:p>
-            <a:pPr indent="0" marL="0">
-              <a:buNone/>
-            </a:pPr>
-            <a:r>
-              <a:rPr lang="en-US" sz="1300" dirty="0">
-                <a:solidFill>
-                  <a:srgbClr val="595959"/>
-                </a:solidFill>
-                <a:latin typeface="Inter" pitchFamily="34" charset="0"/>
-                <a:ea typeface="Inter" pitchFamily="34" charset="-122"/>
-                <a:cs typeface="Inter" pitchFamily="34" charset="-120"/>
-              </a:rPr>
-              <a:t>CP gross, hours/RO</a:t>
-            </a:r>
-            <a:endParaRPr lang="en-US" sz="1300" dirty="0"/>
-          </a:p>
-        </p:txBody>
-      </p:sp>
-      <p:sp>
-        <p:nvSpPr>
-          <p:cNvPr id="25" name="Shape 23"/>
+          <p:cNvPr id="23" name="Shape 21"/>
           <p:cNvSpPr/>
           <p:nvPr/>
         </p:nvSpPr>
         <p:spPr>
           <a:xfrm>
-            <a:off x="4343400" y="4107485"/>
-            <a:ext cx="480060" cy="234086"/>
+            <a:off x="5788152" y="3383280"/>
+            <a:ext cx="64008" cy="512064"/>
           </a:xfrm>
           <a:prstGeom prst="rect">
             <a:avLst/>
@@ -26128,53 +26050,92 @@
       </p:sp>
       <p:sp>
         <p:nvSpPr>
-          <p:cNvPr id="26" name="Text 24"/>
-          <p:cNvSpPr txBox="1"/>
-          <p:nvPr/>
-        </p:nvSpPr>
-        <p:spPr>
-          <a:xfrm>
-            <a:off x="5330952" y="3931920"/>
-            <a:ext cx="411480" cy="585216"/>
-          </a:xfrm>
-          <a:prstGeom prst="rect">
-            <a:avLst/>
-          </a:prstGeom>
-          <a:noFill/>
-          <a:ln/>
-        </p:spPr>
-        <p:txBody>
-          <a:bodyPr wrap="square" lIns="0" tIns="0" rIns="0" bIns="0" rtlCol="0" anchor="ctr"/>
-          <a:lstStyle/>
-          <a:p>
-            <a:pPr algn="r" indent="0" marL="0">
-              <a:buNone/>
-            </a:pPr>
-            <a:r>
-              <a:rPr lang="en-US" sz="1800" b="1" dirty="0">
-                <a:solidFill>
-                  <a:srgbClr val="0B7A4A"/>
-                </a:solidFill>
-                <a:latin typeface="Inter" pitchFamily="34" charset="0"/>
-                <a:ea typeface="Inter" pitchFamily="34" charset="-122"/>
-                <a:cs typeface="Inter" pitchFamily="34" charset="-120"/>
-              </a:rPr>
-              <a:t>2</a:t>
-            </a:r>
-            <a:endParaRPr lang="en-US" sz="1800" dirty="0"/>
-          </a:p>
-        </p:txBody>
-      </p:sp>
-      <p:sp>
-        <p:nvSpPr>
-          <p:cNvPr id="27" name="Shape 25"/>
+          <p:cNvPr id="24" name="Text 22"/>
+          <p:cNvSpPr txBox="1"/>
+          <p:nvPr/>
+        </p:nvSpPr>
+        <p:spPr>
+          <a:xfrm>
+            <a:off x="731520" y="3977640"/>
+            <a:ext cx="2377440" cy="274320"/>
+          </a:xfrm>
+          <a:prstGeom prst="rect">
+            <a:avLst/>
+          </a:prstGeom>
+          <a:noFill/>
+          <a:ln/>
+        </p:spPr>
+        <p:txBody>
+          <a:bodyPr wrap="square" lIns="0" tIns="0" rIns="0" bIns="0" rtlCol="0" anchor="ctr"/>
+          <a:lstStyle/>
+          <a:p>
+            <a:pPr indent="0" marL="0">
+              <a:buNone/>
+            </a:pPr>
+            <a:r>
+              <a:rPr lang="en-US" sz="1400" b="1" dirty="0">
+                <a:solidFill>
+                  <a:srgbClr val="1A1A1A"/>
+                </a:solidFill>
+                <a:latin typeface="Inter" pitchFamily="34" charset="0"/>
+                <a:ea typeface="Inter" pitchFamily="34" charset="-122"/>
+                <a:cs typeface="Inter" pitchFamily="34" charset="-120"/>
+              </a:rPr>
+              <a:t>SUBARU ST GEORGE</a:t>
+            </a:r>
+            <a:endParaRPr lang="en-US" sz="1400" dirty="0"/>
+          </a:p>
+        </p:txBody>
+      </p:sp>
+      <p:sp>
+        <p:nvSpPr>
+          <p:cNvPr id="25" name="Text 23"/>
+          <p:cNvSpPr txBox="1"/>
+          <p:nvPr/>
+        </p:nvSpPr>
+        <p:spPr>
+          <a:xfrm>
+            <a:off x="731520" y="4233672"/>
+            <a:ext cx="4096512" cy="237744"/>
+          </a:xfrm>
+          <a:prstGeom prst="rect">
+            <a:avLst/>
+          </a:prstGeom>
+          <a:noFill/>
+          <a:ln/>
+        </p:spPr>
+        <p:txBody>
+          <a:bodyPr wrap="square" lIns="0" tIns="0" rIns="0" bIns="0" rtlCol="0" anchor="ctr"/>
+          <a:lstStyle/>
+          <a:p>
+            <a:pPr indent="0" marL="0">
+              <a:buNone/>
+            </a:pPr>
+            <a:r>
+              <a:rPr lang="en-US" sz="1300" dirty="0">
+                <a:solidFill>
+                  <a:srgbClr val="595959"/>
+                </a:solidFill>
+                <a:latin typeface="Inter" pitchFamily="34" charset="0"/>
+                <a:ea typeface="Inter" pitchFamily="34" charset="-122"/>
+                <a:cs typeface="Inter" pitchFamily="34" charset="-120"/>
+              </a:rPr>
+              <a:t>gross, ROs, hrs/RO</a:t>
+            </a:r>
+            <a:endParaRPr lang="en-US" sz="1300" dirty="0"/>
+          </a:p>
+        </p:txBody>
+      </p:sp>
+      <p:sp>
+        <p:nvSpPr>
+          <p:cNvPr id="26" name="Shape 24"/>
           <p:cNvSpPr/>
           <p:nvPr/>
         </p:nvSpPr>
         <p:spPr>
           <a:xfrm>
-            <a:off x="5788152" y="3968496"/>
-            <a:ext cx="64008" cy="512064"/>
+            <a:off x="4892040" y="4107485"/>
+            <a:ext cx="182880" cy="234086"/>
           </a:xfrm>
           <a:prstGeom prst="rect">
             <a:avLst/>
@@ -26187,6 +26148,45 @@
       </p:sp>
       <p:sp>
         <p:nvSpPr>
+          <p:cNvPr id="27" name="Text 25"/>
+          <p:cNvSpPr txBox="1"/>
+          <p:nvPr/>
+        </p:nvSpPr>
+        <p:spPr>
+          <a:xfrm>
+            <a:off x="5330952" y="3931920"/>
+            <a:ext cx="411480" cy="585216"/>
+          </a:xfrm>
+          <a:prstGeom prst="rect">
+            <a:avLst/>
+          </a:prstGeom>
+          <a:noFill/>
+          <a:ln/>
+        </p:spPr>
+        <p:txBody>
+          <a:bodyPr wrap="square" lIns="0" tIns="0" rIns="0" bIns="0" rtlCol="0" anchor="ctr"/>
+          <a:lstStyle/>
+          <a:p>
+            <a:pPr algn="r" indent="0" marL="0">
+              <a:buNone/>
+            </a:pPr>
+            <a:r>
+              <a:rPr lang="en-US" sz="1800" b="1" dirty="0">
+                <a:solidFill>
+                  <a:srgbClr val="0B7A4A"/>
+                </a:solidFill>
+                <a:latin typeface="Inter" pitchFamily="34" charset="0"/>
+                <a:ea typeface="Inter" pitchFamily="34" charset="-122"/>
+                <a:cs typeface="Inter" pitchFamily="34" charset="-120"/>
+              </a:rPr>
+              <a:t>3</a:t>
+            </a:r>
+            <a:endParaRPr lang="en-US" sz="1800" dirty="0"/>
+          </a:p>
+        </p:txBody>
+      </p:sp>
+      <p:sp>
+        <p:nvSpPr>
           <p:cNvPr id="28" name="Shape 26"/>
           <p:cNvSpPr/>
           <p:nvPr/>
@@ -26238,7 +26238,7 @@
                 <a:ea typeface="Inter" pitchFamily="34" charset="-122"/>
                 <a:cs typeface="Inter" pitchFamily="34" charset="-120"/>
               </a:rPr>
-              <a:t>KIA LV</a:t>
+              <a:t>LR RENO</a:t>
             </a:r>
             <a:endParaRPr lang="en-US" sz="1400" dirty="0"/>
           </a:p>
@@ -26253,7 +26253,7 @@
         <p:spPr>
           <a:xfrm>
             <a:off x="731520" y="4818888"/>
-            <a:ext cx="3520440" cy="237744"/>
+            <a:ext cx="4096512" cy="237744"/>
           </a:xfrm>
           <a:prstGeom prst="rect">
             <a:avLst/>
@@ -26277,7 +26277,7 @@
                 <a:ea typeface="Inter" pitchFamily="34" charset="-122"/>
                 <a:cs typeface="Inter" pitchFamily="34" charset="-120"/>
               </a:rPr>
-              <a:t>CP ROs, hours/RO</a:t>
+              <a:t>ROs, parts GP, absorption</a:t>
             </a:r>
             <a:endParaRPr lang="en-US" sz="1300" dirty="0"/>
           </a:p>
@@ -26291,8 +26291,8 @@
         </p:nvSpPr>
         <p:spPr>
           <a:xfrm>
-            <a:off x="4343400" y="4692701"/>
-            <a:ext cx="480060" cy="234086"/>
+            <a:off x="4892040" y="4692701"/>
+            <a:ext cx="182880" cy="234086"/>
           </a:xfrm>
           <a:prstGeom prst="rect">
             <a:avLst/>
@@ -26336,7 +26336,7 @@
                 <a:ea typeface="Inter" pitchFamily="34" charset="-122"/>
                 <a:cs typeface="Inter" pitchFamily="34" charset="-120"/>
               </a:rPr>
-              <a:t>2</a:t>
+              <a:t>3</a:t>
             </a:r>
             <a:endParaRPr lang="en-US" sz="1800" dirty="0"/>
           </a:p>
@@ -26375,7 +26375,7 @@
                 <a:ea typeface="Inter" pitchFamily="34" charset="-122"/>
                 <a:cs typeface="Inter" pitchFamily="34" charset="-120"/>
               </a:rPr>
-              <a:t>LR RENO</a:t>
+              <a:t>NISSAN</a:t>
             </a:r>
             <a:endParaRPr lang="en-US" sz="1400" dirty="0"/>
           </a:p>
@@ -26390,7 +26390,7 @@
         <p:spPr>
           <a:xfrm>
             <a:off x="731520" y="5404104"/>
-            <a:ext cx="3520440" cy="237744"/>
+            <a:ext cx="4096512" cy="237744"/>
           </a:xfrm>
           <a:prstGeom prst="rect">
             <a:avLst/>
@@ -26414,7 +26414,7 @@
                 <a:ea typeface="Inter" pitchFamily="34" charset="-122"/>
                 <a:cs typeface="Inter" pitchFamily="34" charset="-120"/>
               </a:rPr>
-              <a:t>CP ROs, parts GP%</a:t>
+              <a:t>ELR, parts GP, labor/RO</a:t>
             </a:r>
             <a:endParaRPr lang="en-US" sz="1300" dirty="0"/>
           </a:p>
@@ -26428,8 +26428,8 @@
         </p:nvSpPr>
         <p:spPr>
           <a:xfrm>
-            <a:off x="4343400" y="5277917"/>
-            <a:ext cx="480060" cy="234086"/>
+            <a:off x="4892040" y="5277917"/>
+            <a:ext cx="182880" cy="234086"/>
           </a:xfrm>
           <a:prstGeom prst="rect">
             <a:avLst/>
@@ -26473,7 +26473,7 @@
                 <a:ea typeface="Inter" pitchFamily="34" charset="-122"/>
                 <a:cs typeface="Inter" pitchFamily="34" charset="-120"/>
               </a:rPr>
-              <a:t>2</a:t>
+              <a:t>3</a:t>
             </a:r>
             <a:endParaRPr lang="en-US" sz="1800" dirty="0"/>
           </a:p>
@@ -26591,7 +26591,7 @@
                 <a:ea typeface="Inter" pitchFamily="34" charset="-122"/>
                 <a:cs typeface="Inter" pitchFamily="34" charset="-120"/>
               </a:rPr>
-              <a:t>Top-5 finishes, of five measures</a:t>
+              <a:t>Top-5 finishes, of eight measures</a:t>
             </a:r>
             <a:endParaRPr lang="en-US" sz="1400" dirty="0"/>
           </a:p>
@@ -26650,7 +26650,7 @@
                 <a:ea typeface="Inter" pitchFamily="34" charset="-122"/>
                 <a:cs typeface="Inter" pitchFamily="34" charset="-120"/>
               </a:rPr>
-              <a:t>MAZDA</a:t>
+              <a:t>KIA ST GEORGE</a:t>
             </a:r>
             <a:endParaRPr lang="en-US" sz="1400" dirty="0"/>
           </a:p>
@@ -26665,7 +26665,7 @@
         <p:spPr>
           <a:xfrm>
             <a:off x="6446520" y="2478024"/>
-            <a:ext cx="3520440" cy="237744"/>
+            <a:ext cx="4096512" cy="237744"/>
           </a:xfrm>
           <a:prstGeom prst="rect">
             <a:avLst/>
@@ -26689,7 +26689,7 @@
                 <a:ea typeface="Inter" pitchFamily="34" charset="-122"/>
                 <a:cs typeface="Inter" pitchFamily="34" charset="-120"/>
               </a:rPr>
-              <a:t>CP gross, CP ROs, hours/RO</a:t>
+              <a:t>gross, hrs/RO, ELR, labor/RO, absorption, opcodes</a:t>
             </a:r>
             <a:endParaRPr lang="en-US" sz="1300" dirty="0"/>
           </a:p>
@@ -26703,8 +26703,8 @@
         </p:nvSpPr>
         <p:spPr>
           <a:xfrm>
-            <a:off x="10058400" y="2351837"/>
-            <a:ext cx="960120" cy="234086"/>
+            <a:off x="10607040" y="2351837"/>
+            <a:ext cx="365760" cy="234086"/>
           </a:xfrm>
           <a:prstGeom prst="rect">
             <a:avLst/>
@@ -26748,7 +26748,7 @@
                 <a:ea typeface="Inter" pitchFamily="34" charset="-122"/>
                 <a:cs typeface="Inter" pitchFamily="34" charset="-120"/>
               </a:rPr>
-              <a:t>3</a:t>
+              <a:t>6</a:t>
             </a:r>
             <a:endParaRPr lang="en-US" sz="1800" dirty="0"/>
           </a:p>
@@ -26756,92 +26756,14 @@
       </p:sp>
       <p:sp>
         <p:nvSpPr>
-          <p:cNvPr id="46" name="Text 44"/>
-          <p:cNvSpPr txBox="1"/>
-          <p:nvPr/>
-        </p:nvSpPr>
-        <p:spPr>
-          <a:xfrm>
-            <a:off x="6446520" y="2807208"/>
-            <a:ext cx="2377440" cy="274320"/>
-          </a:xfrm>
-          <a:prstGeom prst="rect">
-            <a:avLst/>
-          </a:prstGeom>
-          <a:noFill/>
-          <a:ln/>
-        </p:spPr>
-        <p:txBody>
-          <a:bodyPr wrap="square" lIns="0" tIns="0" rIns="0" bIns="0" rtlCol="0" anchor="ctr"/>
-          <a:lstStyle/>
-          <a:p>
-            <a:pPr indent="0" marL="0">
-              <a:buNone/>
-            </a:pPr>
-            <a:r>
-              <a:rPr lang="en-US" sz="1400" b="1" dirty="0">
-                <a:solidFill>
-                  <a:srgbClr val="1A1A1A"/>
-                </a:solidFill>
-                <a:latin typeface="Inter" pitchFamily="34" charset="0"/>
-                <a:ea typeface="Inter" pitchFamily="34" charset="-122"/>
-                <a:cs typeface="Inter" pitchFamily="34" charset="-120"/>
-              </a:rPr>
-              <a:t>KIA ST GEORGE</a:t>
-            </a:r>
-            <a:endParaRPr lang="en-US" sz="1400" dirty="0"/>
-          </a:p>
-        </p:txBody>
-      </p:sp>
-      <p:sp>
-        <p:nvSpPr>
-          <p:cNvPr id="47" name="Text 45"/>
-          <p:cNvSpPr txBox="1"/>
-          <p:nvPr/>
-        </p:nvSpPr>
-        <p:spPr>
-          <a:xfrm>
-            <a:off x="6446520" y="3063240"/>
-            <a:ext cx="3520440" cy="237744"/>
-          </a:xfrm>
-          <a:prstGeom prst="rect">
-            <a:avLst/>
-          </a:prstGeom>
-          <a:noFill/>
-          <a:ln/>
-        </p:spPr>
-        <p:txBody>
-          <a:bodyPr wrap="square" lIns="0" tIns="0" rIns="0" bIns="0" rtlCol="0" anchor="ctr"/>
-          <a:lstStyle/>
-          <a:p>
-            <a:pPr indent="0" marL="0">
-              <a:buNone/>
-            </a:pPr>
-            <a:r>
-              <a:rPr lang="en-US" sz="1300" dirty="0">
-                <a:solidFill>
-                  <a:srgbClr val="595959"/>
-                </a:solidFill>
-                <a:latin typeface="Inter" pitchFamily="34" charset="0"/>
-                <a:ea typeface="Inter" pitchFamily="34" charset="-122"/>
-                <a:cs typeface="Inter" pitchFamily="34" charset="-120"/>
-              </a:rPr>
-              <a:t>CP gross, hours/RO, ELR</a:t>
-            </a:r>
-            <a:endParaRPr lang="en-US" sz="1300" dirty="0"/>
-          </a:p>
-        </p:txBody>
-      </p:sp>
-      <p:sp>
-        <p:nvSpPr>
-          <p:cNvPr id="48" name="Shape 46"/>
+          <p:cNvPr id="46" name="Shape 44"/>
           <p:cNvSpPr/>
           <p:nvPr/>
         </p:nvSpPr>
         <p:spPr>
           <a:xfrm>
-            <a:off x="10058400" y="2937053"/>
-            <a:ext cx="960120" cy="234086"/>
+            <a:off x="11503152" y="2212848"/>
+            <a:ext cx="64008" cy="512064"/>
           </a:xfrm>
           <a:prstGeom prst="rect">
             <a:avLst/>
@@ -26854,53 +26776,92 @@
       </p:sp>
       <p:sp>
         <p:nvSpPr>
-          <p:cNvPr id="49" name="Text 47"/>
-          <p:cNvSpPr txBox="1"/>
-          <p:nvPr/>
-        </p:nvSpPr>
-        <p:spPr>
-          <a:xfrm>
-            <a:off x="11045952" y="2761488"/>
-            <a:ext cx="411480" cy="585216"/>
-          </a:xfrm>
-          <a:prstGeom prst="rect">
-            <a:avLst/>
-          </a:prstGeom>
-          <a:noFill/>
-          <a:ln/>
-        </p:spPr>
-        <p:txBody>
-          <a:bodyPr wrap="square" lIns="0" tIns="0" rIns="0" bIns="0" rtlCol="0" anchor="ctr"/>
-          <a:lstStyle/>
-          <a:p>
-            <a:pPr algn="r" indent="0" marL="0">
-              <a:buNone/>
-            </a:pPr>
-            <a:r>
-              <a:rPr lang="en-US" sz="1800" b="1" dirty="0">
-                <a:solidFill>
-                  <a:srgbClr val="0B7A4A"/>
-                </a:solidFill>
-                <a:latin typeface="Inter" pitchFamily="34" charset="0"/>
-                <a:ea typeface="Inter" pitchFamily="34" charset="-122"/>
-                <a:cs typeface="Inter" pitchFamily="34" charset="-120"/>
-              </a:rPr>
-              <a:t>3</a:t>
-            </a:r>
-            <a:endParaRPr lang="en-US" sz="1800" dirty="0"/>
-          </a:p>
-        </p:txBody>
-      </p:sp>
-      <p:sp>
-        <p:nvSpPr>
-          <p:cNvPr id="50" name="Shape 48"/>
+          <p:cNvPr id="47" name="Text 45"/>
+          <p:cNvSpPr txBox="1"/>
+          <p:nvPr/>
+        </p:nvSpPr>
+        <p:spPr>
+          <a:xfrm>
+            <a:off x="6446520" y="2807208"/>
+            <a:ext cx="2377440" cy="274320"/>
+          </a:xfrm>
+          <a:prstGeom prst="rect">
+            <a:avLst/>
+          </a:prstGeom>
+          <a:noFill/>
+          <a:ln/>
+        </p:spPr>
+        <p:txBody>
+          <a:bodyPr wrap="square" lIns="0" tIns="0" rIns="0" bIns="0" rtlCol="0" anchor="ctr"/>
+          <a:lstStyle/>
+          <a:p>
+            <a:pPr indent="0" marL="0">
+              <a:buNone/>
+            </a:pPr>
+            <a:r>
+              <a:rPr lang="en-US" sz="1400" b="1" dirty="0">
+                <a:solidFill>
+                  <a:srgbClr val="1A1A1A"/>
+                </a:solidFill>
+                <a:latin typeface="Inter" pitchFamily="34" charset="0"/>
+                <a:ea typeface="Inter" pitchFamily="34" charset="-122"/>
+                <a:cs typeface="Inter" pitchFamily="34" charset="-120"/>
+              </a:rPr>
+              <a:t>MAZDA</a:t>
+            </a:r>
+            <a:endParaRPr lang="en-US" sz="1400" dirty="0"/>
+          </a:p>
+        </p:txBody>
+      </p:sp>
+      <p:sp>
+        <p:nvSpPr>
+          <p:cNvPr id="48" name="Text 46"/>
+          <p:cNvSpPr txBox="1"/>
+          <p:nvPr/>
+        </p:nvSpPr>
+        <p:spPr>
+          <a:xfrm>
+            <a:off x="6446520" y="3063240"/>
+            <a:ext cx="4096512" cy="237744"/>
+          </a:xfrm>
+          <a:prstGeom prst="rect">
+            <a:avLst/>
+          </a:prstGeom>
+          <a:noFill/>
+          <a:ln/>
+        </p:spPr>
+        <p:txBody>
+          <a:bodyPr wrap="square" lIns="0" tIns="0" rIns="0" bIns="0" rtlCol="0" anchor="ctr"/>
+          <a:lstStyle/>
+          <a:p>
+            <a:pPr indent="0" marL="0">
+              <a:buNone/>
+            </a:pPr>
+            <a:r>
+              <a:rPr lang="en-US" sz="1300" dirty="0">
+                <a:solidFill>
+                  <a:srgbClr val="595959"/>
+                </a:solidFill>
+                <a:latin typeface="Inter" pitchFamily="34" charset="0"/>
+                <a:ea typeface="Inter" pitchFamily="34" charset="-122"/>
+                <a:cs typeface="Inter" pitchFamily="34" charset="-120"/>
+              </a:rPr>
+              <a:t>gross, ROs, hrs/RO, labor/RO, opcodes</a:t>
+            </a:r>
+            <a:endParaRPr lang="en-US" sz="1300" dirty="0"/>
+          </a:p>
+        </p:txBody>
+      </p:sp>
+      <p:sp>
+        <p:nvSpPr>
+          <p:cNvPr id="49" name="Shape 47"/>
           <p:cNvSpPr/>
           <p:nvPr/>
         </p:nvSpPr>
         <p:spPr>
           <a:xfrm>
-            <a:off x="11503152" y="2798064"/>
-            <a:ext cx="64008" cy="512064"/>
+            <a:off x="10607040" y="2937053"/>
+            <a:ext cx="304800" cy="234086"/>
           </a:xfrm>
           <a:prstGeom prst="rect">
             <a:avLst/>
@@ -26913,6 +26874,45 @@
       </p:sp>
       <p:sp>
         <p:nvSpPr>
+          <p:cNvPr id="50" name="Text 48"/>
+          <p:cNvSpPr txBox="1"/>
+          <p:nvPr/>
+        </p:nvSpPr>
+        <p:spPr>
+          <a:xfrm>
+            <a:off x="11045952" y="2761488"/>
+            <a:ext cx="411480" cy="585216"/>
+          </a:xfrm>
+          <a:prstGeom prst="rect">
+            <a:avLst/>
+          </a:prstGeom>
+          <a:noFill/>
+          <a:ln/>
+        </p:spPr>
+        <p:txBody>
+          <a:bodyPr wrap="square" lIns="0" tIns="0" rIns="0" bIns="0" rtlCol="0" anchor="ctr"/>
+          <a:lstStyle/>
+          <a:p>
+            <a:pPr algn="r" indent="0" marL="0">
+              <a:buNone/>
+            </a:pPr>
+            <a:r>
+              <a:rPr lang="en-US" sz="1800" b="1" dirty="0">
+                <a:solidFill>
+                  <a:srgbClr val="0B7A4A"/>
+                </a:solidFill>
+                <a:latin typeface="Inter" pitchFamily="34" charset="0"/>
+                <a:ea typeface="Inter" pitchFamily="34" charset="-122"/>
+                <a:cs typeface="Inter" pitchFamily="34" charset="-120"/>
+              </a:rPr>
+              <a:t>5</a:t>
+            </a:r>
+            <a:endParaRPr lang="en-US" sz="1800" dirty="0"/>
+          </a:p>
+        </p:txBody>
+      </p:sp>
+      <p:sp>
+        <p:nvSpPr>
           <p:cNvPr id="51" name="Shape 49"/>
           <p:cNvSpPr/>
           <p:nvPr/>
@@ -26964,7 +26964,7 @@
                 <a:ea typeface="Inter" pitchFamily="34" charset="-122"/>
                 <a:cs typeface="Inter" pitchFamily="34" charset="-120"/>
               </a:rPr>
-              <a:t>VW ST GEORGE</a:t>
+              <a:t>HYUNDAI PRESCOTT</a:t>
             </a:r>
             <a:endParaRPr lang="en-US" sz="1400" dirty="0"/>
           </a:p>
@@ -26979,7 +26979,7 @@
         <p:spPr>
           <a:xfrm>
             <a:off x="6446520" y="3648456"/>
-            <a:ext cx="3520440" cy="237744"/>
+            <a:ext cx="4096512" cy="237744"/>
           </a:xfrm>
           <a:prstGeom prst="rect">
             <a:avLst/>
@@ -27003,7 +27003,7 @@
                 <a:ea typeface="Inter" pitchFamily="34" charset="-122"/>
                 <a:cs typeface="Inter" pitchFamily="34" charset="-120"/>
               </a:rPr>
-              <a:t>CP gross, ELR, parts GP%</a:t>
+              <a:t>gross, hrs/RO, labor/RO, opcodes</a:t>
             </a:r>
             <a:endParaRPr lang="en-US" sz="1300" dirty="0"/>
           </a:p>
@@ -27017,8 +27017,8 @@
         </p:nvSpPr>
         <p:spPr>
           <a:xfrm>
-            <a:off x="10058400" y="3522269"/>
-            <a:ext cx="960120" cy="234086"/>
+            <a:off x="10607040" y="3522269"/>
+            <a:ext cx="243840" cy="234086"/>
           </a:xfrm>
           <a:prstGeom prst="rect">
             <a:avLst/>
@@ -27062,7 +27062,7 @@
                 <a:ea typeface="Inter" pitchFamily="34" charset="-122"/>
                 <a:cs typeface="Inter" pitchFamily="34" charset="-120"/>
               </a:rPr>
-              <a:t>3</a:t>
+              <a:t>4</a:t>
             </a:r>
             <a:endParaRPr lang="en-US" sz="1800" dirty="0"/>
           </a:p>
@@ -27101,7 +27101,7 @@
                 <a:ea typeface="Inter" pitchFamily="34" charset="-122"/>
                 <a:cs typeface="Inter" pitchFamily="34" charset="-120"/>
               </a:rPr>
-              <a:t>CDJR POST FALLS</a:t>
+              <a:t>VW ST GEORGE</a:t>
             </a:r>
             <a:endParaRPr lang="en-US" sz="1400" dirty="0"/>
           </a:p>
@@ -27116,7 +27116,7 @@
         <p:spPr>
           <a:xfrm>
             <a:off x="6446520" y="4233672"/>
-            <a:ext cx="3520440" cy="237744"/>
+            <a:ext cx="4096512" cy="237744"/>
           </a:xfrm>
           <a:prstGeom prst="rect">
             <a:avLst/>
@@ -27140,7 +27140,7 @@
                 <a:ea typeface="Inter" pitchFamily="34" charset="-122"/>
                 <a:cs typeface="Inter" pitchFamily="34" charset="-120"/>
               </a:rPr>
-              <a:t>CP gross, CP ROs</a:t>
+              <a:t>gross, ELR, parts GP</a:t>
             </a:r>
             <a:endParaRPr lang="en-US" sz="1300" dirty="0"/>
           </a:p>
@@ -27154,8 +27154,8 @@
         </p:nvSpPr>
         <p:spPr>
           <a:xfrm>
-            <a:off x="10058400" y="4107485"/>
-            <a:ext cx="640080" cy="234086"/>
+            <a:off x="10607040" y="4107485"/>
+            <a:ext cx="182880" cy="234086"/>
           </a:xfrm>
           <a:prstGeom prst="rect">
             <a:avLst/>
@@ -27199,7 +27199,7 @@
                 <a:ea typeface="Inter" pitchFamily="34" charset="-122"/>
                 <a:cs typeface="Inter" pitchFamily="34" charset="-120"/>
               </a:rPr>
-              <a:t>2</a:t>
+              <a:t>3</a:t>
             </a:r>
             <a:endParaRPr lang="en-US" sz="1800" dirty="0"/>
           </a:p>
@@ -27258,7 +27258,7 @@
                 <a:ea typeface="Inter" pitchFamily="34" charset="-122"/>
                 <a:cs typeface="Inter" pitchFamily="34" charset="-120"/>
               </a:rPr>
-              <a:t>HYUNDAI PRESCOTT</a:t>
+              <a:t>AUDI RENO</a:t>
             </a:r>
             <a:endParaRPr lang="en-US" sz="1400" dirty="0"/>
           </a:p>
@@ -27273,7 +27273,7 @@
         <p:spPr>
           <a:xfrm>
             <a:off x="6446520" y="4818888"/>
-            <a:ext cx="3520440" cy="237744"/>
+            <a:ext cx="4096512" cy="237744"/>
           </a:xfrm>
           <a:prstGeom prst="rect">
             <a:avLst/>
@@ -27297,7 +27297,7 @@
                 <a:ea typeface="Inter" pitchFamily="34" charset="-122"/>
                 <a:cs typeface="Inter" pitchFamily="34" charset="-120"/>
               </a:rPr>
-              <a:t>CP gross, hours/RO</a:t>
+              <a:t>ELR, parts GP, labor/RO</a:t>
             </a:r>
             <a:endParaRPr lang="en-US" sz="1300" dirty="0"/>
           </a:p>
@@ -27311,8 +27311,8 @@
         </p:nvSpPr>
         <p:spPr>
           <a:xfrm>
-            <a:off x="10058400" y="4692701"/>
-            <a:ext cx="640080" cy="234086"/>
+            <a:off x="10607040" y="4692701"/>
+            <a:ext cx="182880" cy="234086"/>
           </a:xfrm>
           <a:prstGeom prst="rect">
             <a:avLst/>
@@ -27356,7 +27356,7 @@
                 <a:ea typeface="Inter" pitchFamily="34" charset="-122"/>
                 <a:cs typeface="Inter" pitchFamily="34" charset="-120"/>
               </a:rPr>
-              <a:t>2</a:t>
+              <a:t>3</a:t>
             </a:r>
             <a:endParaRPr lang="en-US" sz="1800" dirty="0"/>
           </a:p>
@@ -27395,7 +27395,7 @@
                 <a:ea typeface="Inter" pitchFamily="34" charset="-122"/>
                 <a:cs typeface="Inter" pitchFamily="34" charset="-120"/>
               </a:rPr>
-              <a:t>AUDI RENO</a:t>
+              <a:t>CDJR POST FALLS</a:t>
             </a:r>
             <a:endParaRPr lang="en-US" sz="1400" dirty="0"/>
           </a:p>
@@ -27410,7 +27410,7 @@
         <p:spPr>
           <a:xfrm>
             <a:off x="6446520" y="5404104"/>
-            <a:ext cx="3520440" cy="237744"/>
+            <a:ext cx="4096512" cy="237744"/>
           </a:xfrm>
           <a:prstGeom prst="rect">
             <a:avLst/>
@@ -27434,7 +27434,7 @@
                 <a:ea typeface="Inter" pitchFamily="34" charset="-122"/>
                 <a:cs typeface="Inter" pitchFamily="34" charset="-120"/>
               </a:rPr>
-              <a:t>ELR, parts GP%</a:t>
+              <a:t>gross, ROs</a:t>
             </a:r>
             <a:endParaRPr lang="en-US" sz="1300" dirty="0"/>
           </a:p>
@@ -27448,8 +27448,8 @@
         </p:nvSpPr>
         <p:spPr>
           <a:xfrm>
-            <a:off x="10058400" y="5277917"/>
-            <a:ext cx="640080" cy="234086"/>
+            <a:off x="10607040" y="5277917"/>
+            <a:ext cx="121920" cy="234086"/>
           </a:xfrm>
           <a:prstGeom prst="rect">
             <a:avLst/>
@@ -27552,7 +27552,7 @@
                 <a:ea typeface="Inter" pitchFamily="34" charset="-122"/>
                 <a:cs typeface="Inter" pitchFamily="34" charset="-120"/>
               </a:rPr>
-              <a:t>Moving now: Three stores tie. One store is on both lists (green bar). Also tied at 2 last year: Nissan.</a:t>
+              <a:t>Last year: Two stores tie. One store is on both lists (green bar). Also tied at 2 moving now: Hyundai St George and Chevy GMC Bullhead.</a:t>
             </a:r>
             <a:endParaRPr lang="en-US" sz="1600" dirty="0"/>
           </a:p>

--- a/day2-deck/decks/Most Improved v2 - Review.pptx
+++ b/day2-deck/decks/Most Improved v2 - Review.pptx
@@ -37988,7 +37988,7 @@
                 <a:ea typeface="Inter" pitchFamily="34" charset="-122"/>
                 <a:cs typeface="Inter" pitchFamily="34" charset="-120"/>
               </a:rPr>
-              <a:t>Group 0.0 pts</a:t>
+              <a:t>Group 0.0 pts (flat)</a:t>
             </a:r>
             <a:endParaRPr lang="en-US" sz="1300" dirty="0"/>
           </a:p>
@@ -38556,7 +38556,7 @@
                 <a:ea typeface="Inter" pitchFamily="34" charset="-122"/>
                 <a:cs typeface="Inter" pitchFamily="34" charset="-120"/>
               </a:rPr>
-              <a:t>Group 0.0 pts</a:t>
+              <a:t>Group 0.0 pts (flat)</a:t>
             </a:r>
             <a:endParaRPr lang="en-US" sz="1300" dirty="0"/>
           </a:p>
